--- a/decks/08-workflows-vs-agents.pptx
+++ b/decks/08-workflows-vs-agents.pptx
@@ -2,21 +2,21 @@
 <file path=ppt/presentation.xml><?xml version="1.0" encoding="utf-8"?>
 <p:presentation xmlns:p="http://schemas.openxmlformats.org/presentationml/2006/main">
   <p:sldMasterIdLst>
-    <p:sldMasterId xmlns:r="http://schemas.openxmlformats.org/officeDocument/2006/relationships" id="2147483648" r:id="Ra15fabcf0b5c45d9"/>
+    <p:sldMasterId xmlns:r="http://schemas.openxmlformats.org/officeDocument/2006/relationships" id="2147483648" r:id="Rbe115f322e7340fb"/>
   </p:sldMasterIdLst>
   <p:notesMasterIdLst>
-    <p:notesMasterId xmlns:r="http://schemas.openxmlformats.org/officeDocument/2006/relationships" r:id="R8bd8dba35be745fa"/>
+    <p:notesMasterId xmlns:r="http://schemas.openxmlformats.org/officeDocument/2006/relationships" r:id="R181d9f9d395e4dc4"/>
   </p:notesMasterIdLst>
   <p:sldIdLst>
-    <p:sldId xmlns:r="http://schemas.openxmlformats.org/officeDocument/2006/relationships" id="256" r:id="Rd0005a0286714007"/>
-    <p:sldId xmlns:r="http://schemas.openxmlformats.org/officeDocument/2006/relationships" id="257" r:id="Red7bd9fd4adf4f36"/>
-    <p:sldId xmlns:r="http://schemas.openxmlformats.org/officeDocument/2006/relationships" id="258" r:id="Rba4c9fa6a3844933"/>
-    <p:sldId xmlns:r="http://schemas.openxmlformats.org/officeDocument/2006/relationships" id="259" r:id="Rcd81866ad90e48c5"/>
-    <p:sldId xmlns:r="http://schemas.openxmlformats.org/officeDocument/2006/relationships" id="260" r:id="R411d420440da41da"/>
-    <p:sldId xmlns:r="http://schemas.openxmlformats.org/officeDocument/2006/relationships" id="261" r:id="Rfce36775b58547b0"/>
-    <p:sldId xmlns:r="http://schemas.openxmlformats.org/officeDocument/2006/relationships" id="262" r:id="Ra35f7ea3d3024666"/>
-    <p:sldId xmlns:r="http://schemas.openxmlformats.org/officeDocument/2006/relationships" id="263" r:id="Rcb2835dd9e3e4ab9"/>
-    <p:sldId xmlns:r="http://schemas.openxmlformats.org/officeDocument/2006/relationships" id="264" r:id="R4584788b9b614ac2"/>
+    <p:sldId xmlns:r="http://schemas.openxmlformats.org/officeDocument/2006/relationships" id="256" r:id="R90f6552860704d7e"/>
+    <p:sldId xmlns:r="http://schemas.openxmlformats.org/officeDocument/2006/relationships" id="257" r:id="R80e49952a289419d"/>
+    <p:sldId xmlns:r="http://schemas.openxmlformats.org/officeDocument/2006/relationships" id="258" r:id="R85995328e563446e"/>
+    <p:sldId xmlns:r="http://schemas.openxmlformats.org/officeDocument/2006/relationships" id="259" r:id="R44a6694f0e9547f1"/>
+    <p:sldId xmlns:r="http://schemas.openxmlformats.org/officeDocument/2006/relationships" id="260" r:id="R0b6ac64bb6034eaf"/>
+    <p:sldId xmlns:r="http://schemas.openxmlformats.org/officeDocument/2006/relationships" id="261" r:id="Ra88039a2621d4097"/>
+    <p:sldId xmlns:r="http://schemas.openxmlformats.org/officeDocument/2006/relationships" id="262" r:id="Rabac2817a30e45fe"/>
+    <p:sldId xmlns:r="http://schemas.openxmlformats.org/officeDocument/2006/relationships" id="263" r:id="Ra3e4051241374c90"/>
+    <p:sldId xmlns:r="http://schemas.openxmlformats.org/officeDocument/2006/relationships" id="264" r:id="Ra5fd65af1add42fe"/>
   </p:sldIdLst>
   <p:sldSz cx="15240000" cy="8572500"/>
   <p:notesSz cx="6858000" cy="9144000"/>
@@ -450,7 +450,7 @@
           <a:lstStyle xmlns:a="http://schemas.openxmlformats.org/drawingml/2006/main"/>
           <a:p xmlns:a="http://schemas.openxmlformats.org/drawingml/2006/main">
             <a:r>
-              <a:t>Lesson 08 introduces the architecture decision before the agent framework: workflow or bounded agent? Students keep the same typed tools and compare only orchestration.</a:t>
+              <a:t>Lesson 08 compares workflows and agents before introducing an agent framework. Students use the same finance tools and change only the control logic.</a:t>
             </a:r>
           </a:p>
           <a:p xmlns:a="http://schemas.openxmlformats.org/drawingml/2006/main">
@@ -545,7 +545,7 @@
           <a:lstStyle xmlns:a="http://schemas.openxmlformats.org/drawingml/2006/main"/>
           <a:p xmlns:a="http://schemas.openxmlformats.org/drawingml/2006/main">
             <a:r>
-              <a:t>Autonomy is an engineering trade-off. Each step to the right adds choice, failure paths, latency and observability requirements.</a:t>
+              <a:t>This recap compares who controls the next step. A workflow follows Python code, an agent lets one model choose, and a multi-agent system coordinates several models.</a:t>
             </a:r>
           </a:p>
           <a:p xmlns:a="http://schemas.openxmlformats.org/drawingml/2006/main">
@@ -640,7 +640,7 @@
           <a:lstStyle xmlns:a="http://schemas.openxmlformats.org/drawingml/2006/main"/>
           <a:p xmlns:a="http://schemas.openxmlformats.org/drawingml/2006/main">
             <a:r>
-              <a:t>Task importance does not justify an agent. Dynamic dependencies do: a later valid action cannot be selected until an earlier observation exists.</a:t>
+              <a:t>Use five practical checks before adding an agent: path, latency, debugging, tool chaining, and best use case.</a:t>
             </a:r>
           </a:p>
           <a:p xmlns:a="http://schemas.openxmlformats.org/drawingml/2006/main">
@@ -655,12 +655,12 @@
           </a:p>
           <a:p xmlns:a="http://schemas.openxmlformats.org/drawingml/2006/main">
             <a:r>
+              <a:t>- https://www.mlexpert.io/academy/v1/ai-agents/workflows-vs-agents</a:t>
+            </a:r>
+          </a:p>
+          <a:p xmlns:a="http://schemas.openxmlformats.org/drawingml/2006/main">
+            <a:r>
               <a:t>- Course chapter: chapters/08-workflows-vs-agents.md</a:t>
-            </a:r>
-          </a:p>
-          <a:p xmlns:a="http://schemas.openxmlformats.org/drawingml/2006/main">
-            <a:r>
-              <a:t>- src/finai_academy/agent_workflows.py</a:t>
             </a:r>
           </a:p>
           <a:p xmlns:a="http://schemas.openxmlformats.org/drawingml/2006/main">
@@ -735,7 +735,7 @@
           <a:lstStyle xmlns:a="http://schemas.openxmlformats.org/drawingml/2006/main"/>
           <a:p xmlns:a="http://schemas.openxmlformats.org/drawingml/2006/main">
             <a:r>
-              <a:t>The language model emits a typed request. Pydantic validates it; deterministic Python executes the registered finance tool and returns a typed observation with provenance.</a:t>
+              <a:t>The model returns a typed tool request. Python validates it, runs the registered function, and returns a typed result with source information.</a:t>
             </a:r>
           </a:p>
           <a:p xmlns:a="http://schemas.openxmlformats.org/drawingml/2006/main">
@@ -830,7 +830,7 @@
           <a:lstStyle xmlns:a="http://schemas.openxmlformats.org/drawingml/2006/main"/>
           <a:p xmlns:a="http://schemas.openxmlformats.org/drawingml/2006/main">
             <a:r>
-              <a:t>For a single market-price question, the workflow plans once, calls one tool and produces a grounded answer. A loop would add cost without capability.</a:t>
+              <a:t>A single price lookup has a known path. One workflow call is enough and is easier to test than an agent loop.</a:t>
             </a:r>
           </a:p>
           <a:p xmlns:a="http://schemas.openxmlformats.org/drawingml/2006/main">
@@ -925,7 +925,7 @@
           <a:lstStyle xmlns:a="http://schemas.openxmlformats.org/drawingml/2006/main"/>
           <a:p xmlns:a="http://schemas.openxmlformats.org/drawingml/2006/main">
             <a:r>
-              <a:t>The compound one-pass workflow exposes its limit rather than fabricating a conversion amount. The visible status is unsupported_dependency.</a:t>
+              <a:t>The conversion amount is not available before the market-price result. The fixed workflow stops with unsupported_dependency instead of inventing a value.</a:t>
             </a:r>
           </a:p>
           <a:p xmlns:a="http://schemas.openxmlformats.org/drawingml/2006/main">
@@ -1020,7 +1020,7 @@
           <a:lstStyle xmlns:a="http://schemas.openxmlformats.org/drawingml/2006/main"/>
           <a:p xmlns:a="http://schemas.openxmlformats.org/drawingml/2006/main">
             <a:r>
-              <a:t>The bounded agent uses the observed USD price as the amount in the next typed convert_currency request. MAX_STEPS prevents an unbounded loop.</a:t>
+              <a:t>The bounded agent first gets the USD price, then uses that result as the input to the FX tool. MAX_STEPS limits the loop.</a:t>
             </a:r>
           </a:p>
           <a:p xmlns:a="http://schemas.openxmlformats.org/drawingml/2006/main">
@@ -1115,7 +1115,7 @@
           <a:lstStyle xmlns:a="http://schemas.openxmlformats.org/drawingml/2006/main"/>
           <a:p xmlns:a="http://schemas.openxmlformats.org/drawingml/2006/main">
             <a:r>
-              <a:t>The comparison is aligned: same question, snapshot, tools, schemas and output contract. The trace makes the orchestration difference inspectable.</a:t>
+              <a:t>The trace makes the difference visible: the workflow stops safely, while the agent uses the first result to make a valid second call.</a:t>
             </a:r>
           </a:p>
           <a:p xmlns:a="http://schemas.openxmlformats.org/drawingml/2006/main">
@@ -1210,7 +1210,7 @@
           <a:lstStyle xmlns:a="http://schemas.openxmlformats.org/drawingml/2006/main"/>
           <a:p xmlns:a="http://schemas.openxmlformats.org/drawingml/2006/main">
             <a:r>
-              <a:t>The acceptance rule is the lowest useful autonomy. Lesson 09 will make state, tool failures and bounded retry paths explicit in LangGraph.</a:t>
+              <a:t>The final rule is simple: choose a workflow for known steps and a bounded agent only when a tool result changes the next step. Lesson 09 adds explicit graph state and retries.</a:t>
             </a:r>
           </a:p>
           <a:p xmlns:a="http://schemas.openxmlformats.org/drawingml/2006/main">
@@ -1303,7 +1303,7 @@
   </p:cSld>
   <p:clrMap bg1="lt1" tx1="dk1" bg2="lt2" tx2="dk2" accent1="accent1" accent2="accent2" accent3="accent3" accent4="accent4" accent5="accent5" accent6="accent6" hlink="hlink" folHlink="folHlink"/>
   <p:sldLayoutIdLst>
-    <p:sldLayoutId xmlns:r="http://schemas.openxmlformats.org/officeDocument/2006/relationships" id="2147483649" r:id="R7169359d632c4d5e"/>
+    <p:sldLayoutId xmlns:r="http://schemas.openxmlformats.org/officeDocument/2006/relationships" id="2147483649" r:id="R9cabc63eaf004962"/>
   </p:sldLayoutIdLst>
   <p:txStyles>
     <p:titleStyle>
@@ -2063,7 +2063,7 @@
                 <a:ea typeface="Calibri"/>
                 <a:cs typeface="Calibri"/>
               </a:rPr>
-              <a:t>Use the lowest autonomy that can resolve the next decision</a:t>
+              <a:t>Use the simplest system that can complete the task</a:t>
             </a:r>
           </a:p>
         </p:txBody>
@@ -2223,10 +2223,10 @@
       </p:grpSpPr>
       <p:sp>
         <p:nvSpPr>
-          <p:cNvPr id="44" name="">
-            <a:extLst xmlns:a="http://schemas.openxmlformats.org/drawingml/2006/main">
-              <a:ext uri="{FF2B5EF4-FFF2-40B4-BE49-F238E27FC236}">
-                <a16:creationId xmlns:a16="http://schemas.microsoft.com/office/drawing/2014/main" id="{7F521A64-93BB-447D-87E9-41FC1E867CBC}"/>
+          <p:cNvPr id="35" name="">
+            <a:extLst xmlns:a="http://schemas.openxmlformats.org/drawingml/2006/main">
+              <a:ext uri="{FF2B5EF4-FFF2-40B4-BE49-F238E27FC236}">
+                <a16:creationId xmlns:a16="http://schemas.microsoft.com/office/drawing/2014/main" id="{ABF4BAA6-B729-496F-9507-674DB3429F9D}"/>
               </a:ext>
             </a:extLst>
           </p:cNvPr>
@@ -2278,7 +2278,7 @@
                 <a:ea typeface="Calibri"/>
                 <a:cs typeface="Calibri"/>
               </a:rPr>
-              <a:t>AUTONOMY SPECTRUM</a:t>
+              <a:t>THREE SYSTEMS AT A GLANCE</a:t>
             </a:r>
           </a:p>
         </p:txBody>
@@ -2288,7 +2288,7 @@
           <p:cNvPr id="2" name="">
             <a:extLst xmlns:a="http://schemas.openxmlformats.org/drawingml/2006/main">
               <a:ext uri="{FF2B5EF4-FFF2-40B4-BE49-F238E27FC236}">
-                <a16:creationId xmlns:a16="http://schemas.microsoft.com/office/drawing/2014/main" id="{9C793F9E-8AD7-4755-853A-CFF63AEDB7A7}"/>
+                <a16:creationId xmlns:a16="http://schemas.microsoft.com/office/drawing/2014/main" id="{EB6C2DCA-6A55-434D-995F-2D0AB2788AED}"/>
               </a:ext>
             </a:extLst>
           </p:cNvPr>
@@ -2340,7 +2340,7 @@
                 <a:ea typeface="Calibri"/>
                 <a:cs typeface="Calibri"/>
               </a:rPr>
-              <a:t>More autonomy expands choice—and the failure surface</a:t>
+              <a:t>Who chooses the next step?</a:t>
             </a:r>
           </a:p>
         </p:txBody>
@@ -2350,19 +2350,19 @@
           <p:cNvPr id="3" name="">
             <a:extLst xmlns:a="http://schemas.openxmlformats.org/drawingml/2006/main">
               <a:ext uri="{FF2B5EF4-FFF2-40B4-BE49-F238E27FC236}">
-                <a16:creationId xmlns:a16="http://schemas.microsoft.com/office/drawing/2014/main" id="{274302C1-E6C0-49C0-9FA8-BA7896D6FDBE}"/>
-              </a:ext>
-            </a:extLst>
-          </p:cNvPr>
-          <p:cNvSpPr>
-            <a:spLocks xmlns:a="http://schemas.openxmlformats.org/drawingml/2006/main" noGrp="1"/>
-          </p:cNvSpPr>
-          <p:nvPr/>
-        </p:nvSpPr>
-        <p:spPr>
-          <a:xfrm xmlns:a="http://schemas.openxmlformats.org/drawingml/2006/main">
-            <a:off x="1028700" y="2343150"/>
-            <a:ext cx="2667000" cy="285750"/>
+                <a16:creationId xmlns:a16="http://schemas.microsoft.com/office/drawing/2014/main" id="{D7E8B752-5838-4084-A09E-2C38B9D5B30B}"/>
+              </a:ext>
+            </a:extLst>
+          </p:cNvPr>
+          <p:cNvSpPr>
+            <a:spLocks xmlns:a="http://schemas.openxmlformats.org/drawingml/2006/main" noGrp="1"/>
+          </p:cNvSpPr>
+          <p:nvPr/>
+        </p:nvSpPr>
+        <p:spPr>
+          <a:xfrm xmlns:a="http://schemas.openxmlformats.org/drawingml/2006/main">
+            <a:off x="1028700" y="2800350"/>
+            <a:ext cx="2476500" cy="361950"/>
           </a:xfrm>
           <a:prstGeom xmlns:a="http://schemas.openxmlformats.org/drawingml/2006/main" prst="rect">
             <a:avLst/>
@@ -2402,383 +2402,37 @@
                 <a:ea typeface="Calibri"/>
                 <a:cs typeface="Calibri"/>
               </a:rPr>
-              <a:t>FIXED ROUTES</a:t>
-            </a:r>
-          </a:p>
-        </p:txBody>
-      </p:sp>
-      <p:sp>
-        <p:nvSpPr>
-          <p:cNvPr id="4" name="fixed-one">
-            <a:extLst xmlns:a="http://schemas.openxmlformats.org/drawingml/2006/main">
-              <a:ext uri="{FF2B5EF4-FFF2-40B4-BE49-F238E27FC236}">
-                <a16:creationId xmlns:a16="http://schemas.microsoft.com/office/drawing/2014/main" id="{40C15356-6CC0-4340-AD48-214BA676B1CA}"/>
-              </a:ext>
-            </a:extLst>
-          </p:cNvPr>
-          <p:cNvSpPr>
-            <a:spLocks xmlns:a="http://schemas.openxmlformats.org/drawingml/2006/main" noGrp="1"/>
-          </p:cNvSpPr>
-          <p:nvPr/>
-        </p:nvSpPr>
-        <p:spPr>
-          <a:xfrm xmlns:a="http://schemas.openxmlformats.org/drawingml/2006/main">
-            <a:off x="1028700" y="2800350"/>
-            <a:ext cx="5334000" cy="1104900"/>
+              <a:t>WORKFLOW</a:t>
+            </a:r>
+          </a:p>
+        </p:txBody>
+      </p:sp>
+      <p:sp>
+        <p:nvSpPr>
+          <p:cNvPr id="4" name="">
+            <a:extLst xmlns:a="http://schemas.openxmlformats.org/drawingml/2006/main">
+              <a:ext uri="{FF2B5EF4-FFF2-40B4-BE49-F238E27FC236}">
+                <a16:creationId xmlns:a16="http://schemas.microsoft.com/office/drawing/2014/main" id="{6CA53B89-6D78-4803-9B7F-A0162294F364}"/>
+              </a:ext>
+            </a:extLst>
+          </p:cNvPr>
+          <p:cNvSpPr>
+            <a:spLocks xmlns:a="http://schemas.openxmlformats.org/drawingml/2006/main" noGrp="1"/>
+          </p:cNvSpPr>
+          <p:nvPr/>
+        </p:nvSpPr>
+        <p:spPr>
+          <a:xfrm xmlns:a="http://schemas.openxmlformats.org/drawingml/2006/main">
+            <a:off x="3714750" y="2743200"/>
+            <a:ext cx="2381250" cy="647700"/>
           </a:xfrm>
           <a:prstGeom xmlns:a="http://schemas.openxmlformats.org/drawingml/2006/main" prst="roundRect">
             <a:avLst>
-              <a:gd name="adj" fmla="val 10345"/>
+              <a:gd name="adj" fmla="val 5882"/>
             </a:avLst>
           </a:prstGeom>
           <a:solidFill xmlns:a="http://schemas.openxmlformats.org/drawingml/2006/main">
-            <a:srgbClr val="FFF1E5"/>
-          </a:solidFill>
-          <a:ln xmlns:a="http://schemas.openxmlformats.org/drawingml/2006/main" w="19050">
-            <a:solidFill>
-              <a:srgbClr val="F07D00"/>
-            </a:solidFill>
-            <a:prstDash val="solid"/>
-          </a:ln>
-        </p:spPr>
-      </p:sp>
-      <p:sp>
-        <p:nvSpPr>
-          <p:cNvPr id="5" name="">
-            <a:extLst xmlns:a="http://schemas.openxmlformats.org/drawingml/2006/main">
-              <a:ext uri="{FF2B5EF4-FFF2-40B4-BE49-F238E27FC236}">
-                <a16:creationId xmlns:a16="http://schemas.microsoft.com/office/drawing/2014/main" id="{2782FFA5-77A1-442E-984F-08CF9D903B3C}"/>
-              </a:ext>
-            </a:extLst>
-          </p:cNvPr>
-          <p:cNvSpPr>
-            <a:spLocks xmlns:a="http://schemas.openxmlformats.org/drawingml/2006/main" noGrp="1"/>
-          </p:cNvSpPr>
-          <p:nvPr/>
-        </p:nvSpPr>
-        <p:spPr>
-          <a:xfrm xmlns:a="http://schemas.openxmlformats.org/drawingml/2006/main">
-            <a:off x="1276350" y="2952750"/>
-            <a:ext cx="4838700" cy="800100"/>
-          </a:xfrm>
-          <a:prstGeom xmlns:a="http://schemas.openxmlformats.org/drawingml/2006/main" prst="rect">
-            <a:avLst/>
-          </a:prstGeom>
-          <a:noFill xmlns:a="http://schemas.openxmlformats.org/drawingml/2006/main"/>
-          <a:ln xmlns:a="http://schemas.openxmlformats.org/drawingml/2006/main" w="0">
-            <a:noFill/>
-            <a:prstDash val="solid"/>
-          </a:ln>
-        </p:spPr>
-        <p:txBody>
-          <a:bodyPr xmlns:a="http://schemas.openxmlformats.org/drawingml/2006/main" wrap="square" lIns="0" tIns="0" rIns="0" bIns="0" anchor="ctr">
-            <a:normAutofit fontScale="100000"/>
-          </a:bodyPr>
-          <a:lstStyle xmlns:a="http://schemas.openxmlformats.org/drawingml/2006/main"/>
-          <a:p xmlns:a="http://schemas.openxmlformats.org/drawingml/2006/main">
-            <a:pPr algn="l">
-              <a:lnSpc>
-                <a:spcPct val="100000"/>
-              </a:lnSpc>
-              <a:buNone/>
-              <a:defRPr sz="1425" b="0">
-                <a:solidFill>
-                  <a:srgbClr val="051C2A"/>
-                </a:solidFill>
-                <a:latin typeface="Courier New"/>
-                <a:ea typeface="Courier New"/>
-                <a:cs typeface="Courier New"/>
-              </a:defRPr>
-            </a:pPr>
-            <a:r>
-              <a:rPr sz="1425" b="0">
-                <a:solidFill>
-                  <a:srgbClr val="051C2A"/>
-                </a:solidFill>
-                <a:latin typeface="Courier New"/>
-                <a:ea typeface="Courier New"/>
-                <a:cs typeface="Courier New"/>
-              </a:rPr>
-              <a:t>Function</a:t>
-            </a:r>
-          </a:p>
-          <a:p xmlns:a="http://schemas.openxmlformats.org/drawingml/2006/main">
-            <a:pPr algn="l">
-              <a:lnSpc>
-                <a:spcPct val="100000"/>
-              </a:lnSpc>
-              <a:buNone/>
-              <a:defRPr sz="1425" b="0">
-                <a:solidFill>
-                  <a:srgbClr val="051C2A"/>
-                </a:solidFill>
-                <a:latin typeface="Courier New"/>
-                <a:ea typeface="Courier New"/>
-                <a:cs typeface="Courier New"/>
-              </a:defRPr>
-            </a:pPr>
-            <a:r>
-              <a:rPr sz="1425" b="0">
-                <a:solidFill>
-                  <a:srgbClr val="051C2A"/>
-                </a:solidFill>
-                <a:latin typeface="Courier New"/>
-                <a:ea typeface="Courier New"/>
-                <a:cs typeface="Courier New"/>
-              </a:rPr>
-              <a:t>one typed action</a:t>
-            </a:r>
-          </a:p>
-        </p:txBody>
-      </p:sp>
-      <p:sp>
-        <p:nvSpPr>
-          <p:cNvPr id="6" name="fixed-two">
-            <a:extLst xmlns:a="http://schemas.openxmlformats.org/drawingml/2006/main">
-              <a:ext uri="{FF2B5EF4-FFF2-40B4-BE49-F238E27FC236}">
-                <a16:creationId xmlns:a16="http://schemas.microsoft.com/office/drawing/2014/main" id="{AD30FCD2-C657-4E45-B1A1-6793E46E7142}"/>
-              </a:ext>
-            </a:extLst>
-          </p:cNvPr>
-          <p:cNvSpPr>
-            <a:spLocks xmlns:a="http://schemas.openxmlformats.org/drawingml/2006/main" noGrp="1"/>
-          </p:cNvSpPr>
-          <p:nvPr/>
-        </p:nvSpPr>
-        <p:spPr>
-          <a:xfrm xmlns:a="http://schemas.openxmlformats.org/drawingml/2006/main">
-            <a:off x="1028700" y="4324350"/>
-            <a:ext cx="2857500" cy="723900"/>
-          </a:xfrm>
-          <a:prstGeom xmlns:a="http://schemas.openxmlformats.org/drawingml/2006/main" prst="roundRect">
-            <a:avLst>
-              <a:gd name="adj" fmla="val 15789"/>
-            </a:avLst>
-          </a:prstGeom>
-          <a:solidFill xmlns:a="http://schemas.openxmlformats.org/drawingml/2006/main">
-            <a:srgbClr val="FFF1E5"/>
-          </a:solidFill>
-          <a:ln xmlns:a="http://schemas.openxmlformats.org/drawingml/2006/main" w="19050">
-            <a:solidFill>
-              <a:srgbClr val="F07D00"/>
-            </a:solidFill>
-            <a:prstDash val="solid"/>
-          </a:ln>
-        </p:spPr>
-      </p:sp>
-      <p:sp>
-        <p:nvSpPr>
-          <p:cNvPr id="7" name="">
-            <a:extLst xmlns:a="http://schemas.openxmlformats.org/drawingml/2006/main">
-              <a:ext uri="{FF2B5EF4-FFF2-40B4-BE49-F238E27FC236}">
-                <a16:creationId xmlns:a16="http://schemas.microsoft.com/office/drawing/2014/main" id="{CF3EC4B2-CAE9-400F-B11D-2D4F3052F980}"/>
-              </a:ext>
-            </a:extLst>
-          </p:cNvPr>
-          <p:cNvSpPr>
-            <a:spLocks xmlns:a="http://schemas.openxmlformats.org/drawingml/2006/main" noGrp="1"/>
-          </p:cNvSpPr>
-          <p:nvPr/>
-        </p:nvSpPr>
-        <p:spPr>
-          <a:xfrm xmlns:a="http://schemas.openxmlformats.org/drawingml/2006/main">
-            <a:off x="1276350" y="4457700"/>
-            <a:ext cx="2381250" cy="438150"/>
-          </a:xfrm>
-          <a:prstGeom xmlns:a="http://schemas.openxmlformats.org/drawingml/2006/main" prst="rect">
-            <a:avLst/>
-          </a:prstGeom>
-          <a:noFill xmlns:a="http://schemas.openxmlformats.org/drawingml/2006/main"/>
-          <a:ln xmlns:a="http://schemas.openxmlformats.org/drawingml/2006/main" w="0">
-            <a:noFill/>
-            <a:prstDash val="solid"/>
-          </a:ln>
-        </p:spPr>
-        <p:txBody>
-          <a:bodyPr xmlns:a="http://schemas.openxmlformats.org/drawingml/2006/main" wrap="square" lIns="0" tIns="0" rIns="0" bIns="0" anchor="ctr">
-            <a:normAutofit fontScale="95833"/>
-          </a:bodyPr>
-          <a:lstStyle xmlns:a="http://schemas.openxmlformats.org/drawingml/2006/main"/>
-          <a:p xmlns:a="http://schemas.openxmlformats.org/drawingml/2006/main">
-            <a:pPr algn="l">
-              <a:lnSpc>
-                <a:spcPct val="100000"/>
-              </a:lnSpc>
-              <a:buNone/>
-              <a:defRPr sz="1500" b="1">
-                <a:solidFill>
-                  <a:srgbClr val="051C2A"/>
-                </a:solidFill>
-                <a:latin typeface="Courier New"/>
-                <a:ea typeface="Courier New"/>
-                <a:cs typeface="Courier New"/>
-              </a:defRPr>
-            </a:pPr>
-            <a:r>
-              <a:rPr sz="1500" b="1">
-                <a:solidFill>
-                  <a:srgbClr val="051C2A"/>
-                </a:solidFill>
-                <a:latin typeface="Courier New"/>
-                <a:ea typeface="Courier New"/>
-                <a:cs typeface="Courier New"/>
-              </a:rPr>
-              <a:t>Workflow
-fixed sequence</a:t>
-            </a:r>
-          </a:p>
-        </p:txBody>
-      </p:sp>
-      <p:sp>
-        <p:nvSpPr>
-          <p:cNvPr id="8" name="">
-            <a:extLst xmlns:a="http://schemas.openxmlformats.org/drawingml/2006/main">
-              <a:ext uri="{FF2B5EF4-FFF2-40B4-BE49-F238E27FC236}">
-                <a16:creationId xmlns:a16="http://schemas.microsoft.com/office/drawing/2014/main" id="{EF846D44-14BC-44D4-9667-69FFDFBE94EE}"/>
-              </a:ext>
-            </a:extLst>
-          </p:cNvPr>
-          <p:cNvSpPr>
-            <a:spLocks xmlns:a="http://schemas.openxmlformats.org/drawingml/2006/main" noGrp="1"/>
-          </p:cNvSpPr>
-          <p:nvPr/>
-        </p:nvSpPr>
-        <p:spPr>
-          <a:xfrm xmlns:a="http://schemas.openxmlformats.org/drawingml/2006/main">
-            <a:off x="1028700" y="5276850"/>
-            <a:ext cx="5334000" cy="419100"/>
-          </a:xfrm>
-          <a:prstGeom xmlns:a="http://schemas.openxmlformats.org/drawingml/2006/main" prst="rect">
-            <a:avLst/>
-          </a:prstGeom>
-          <a:noFill xmlns:a="http://schemas.openxmlformats.org/drawingml/2006/main"/>
-          <a:ln xmlns:a="http://schemas.openxmlformats.org/drawingml/2006/main" w="0">
-            <a:noFill/>
-            <a:prstDash val="solid"/>
-          </a:ln>
-        </p:spPr>
-        <p:txBody>
-          <a:bodyPr xmlns:a="http://schemas.openxmlformats.org/drawingml/2006/main" wrap="square" lIns="0" tIns="0" rIns="0" bIns="0" anchor="ctr">
-            <a:noAutofit/>
-          </a:bodyPr>
-          <a:lstStyle xmlns:a="http://schemas.openxmlformats.org/drawingml/2006/main"/>
-          <a:p xmlns:a="http://schemas.openxmlformats.org/drawingml/2006/main">
-            <a:pPr algn="l">
-              <a:lnSpc>
-                <a:spcPct val="100000"/>
-              </a:lnSpc>
-              <a:buNone/>
-              <a:defRPr sz="1575" b="1">
-                <a:solidFill>
-                  <a:srgbClr val="F07D00"/>
-                </a:solidFill>
-                <a:latin typeface="Calibri"/>
-                <a:ea typeface="Calibri"/>
-                <a:cs typeface="Calibri"/>
-              </a:defRPr>
-            </a:pPr>
-            <a:r>
-              <a:rPr sz="1800" b="1">
-                <a:solidFill>
-                  <a:srgbClr val="F07D00"/>
-                </a:solidFill>
-                <a:latin typeface="Calibri"/>
-                <a:ea typeface="Calibri"/>
-                <a:cs typeface="Calibri"/>
-              </a:rPr>
-              <a:t>Predictable · cheap · easy to test</a:t>
-            </a:r>
-          </a:p>
-        </p:txBody>
-      </p:sp>
-      <p:sp>
-        <p:nvSpPr>
-          <p:cNvPr id="9" name="">
-            <a:extLst xmlns:a="http://schemas.openxmlformats.org/drawingml/2006/main">
-              <a:ext uri="{FF2B5EF4-FFF2-40B4-BE49-F238E27FC236}">
-                <a16:creationId xmlns:a16="http://schemas.microsoft.com/office/drawing/2014/main" id="{1106CDE7-35E6-4C8C-A738-6BACCF9A4851}"/>
-              </a:ext>
-            </a:extLst>
-          </p:cNvPr>
-          <p:cNvSpPr>
-            <a:spLocks xmlns:a="http://schemas.openxmlformats.org/drawingml/2006/main" noGrp="1"/>
-          </p:cNvSpPr>
-          <p:nvPr/>
-        </p:nvSpPr>
-        <p:spPr>
-          <a:xfrm xmlns:a="http://schemas.openxmlformats.org/drawingml/2006/main">
-            <a:off x="7334250" y="2343150"/>
-            <a:ext cx="2857500" cy="285750"/>
-          </a:xfrm>
-          <a:prstGeom xmlns:a="http://schemas.openxmlformats.org/drawingml/2006/main" prst="rect">
-            <a:avLst/>
-          </a:prstGeom>
-          <a:noFill xmlns:a="http://schemas.openxmlformats.org/drawingml/2006/main"/>
-          <a:ln xmlns:a="http://schemas.openxmlformats.org/drawingml/2006/main" w="0">
-            <a:noFill/>
-            <a:prstDash val="solid"/>
-          </a:ln>
-        </p:spPr>
-        <p:txBody>
-          <a:bodyPr xmlns:a="http://schemas.openxmlformats.org/drawingml/2006/main" wrap="square" lIns="0" tIns="0" rIns="0" bIns="0" anchor="ctr">
-            <a:noAutofit/>
-          </a:bodyPr>
-          <a:lstStyle xmlns:a="http://schemas.openxmlformats.org/drawingml/2006/main"/>
-          <a:p xmlns:a="http://schemas.openxmlformats.org/drawingml/2006/main">
-            <a:pPr algn="l">
-              <a:lnSpc>
-                <a:spcPct val="100000"/>
-              </a:lnSpc>
-              <a:buNone/>
-              <a:defRPr sz="1350" b="1">
-                <a:solidFill>
-                  <a:srgbClr val="2E8B57"/>
-                </a:solidFill>
-                <a:latin typeface="Calibri"/>
-                <a:ea typeface="Calibri"/>
-                <a:cs typeface="Calibri"/>
-              </a:defRPr>
-            </a:pPr>
-            <a:r>
-              <a:rPr sz="1800" b="1">
-                <a:solidFill>
-                  <a:srgbClr val="2E8B57"/>
-                </a:solidFill>
-                <a:latin typeface="Calibri"/>
-                <a:ea typeface="Calibri"/>
-                <a:cs typeface="Calibri"/>
-              </a:rPr>
-              <a:t>DYNAMIC ROUTES</a:t>
-            </a:r>
-          </a:p>
-        </p:txBody>
-      </p:sp>
-      <p:sp>
-        <p:nvSpPr>
-          <p:cNvPr id="10" name="">
-            <a:extLst xmlns:a="http://schemas.openxmlformats.org/drawingml/2006/main">
-              <a:ext uri="{FF2B5EF4-FFF2-40B4-BE49-F238E27FC236}">
-                <a16:creationId xmlns:a16="http://schemas.microsoft.com/office/drawing/2014/main" id="{562A6E03-2E74-4AA0-BC40-D36976B59F68}"/>
-              </a:ext>
-            </a:extLst>
-          </p:cNvPr>
-          <p:cNvSpPr>
-            <a:spLocks xmlns:a="http://schemas.openxmlformats.org/drawingml/2006/main" noGrp="1"/>
-          </p:cNvSpPr>
-          <p:nvPr/>
-        </p:nvSpPr>
-        <p:spPr>
-          <a:xfrm xmlns:a="http://schemas.openxmlformats.org/drawingml/2006/main">
-            <a:off x="7334250" y="2800350"/>
-            <a:ext cx="2152650" cy="609600"/>
-          </a:xfrm>
-          <a:prstGeom xmlns:a="http://schemas.openxmlformats.org/drawingml/2006/main" prst="roundRect">
-            <a:avLst>
-              <a:gd name="adj" fmla="val 3125"/>
-            </a:avLst>
-          </a:prstGeom>
-          <a:solidFill xmlns:a="http://schemas.openxmlformats.org/drawingml/2006/main">
-            <a:srgbClr val="E8F7EE"/>
+            <a:srgbClr val="1F40CB"/>
           </a:solidFill>
           <a:ln xmlns:a="http://schemas.openxmlformats.org/drawingml/2006/main" w="9525">
             <a:solidFill>
@@ -2790,22 +2444,22 @@
       </p:sp>
       <p:sp>
         <p:nvSpPr>
-          <p:cNvPr id="11" name="">
-            <a:extLst xmlns:a="http://schemas.openxmlformats.org/drawingml/2006/main">
-              <a:ext uri="{FF2B5EF4-FFF2-40B4-BE49-F238E27FC236}">
-                <a16:creationId xmlns:a16="http://schemas.microsoft.com/office/drawing/2014/main" id="{44E18B6A-26EA-404D-8004-B4AEFB1AC04F}"/>
-              </a:ext>
-            </a:extLst>
-          </p:cNvPr>
-          <p:cNvSpPr>
-            <a:spLocks xmlns:a="http://schemas.openxmlformats.org/drawingml/2006/main" noGrp="1"/>
-          </p:cNvSpPr>
-          <p:nvPr/>
-        </p:nvSpPr>
-        <p:spPr>
-          <a:xfrm xmlns:a="http://schemas.openxmlformats.org/drawingml/2006/main">
-            <a:off x="7448550" y="2905125"/>
-            <a:ext cx="1924050" cy="400050"/>
+          <p:cNvPr id="5" name="">
+            <a:extLst xmlns:a="http://schemas.openxmlformats.org/drawingml/2006/main">
+              <a:ext uri="{FF2B5EF4-FFF2-40B4-BE49-F238E27FC236}">
+                <a16:creationId xmlns:a16="http://schemas.microsoft.com/office/drawing/2014/main" id="{132FC0D2-12CA-4723-B1F4-C8F21C5F174F}"/>
+              </a:ext>
+            </a:extLst>
+          </p:cNvPr>
+          <p:cNvSpPr>
+            <a:spLocks xmlns:a="http://schemas.openxmlformats.org/drawingml/2006/main" noGrp="1"/>
+          </p:cNvSpPr>
+          <p:nvPr/>
+        </p:nvSpPr>
+        <p:spPr>
+          <a:xfrm xmlns:a="http://schemas.openxmlformats.org/drawingml/2006/main">
+            <a:off x="3810000" y="2838450"/>
+            <a:ext cx="2190750" cy="457200"/>
           </a:xfrm>
           <a:prstGeom xmlns:a="http://schemas.openxmlformats.org/drawingml/2006/main" prst="rect">
             <a:avLst/>
@@ -2822,14 +2476,14 @@
           </a:bodyPr>
           <a:lstStyle xmlns:a="http://schemas.openxmlformats.org/drawingml/2006/main"/>
           <a:p xmlns:a="http://schemas.openxmlformats.org/drawingml/2006/main">
-            <a:pPr algn="l">
-              <a:lnSpc>
-                <a:spcPct val="100000"/>
-              </a:lnSpc>
-              <a:buNone/>
-              <a:defRPr sz="1350" b="1">
-                <a:solidFill>
-                  <a:srgbClr val="051C2A"/>
+            <a:pPr algn="ctr">
+              <a:lnSpc>
+                <a:spcPct val="100000"/>
+              </a:lnSpc>
+              <a:buNone/>
+              <a:defRPr sz="1275" b="1">
+                <a:solidFill>
+                  <a:srgbClr val="FFFFFF"/>
                 </a:solidFill>
                 <a:latin typeface="Calibri"/>
                 <a:ea typeface="Calibri"/>
@@ -2839,43 +2493,43 @@
             <a:r>
               <a:rPr sz="1800" b="1">
                 <a:solidFill>
-                  <a:srgbClr val="051C2A"/>
-                </a:solidFill>
-                <a:latin typeface="Calibri"/>
-                <a:ea typeface="Calibri"/>
-                <a:cs typeface="Calibri"/>
-              </a:rPr>
-              <a:t>#</a:t>
-            </a:r>
-          </a:p>
-        </p:txBody>
-      </p:sp>
-      <p:sp>
-        <p:nvSpPr>
-          <p:cNvPr id="12" name="">
-            <a:extLst xmlns:a="http://schemas.openxmlformats.org/drawingml/2006/main">
-              <a:ext uri="{FF2B5EF4-FFF2-40B4-BE49-F238E27FC236}">
-                <a16:creationId xmlns:a16="http://schemas.microsoft.com/office/drawing/2014/main" id="{4F7E5910-AC18-40D2-B2F3-6FC1F08D1B7D}"/>
-              </a:ext>
-            </a:extLst>
-          </p:cNvPr>
-          <p:cNvSpPr>
-            <a:spLocks xmlns:a="http://schemas.openxmlformats.org/drawingml/2006/main" noGrp="1"/>
-          </p:cNvSpPr>
-          <p:nvPr/>
-        </p:nvSpPr>
-        <p:spPr>
-          <a:xfrm xmlns:a="http://schemas.openxmlformats.org/drawingml/2006/main">
-            <a:off x="9544050" y="2800350"/>
-            <a:ext cx="1962150" cy="609600"/>
+                  <a:srgbClr val="FFFFFF"/>
+                </a:solidFill>
+                <a:latin typeface="Calibri"/>
+                <a:ea typeface="Calibri"/>
+                <a:cs typeface="Calibri"/>
+              </a:rPr>
+              <a:t>Python code</a:t>
+            </a:r>
+          </a:p>
+        </p:txBody>
+      </p:sp>
+      <p:sp>
+        <p:nvSpPr>
+          <p:cNvPr id="6" name="">
+            <a:extLst xmlns:a="http://schemas.openxmlformats.org/drawingml/2006/main">
+              <a:ext uri="{FF2B5EF4-FFF2-40B4-BE49-F238E27FC236}">
+                <a16:creationId xmlns:a16="http://schemas.microsoft.com/office/drawing/2014/main" id="{3E9AAB83-2BB1-4A7A-84F9-1F2BE14A6F81}"/>
+              </a:ext>
+            </a:extLst>
+          </p:cNvPr>
+          <p:cNvSpPr>
+            <a:spLocks xmlns:a="http://schemas.openxmlformats.org/drawingml/2006/main" noGrp="1"/>
+          </p:cNvSpPr>
+          <p:nvPr/>
+        </p:nvSpPr>
+        <p:spPr>
+          <a:xfrm xmlns:a="http://schemas.openxmlformats.org/drawingml/2006/main">
+            <a:off x="6153150" y="2743200"/>
+            <a:ext cx="2000250" cy="647700"/>
           </a:xfrm>
           <a:prstGeom xmlns:a="http://schemas.openxmlformats.org/drawingml/2006/main" prst="roundRect">
             <a:avLst>
-              <a:gd name="adj" fmla="val 3125"/>
+              <a:gd name="adj" fmla="val 5882"/>
             </a:avLst>
           </a:prstGeom>
           <a:solidFill xmlns:a="http://schemas.openxmlformats.org/drawingml/2006/main">
-            <a:srgbClr val="E8F7EE"/>
+            <a:srgbClr val="F07D00"/>
           </a:solidFill>
           <a:ln xmlns:a="http://schemas.openxmlformats.org/drawingml/2006/main" w="9525">
             <a:solidFill>
@@ -2887,22 +2541,22 @@
       </p:sp>
       <p:sp>
         <p:nvSpPr>
-          <p:cNvPr id="13" name="">
-            <a:extLst xmlns:a="http://schemas.openxmlformats.org/drawingml/2006/main">
-              <a:ext uri="{FF2B5EF4-FFF2-40B4-BE49-F238E27FC236}">
-                <a16:creationId xmlns:a16="http://schemas.microsoft.com/office/drawing/2014/main" id="{664DBD99-75A2-4F76-80D2-886026B31195}"/>
-              </a:ext>
-            </a:extLst>
-          </p:cNvPr>
-          <p:cNvSpPr>
-            <a:spLocks xmlns:a="http://schemas.openxmlformats.org/drawingml/2006/main" noGrp="1"/>
-          </p:cNvSpPr>
-          <p:nvPr/>
-        </p:nvSpPr>
-        <p:spPr>
-          <a:xfrm xmlns:a="http://schemas.openxmlformats.org/drawingml/2006/main">
-            <a:off x="9658350" y="2905125"/>
-            <a:ext cx="1733550" cy="400050"/>
+          <p:cNvPr id="7" name="">
+            <a:extLst xmlns:a="http://schemas.openxmlformats.org/drawingml/2006/main">
+              <a:ext uri="{FF2B5EF4-FFF2-40B4-BE49-F238E27FC236}">
+                <a16:creationId xmlns:a16="http://schemas.microsoft.com/office/drawing/2014/main" id="{6740ED07-2E49-4E7A-9CBF-23CD3B8CFFB4}"/>
+              </a:ext>
+            </a:extLst>
+          </p:cNvPr>
+          <p:cNvSpPr>
+            <a:spLocks xmlns:a="http://schemas.openxmlformats.org/drawingml/2006/main" noGrp="1"/>
+          </p:cNvSpPr>
+          <p:nvPr/>
+        </p:nvSpPr>
+        <p:spPr>
+          <a:xfrm xmlns:a="http://schemas.openxmlformats.org/drawingml/2006/main">
+            <a:off x="6248400" y="2838450"/>
+            <a:ext cx="1809750" cy="457200"/>
           </a:xfrm>
           <a:prstGeom xmlns:a="http://schemas.openxmlformats.org/drawingml/2006/main" prst="rect">
             <a:avLst/>
@@ -2919,14 +2573,14 @@
           </a:bodyPr>
           <a:lstStyle xmlns:a="http://schemas.openxmlformats.org/drawingml/2006/main"/>
           <a:p xmlns:a="http://schemas.openxmlformats.org/drawingml/2006/main">
-            <a:pPr algn="l">
-              <a:lnSpc>
-                <a:spcPct val="100000"/>
-              </a:lnSpc>
-              <a:buNone/>
-              <a:defRPr sz="1350" b="1">
-                <a:solidFill>
-                  <a:srgbClr val="051C2A"/>
+            <a:pPr algn="ctr">
+              <a:lnSpc>
+                <a:spcPct val="100000"/>
+              </a:lnSpc>
+              <a:buNone/>
+              <a:defRPr sz="1275" b="1">
+                <a:solidFill>
+                  <a:srgbClr val="FFFFFF"/>
                 </a:solidFill>
                 <a:latin typeface="Calibri"/>
                 <a:ea typeface="Calibri"/>
@@ -2936,43 +2590,43 @@
             <a:r>
               <a:rPr sz="1800" b="1">
                 <a:solidFill>
-                  <a:srgbClr val="051C2A"/>
-                </a:solidFill>
-                <a:latin typeface="Calibri"/>
-                <a:ea typeface="Calibri"/>
-                <a:cs typeface="Calibri"/>
-              </a:rPr>
-              <a:t>Mode</a:t>
-            </a:r>
-          </a:p>
-        </p:txBody>
-      </p:sp>
-      <p:sp>
-        <p:nvSpPr>
-          <p:cNvPr id="14" name="">
-            <a:extLst xmlns:a="http://schemas.openxmlformats.org/drawingml/2006/main">
-              <a:ext uri="{FF2B5EF4-FFF2-40B4-BE49-F238E27FC236}">
-                <a16:creationId xmlns:a16="http://schemas.microsoft.com/office/drawing/2014/main" id="{90461F5A-F082-42F4-BA7B-33237B017D96}"/>
-              </a:ext>
-            </a:extLst>
-          </p:cNvPr>
-          <p:cNvSpPr>
-            <a:spLocks xmlns:a="http://schemas.openxmlformats.org/drawingml/2006/main" noGrp="1"/>
-          </p:cNvSpPr>
-          <p:nvPr/>
-        </p:nvSpPr>
-        <p:spPr>
-          <a:xfrm xmlns:a="http://schemas.openxmlformats.org/drawingml/2006/main">
-            <a:off x="11563350" y="2800350"/>
-            <a:ext cx="2571750" cy="609600"/>
+                  <a:srgbClr val="FFFFFF"/>
+                </a:solidFill>
+                <a:latin typeface="Calibri"/>
+                <a:ea typeface="Calibri"/>
+                <a:cs typeface="Calibri"/>
+              </a:rPr>
+              <a:t>Fixed steps</a:t>
+            </a:r>
+          </a:p>
+        </p:txBody>
+      </p:sp>
+      <p:sp>
+        <p:nvSpPr>
+          <p:cNvPr id="8" name="">
+            <a:extLst xmlns:a="http://schemas.openxmlformats.org/drawingml/2006/main">
+              <a:ext uri="{FF2B5EF4-FFF2-40B4-BE49-F238E27FC236}">
+                <a16:creationId xmlns:a16="http://schemas.microsoft.com/office/drawing/2014/main" id="{E5A5E176-BCBA-4C49-9196-B98EF7C59C62}"/>
+              </a:ext>
+            </a:extLst>
+          </p:cNvPr>
+          <p:cNvSpPr>
+            <a:spLocks xmlns:a="http://schemas.openxmlformats.org/drawingml/2006/main" noGrp="1"/>
+          </p:cNvSpPr>
+          <p:nvPr/>
+        </p:nvSpPr>
+        <p:spPr>
+          <a:xfrm xmlns:a="http://schemas.openxmlformats.org/drawingml/2006/main">
+            <a:off x="8210550" y="2743200"/>
+            <a:ext cx="1676400" cy="647700"/>
           </a:xfrm>
           <a:prstGeom xmlns:a="http://schemas.openxmlformats.org/drawingml/2006/main" prst="roundRect">
             <a:avLst>
-              <a:gd name="adj" fmla="val 3125"/>
+              <a:gd name="adj" fmla="val 5882"/>
             </a:avLst>
           </a:prstGeom>
           <a:solidFill xmlns:a="http://schemas.openxmlformats.org/drawingml/2006/main">
-            <a:srgbClr val="E8F7EE"/>
+            <a:srgbClr val="1F40CB"/>
           </a:solidFill>
           <a:ln xmlns:a="http://schemas.openxmlformats.org/drawingml/2006/main" w="9525">
             <a:solidFill>
@@ -2984,22 +2638,22 @@
       </p:sp>
       <p:sp>
         <p:nvSpPr>
-          <p:cNvPr id="15" name="">
-            <a:extLst xmlns:a="http://schemas.openxmlformats.org/drawingml/2006/main">
-              <a:ext uri="{FF2B5EF4-FFF2-40B4-BE49-F238E27FC236}">
-                <a16:creationId xmlns:a16="http://schemas.microsoft.com/office/drawing/2014/main" id="{26A70624-C8CA-468D-98D9-3780748870C7}"/>
-              </a:ext>
-            </a:extLst>
-          </p:cNvPr>
-          <p:cNvSpPr>
-            <a:spLocks xmlns:a="http://schemas.openxmlformats.org/drawingml/2006/main" noGrp="1"/>
-          </p:cNvSpPr>
-          <p:nvPr/>
-        </p:nvSpPr>
-        <p:spPr>
-          <a:xfrm xmlns:a="http://schemas.openxmlformats.org/drawingml/2006/main">
-            <a:off x="11677650" y="2905125"/>
-            <a:ext cx="2343150" cy="400050"/>
+          <p:cNvPr id="9" name="">
+            <a:extLst xmlns:a="http://schemas.openxmlformats.org/drawingml/2006/main">
+              <a:ext uri="{FF2B5EF4-FFF2-40B4-BE49-F238E27FC236}">
+                <a16:creationId xmlns:a16="http://schemas.microsoft.com/office/drawing/2014/main" id="{2D62C752-A7F9-4B50-9D20-A71CEAD8FABF}"/>
+              </a:ext>
+            </a:extLst>
+          </p:cNvPr>
+          <p:cNvSpPr>
+            <a:spLocks xmlns:a="http://schemas.openxmlformats.org/drawingml/2006/main" noGrp="1"/>
+          </p:cNvSpPr>
+          <p:nvPr/>
+        </p:nvSpPr>
+        <p:spPr>
+          <a:xfrm xmlns:a="http://schemas.openxmlformats.org/drawingml/2006/main">
+            <a:off x="8305800" y="2838450"/>
+            <a:ext cx="1485900" cy="457200"/>
           </a:xfrm>
           <a:prstGeom xmlns:a="http://schemas.openxmlformats.org/drawingml/2006/main" prst="rect">
             <a:avLst/>
@@ -3016,14 +2670,14 @@
           </a:bodyPr>
           <a:lstStyle xmlns:a="http://schemas.openxmlformats.org/drawingml/2006/main"/>
           <a:p xmlns:a="http://schemas.openxmlformats.org/drawingml/2006/main">
-            <a:pPr algn="l">
-              <a:lnSpc>
-                <a:spcPct val="100000"/>
-              </a:lnSpc>
-              <a:buNone/>
-              <a:defRPr sz="1350" b="1">
-                <a:solidFill>
-                  <a:srgbClr val="051C2A"/>
+            <a:pPr algn="ctr">
+              <a:lnSpc>
+                <a:spcPct val="100000"/>
+              </a:lnSpc>
+              <a:buNone/>
+              <a:defRPr sz="1275" b="1">
+                <a:solidFill>
+                  <a:srgbClr val="FFFFFF"/>
                 </a:solidFill>
                 <a:latin typeface="Calibri"/>
                 <a:ea typeface="Calibri"/>
@@ -3033,43 +2687,43 @@
             <a:r>
               <a:rPr sz="1800" b="1">
                 <a:solidFill>
-                  <a:srgbClr val="051C2A"/>
-                </a:solidFill>
-                <a:latin typeface="Calibri"/>
-                <a:ea typeface="Calibri"/>
-                <a:cs typeface="Calibri"/>
-              </a:rPr>
-              <a:t>Adds</a:t>
-            </a:r>
-          </a:p>
-        </p:txBody>
-      </p:sp>
-      <p:sp>
-        <p:nvSpPr>
-          <p:cNvPr id="16" name="">
-            <a:extLst xmlns:a="http://schemas.openxmlformats.org/drawingml/2006/main">
-              <a:ext uri="{FF2B5EF4-FFF2-40B4-BE49-F238E27FC236}">
-                <a16:creationId xmlns:a16="http://schemas.microsoft.com/office/drawing/2014/main" id="{D403A85A-2DFF-4A0D-A0C0-99283CEFD139}"/>
-              </a:ext>
-            </a:extLst>
-          </p:cNvPr>
-          <p:cNvSpPr>
-            <a:spLocks xmlns:a="http://schemas.openxmlformats.org/drawingml/2006/main" noGrp="1"/>
-          </p:cNvSpPr>
-          <p:nvPr/>
-        </p:nvSpPr>
-        <p:spPr>
-          <a:xfrm xmlns:a="http://schemas.openxmlformats.org/drawingml/2006/main">
-            <a:off x="7334250" y="3448050"/>
-            <a:ext cx="2152650" cy="666750"/>
+                  <a:srgbClr val="FFFFFF"/>
+                </a:solidFill>
+                <a:latin typeface="Calibri"/>
+                <a:ea typeface="Calibri"/>
+                <a:cs typeface="Calibri"/>
+              </a:rPr>
+              <a:t>Price lookup</a:t>
+            </a:r>
+          </a:p>
+        </p:txBody>
+      </p:sp>
+      <p:sp>
+        <p:nvSpPr>
+          <p:cNvPr id="10" name="">
+            <a:extLst xmlns:a="http://schemas.openxmlformats.org/drawingml/2006/main">
+              <a:ext uri="{FF2B5EF4-FFF2-40B4-BE49-F238E27FC236}">
+                <a16:creationId xmlns:a16="http://schemas.microsoft.com/office/drawing/2014/main" id="{F9A9A56C-9DB1-49FF-8E87-2C6B8DB8CE93}"/>
+              </a:ext>
+            </a:extLst>
+          </p:cNvPr>
+          <p:cNvSpPr>
+            <a:spLocks xmlns:a="http://schemas.openxmlformats.org/drawingml/2006/main" noGrp="1"/>
+          </p:cNvSpPr>
+          <p:nvPr/>
+        </p:nvSpPr>
+        <p:spPr>
+          <a:xfrm xmlns:a="http://schemas.openxmlformats.org/drawingml/2006/main">
+            <a:off x="9944100" y="2743200"/>
+            <a:ext cx="1066800" cy="647700"/>
           </a:xfrm>
           <a:prstGeom xmlns:a="http://schemas.openxmlformats.org/drawingml/2006/main" prst="roundRect">
             <a:avLst>
-              <a:gd name="adj" fmla="val 2857"/>
+              <a:gd name="adj" fmla="val 5882"/>
             </a:avLst>
           </a:prstGeom>
           <a:solidFill xmlns:a="http://schemas.openxmlformats.org/drawingml/2006/main">
-            <a:srgbClr val="F7FBF8"/>
+            <a:srgbClr val="F07D00"/>
           </a:solidFill>
           <a:ln xmlns:a="http://schemas.openxmlformats.org/drawingml/2006/main" w="9525">
             <a:solidFill>
@@ -3081,35 +2735,159 @@
       </p:sp>
       <p:sp>
         <p:nvSpPr>
-          <p:cNvPr id="17" name="">
-            <a:extLst xmlns:a="http://schemas.openxmlformats.org/drawingml/2006/main">
-              <a:ext uri="{FF2B5EF4-FFF2-40B4-BE49-F238E27FC236}">
-                <a16:creationId xmlns:a16="http://schemas.microsoft.com/office/drawing/2014/main" id="{91684354-1A30-417B-8AE7-ECA5F6B039A6}"/>
-              </a:ext>
-            </a:extLst>
-          </p:cNvPr>
-          <p:cNvSpPr>
-            <a:spLocks xmlns:a="http://schemas.openxmlformats.org/drawingml/2006/main" noGrp="1"/>
-          </p:cNvSpPr>
-          <p:nvPr/>
-        </p:nvSpPr>
-        <p:spPr>
-          <a:xfrm xmlns:a="http://schemas.openxmlformats.org/drawingml/2006/main">
-            <a:off x="7448550" y="3562350"/>
-            <a:ext cx="1924050" cy="419100"/>
-          </a:xfrm>
-          <a:prstGeom xmlns:a="http://schemas.openxmlformats.org/drawingml/2006/main" prst="rect">
-            <a:avLst/>
-          </a:prstGeom>
-          <a:noFill xmlns:a="http://schemas.openxmlformats.org/drawingml/2006/main"/>
-          <a:ln xmlns:a="http://schemas.openxmlformats.org/drawingml/2006/main" w="0">
-            <a:noFill/>
-            <a:prstDash val="solid"/>
-          </a:ln>
-        </p:spPr>
-        <p:txBody>
-          <a:bodyPr xmlns:a="http://schemas.openxmlformats.org/drawingml/2006/main" wrap="square" lIns="0" tIns="0" rIns="0" bIns="0" anchor="ctr">
-            <a:normAutofit fontScale="100000"/>
+          <p:cNvPr id="11" name="">
+            <a:extLst xmlns:a="http://schemas.openxmlformats.org/drawingml/2006/main">
+              <a:ext uri="{FF2B5EF4-FFF2-40B4-BE49-F238E27FC236}">
+                <a16:creationId xmlns:a16="http://schemas.microsoft.com/office/drawing/2014/main" id="{D9D4F50D-12C3-4331-801A-91C1EC1A4D30}"/>
+              </a:ext>
+            </a:extLst>
+          </p:cNvPr>
+          <p:cNvSpPr>
+            <a:spLocks xmlns:a="http://schemas.openxmlformats.org/drawingml/2006/main" noGrp="1"/>
+          </p:cNvSpPr>
+          <p:nvPr/>
+        </p:nvSpPr>
+        <p:spPr>
+          <a:xfrm xmlns:a="http://schemas.openxmlformats.org/drawingml/2006/main">
+            <a:off x="10039350" y="2838450"/>
+            <a:ext cx="876300" cy="457200"/>
+          </a:xfrm>
+          <a:prstGeom xmlns:a="http://schemas.openxmlformats.org/drawingml/2006/main" prst="rect">
+            <a:avLst/>
+          </a:prstGeom>
+          <a:noFill xmlns:a="http://schemas.openxmlformats.org/drawingml/2006/main"/>
+          <a:ln xmlns:a="http://schemas.openxmlformats.org/drawingml/2006/main" w="0">
+            <a:noFill/>
+            <a:prstDash val="solid"/>
+          </a:ln>
+        </p:spPr>
+        <p:txBody>
+          <a:bodyPr xmlns:a="http://schemas.openxmlformats.org/drawingml/2006/main" wrap="square" lIns="0" tIns="0" rIns="0" bIns="0" anchor="ctr">
+            <a:noAutofit/>
+          </a:bodyPr>
+          <a:lstStyle xmlns:a="http://schemas.openxmlformats.org/drawingml/2006/main"/>
+          <a:p xmlns:a="http://schemas.openxmlformats.org/drawingml/2006/main">
+            <a:pPr algn="ctr">
+              <a:lnSpc>
+                <a:spcPct val="100000"/>
+              </a:lnSpc>
+              <a:buNone/>
+              <a:defRPr sz="1275" b="1">
+                <a:solidFill>
+                  <a:srgbClr val="FFFFFF"/>
+                </a:solidFill>
+                <a:latin typeface="Calibri"/>
+                <a:ea typeface="Calibri"/>
+                <a:cs typeface="Calibri"/>
+              </a:defRPr>
+            </a:pPr>
+            <a:r>
+              <a:rPr sz="1800" b="1">
+                <a:solidFill>
+                  <a:srgbClr val="FFFFFF"/>
+                </a:solidFill>
+                <a:latin typeface="Calibri"/>
+                <a:ea typeface="Calibri"/>
+                <a:cs typeface="Calibri"/>
+              </a:rPr>
+              <a:t>0 to 3 calls</a:t>
+            </a:r>
+          </a:p>
+        </p:txBody>
+      </p:sp>
+      <p:sp>
+        <p:nvSpPr>
+          <p:cNvPr id="12" name="">
+            <a:extLst xmlns:a="http://schemas.openxmlformats.org/drawingml/2006/main">
+              <a:ext uri="{FF2B5EF4-FFF2-40B4-BE49-F238E27FC236}">
+                <a16:creationId xmlns:a16="http://schemas.microsoft.com/office/drawing/2014/main" id="{194D2954-A4C1-482E-AAB1-42DAC0BB1957}"/>
+              </a:ext>
+            </a:extLst>
+          </p:cNvPr>
+          <p:cNvSpPr>
+            <a:spLocks xmlns:a="http://schemas.openxmlformats.org/drawingml/2006/main" noGrp="1"/>
+          </p:cNvSpPr>
+          <p:nvPr/>
+        </p:nvSpPr>
+        <p:spPr>
+          <a:xfrm xmlns:a="http://schemas.openxmlformats.org/drawingml/2006/main">
+            <a:off x="12001500" y="2800350"/>
+            <a:ext cx="2190750" cy="361950"/>
+          </a:xfrm>
+          <a:prstGeom xmlns:a="http://schemas.openxmlformats.org/drawingml/2006/main" prst="rect">
+            <a:avLst/>
+          </a:prstGeom>
+          <a:noFill xmlns:a="http://schemas.openxmlformats.org/drawingml/2006/main"/>
+          <a:ln xmlns:a="http://schemas.openxmlformats.org/drawingml/2006/main" w="0">
+            <a:noFill/>
+            <a:prstDash val="solid"/>
+          </a:ln>
+        </p:spPr>
+        <p:txBody>
+          <a:bodyPr xmlns:a="http://schemas.openxmlformats.org/drawingml/2006/main" wrap="square" lIns="0" tIns="0" rIns="0" bIns="0" anchor="ctr">
+            <a:noAutofit/>
+          </a:bodyPr>
+          <a:lstStyle xmlns:a="http://schemas.openxmlformats.org/drawingml/2006/main"/>
+          <a:p xmlns:a="http://schemas.openxmlformats.org/drawingml/2006/main">
+            <a:pPr algn="r">
+              <a:lnSpc>
+                <a:spcPct val="100000"/>
+              </a:lnSpc>
+              <a:buNone/>
+              <a:defRPr sz="1350" b="1">
+                <a:solidFill>
+                  <a:srgbClr val="F07D00"/>
+                </a:solidFill>
+                <a:latin typeface="Calibri"/>
+                <a:ea typeface="Calibri"/>
+                <a:cs typeface="Calibri"/>
+              </a:defRPr>
+            </a:pPr>
+            <a:r>
+              <a:rPr sz="1800" b="1">
+                <a:solidFill>
+                  <a:srgbClr val="F07D00"/>
+                </a:solidFill>
+                <a:latin typeface="Calibri"/>
+                <a:ea typeface="Calibri"/>
+                <a:cs typeface="Calibri"/>
+              </a:rPr>
+              <a:t>LOW COST</a:t>
+            </a:r>
+          </a:p>
+        </p:txBody>
+      </p:sp>
+      <p:sp>
+        <p:nvSpPr>
+          <p:cNvPr id="13" name="">
+            <a:extLst xmlns:a="http://schemas.openxmlformats.org/drawingml/2006/main">
+              <a:ext uri="{FF2B5EF4-FFF2-40B4-BE49-F238E27FC236}">
+                <a16:creationId xmlns:a16="http://schemas.microsoft.com/office/drawing/2014/main" id="{B3122776-3C69-478E-8B1D-4E859ACC8602}"/>
+              </a:ext>
+            </a:extLst>
+          </p:cNvPr>
+          <p:cNvSpPr>
+            <a:spLocks xmlns:a="http://schemas.openxmlformats.org/drawingml/2006/main" noGrp="1"/>
+          </p:cNvSpPr>
+          <p:nvPr/>
+        </p:nvSpPr>
+        <p:spPr>
+          <a:xfrm xmlns:a="http://schemas.openxmlformats.org/drawingml/2006/main">
+            <a:off x="1028700" y="4267200"/>
+            <a:ext cx="2476500" cy="361950"/>
+          </a:xfrm>
+          <a:prstGeom xmlns:a="http://schemas.openxmlformats.org/drawingml/2006/main" prst="rect">
+            <a:avLst/>
+          </a:prstGeom>
+          <a:noFill xmlns:a="http://schemas.openxmlformats.org/drawingml/2006/main"/>
+          <a:ln xmlns:a="http://schemas.openxmlformats.org/drawingml/2006/main" w="0">
+            <a:noFill/>
+            <a:prstDash val="solid"/>
+          </a:ln>
+        </p:spPr>
+        <p:txBody>
+          <a:bodyPr xmlns:a="http://schemas.openxmlformats.org/drawingml/2006/main" wrap="square" lIns="0" tIns="0" rIns="0" bIns="0" anchor="ctr">
+            <a:noAutofit/>
           </a:bodyPr>
           <a:lstStyle xmlns:a="http://schemas.openxmlformats.org/drawingml/2006/main"/>
           <a:p xmlns:a="http://schemas.openxmlformats.org/drawingml/2006/main">
@@ -3118,55 +2896,55 @@
                 <a:spcPct val="100000"/>
               </a:lnSpc>
               <a:buNone/>
-              <a:defRPr sz="1425" b="0">
-                <a:solidFill>
-                  <a:srgbClr val="051C2A"/>
-                </a:solidFill>
-                <a:latin typeface="Calibri"/>
-                <a:ea typeface="Calibri"/>
-                <a:cs typeface="Calibri"/>
-              </a:defRPr>
-            </a:pPr>
-            <a:r>
-              <a:rPr sz="1425" b="0">
-                <a:solidFill>
-                  <a:srgbClr val="051C2A"/>
-                </a:solidFill>
-                <a:latin typeface="Calibri"/>
-                <a:ea typeface="Calibri"/>
-                <a:cs typeface="Calibri"/>
-              </a:rPr>
-              <a:t>01</a:t>
-            </a:r>
-          </a:p>
-        </p:txBody>
-      </p:sp>
-      <p:sp>
-        <p:nvSpPr>
-          <p:cNvPr id="18" name="">
-            <a:extLst xmlns:a="http://schemas.openxmlformats.org/drawingml/2006/main">
-              <a:ext uri="{FF2B5EF4-FFF2-40B4-BE49-F238E27FC236}">
-                <a16:creationId xmlns:a16="http://schemas.microsoft.com/office/drawing/2014/main" id="{65B55295-3DA8-457F-83F0-53BB6A03876C}"/>
-              </a:ext>
-            </a:extLst>
-          </p:cNvPr>
-          <p:cNvSpPr>
-            <a:spLocks xmlns:a="http://schemas.openxmlformats.org/drawingml/2006/main" noGrp="1"/>
-          </p:cNvSpPr>
-          <p:nvPr/>
-        </p:nvSpPr>
-        <p:spPr>
-          <a:xfrm xmlns:a="http://schemas.openxmlformats.org/drawingml/2006/main">
-            <a:off x="9544050" y="3448050"/>
-            <a:ext cx="1962150" cy="666750"/>
+              <a:defRPr sz="1350" b="1">
+                <a:solidFill>
+                  <a:srgbClr val="00A2EB"/>
+                </a:solidFill>
+                <a:latin typeface="Calibri"/>
+                <a:ea typeface="Calibri"/>
+                <a:cs typeface="Calibri"/>
+              </a:defRPr>
+            </a:pPr>
+            <a:r>
+              <a:rPr sz="1800" b="1">
+                <a:solidFill>
+                  <a:srgbClr val="00A2EB"/>
+                </a:solidFill>
+                <a:latin typeface="Calibri"/>
+                <a:ea typeface="Calibri"/>
+                <a:cs typeface="Calibri"/>
+              </a:rPr>
+              <a:t>AGENT</a:t>
+            </a:r>
+          </a:p>
+        </p:txBody>
+      </p:sp>
+      <p:sp>
+        <p:nvSpPr>
+          <p:cNvPr id="14" name="">
+            <a:extLst xmlns:a="http://schemas.openxmlformats.org/drawingml/2006/main">
+              <a:ext uri="{FF2B5EF4-FFF2-40B4-BE49-F238E27FC236}">
+                <a16:creationId xmlns:a16="http://schemas.microsoft.com/office/drawing/2014/main" id="{0020E4D2-1B72-432A-AD48-61D3EF9BCCA8}"/>
+              </a:ext>
+            </a:extLst>
+          </p:cNvPr>
+          <p:cNvSpPr>
+            <a:spLocks xmlns:a="http://schemas.openxmlformats.org/drawingml/2006/main" noGrp="1"/>
+          </p:cNvSpPr>
+          <p:nvPr/>
+        </p:nvSpPr>
+        <p:spPr>
+          <a:xfrm xmlns:a="http://schemas.openxmlformats.org/drawingml/2006/main">
+            <a:off x="3714750" y="4210050"/>
+            <a:ext cx="3143250" cy="647700"/>
           </a:xfrm>
           <a:prstGeom xmlns:a="http://schemas.openxmlformats.org/drawingml/2006/main" prst="roundRect">
             <a:avLst>
-              <a:gd name="adj" fmla="val 2857"/>
+              <a:gd name="adj" fmla="val 5882"/>
             </a:avLst>
           </a:prstGeom>
           <a:solidFill xmlns:a="http://schemas.openxmlformats.org/drawingml/2006/main">
-            <a:srgbClr val="F7FBF8"/>
+            <a:srgbClr val="1F40CB"/>
           </a:solidFill>
           <a:ln xmlns:a="http://schemas.openxmlformats.org/drawingml/2006/main" w="9525">
             <a:solidFill>
@@ -3178,92 +2956,92 @@
       </p:sp>
       <p:sp>
         <p:nvSpPr>
-          <p:cNvPr id="19" name="">
-            <a:extLst xmlns:a="http://schemas.openxmlformats.org/drawingml/2006/main">
-              <a:ext uri="{FF2B5EF4-FFF2-40B4-BE49-F238E27FC236}">
-                <a16:creationId xmlns:a16="http://schemas.microsoft.com/office/drawing/2014/main" id="{3A696DF8-2386-42C4-91BD-18AC99A2924A}"/>
-              </a:ext>
-            </a:extLst>
-          </p:cNvPr>
-          <p:cNvSpPr>
-            <a:spLocks xmlns:a="http://schemas.openxmlformats.org/drawingml/2006/main" noGrp="1"/>
-          </p:cNvSpPr>
-          <p:nvPr/>
-        </p:nvSpPr>
-        <p:spPr>
-          <a:xfrm xmlns:a="http://schemas.openxmlformats.org/drawingml/2006/main">
-            <a:off x="9658350" y="3562350"/>
-            <a:ext cx="1733550" cy="419100"/>
-          </a:xfrm>
-          <a:prstGeom xmlns:a="http://schemas.openxmlformats.org/drawingml/2006/main" prst="rect">
-            <a:avLst/>
-          </a:prstGeom>
-          <a:noFill xmlns:a="http://schemas.openxmlformats.org/drawingml/2006/main"/>
-          <a:ln xmlns:a="http://schemas.openxmlformats.org/drawingml/2006/main" w="0">
-            <a:noFill/>
-            <a:prstDash val="solid"/>
-          </a:ln>
-        </p:spPr>
-        <p:txBody>
-          <a:bodyPr xmlns:a="http://schemas.openxmlformats.org/drawingml/2006/main" wrap="square" lIns="0" tIns="0" rIns="0" bIns="0" anchor="ctr">
-            <a:normAutofit fontScale="100000"/>
-          </a:bodyPr>
-          <a:lstStyle xmlns:a="http://schemas.openxmlformats.org/drawingml/2006/main"/>
-          <a:p xmlns:a="http://schemas.openxmlformats.org/drawingml/2006/main">
-            <a:pPr algn="l">
-              <a:lnSpc>
-                <a:spcPct val="100000"/>
-              </a:lnSpc>
-              <a:buNone/>
-              <a:defRPr sz="1425" b="0">
-                <a:solidFill>
-                  <a:srgbClr val="051C2A"/>
-                </a:solidFill>
-                <a:latin typeface="Calibri"/>
-                <a:ea typeface="Calibri"/>
-                <a:cs typeface="Calibri"/>
-              </a:defRPr>
-            </a:pPr>
-            <a:r>
-              <a:rPr sz="1425" b="0">
-                <a:solidFill>
-                  <a:srgbClr val="051C2A"/>
-                </a:solidFill>
-                <a:latin typeface="Calibri"/>
-                <a:ea typeface="Calibri"/>
-                <a:cs typeface="Calibri"/>
-              </a:rPr>
-              <a:t>Bounded agent</a:t>
-            </a:r>
-          </a:p>
-        </p:txBody>
-      </p:sp>
-      <p:sp>
-        <p:nvSpPr>
-          <p:cNvPr id="20" name="">
-            <a:extLst xmlns:a="http://schemas.openxmlformats.org/drawingml/2006/main">
-              <a:ext uri="{FF2B5EF4-FFF2-40B4-BE49-F238E27FC236}">
-                <a16:creationId xmlns:a16="http://schemas.microsoft.com/office/drawing/2014/main" id="{E339A1A9-4564-4056-8CDC-CEDB497A7AD1}"/>
-              </a:ext>
-            </a:extLst>
-          </p:cNvPr>
-          <p:cNvSpPr>
-            <a:spLocks xmlns:a="http://schemas.openxmlformats.org/drawingml/2006/main" noGrp="1"/>
-          </p:cNvSpPr>
-          <p:nvPr/>
-        </p:nvSpPr>
-        <p:spPr>
-          <a:xfrm xmlns:a="http://schemas.openxmlformats.org/drawingml/2006/main">
-            <a:off x="11563350" y="3448050"/>
-            <a:ext cx="2571750" cy="666750"/>
+          <p:cNvPr id="15" name="">
+            <a:extLst xmlns:a="http://schemas.openxmlformats.org/drawingml/2006/main">
+              <a:ext uri="{FF2B5EF4-FFF2-40B4-BE49-F238E27FC236}">
+                <a16:creationId xmlns:a16="http://schemas.microsoft.com/office/drawing/2014/main" id="{499905A1-C4D3-46AB-A516-DCFB88A03736}"/>
+              </a:ext>
+            </a:extLst>
+          </p:cNvPr>
+          <p:cNvSpPr>
+            <a:spLocks xmlns:a="http://schemas.openxmlformats.org/drawingml/2006/main" noGrp="1"/>
+          </p:cNvSpPr>
+          <p:nvPr/>
+        </p:nvSpPr>
+        <p:spPr>
+          <a:xfrm xmlns:a="http://schemas.openxmlformats.org/drawingml/2006/main">
+            <a:off x="3810000" y="4305300"/>
+            <a:ext cx="2952750" cy="457200"/>
+          </a:xfrm>
+          <a:prstGeom xmlns:a="http://schemas.openxmlformats.org/drawingml/2006/main" prst="rect">
+            <a:avLst/>
+          </a:prstGeom>
+          <a:noFill xmlns:a="http://schemas.openxmlformats.org/drawingml/2006/main"/>
+          <a:ln xmlns:a="http://schemas.openxmlformats.org/drawingml/2006/main" w="0">
+            <a:noFill/>
+            <a:prstDash val="solid"/>
+          </a:ln>
+        </p:spPr>
+        <p:txBody>
+          <a:bodyPr xmlns:a="http://schemas.openxmlformats.org/drawingml/2006/main" wrap="square" lIns="0" tIns="0" rIns="0" bIns="0" anchor="ctr">
+            <a:noAutofit/>
+          </a:bodyPr>
+          <a:lstStyle xmlns:a="http://schemas.openxmlformats.org/drawingml/2006/main"/>
+          <a:p xmlns:a="http://schemas.openxmlformats.org/drawingml/2006/main">
+            <a:pPr algn="ctr">
+              <a:lnSpc>
+                <a:spcPct val="100000"/>
+              </a:lnSpc>
+              <a:buNone/>
+              <a:defRPr sz="1275" b="1">
+                <a:solidFill>
+                  <a:srgbClr val="FFFFFF"/>
+                </a:solidFill>
+                <a:latin typeface="Calibri"/>
+                <a:ea typeface="Calibri"/>
+                <a:cs typeface="Calibri"/>
+              </a:defRPr>
+            </a:pPr>
+            <a:r>
+              <a:rPr sz="1800" b="1">
+                <a:solidFill>
+                  <a:srgbClr val="FFFFFF"/>
+                </a:solidFill>
+                <a:latin typeface="Calibri"/>
+                <a:ea typeface="Calibri"/>
+                <a:cs typeface="Calibri"/>
+              </a:rPr>
+              <a:t>One LLM</a:t>
+            </a:r>
+          </a:p>
+        </p:txBody>
+      </p:sp>
+      <p:sp>
+        <p:nvSpPr>
+          <p:cNvPr id="16" name="">
+            <a:extLst xmlns:a="http://schemas.openxmlformats.org/drawingml/2006/main">
+              <a:ext uri="{FF2B5EF4-FFF2-40B4-BE49-F238E27FC236}">
+                <a16:creationId xmlns:a16="http://schemas.microsoft.com/office/drawing/2014/main" id="{7C2240E6-0102-4064-B038-AB12EDED68BD}"/>
+              </a:ext>
+            </a:extLst>
+          </p:cNvPr>
+          <p:cNvSpPr>
+            <a:spLocks xmlns:a="http://schemas.openxmlformats.org/drawingml/2006/main" noGrp="1"/>
+          </p:cNvSpPr>
+          <p:nvPr/>
+        </p:nvSpPr>
+        <p:spPr>
+          <a:xfrm xmlns:a="http://schemas.openxmlformats.org/drawingml/2006/main">
+            <a:off x="6915150" y="4210050"/>
+            <a:ext cx="2952750" cy="647700"/>
           </a:xfrm>
           <a:prstGeom xmlns:a="http://schemas.openxmlformats.org/drawingml/2006/main" prst="roundRect">
             <a:avLst>
-              <a:gd name="adj" fmla="val 2857"/>
+              <a:gd name="adj" fmla="val 5882"/>
             </a:avLst>
           </a:prstGeom>
           <a:solidFill xmlns:a="http://schemas.openxmlformats.org/drawingml/2006/main">
-            <a:srgbClr val="F7FBF8"/>
+            <a:srgbClr val="00A2EB"/>
           </a:solidFill>
           <a:ln xmlns:a="http://schemas.openxmlformats.org/drawingml/2006/main" w="9525">
             <a:solidFill>
@@ -3275,92 +3053,92 @@
       </p:sp>
       <p:sp>
         <p:nvSpPr>
-          <p:cNvPr id="21" name="">
-            <a:extLst xmlns:a="http://schemas.openxmlformats.org/drawingml/2006/main">
-              <a:ext uri="{FF2B5EF4-FFF2-40B4-BE49-F238E27FC236}">
-                <a16:creationId xmlns:a16="http://schemas.microsoft.com/office/drawing/2014/main" id="{9BC725B4-5DC5-4222-B581-EB84BE90E77A}"/>
-              </a:ext>
-            </a:extLst>
-          </p:cNvPr>
-          <p:cNvSpPr>
-            <a:spLocks xmlns:a="http://schemas.openxmlformats.org/drawingml/2006/main" noGrp="1"/>
-          </p:cNvSpPr>
-          <p:nvPr/>
-        </p:nvSpPr>
-        <p:spPr>
-          <a:xfrm xmlns:a="http://schemas.openxmlformats.org/drawingml/2006/main">
-            <a:off x="11677650" y="3562350"/>
-            <a:ext cx="2343150" cy="419100"/>
-          </a:xfrm>
-          <a:prstGeom xmlns:a="http://schemas.openxmlformats.org/drawingml/2006/main" prst="rect">
-            <a:avLst/>
-          </a:prstGeom>
-          <a:noFill xmlns:a="http://schemas.openxmlformats.org/drawingml/2006/main"/>
-          <a:ln xmlns:a="http://schemas.openxmlformats.org/drawingml/2006/main" w="0">
-            <a:noFill/>
-            <a:prstDash val="solid"/>
-          </a:ln>
-        </p:spPr>
-        <p:txBody>
-          <a:bodyPr xmlns:a="http://schemas.openxmlformats.org/drawingml/2006/main" wrap="square" lIns="0" tIns="0" rIns="0" bIns="0" anchor="ctr">
-            <a:normAutofit fontScale="96491"/>
-          </a:bodyPr>
-          <a:lstStyle xmlns:a="http://schemas.openxmlformats.org/drawingml/2006/main"/>
-          <a:p xmlns:a="http://schemas.openxmlformats.org/drawingml/2006/main">
-            <a:pPr algn="l">
-              <a:lnSpc>
-                <a:spcPct val="100000"/>
-              </a:lnSpc>
-              <a:buNone/>
-              <a:defRPr sz="1425" b="0">
-                <a:solidFill>
-                  <a:srgbClr val="051C2A"/>
-                </a:solidFill>
-                <a:latin typeface="Calibri"/>
-                <a:ea typeface="Calibri"/>
-                <a:cs typeface="Calibri"/>
-              </a:defRPr>
-            </a:pPr>
-            <a:r>
-              <a:rPr sz="1425" b="0">
-                <a:solidFill>
-                  <a:srgbClr val="051C2A"/>
-                </a:solidFill>
-                <a:latin typeface="Calibri"/>
-                <a:ea typeface="Calibri"/>
-                <a:cs typeface="Calibri"/>
-              </a:rPr>
-              <a:t>observation selects next action</a:t>
-            </a:r>
-          </a:p>
-        </p:txBody>
-      </p:sp>
-      <p:sp>
-        <p:nvSpPr>
-          <p:cNvPr id="22" name="">
-            <a:extLst xmlns:a="http://schemas.openxmlformats.org/drawingml/2006/main">
-              <a:ext uri="{FF2B5EF4-FFF2-40B4-BE49-F238E27FC236}">
-                <a16:creationId xmlns:a16="http://schemas.microsoft.com/office/drawing/2014/main" id="{0D160DDC-C4FB-4932-B81B-093415961B73}"/>
-              </a:ext>
-            </a:extLst>
-          </p:cNvPr>
-          <p:cNvSpPr>
-            <a:spLocks xmlns:a="http://schemas.openxmlformats.org/drawingml/2006/main" noGrp="1"/>
-          </p:cNvSpPr>
-          <p:nvPr/>
-        </p:nvSpPr>
-        <p:spPr>
-          <a:xfrm xmlns:a="http://schemas.openxmlformats.org/drawingml/2006/main">
-            <a:off x="7334250" y="4171950"/>
-            <a:ext cx="2152650" cy="666750"/>
+          <p:cNvPr id="17" name="">
+            <a:extLst xmlns:a="http://schemas.openxmlformats.org/drawingml/2006/main">
+              <a:ext uri="{FF2B5EF4-FFF2-40B4-BE49-F238E27FC236}">
+                <a16:creationId xmlns:a16="http://schemas.microsoft.com/office/drawing/2014/main" id="{7ECBA82F-0F85-40C1-9BE1-6E7847AE3FF4}"/>
+              </a:ext>
+            </a:extLst>
+          </p:cNvPr>
+          <p:cNvSpPr>
+            <a:spLocks xmlns:a="http://schemas.openxmlformats.org/drawingml/2006/main" noGrp="1"/>
+          </p:cNvSpPr>
+          <p:nvPr/>
+        </p:nvSpPr>
+        <p:spPr>
+          <a:xfrm xmlns:a="http://schemas.openxmlformats.org/drawingml/2006/main">
+            <a:off x="7010400" y="4305300"/>
+            <a:ext cx="2762250" cy="457200"/>
+          </a:xfrm>
+          <a:prstGeom xmlns:a="http://schemas.openxmlformats.org/drawingml/2006/main" prst="rect">
+            <a:avLst/>
+          </a:prstGeom>
+          <a:noFill xmlns:a="http://schemas.openxmlformats.org/drawingml/2006/main"/>
+          <a:ln xmlns:a="http://schemas.openxmlformats.org/drawingml/2006/main" w="0">
+            <a:noFill/>
+            <a:prstDash val="solid"/>
+          </a:ln>
+        </p:spPr>
+        <p:txBody>
+          <a:bodyPr xmlns:a="http://schemas.openxmlformats.org/drawingml/2006/main" wrap="square" lIns="0" tIns="0" rIns="0" bIns="0" anchor="ctr">
+            <a:noAutofit/>
+          </a:bodyPr>
+          <a:lstStyle xmlns:a="http://schemas.openxmlformats.org/drawingml/2006/main"/>
+          <a:p xmlns:a="http://schemas.openxmlformats.org/drawingml/2006/main">
+            <a:pPr algn="ctr">
+              <a:lnSpc>
+                <a:spcPct val="100000"/>
+              </a:lnSpc>
+              <a:buNone/>
+              <a:defRPr sz="1275" b="1">
+                <a:solidFill>
+                  <a:srgbClr val="FFFFFF"/>
+                </a:solidFill>
+                <a:latin typeface="Calibri"/>
+                <a:ea typeface="Calibri"/>
+                <a:cs typeface="Calibri"/>
+              </a:defRPr>
+            </a:pPr>
+            <a:r>
+              <a:rPr sz="1800" b="1">
+                <a:solidFill>
+                  <a:srgbClr val="FFFFFF"/>
+                </a:solidFill>
+                <a:latin typeface="Calibri"/>
+                <a:ea typeface="Calibri"/>
+                <a:cs typeface="Calibri"/>
+              </a:rPr>
+              <a:t>Chooses after each result</a:t>
+            </a:r>
+          </a:p>
+        </p:txBody>
+      </p:sp>
+      <p:sp>
+        <p:nvSpPr>
+          <p:cNvPr id="18" name="">
+            <a:extLst xmlns:a="http://schemas.openxmlformats.org/drawingml/2006/main">
+              <a:ext uri="{FF2B5EF4-FFF2-40B4-BE49-F238E27FC236}">
+                <a16:creationId xmlns:a16="http://schemas.microsoft.com/office/drawing/2014/main" id="{6BD7C7D4-5A09-43DC-B381-56DF305B4223}"/>
+              </a:ext>
+            </a:extLst>
+          </p:cNvPr>
+          <p:cNvSpPr>
+            <a:spLocks xmlns:a="http://schemas.openxmlformats.org/drawingml/2006/main" noGrp="1"/>
+          </p:cNvSpPr>
+          <p:nvPr/>
+        </p:nvSpPr>
+        <p:spPr>
+          <a:xfrm xmlns:a="http://schemas.openxmlformats.org/drawingml/2006/main">
+            <a:off x="9925050" y="4210050"/>
+            <a:ext cx="2000250" cy="647700"/>
           </a:xfrm>
           <a:prstGeom xmlns:a="http://schemas.openxmlformats.org/drawingml/2006/main" prst="roundRect">
             <a:avLst>
-              <a:gd name="adj" fmla="val 2857"/>
+              <a:gd name="adj" fmla="val 5882"/>
             </a:avLst>
           </a:prstGeom>
           <a:solidFill xmlns:a="http://schemas.openxmlformats.org/drawingml/2006/main">
-            <a:srgbClr val="F7FBF8"/>
+            <a:srgbClr val="1F40CB"/>
           </a:solidFill>
           <a:ln xmlns:a="http://schemas.openxmlformats.org/drawingml/2006/main" w="9525">
             <a:solidFill>
@@ -3372,35 +3150,159 @@
       </p:sp>
       <p:sp>
         <p:nvSpPr>
-          <p:cNvPr id="23" name="">
-            <a:extLst xmlns:a="http://schemas.openxmlformats.org/drawingml/2006/main">
-              <a:ext uri="{FF2B5EF4-FFF2-40B4-BE49-F238E27FC236}">
-                <a16:creationId xmlns:a16="http://schemas.microsoft.com/office/drawing/2014/main" id="{328C8390-620E-4337-B177-E20E16662614}"/>
-              </a:ext>
-            </a:extLst>
-          </p:cNvPr>
-          <p:cNvSpPr>
-            <a:spLocks xmlns:a="http://schemas.openxmlformats.org/drawingml/2006/main" noGrp="1"/>
-          </p:cNvSpPr>
-          <p:nvPr/>
-        </p:nvSpPr>
-        <p:spPr>
-          <a:xfrm xmlns:a="http://schemas.openxmlformats.org/drawingml/2006/main">
-            <a:off x="7448550" y="4286250"/>
-            <a:ext cx="1924050" cy="419100"/>
-          </a:xfrm>
-          <a:prstGeom xmlns:a="http://schemas.openxmlformats.org/drawingml/2006/main" prst="rect">
-            <a:avLst/>
-          </a:prstGeom>
-          <a:noFill xmlns:a="http://schemas.openxmlformats.org/drawingml/2006/main"/>
-          <a:ln xmlns:a="http://schemas.openxmlformats.org/drawingml/2006/main" w="0">
-            <a:noFill/>
-            <a:prstDash val="solid"/>
-          </a:ln>
-        </p:spPr>
-        <p:txBody>
-          <a:bodyPr xmlns:a="http://schemas.openxmlformats.org/drawingml/2006/main" wrap="square" lIns="0" tIns="0" rIns="0" bIns="0" anchor="ctr">
-            <a:normAutofit fontScale="100000"/>
+          <p:cNvPr id="19" name="">
+            <a:extLst xmlns:a="http://schemas.openxmlformats.org/drawingml/2006/main">
+              <a:ext uri="{FF2B5EF4-FFF2-40B4-BE49-F238E27FC236}">
+                <a16:creationId xmlns:a16="http://schemas.microsoft.com/office/drawing/2014/main" id="{9A2F20F1-CF35-4789-AC4A-62229AB1DDA9}"/>
+              </a:ext>
+            </a:extLst>
+          </p:cNvPr>
+          <p:cNvSpPr>
+            <a:spLocks xmlns:a="http://schemas.openxmlformats.org/drawingml/2006/main" noGrp="1"/>
+          </p:cNvSpPr>
+          <p:nvPr/>
+        </p:nvSpPr>
+        <p:spPr>
+          <a:xfrm xmlns:a="http://schemas.openxmlformats.org/drawingml/2006/main">
+            <a:off x="10020300" y="4305300"/>
+            <a:ext cx="1809750" cy="457200"/>
+          </a:xfrm>
+          <a:prstGeom xmlns:a="http://schemas.openxmlformats.org/drawingml/2006/main" prst="rect">
+            <a:avLst/>
+          </a:prstGeom>
+          <a:noFill xmlns:a="http://schemas.openxmlformats.org/drawingml/2006/main"/>
+          <a:ln xmlns:a="http://schemas.openxmlformats.org/drawingml/2006/main" w="0">
+            <a:noFill/>
+            <a:prstDash val="solid"/>
+          </a:ln>
+        </p:spPr>
+        <p:txBody>
+          <a:bodyPr xmlns:a="http://schemas.openxmlformats.org/drawingml/2006/main" wrap="square" lIns="0" tIns="0" rIns="0" bIns="0" anchor="ctr">
+            <a:noAutofit/>
+          </a:bodyPr>
+          <a:lstStyle xmlns:a="http://schemas.openxmlformats.org/drawingml/2006/main"/>
+          <a:p xmlns:a="http://schemas.openxmlformats.org/drawingml/2006/main">
+            <a:pPr algn="ctr">
+              <a:lnSpc>
+                <a:spcPct val="100000"/>
+              </a:lnSpc>
+              <a:buNone/>
+              <a:defRPr sz="1275" b="1">
+                <a:solidFill>
+                  <a:srgbClr val="FFFFFF"/>
+                </a:solidFill>
+                <a:latin typeface="Calibri"/>
+                <a:ea typeface="Calibri"/>
+                <a:cs typeface="Calibri"/>
+              </a:defRPr>
+            </a:pPr>
+            <a:r>
+              <a:rPr sz="1800" b="1">
+                <a:solidFill>
+                  <a:srgbClr val="FFFFFF"/>
+                </a:solidFill>
+                <a:latin typeface="Calibri"/>
+                <a:ea typeface="Calibri"/>
+                <a:cs typeface="Calibri"/>
+              </a:rPr>
+              <a:t>Price then FX</a:t>
+            </a:r>
+          </a:p>
+        </p:txBody>
+      </p:sp>
+      <p:sp>
+        <p:nvSpPr>
+          <p:cNvPr id="20" name="">
+            <a:extLst xmlns:a="http://schemas.openxmlformats.org/drawingml/2006/main">
+              <a:ext uri="{FF2B5EF4-FFF2-40B4-BE49-F238E27FC236}">
+                <a16:creationId xmlns:a16="http://schemas.microsoft.com/office/drawing/2014/main" id="{E58CD3E4-48E0-4421-8A8E-9A03948E1061}"/>
+              </a:ext>
+            </a:extLst>
+          </p:cNvPr>
+          <p:cNvSpPr>
+            <a:spLocks xmlns:a="http://schemas.openxmlformats.org/drawingml/2006/main" noGrp="1"/>
+          </p:cNvSpPr>
+          <p:nvPr/>
+        </p:nvSpPr>
+        <p:spPr>
+          <a:xfrm xmlns:a="http://schemas.openxmlformats.org/drawingml/2006/main">
+            <a:off x="12001500" y="4267200"/>
+            <a:ext cx="2190750" cy="361950"/>
+          </a:xfrm>
+          <a:prstGeom xmlns:a="http://schemas.openxmlformats.org/drawingml/2006/main" prst="rect">
+            <a:avLst/>
+          </a:prstGeom>
+          <a:noFill xmlns:a="http://schemas.openxmlformats.org/drawingml/2006/main"/>
+          <a:ln xmlns:a="http://schemas.openxmlformats.org/drawingml/2006/main" w="0">
+            <a:noFill/>
+            <a:prstDash val="solid"/>
+          </a:ln>
+        </p:spPr>
+        <p:txBody>
+          <a:bodyPr xmlns:a="http://schemas.openxmlformats.org/drawingml/2006/main" wrap="square" lIns="0" tIns="0" rIns="0" bIns="0" anchor="ctr">
+            <a:noAutofit/>
+          </a:bodyPr>
+          <a:lstStyle xmlns:a="http://schemas.openxmlformats.org/drawingml/2006/main"/>
+          <a:p xmlns:a="http://schemas.openxmlformats.org/drawingml/2006/main">
+            <a:pPr algn="r">
+              <a:lnSpc>
+                <a:spcPct val="100000"/>
+              </a:lnSpc>
+              <a:buNone/>
+              <a:defRPr sz="1350" b="1">
+                <a:solidFill>
+                  <a:srgbClr val="00A2EB"/>
+                </a:solidFill>
+                <a:latin typeface="Calibri"/>
+                <a:ea typeface="Calibri"/>
+                <a:cs typeface="Calibri"/>
+              </a:defRPr>
+            </a:pPr>
+            <a:r>
+              <a:rPr sz="1800" b="1">
+                <a:solidFill>
+                  <a:srgbClr val="00A2EB"/>
+                </a:solidFill>
+                <a:latin typeface="Calibri"/>
+                <a:ea typeface="Calibri"/>
+                <a:cs typeface="Calibri"/>
+              </a:rPr>
+              <a:t>MEDIUM COST</a:t>
+            </a:r>
+          </a:p>
+        </p:txBody>
+      </p:sp>
+      <p:sp>
+        <p:nvSpPr>
+          <p:cNvPr id="21" name="">
+            <a:extLst xmlns:a="http://schemas.openxmlformats.org/drawingml/2006/main">
+              <a:ext uri="{FF2B5EF4-FFF2-40B4-BE49-F238E27FC236}">
+                <a16:creationId xmlns:a16="http://schemas.microsoft.com/office/drawing/2014/main" id="{DA8DF2BD-542C-4821-AB60-F914C2D7D54D}"/>
+              </a:ext>
+            </a:extLst>
+          </p:cNvPr>
+          <p:cNvSpPr>
+            <a:spLocks xmlns:a="http://schemas.openxmlformats.org/drawingml/2006/main" noGrp="1"/>
+          </p:cNvSpPr>
+          <p:nvPr/>
+        </p:nvSpPr>
+        <p:spPr>
+          <a:xfrm xmlns:a="http://schemas.openxmlformats.org/drawingml/2006/main">
+            <a:off x="1028700" y="5734050"/>
+            <a:ext cx="2476500" cy="361950"/>
+          </a:xfrm>
+          <a:prstGeom xmlns:a="http://schemas.openxmlformats.org/drawingml/2006/main" prst="rect">
+            <a:avLst/>
+          </a:prstGeom>
+          <a:noFill xmlns:a="http://schemas.openxmlformats.org/drawingml/2006/main"/>
+          <a:ln xmlns:a="http://schemas.openxmlformats.org/drawingml/2006/main" w="0">
+            <a:noFill/>
+            <a:prstDash val="solid"/>
+          </a:ln>
+        </p:spPr>
+        <p:txBody>
+          <a:bodyPr xmlns:a="http://schemas.openxmlformats.org/drawingml/2006/main" wrap="square" lIns="0" tIns="0" rIns="0" bIns="0" anchor="ctr">
+            <a:noAutofit/>
           </a:bodyPr>
           <a:lstStyle xmlns:a="http://schemas.openxmlformats.org/drawingml/2006/main"/>
           <a:p xmlns:a="http://schemas.openxmlformats.org/drawingml/2006/main">
@@ -3409,55 +3311,55 @@
                 <a:spcPct val="100000"/>
               </a:lnSpc>
               <a:buNone/>
-              <a:defRPr sz="1425" b="0">
-                <a:solidFill>
-                  <a:srgbClr val="051C2A"/>
-                </a:solidFill>
-                <a:latin typeface="Calibri"/>
-                <a:ea typeface="Calibri"/>
-                <a:cs typeface="Calibri"/>
-              </a:defRPr>
-            </a:pPr>
-            <a:r>
-              <a:rPr sz="1425" b="0">
-                <a:solidFill>
-                  <a:srgbClr val="051C2A"/>
-                </a:solidFill>
-                <a:latin typeface="Calibri"/>
-                <a:ea typeface="Calibri"/>
-                <a:cs typeface="Calibri"/>
-              </a:rPr>
-              <a:t>02</a:t>
-            </a:r>
-          </a:p>
-        </p:txBody>
-      </p:sp>
-      <p:sp>
-        <p:nvSpPr>
-          <p:cNvPr id="24" name="">
-            <a:extLst xmlns:a="http://schemas.openxmlformats.org/drawingml/2006/main">
-              <a:ext uri="{FF2B5EF4-FFF2-40B4-BE49-F238E27FC236}">
-                <a16:creationId xmlns:a16="http://schemas.microsoft.com/office/drawing/2014/main" id="{78123193-7BA4-459F-B618-D3AB37E4EFEA}"/>
-              </a:ext>
-            </a:extLst>
-          </p:cNvPr>
-          <p:cNvSpPr>
-            <a:spLocks xmlns:a="http://schemas.openxmlformats.org/drawingml/2006/main" noGrp="1"/>
-          </p:cNvSpPr>
-          <p:nvPr/>
-        </p:nvSpPr>
-        <p:spPr>
-          <a:xfrm xmlns:a="http://schemas.openxmlformats.org/drawingml/2006/main">
-            <a:off x="9544050" y="4171950"/>
-            <a:ext cx="1962150" cy="666750"/>
+              <a:defRPr sz="1350" b="1">
+                <a:solidFill>
+                  <a:srgbClr val="2E8B57"/>
+                </a:solidFill>
+                <a:latin typeface="Calibri"/>
+                <a:ea typeface="Calibri"/>
+                <a:cs typeface="Calibri"/>
+              </a:defRPr>
+            </a:pPr>
+            <a:r>
+              <a:rPr sz="1800" b="1">
+                <a:solidFill>
+                  <a:srgbClr val="2E8B57"/>
+                </a:solidFill>
+                <a:latin typeface="Calibri"/>
+                <a:ea typeface="Calibri"/>
+                <a:cs typeface="Calibri"/>
+              </a:rPr>
+              <a:t>MULTI-AGENT</a:t>
+            </a:r>
+          </a:p>
+        </p:txBody>
+      </p:sp>
+      <p:sp>
+        <p:nvSpPr>
+          <p:cNvPr id="22" name="">
+            <a:extLst xmlns:a="http://schemas.openxmlformats.org/drawingml/2006/main">
+              <a:ext uri="{FF2B5EF4-FFF2-40B4-BE49-F238E27FC236}">
+                <a16:creationId xmlns:a16="http://schemas.microsoft.com/office/drawing/2014/main" id="{80D1C47B-0B67-4AFB-8BDC-2F9D29D00182}"/>
+              </a:ext>
+            </a:extLst>
+          </p:cNvPr>
+          <p:cNvSpPr>
+            <a:spLocks xmlns:a="http://schemas.openxmlformats.org/drawingml/2006/main" noGrp="1"/>
+          </p:cNvSpPr>
+          <p:nvPr/>
+        </p:nvSpPr>
+        <p:spPr>
+          <a:xfrm xmlns:a="http://schemas.openxmlformats.org/drawingml/2006/main">
+            <a:off x="3714750" y="5676900"/>
+            <a:ext cx="3314700" cy="647700"/>
           </a:xfrm>
           <a:prstGeom xmlns:a="http://schemas.openxmlformats.org/drawingml/2006/main" prst="roundRect">
             <a:avLst>
-              <a:gd name="adj" fmla="val 2857"/>
+              <a:gd name="adj" fmla="val 5882"/>
             </a:avLst>
           </a:prstGeom>
           <a:solidFill xmlns:a="http://schemas.openxmlformats.org/drawingml/2006/main">
-            <a:srgbClr val="F7FBF8"/>
+            <a:srgbClr val="1F40CB"/>
           </a:solidFill>
           <a:ln xmlns:a="http://schemas.openxmlformats.org/drawingml/2006/main" w="9525">
             <a:solidFill>
@@ -3469,92 +3371,92 @@
       </p:sp>
       <p:sp>
         <p:nvSpPr>
-          <p:cNvPr id="25" name="">
-            <a:extLst xmlns:a="http://schemas.openxmlformats.org/drawingml/2006/main">
-              <a:ext uri="{FF2B5EF4-FFF2-40B4-BE49-F238E27FC236}">
-                <a16:creationId xmlns:a16="http://schemas.microsoft.com/office/drawing/2014/main" id="{CAA33689-B136-4C82-B577-8954D2056B7F}"/>
-              </a:ext>
-            </a:extLst>
-          </p:cNvPr>
-          <p:cNvSpPr>
-            <a:spLocks xmlns:a="http://schemas.openxmlformats.org/drawingml/2006/main" noGrp="1"/>
-          </p:cNvSpPr>
-          <p:nvPr/>
-        </p:nvSpPr>
-        <p:spPr>
-          <a:xfrm xmlns:a="http://schemas.openxmlformats.org/drawingml/2006/main">
-            <a:off x="9658350" y="4286250"/>
-            <a:ext cx="1733550" cy="419100"/>
-          </a:xfrm>
-          <a:prstGeom xmlns:a="http://schemas.openxmlformats.org/drawingml/2006/main" prst="rect">
-            <a:avLst/>
-          </a:prstGeom>
-          <a:noFill xmlns:a="http://schemas.openxmlformats.org/drawingml/2006/main"/>
-          <a:ln xmlns:a="http://schemas.openxmlformats.org/drawingml/2006/main" w="0">
-            <a:noFill/>
-            <a:prstDash val="solid"/>
-          </a:ln>
-        </p:spPr>
-        <p:txBody>
-          <a:bodyPr xmlns:a="http://schemas.openxmlformats.org/drawingml/2006/main" wrap="square" lIns="0" tIns="0" rIns="0" bIns="0" anchor="ctr">
-            <a:normAutofit fontScale="100000"/>
-          </a:bodyPr>
-          <a:lstStyle xmlns:a="http://schemas.openxmlformats.org/drawingml/2006/main"/>
-          <a:p xmlns:a="http://schemas.openxmlformats.org/drawingml/2006/main">
-            <a:pPr algn="l">
-              <a:lnSpc>
-                <a:spcPct val="100000"/>
-              </a:lnSpc>
-              <a:buNone/>
-              <a:defRPr sz="1425" b="0">
-                <a:solidFill>
-                  <a:srgbClr val="051C2A"/>
-                </a:solidFill>
-                <a:latin typeface="Calibri"/>
-                <a:ea typeface="Calibri"/>
-                <a:cs typeface="Calibri"/>
-              </a:defRPr>
-            </a:pPr>
-            <a:r>
-              <a:rPr sz="1425" b="0">
-                <a:solidFill>
-                  <a:srgbClr val="051C2A"/>
-                </a:solidFill>
-                <a:latin typeface="Calibri"/>
-                <a:ea typeface="Calibri"/>
-                <a:cs typeface="Calibri"/>
-              </a:rPr>
-              <a:t>Multi-agent</a:t>
-            </a:r>
-          </a:p>
-        </p:txBody>
-      </p:sp>
-      <p:sp>
-        <p:nvSpPr>
-          <p:cNvPr id="26" name="">
-            <a:extLst xmlns:a="http://schemas.openxmlformats.org/drawingml/2006/main">
-              <a:ext uri="{FF2B5EF4-FFF2-40B4-BE49-F238E27FC236}">
-                <a16:creationId xmlns:a16="http://schemas.microsoft.com/office/drawing/2014/main" id="{BF49AE3A-93EC-4D6A-8CF3-2D01BDBDCB84}"/>
-              </a:ext>
-            </a:extLst>
-          </p:cNvPr>
-          <p:cNvSpPr>
-            <a:spLocks xmlns:a="http://schemas.openxmlformats.org/drawingml/2006/main" noGrp="1"/>
-          </p:cNvSpPr>
-          <p:nvPr/>
-        </p:nvSpPr>
-        <p:spPr>
-          <a:xfrm xmlns:a="http://schemas.openxmlformats.org/drawingml/2006/main">
-            <a:off x="11563350" y="4171950"/>
-            <a:ext cx="2571750" cy="666750"/>
+          <p:cNvPr id="23" name="">
+            <a:extLst xmlns:a="http://schemas.openxmlformats.org/drawingml/2006/main">
+              <a:ext uri="{FF2B5EF4-FFF2-40B4-BE49-F238E27FC236}">
+                <a16:creationId xmlns:a16="http://schemas.microsoft.com/office/drawing/2014/main" id="{0E2F7603-BBFF-4854-9F2D-F8FF1E3B19D5}"/>
+              </a:ext>
+            </a:extLst>
+          </p:cNvPr>
+          <p:cNvSpPr>
+            <a:spLocks xmlns:a="http://schemas.openxmlformats.org/drawingml/2006/main" noGrp="1"/>
+          </p:cNvSpPr>
+          <p:nvPr/>
+        </p:nvSpPr>
+        <p:spPr>
+          <a:xfrm xmlns:a="http://schemas.openxmlformats.org/drawingml/2006/main">
+            <a:off x="3810000" y="5772150"/>
+            <a:ext cx="3124200" cy="457200"/>
+          </a:xfrm>
+          <a:prstGeom xmlns:a="http://schemas.openxmlformats.org/drawingml/2006/main" prst="rect">
+            <a:avLst/>
+          </a:prstGeom>
+          <a:noFill xmlns:a="http://schemas.openxmlformats.org/drawingml/2006/main"/>
+          <a:ln xmlns:a="http://schemas.openxmlformats.org/drawingml/2006/main" w="0">
+            <a:noFill/>
+            <a:prstDash val="solid"/>
+          </a:ln>
+        </p:spPr>
+        <p:txBody>
+          <a:bodyPr xmlns:a="http://schemas.openxmlformats.org/drawingml/2006/main" wrap="square" lIns="0" tIns="0" rIns="0" bIns="0" anchor="ctr">
+            <a:noAutofit/>
+          </a:bodyPr>
+          <a:lstStyle xmlns:a="http://schemas.openxmlformats.org/drawingml/2006/main"/>
+          <a:p xmlns:a="http://schemas.openxmlformats.org/drawingml/2006/main">
+            <a:pPr algn="ctr">
+              <a:lnSpc>
+                <a:spcPct val="100000"/>
+              </a:lnSpc>
+              <a:buNone/>
+              <a:defRPr sz="1275" b="1">
+                <a:solidFill>
+                  <a:srgbClr val="FFFFFF"/>
+                </a:solidFill>
+                <a:latin typeface="Calibri"/>
+                <a:ea typeface="Calibri"/>
+                <a:cs typeface="Calibri"/>
+              </a:defRPr>
+            </a:pPr>
+            <a:r>
+              <a:rPr sz="1800" b="1">
+                <a:solidFill>
+                  <a:srgbClr val="FFFFFF"/>
+                </a:solidFill>
+                <a:latin typeface="Calibri"/>
+                <a:ea typeface="Calibri"/>
+                <a:cs typeface="Calibri"/>
+              </a:rPr>
+              <a:t>Several LLMs</a:t>
+            </a:r>
+          </a:p>
+        </p:txBody>
+      </p:sp>
+      <p:sp>
+        <p:nvSpPr>
+          <p:cNvPr id="24" name="">
+            <a:extLst xmlns:a="http://schemas.openxmlformats.org/drawingml/2006/main">
+              <a:ext uri="{FF2B5EF4-FFF2-40B4-BE49-F238E27FC236}">
+                <a16:creationId xmlns:a16="http://schemas.microsoft.com/office/drawing/2014/main" id="{518F6C86-F0E1-4812-B3DD-797EA0ED5A4E}"/>
+              </a:ext>
+            </a:extLst>
+          </p:cNvPr>
+          <p:cNvSpPr>
+            <a:spLocks xmlns:a="http://schemas.openxmlformats.org/drawingml/2006/main" noGrp="1"/>
+          </p:cNvSpPr>
+          <p:nvPr/>
+        </p:nvSpPr>
+        <p:spPr>
+          <a:xfrm xmlns:a="http://schemas.openxmlformats.org/drawingml/2006/main">
+            <a:off x="7086600" y="5676900"/>
+            <a:ext cx="4781550" cy="647700"/>
           </a:xfrm>
           <a:prstGeom xmlns:a="http://schemas.openxmlformats.org/drawingml/2006/main" prst="roundRect">
             <a:avLst>
-              <a:gd name="adj" fmla="val 2857"/>
+              <a:gd name="adj" fmla="val 5882"/>
             </a:avLst>
           </a:prstGeom>
           <a:solidFill xmlns:a="http://schemas.openxmlformats.org/drawingml/2006/main">
-            <a:srgbClr val="F7FBF8"/>
+            <a:srgbClr val="2E8B57"/>
           </a:solidFill>
           <a:ln xmlns:a="http://schemas.openxmlformats.org/drawingml/2006/main" w="9525">
             <a:solidFill>
@@ -3566,146 +3468,146 @@
       </p:sp>
       <p:sp>
         <p:nvSpPr>
+          <p:cNvPr id="25" name="">
+            <a:extLst xmlns:a="http://schemas.openxmlformats.org/drawingml/2006/main">
+              <a:ext uri="{FF2B5EF4-FFF2-40B4-BE49-F238E27FC236}">
+                <a16:creationId xmlns:a16="http://schemas.microsoft.com/office/drawing/2014/main" id="{B9A6A990-C3AB-4ED0-A029-B6138AA54242}"/>
+              </a:ext>
+            </a:extLst>
+          </p:cNvPr>
+          <p:cNvSpPr>
+            <a:spLocks xmlns:a="http://schemas.openxmlformats.org/drawingml/2006/main" noGrp="1"/>
+          </p:cNvSpPr>
+          <p:nvPr/>
+        </p:nvSpPr>
+        <p:spPr>
+          <a:xfrm xmlns:a="http://schemas.openxmlformats.org/drawingml/2006/main">
+            <a:off x="7181850" y="5772150"/>
+            <a:ext cx="4591050" cy="457200"/>
+          </a:xfrm>
+          <a:prstGeom xmlns:a="http://schemas.openxmlformats.org/drawingml/2006/main" prst="rect">
+            <a:avLst/>
+          </a:prstGeom>
+          <a:noFill xmlns:a="http://schemas.openxmlformats.org/drawingml/2006/main"/>
+          <a:ln xmlns:a="http://schemas.openxmlformats.org/drawingml/2006/main" w="0">
+            <a:noFill/>
+            <a:prstDash val="solid"/>
+          </a:ln>
+        </p:spPr>
+        <p:txBody>
+          <a:bodyPr xmlns:a="http://schemas.openxmlformats.org/drawingml/2006/main" wrap="square" lIns="0" tIns="0" rIns="0" bIns="0" anchor="ctr">
+            <a:noAutofit/>
+          </a:bodyPr>
+          <a:lstStyle xmlns:a="http://schemas.openxmlformats.org/drawingml/2006/main"/>
+          <a:p xmlns:a="http://schemas.openxmlformats.org/drawingml/2006/main">
+            <a:pPr algn="ctr">
+              <a:lnSpc>
+                <a:spcPct val="100000"/>
+              </a:lnSpc>
+              <a:buNone/>
+              <a:defRPr sz="1275" b="1">
+                <a:solidFill>
+                  <a:srgbClr val="FFFFFF"/>
+                </a:solidFill>
+                <a:latin typeface="Calibri"/>
+                <a:ea typeface="Calibri"/>
+                <a:cs typeface="Calibri"/>
+              </a:defRPr>
+            </a:pPr>
+            <a:r>
+              <a:rPr sz="1800" b="1">
+                <a:solidFill>
+                  <a:srgbClr val="FFFFFF"/>
+                </a:solidFill>
+                <a:latin typeface="Calibri"/>
+                <a:ea typeface="Calibri"/>
+                <a:cs typeface="Calibri"/>
+              </a:rPr>
+              <a:t>Researcher, analyst, writer</a:t>
+            </a:r>
+          </a:p>
+        </p:txBody>
+      </p:sp>
+      <p:sp>
+        <p:nvSpPr>
+          <p:cNvPr id="26" name="">
+            <a:extLst xmlns:a="http://schemas.openxmlformats.org/drawingml/2006/main">
+              <a:ext uri="{FF2B5EF4-FFF2-40B4-BE49-F238E27FC236}">
+                <a16:creationId xmlns:a16="http://schemas.microsoft.com/office/drawing/2014/main" id="{24845B58-81DD-48AA-9B5B-C9CA27F8A4A0}"/>
+              </a:ext>
+            </a:extLst>
+          </p:cNvPr>
+          <p:cNvSpPr>
+            <a:spLocks xmlns:a="http://schemas.openxmlformats.org/drawingml/2006/main" noGrp="1"/>
+          </p:cNvSpPr>
+          <p:nvPr/>
+        </p:nvSpPr>
+        <p:spPr>
+          <a:xfrm xmlns:a="http://schemas.openxmlformats.org/drawingml/2006/main">
+            <a:off x="12001500" y="5734050"/>
+            <a:ext cx="2190750" cy="361950"/>
+          </a:xfrm>
+          <a:prstGeom xmlns:a="http://schemas.openxmlformats.org/drawingml/2006/main" prst="rect">
+            <a:avLst/>
+          </a:prstGeom>
+          <a:noFill xmlns:a="http://schemas.openxmlformats.org/drawingml/2006/main"/>
+          <a:ln xmlns:a="http://schemas.openxmlformats.org/drawingml/2006/main" w="0">
+            <a:noFill/>
+            <a:prstDash val="solid"/>
+          </a:ln>
+        </p:spPr>
+        <p:txBody>
+          <a:bodyPr xmlns:a="http://schemas.openxmlformats.org/drawingml/2006/main" wrap="square" lIns="0" tIns="0" rIns="0" bIns="0" anchor="ctr">
+            <a:noAutofit/>
+          </a:bodyPr>
+          <a:lstStyle xmlns:a="http://schemas.openxmlformats.org/drawingml/2006/main"/>
+          <a:p xmlns:a="http://schemas.openxmlformats.org/drawingml/2006/main">
+            <a:pPr algn="r">
+              <a:lnSpc>
+                <a:spcPct val="100000"/>
+              </a:lnSpc>
+              <a:buNone/>
+              <a:defRPr sz="1350" b="1">
+                <a:solidFill>
+                  <a:srgbClr val="2E8B57"/>
+                </a:solidFill>
+                <a:latin typeface="Calibri"/>
+                <a:ea typeface="Calibri"/>
+                <a:cs typeface="Calibri"/>
+              </a:defRPr>
+            </a:pPr>
+            <a:r>
+              <a:rPr sz="1800" b="1">
+                <a:solidFill>
+                  <a:srgbClr val="2E8B57"/>
+                </a:solidFill>
+                <a:latin typeface="Calibri"/>
+                <a:ea typeface="Calibri"/>
+                <a:cs typeface="Calibri"/>
+              </a:rPr>
+              <a:t>HIGH COST</a:t>
+            </a:r>
+          </a:p>
+        </p:txBody>
+      </p:sp>
+      <p:sp>
+        <p:nvSpPr>
           <p:cNvPr id="27" name="">
             <a:extLst xmlns:a="http://schemas.openxmlformats.org/drawingml/2006/main">
               <a:ext uri="{FF2B5EF4-FFF2-40B4-BE49-F238E27FC236}">
-                <a16:creationId xmlns:a16="http://schemas.microsoft.com/office/drawing/2014/main" id="{6F772D1E-8248-480D-BA11-3458C9BA2755}"/>
-              </a:ext>
-            </a:extLst>
-          </p:cNvPr>
-          <p:cNvSpPr>
-            <a:spLocks xmlns:a="http://schemas.openxmlformats.org/drawingml/2006/main" noGrp="1"/>
-          </p:cNvSpPr>
-          <p:nvPr/>
-        </p:nvSpPr>
-        <p:spPr>
-          <a:xfrm xmlns:a="http://schemas.openxmlformats.org/drawingml/2006/main">
-            <a:off x="11677650" y="4286250"/>
-            <a:ext cx="2343150" cy="419100"/>
-          </a:xfrm>
-          <a:prstGeom xmlns:a="http://schemas.openxmlformats.org/drawingml/2006/main" prst="rect">
-            <a:avLst/>
-          </a:prstGeom>
-          <a:noFill xmlns:a="http://schemas.openxmlformats.org/drawingml/2006/main"/>
-          <a:ln xmlns:a="http://schemas.openxmlformats.org/drawingml/2006/main" w="0">
-            <a:noFill/>
-            <a:prstDash val="solid"/>
-          </a:ln>
-        </p:spPr>
-        <p:txBody>
-          <a:bodyPr xmlns:a="http://schemas.openxmlformats.org/drawingml/2006/main" wrap="square" lIns="0" tIns="0" rIns="0" bIns="0" anchor="ctr">
-            <a:normAutofit fontScale="100000"/>
-          </a:bodyPr>
-          <a:lstStyle xmlns:a="http://schemas.openxmlformats.org/drawingml/2006/main"/>
-          <a:p xmlns:a="http://schemas.openxmlformats.org/drawingml/2006/main">
-            <a:pPr algn="l">
-              <a:lnSpc>
-                <a:spcPct val="100000"/>
-              </a:lnSpc>
-              <a:buNone/>
-              <a:defRPr sz="1425" b="0">
-                <a:solidFill>
-                  <a:srgbClr val="051C2A"/>
-                </a:solidFill>
-                <a:latin typeface="Calibri"/>
-                <a:ea typeface="Calibri"/>
-                <a:cs typeface="Calibri"/>
-              </a:defRPr>
-            </a:pPr>
-            <a:r>
-              <a:rPr sz="1425" b="0">
-                <a:solidFill>
-                  <a:srgbClr val="051C2A"/>
-                </a:solidFill>
-                <a:latin typeface="Calibri"/>
-                <a:ea typeface="Calibri"/>
-                <a:cs typeface="Calibri"/>
-              </a:rPr>
-              <a:t>coordination + handoffs</a:t>
-            </a:r>
-          </a:p>
-        </p:txBody>
-      </p:sp>
-      <p:sp>
-        <p:nvSpPr>
-          <p:cNvPr id="28" name="">
-            <a:extLst xmlns:a="http://schemas.openxmlformats.org/drawingml/2006/main">
-              <a:ext uri="{FF2B5EF4-FFF2-40B4-BE49-F238E27FC236}">
-                <a16:creationId xmlns:a16="http://schemas.microsoft.com/office/drawing/2014/main" id="{3EF86CEA-598B-4254-9CEF-1D77B357BD37}"/>
-              </a:ext>
-            </a:extLst>
-          </p:cNvPr>
-          <p:cNvSpPr>
-            <a:spLocks xmlns:a="http://schemas.openxmlformats.org/drawingml/2006/main" noGrp="1"/>
-          </p:cNvSpPr>
-          <p:nvPr/>
-        </p:nvSpPr>
-        <p:spPr>
-          <a:xfrm xmlns:a="http://schemas.openxmlformats.org/drawingml/2006/main">
-            <a:off x="7334250" y="5124450"/>
-            <a:ext cx="6800850" cy="400050"/>
-          </a:xfrm>
-          <a:prstGeom xmlns:a="http://schemas.openxmlformats.org/drawingml/2006/main" prst="rect">
-            <a:avLst/>
-          </a:prstGeom>
-          <a:noFill xmlns:a="http://schemas.openxmlformats.org/drawingml/2006/main"/>
-          <a:ln xmlns:a="http://schemas.openxmlformats.org/drawingml/2006/main" w="0">
-            <a:noFill/>
-            <a:prstDash val="solid"/>
-          </a:ln>
-        </p:spPr>
-        <p:txBody>
-          <a:bodyPr xmlns:a="http://schemas.openxmlformats.org/drawingml/2006/main" wrap="square" lIns="0" tIns="0" rIns="0" bIns="0" anchor="ctr">
-            <a:noAutofit/>
-          </a:bodyPr>
-          <a:lstStyle xmlns:a="http://schemas.openxmlformats.org/drawingml/2006/main"/>
-          <a:p xmlns:a="http://schemas.openxmlformats.org/drawingml/2006/main">
-            <a:pPr algn="ctr">
-              <a:lnSpc>
-                <a:spcPct val="100000"/>
-              </a:lnSpc>
-              <a:buNone/>
-              <a:defRPr sz="1575" b="1">
-                <a:solidFill>
-                  <a:srgbClr val="2E8B57"/>
-                </a:solidFill>
-                <a:latin typeface="Calibri"/>
-                <a:ea typeface="Calibri"/>
-                <a:cs typeface="Calibri"/>
-              </a:defRPr>
-            </a:pPr>
-            <a:r>
-              <a:rPr sz="1800" b="1">
-                <a:solidFill>
-                  <a:srgbClr val="2E8B57"/>
-                </a:solidFill>
-                <a:latin typeface="Calibri"/>
-                <a:ea typeface="Calibri"/>
-                <a:cs typeface="Calibri"/>
-              </a:rPr>
-              <a:t>Start left; move right only when an observation must change the next action.</a:t>
-            </a:r>
-          </a:p>
-        </p:txBody>
-      </p:sp>
-      <p:sp>
-        <p:nvSpPr>
-          <p:cNvPr id="29" name="">
-            <a:extLst xmlns:a="http://schemas.openxmlformats.org/drawingml/2006/main">
-              <a:ext uri="{FF2B5EF4-FFF2-40B4-BE49-F238E27FC236}">
-                <a16:creationId xmlns:a16="http://schemas.microsoft.com/office/drawing/2014/main" id="{B65E3BAB-E11C-4A7E-89F3-AB1868F4F013}"/>
-              </a:ext>
-            </a:extLst>
-          </p:cNvPr>
-          <p:cNvSpPr>
-            <a:spLocks xmlns:a="http://schemas.openxmlformats.org/drawingml/2006/main" noGrp="1"/>
-          </p:cNvSpPr>
-          <p:nvPr/>
-        </p:nvSpPr>
-        <p:spPr>
-          <a:xfrm xmlns:a="http://schemas.openxmlformats.org/drawingml/2006/main">
-            <a:off x="6953250" y="2362200"/>
-            <a:ext cx="28575" cy="3390900"/>
+                <a16:creationId xmlns:a16="http://schemas.microsoft.com/office/drawing/2014/main" id="{1F021015-2BDE-427C-B7E6-89D40DC755A5}"/>
+              </a:ext>
+            </a:extLst>
+          </p:cNvPr>
+          <p:cNvSpPr>
+            <a:spLocks xmlns:a="http://schemas.openxmlformats.org/drawingml/2006/main" noGrp="1"/>
+          </p:cNvSpPr>
+          <p:nvPr/>
+        </p:nvSpPr>
+        <p:spPr>
+          <a:xfrm xmlns:a="http://schemas.openxmlformats.org/drawingml/2006/main">
+            <a:off x="3714750" y="2819400"/>
+            <a:ext cx="28575" cy="3486150"/>
           </a:xfrm>
           <a:prstGeom xmlns:a="http://schemas.openxmlformats.org/drawingml/2006/main" prst="rect">
             <a:avLst/>
@@ -3723,568 +3625,107 @@
       </p:sp>
       <p:sp>
         <p:nvSpPr>
+          <p:cNvPr id="28" name="">
+            <a:extLst xmlns:a="http://schemas.openxmlformats.org/drawingml/2006/main">
+              <a:ext uri="{FF2B5EF4-FFF2-40B4-BE49-F238E27FC236}">
+                <a16:creationId xmlns:a16="http://schemas.microsoft.com/office/drawing/2014/main" id="{B71760BB-B653-4A2F-A39B-D370FC39BF0D}"/>
+              </a:ext>
+            </a:extLst>
+          </p:cNvPr>
+          <p:cNvSpPr>
+            <a:spLocks xmlns:a="http://schemas.openxmlformats.org/drawingml/2006/main" noGrp="1"/>
+          </p:cNvSpPr>
+          <p:nvPr/>
+        </p:nvSpPr>
+        <p:spPr>
+          <a:xfrm xmlns:a="http://schemas.openxmlformats.org/drawingml/2006/main">
+            <a:off x="1028700" y="6838950"/>
+            <a:ext cx="13163550" cy="609600"/>
+          </a:xfrm>
+          <a:prstGeom xmlns:a="http://schemas.openxmlformats.org/drawingml/2006/main" prst="roundRect">
+            <a:avLst>
+              <a:gd name="adj" fmla="val 12500"/>
+            </a:avLst>
+          </a:prstGeom>
+          <a:solidFill xmlns:a="http://schemas.openxmlformats.org/drawingml/2006/main">
+            <a:srgbClr val="FFF1E5"/>
+          </a:solidFill>
+          <a:ln xmlns:a="http://schemas.openxmlformats.org/drawingml/2006/main" w="9525">
+            <a:solidFill>
+              <a:srgbClr val="F07D00"/>
+            </a:solidFill>
+            <a:prstDash val="solid"/>
+          </a:ln>
+        </p:spPr>
+      </p:sp>
+      <p:sp>
+        <p:nvSpPr>
+          <p:cNvPr id="29" name="">
+            <a:extLst xmlns:a="http://schemas.openxmlformats.org/drawingml/2006/main">
+              <a:ext uri="{FF2B5EF4-FFF2-40B4-BE49-F238E27FC236}">
+                <a16:creationId xmlns:a16="http://schemas.microsoft.com/office/drawing/2014/main" id="{0FA73608-CD25-41CB-8836-D0C27AC581FD}"/>
+              </a:ext>
+            </a:extLst>
+          </p:cNvPr>
+          <p:cNvSpPr>
+            <a:spLocks xmlns:a="http://schemas.openxmlformats.org/drawingml/2006/main" noGrp="1"/>
+          </p:cNvSpPr>
+          <p:nvPr/>
+        </p:nvSpPr>
+        <p:spPr>
+          <a:xfrm xmlns:a="http://schemas.openxmlformats.org/drawingml/2006/main">
+            <a:off x="1371600" y="6934200"/>
+            <a:ext cx="12477750" cy="400050"/>
+          </a:xfrm>
+          <a:prstGeom xmlns:a="http://schemas.openxmlformats.org/drawingml/2006/main" prst="rect">
+            <a:avLst/>
+          </a:prstGeom>
+          <a:noFill xmlns:a="http://schemas.openxmlformats.org/drawingml/2006/main"/>
+          <a:ln xmlns:a="http://schemas.openxmlformats.org/drawingml/2006/main" w="0">
+            <a:noFill/>
+            <a:prstDash val="solid"/>
+          </a:ln>
+        </p:spPr>
+        <p:txBody>
+          <a:bodyPr xmlns:a="http://schemas.openxmlformats.org/drawingml/2006/main" wrap="square" lIns="0" tIns="0" rIns="0" bIns="0" anchor="ctr">
+            <a:normAutofit fontScale="100000"/>
+          </a:bodyPr>
+          <a:lstStyle xmlns:a="http://schemas.openxmlformats.org/drawingml/2006/main"/>
+          <a:p xmlns:a="http://schemas.openxmlformats.org/drawingml/2006/main">
+            <a:pPr algn="ctr">
+              <a:lnSpc>
+                <a:spcPct val="100000"/>
+              </a:lnSpc>
+              <a:buNone/>
+              <a:defRPr sz="1950" b="1">
+                <a:solidFill>
+                  <a:srgbClr val="051C2A"/>
+                </a:solidFill>
+                <a:latin typeface="Calibri"/>
+                <a:ea typeface="Calibri"/>
+                <a:cs typeface="Calibri"/>
+              </a:defRPr>
+            </a:pPr>
+            <a:r>
+              <a:rPr sz="1950" b="1">
+                <a:solidFill>
+                  <a:srgbClr val="051C2A"/>
+                </a:solidFill>
+                <a:latin typeface="Calibri"/>
+                <a:ea typeface="Calibri"/>
+                <a:cs typeface="Calibri"/>
+              </a:rPr>
+              <a:t>Start with a workflow. Add an agent only when the next step is not known yet.</a:t>
+            </a:r>
+          </a:p>
+        </p:txBody>
+      </p:sp>
+      <p:sp>
+        <p:nvSpPr>
           <p:cNvPr id="30" name="">
             <a:extLst xmlns:a="http://schemas.openxmlformats.org/drawingml/2006/main">
               <a:ext uri="{FF2B5EF4-FFF2-40B4-BE49-F238E27FC236}">
-                <a16:creationId xmlns:a16="http://schemas.microsoft.com/office/drawing/2014/main" id="{71233CBA-8C3B-4B18-A5D5-D4F7061FDCF8}"/>
-              </a:ext>
-            </a:extLst>
-          </p:cNvPr>
-          <p:cNvSpPr>
-            <a:spLocks xmlns:a="http://schemas.openxmlformats.org/drawingml/2006/main" noGrp="1"/>
-          </p:cNvSpPr>
-          <p:nvPr/>
-        </p:nvSpPr>
-        <p:spPr>
-          <a:xfrm xmlns:a="http://schemas.openxmlformats.org/drawingml/2006/main">
-            <a:off x="1028700" y="6153150"/>
-            <a:ext cx="4286250" cy="285750"/>
-          </a:xfrm>
-          <a:prstGeom xmlns:a="http://schemas.openxmlformats.org/drawingml/2006/main" prst="rect">
-            <a:avLst/>
-          </a:prstGeom>
-          <a:noFill xmlns:a="http://schemas.openxmlformats.org/drawingml/2006/main"/>
-          <a:ln xmlns:a="http://schemas.openxmlformats.org/drawingml/2006/main" w="0">
-            <a:noFill/>
-            <a:prstDash val="solid"/>
-          </a:ln>
-        </p:spPr>
-        <p:txBody>
-          <a:bodyPr xmlns:a="http://schemas.openxmlformats.org/drawingml/2006/main" wrap="square" lIns="0" tIns="0" rIns="0" bIns="0" anchor="ctr">
-            <a:noAutofit/>
-          </a:bodyPr>
-          <a:lstStyle xmlns:a="http://schemas.openxmlformats.org/drawingml/2006/main"/>
-          <a:p xmlns:a="http://schemas.openxmlformats.org/drawingml/2006/main">
-            <a:pPr algn="l">
-              <a:lnSpc>
-                <a:spcPct val="100000"/>
-              </a:lnSpc>
-              <a:buNone/>
-              <a:defRPr sz="1275" b="1">
-                <a:solidFill>
-                  <a:srgbClr val="1F40CB"/>
-                </a:solidFill>
-                <a:latin typeface="Calibri"/>
-                <a:ea typeface="Calibri"/>
-                <a:cs typeface="Calibri"/>
-              </a:defRPr>
-            </a:pPr>
-            <a:r>
-              <a:rPr sz="1800" b="1">
-                <a:solidFill>
-                  <a:srgbClr val="1F40CB"/>
-                </a:solidFill>
-                <a:latin typeface="Calibri"/>
-                <a:ea typeface="Calibri"/>
-                <a:cs typeface="Calibri"/>
-              </a:rPr>
-              <a:t>AUTONOMY ADDS COST</a:t>
-            </a:r>
-          </a:p>
-        </p:txBody>
-      </p:sp>
-      <p:sp>
-        <p:nvSpPr>
-          <p:cNvPr id="31" name="">
-            <a:extLst xmlns:a="http://schemas.openxmlformats.org/drawingml/2006/main">
-              <a:ext uri="{FF2B5EF4-FFF2-40B4-BE49-F238E27FC236}">
-                <a16:creationId xmlns:a16="http://schemas.microsoft.com/office/drawing/2014/main" id="{5DEA1FB2-5ABC-4E19-B39E-FBEB026EF177}"/>
-              </a:ext>
-            </a:extLst>
-          </p:cNvPr>
-          <p:cNvSpPr>
-            <a:spLocks xmlns:a="http://schemas.openxmlformats.org/drawingml/2006/main" noGrp="1"/>
-          </p:cNvSpPr>
-          <p:nvPr/>
-        </p:nvSpPr>
-        <p:spPr>
-          <a:xfrm xmlns:a="http://schemas.openxmlformats.org/drawingml/2006/main">
-            <a:off x="1028700" y="6534150"/>
-            <a:ext cx="2667000" cy="285750"/>
-          </a:xfrm>
-          <a:prstGeom xmlns:a="http://schemas.openxmlformats.org/drawingml/2006/main" prst="rect">
-            <a:avLst/>
-          </a:prstGeom>
-          <a:noFill xmlns:a="http://schemas.openxmlformats.org/drawingml/2006/main"/>
-          <a:ln xmlns:a="http://schemas.openxmlformats.org/drawingml/2006/main" w="0">
-            <a:noFill/>
-            <a:prstDash val="solid"/>
-          </a:ln>
-        </p:spPr>
-        <p:txBody>
-          <a:bodyPr xmlns:a="http://schemas.openxmlformats.org/drawingml/2006/main" wrap="square" lIns="0" tIns="0" rIns="0" bIns="0" anchor="ctr">
-            <a:noAutofit/>
-          </a:bodyPr>
-          <a:lstStyle xmlns:a="http://schemas.openxmlformats.org/drawingml/2006/main"/>
-          <a:p xmlns:a="http://schemas.openxmlformats.org/drawingml/2006/main">
-            <a:pPr algn="l">
-              <a:lnSpc>
-                <a:spcPct val="100000"/>
-              </a:lnSpc>
-              <a:buNone/>
-              <a:defRPr sz="1275" b="0">
-                <a:solidFill>
-                  <a:srgbClr val="64748B"/>
-                </a:solidFill>
-                <a:latin typeface="Calibri"/>
-                <a:ea typeface="Calibri"/>
-                <a:cs typeface="Calibri"/>
-              </a:defRPr>
-            </a:pPr>
-            <a:r>
-              <a:rPr sz="1800" b="0">
-                <a:solidFill>
-                  <a:srgbClr val="64748B"/>
-                </a:solidFill>
-                <a:latin typeface="Calibri"/>
-                <a:ea typeface="Calibri"/>
-                <a:cs typeface="Calibri"/>
-              </a:rPr>
-              <a:t>Choice</a:t>
-            </a:r>
-          </a:p>
-        </p:txBody>
-      </p:sp>
-      <p:sp>
-        <p:nvSpPr>
-          <p:cNvPr id="32" name="">
-            <a:extLst xmlns:a="http://schemas.openxmlformats.org/drawingml/2006/main">
-              <a:ext uri="{FF2B5EF4-FFF2-40B4-BE49-F238E27FC236}">
-                <a16:creationId xmlns:a16="http://schemas.microsoft.com/office/drawing/2014/main" id="{79EE73CC-AED7-4593-A08D-4913CB1DF80E}"/>
-              </a:ext>
-            </a:extLst>
-          </p:cNvPr>
-          <p:cNvSpPr>
-            <a:spLocks xmlns:a="http://schemas.openxmlformats.org/drawingml/2006/main" noGrp="1"/>
-          </p:cNvSpPr>
-          <p:nvPr/>
-        </p:nvSpPr>
-        <p:spPr>
-          <a:xfrm xmlns:a="http://schemas.openxmlformats.org/drawingml/2006/main">
-            <a:off x="1028700" y="6858000"/>
-            <a:ext cx="2667000" cy="457200"/>
-          </a:xfrm>
-          <a:prstGeom xmlns:a="http://schemas.openxmlformats.org/drawingml/2006/main" prst="rect">
-            <a:avLst/>
-          </a:prstGeom>
-          <a:noFill xmlns:a="http://schemas.openxmlformats.org/drawingml/2006/main"/>
-          <a:ln xmlns:a="http://schemas.openxmlformats.org/drawingml/2006/main" w="0">
-            <a:noFill/>
-            <a:prstDash val="solid"/>
-          </a:ln>
-        </p:spPr>
-        <p:txBody>
-          <a:bodyPr xmlns:a="http://schemas.openxmlformats.org/drawingml/2006/main" wrap="square" lIns="0" tIns="0" rIns="0" bIns="0" anchor="ctr">
-            <a:normAutofit fontScale="90022"/>
-          </a:bodyPr>
-          <a:lstStyle xmlns:a="http://schemas.openxmlformats.org/drawingml/2006/main"/>
-          <a:p xmlns:a="http://schemas.openxmlformats.org/drawingml/2006/main">
-            <a:pPr algn="l">
-              <a:lnSpc>
-                <a:spcPct val="100000"/>
-              </a:lnSpc>
-              <a:buNone/>
-              <a:defRPr sz="2550" b="1">
-                <a:solidFill>
-                  <a:srgbClr val="F07D00"/>
-                </a:solidFill>
-                <a:latin typeface="Calibri"/>
-                <a:ea typeface="Calibri"/>
-                <a:cs typeface="Calibri"/>
-              </a:defRPr>
-            </a:pPr>
-            <a:r>
-              <a:rPr sz="2550" b="1">
-                <a:solidFill>
-                  <a:srgbClr val="F07D00"/>
-                </a:solidFill>
-                <a:latin typeface="Calibri"/>
-                <a:ea typeface="Calibri"/>
-                <a:cs typeface="Calibri"/>
-              </a:rPr>
-              <a:t>function · workflow</a:t>
-            </a:r>
-          </a:p>
-        </p:txBody>
-      </p:sp>
-      <p:sp>
-        <p:nvSpPr>
-          <p:cNvPr id="33" name="">
-            <a:extLst xmlns:a="http://schemas.openxmlformats.org/drawingml/2006/main">
-              <a:ext uri="{FF2B5EF4-FFF2-40B4-BE49-F238E27FC236}">
-                <a16:creationId xmlns:a16="http://schemas.microsoft.com/office/drawing/2014/main" id="{043BC68A-D5B2-4F89-AC7A-F4A6B12238B6}"/>
-              </a:ext>
-            </a:extLst>
-          </p:cNvPr>
-          <p:cNvSpPr>
-            <a:spLocks xmlns:a="http://schemas.openxmlformats.org/drawingml/2006/main" noGrp="1"/>
-          </p:cNvSpPr>
-          <p:nvPr/>
-        </p:nvSpPr>
-        <p:spPr>
-          <a:xfrm xmlns:a="http://schemas.openxmlformats.org/drawingml/2006/main">
-            <a:off x="4343400" y="6534150"/>
-            <a:ext cx="2667000" cy="285750"/>
-          </a:xfrm>
-          <a:prstGeom xmlns:a="http://schemas.openxmlformats.org/drawingml/2006/main" prst="rect">
-            <a:avLst/>
-          </a:prstGeom>
-          <a:noFill xmlns:a="http://schemas.openxmlformats.org/drawingml/2006/main"/>
-          <a:ln xmlns:a="http://schemas.openxmlformats.org/drawingml/2006/main" w="0">
-            <a:noFill/>
-            <a:prstDash val="solid"/>
-          </a:ln>
-        </p:spPr>
-        <p:txBody>
-          <a:bodyPr xmlns:a="http://schemas.openxmlformats.org/drawingml/2006/main" wrap="square" lIns="0" tIns="0" rIns="0" bIns="0" anchor="ctr">
-            <a:noAutofit/>
-          </a:bodyPr>
-          <a:lstStyle xmlns:a="http://schemas.openxmlformats.org/drawingml/2006/main"/>
-          <a:p xmlns:a="http://schemas.openxmlformats.org/drawingml/2006/main">
-            <a:pPr algn="l">
-              <a:lnSpc>
-                <a:spcPct val="100000"/>
-              </a:lnSpc>
-              <a:buNone/>
-              <a:defRPr sz="1275" b="0">
-                <a:solidFill>
-                  <a:srgbClr val="64748B"/>
-                </a:solidFill>
-                <a:latin typeface="Calibri"/>
-                <a:ea typeface="Calibri"/>
-                <a:cs typeface="Calibri"/>
-              </a:defRPr>
-            </a:pPr>
-            <a:r>
-              <a:rPr sz="1800" b="0">
-                <a:solidFill>
-                  <a:srgbClr val="64748B"/>
-                </a:solidFill>
-                <a:latin typeface="Calibri"/>
-                <a:ea typeface="Calibri"/>
-                <a:cs typeface="Calibri"/>
-              </a:rPr>
-              <a:t>Next step</a:t>
-            </a:r>
-          </a:p>
-        </p:txBody>
-      </p:sp>
-      <p:sp>
-        <p:nvSpPr>
-          <p:cNvPr id="34" name="">
-            <a:extLst xmlns:a="http://schemas.openxmlformats.org/drawingml/2006/main">
-              <a:ext uri="{FF2B5EF4-FFF2-40B4-BE49-F238E27FC236}">
-                <a16:creationId xmlns:a16="http://schemas.microsoft.com/office/drawing/2014/main" id="{CD38EEE4-AA29-40C4-BA3C-01E40A9D56EB}"/>
-              </a:ext>
-            </a:extLst>
-          </p:cNvPr>
-          <p:cNvSpPr>
-            <a:spLocks xmlns:a="http://schemas.openxmlformats.org/drawingml/2006/main" noGrp="1"/>
-          </p:cNvSpPr>
-          <p:nvPr/>
-        </p:nvSpPr>
-        <p:spPr>
-          <a:xfrm xmlns:a="http://schemas.openxmlformats.org/drawingml/2006/main">
-            <a:off x="4343400" y="6858000"/>
-            <a:ext cx="2667000" cy="457200"/>
-          </a:xfrm>
-          <a:prstGeom xmlns:a="http://schemas.openxmlformats.org/drawingml/2006/main" prst="rect">
-            <a:avLst/>
-          </a:prstGeom>
-          <a:noFill xmlns:a="http://schemas.openxmlformats.org/drawingml/2006/main"/>
-          <a:ln xmlns:a="http://schemas.openxmlformats.org/drawingml/2006/main" w="0">
-            <a:noFill/>
-            <a:prstDash val="solid"/>
-          </a:ln>
-        </p:spPr>
-        <p:txBody>
-          <a:bodyPr xmlns:a="http://schemas.openxmlformats.org/drawingml/2006/main" wrap="square" lIns="0" tIns="0" rIns="0" bIns="0" anchor="ctr">
-            <a:normAutofit fontScale="100000"/>
-          </a:bodyPr>
-          <a:lstStyle xmlns:a="http://schemas.openxmlformats.org/drawingml/2006/main"/>
-          <a:p xmlns:a="http://schemas.openxmlformats.org/drawingml/2006/main">
-            <a:pPr algn="l">
-              <a:lnSpc>
-                <a:spcPct val="100000"/>
-              </a:lnSpc>
-              <a:buNone/>
-              <a:defRPr sz="2550" b="1">
-                <a:solidFill>
-                  <a:srgbClr val="2E8B57"/>
-                </a:solidFill>
-                <a:latin typeface="Calibri"/>
-                <a:ea typeface="Calibri"/>
-                <a:cs typeface="Calibri"/>
-              </a:defRPr>
-            </a:pPr>
-            <a:r>
-              <a:rPr sz="2550" b="1">
-                <a:solidFill>
-                  <a:srgbClr val="2E8B57"/>
-                </a:solidFill>
-                <a:latin typeface="Calibri"/>
-                <a:ea typeface="Calibri"/>
-                <a:cs typeface="Calibri"/>
-              </a:rPr>
-              <a:t>observed state</a:t>
-            </a:r>
-          </a:p>
-        </p:txBody>
-      </p:sp>
-      <p:sp>
-        <p:nvSpPr>
-          <p:cNvPr id="35" name="">
-            <a:extLst xmlns:a="http://schemas.openxmlformats.org/drawingml/2006/main">
-              <a:ext uri="{FF2B5EF4-FFF2-40B4-BE49-F238E27FC236}">
-                <a16:creationId xmlns:a16="http://schemas.microsoft.com/office/drawing/2014/main" id="{4B5D4A6D-C246-49F7-9388-C795B5E0FCC0}"/>
-              </a:ext>
-            </a:extLst>
-          </p:cNvPr>
-          <p:cNvSpPr>
-            <a:spLocks xmlns:a="http://schemas.openxmlformats.org/drawingml/2006/main" noGrp="1"/>
-          </p:cNvSpPr>
-          <p:nvPr/>
-        </p:nvSpPr>
-        <p:spPr>
-          <a:xfrm xmlns:a="http://schemas.openxmlformats.org/drawingml/2006/main">
-            <a:off x="7658100" y="6534150"/>
-            <a:ext cx="2667000" cy="285750"/>
-          </a:xfrm>
-          <a:prstGeom xmlns:a="http://schemas.openxmlformats.org/drawingml/2006/main" prst="rect">
-            <a:avLst/>
-          </a:prstGeom>
-          <a:noFill xmlns:a="http://schemas.openxmlformats.org/drawingml/2006/main"/>
-          <a:ln xmlns:a="http://schemas.openxmlformats.org/drawingml/2006/main" w="0">
-            <a:noFill/>
-            <a:prstDash val="solid"/>
-          </a:ln>
-        </p:spPr>
-        <p:txBody>
-          <a:bodyPr xmlns:a="http://schemas.openxmlformats.org/drawingml/2006/main" wrap="square" lIns="0" tIns="0" rIns="0" bIns="0" anchor="ctr">
-            <a:noAutofit/>
-          </a:bodyPr>
-          <a:lstStyle xmlns:a="http://schemas.openxmlformats.org/drawingml/2006/main"/>
-          <a:p xmlns:a="http://schemas.openxmlformats.org/drawingml/2006/main">
-            <a:pPr algn="l">
-              <a:lnSpc>
-                <a:spcPct val="100000"/>
-              </a:lnSpc>
-              <a:buNone/>
-              <a:defRPr sz="1275" b="0">
-                <a:solidFill>
-                  <a:srgbClr val="64748B"/>
-                </a:solidFill>
-                <a:latin typeface="Calibri"/>
-                <a:ea typeface="Calibri"/>
-                <a:cs typeface="Calibri"/>
-              </a:defRPr>
-            </a:pPr>
-            <a:r>
-              <a:rPr sz="1800" b="0">
-                <a:solidFill>
-                  <a:srgbClr val="64748B"/>
-                </a:solidFill>
-                <a:latin typeface="Calibri"/>
-                <a:ea typeface="Calibri"/>
-                <a:cs typeface="Calibri"/>
-              </a:rPr>
-              <a:t>Failure</a:t>
-            </a:r>
-          </a:p>
-        </p:txBody>
-      </p:sp>
-      <p:sp>
-        <p:nvSpPr>
-          <p:cNvPr id="36" name="">
-            <a:extLst xmlns:a="http://schemas.openxmlformats.org/drawingml/2006/main">
-              <a:ext uri="{FF2B5EF4-FFF2-40B4-BE49-F238E27FC236}">
-                <a16:creationId xmlns:a16="http://schemas.microsoft.com/office/drawing/2014/main" id="{02066664-5058-4CD5-A636-49C7B36A91B5}"/>
-              </a:ext>
-            </a:extLst>
-          </p:cNvPr>
-          <p:cNvSpPr>
-            <a:spLocks xmlns:a="http://schemas.openxmlformats.org/drawingml/2006/main" noGrp="1"/>
-          </p:cNvSpPr>
-          <p:nvPr/>
-        </p:nvSpPr>
-        <p:spPr>
-          <a:xfrm xmlns:a="http://schemas.openxmlformats.org/drawingml/2006/main">
-            <a:off x="7658100" y="6858000"/>
-            <a:ext cx="2667000" cy="457200"/>
-          </a:xfrm>
-          <a:prstGeom xmlns:a="http://schemas.openxmlformats.org/drawingml/2006/main" prst="rect">
-            <a:avLst/>
-          </a:prstGeom>
-          <a:noFill xmlns:a="http://schemas.openxmlformats.org/drawingml/2006/main"/>
-          <a:ln xmlns:a="http://schemas.openxmlformats.org/drawingml/2006/main" w="0">
-            <a:noFill/>
-            <a:prstDash val="solid"/>
-          </a:ln>
-        </p:spPr>
-        <p:txBody>
-          <a:bodyPr xmlns:a="http://schemas.openxmlformats.org/drawingml/2006/main" wrap="square" lIns="0" tIns="0" rIns="0" bIns="0" anchor="ctr">
-            <a:normAutofit fontScale="100000"/>
-          </a:bodyPr>
-          <a:lstStyle xmlns:a="http://schemas.openxmlformats.org/drawingml/2006/main"/>
-          <a:p xmlns:a="http://schemas.openxmlformats.org/drawingml/2006/main">
-            <a:pPr algn="l">
-              <a:lnSpc>
-                <a:spcPct val="100000"/>
-              </a:lnSpc>
-              <a:buNone/>
-              <a:defRPr sz="2550" b="1">
-                <a:solidFill>
-                  <a:srgbClr val="F07D00"/>
-                </a:solidFill>
-                <a:latin typeface="Calibri"/>
-                <a:ea typeface="Calibri"/>
-                <a:cs typeface="Calibri"/>
-              </a:defRPr>
-            </a:pPr>
-            <a:r>
-              <a:rPr sz="2550" b="1">
-                <a:solidFill>
-                  <a:srgbClr val="F07D00"/>
-                </a:solidFill>
-                <a:latin typeface="Calibri"/>
-                <a:ea typeface="Calibri"/>
-                <a:cs typeface="Calibri"/>
-              </a:rPr>
-              <a:t>more paths</a:t>
-            </a:r>
-          </a:p>
-        </p:txBody>
-      </p:sp>
-      <p:sp>
-        <p:nvSpPr>
-          <p:cNvPr id="37" name="">
-            <a:extLst xmlns:a="http://schemas.openxmlformats.org/drawingml/2006/main">
-              <a:ext uri="{FF2B5EF4-FFF2-40B4-BE49-F238E27FC236}">
-                <a16:creationId xmlns:a16="http://schemas.microsoft.com/office/drawing/2014/main" id="{D2483989-A3BC-4F4A-A656-ACD3BAC9F2F1}"/>
-              </a:ext>
-            </a:extLst>
-          </p:cNvPr>
-          <p:cNvSpPr>
-            <a:spLocks xmlns:a="http://schemas.openxmlformats.org/drawingml/2006/main" noGrp="1"/>
-          </p:cNvSpPr>
-          <p:nvPr/>
-        </p:nvSpPr>
-        <p:spPr>
-          <a:xfrm xmlns:a="http://schemas.openxmlformats.org/drawingml/2006/main">
-            <a:off x="10972800" y="6534150"/>
-            <a:ext cx="2667000" cy="285750"/>
-          </a:xfrm>
-          <a:prstGeom xmlns:a="http://schemas.openxmlformats.org/drawingml/2006/main" prst="rect">
-            <a:avLst/>
-          </a:prstGeom>
-          <a:noFill xmlns:a="http://schemas.openxmlformats.org/drawingml/2006/main"/>
-          <a:ln xmlns:a="http://schemas.openxmlformats.org/drawingml/2006/main" w="0">
-            <a:noFill/>
-            <a:prstDash val="solid"/>
-          </a:ln>
-        </p:spPr>
-        <p:txBody>
-          <a:bodyPr xmlns:a="http://schemas.openxmlformats.org/drawingml/2006/main" wrap="square" lIns="0" tIns="0" rIns="0" bIns="0" anchor="ctr">
-            <a:noAutofit/>
-          </a:bodyPr>
-          <a:lstStyle xmlns:a="http://schemas.openxmlformats.org/drawingml/2006/main"/>
-          <a:p xmlns:a="http://schemas.openxmlformats.org/drawingml/2006/main">
-            <a:pPr algn="l">
-              <a:lnSpc>
-                <a:spcPct val="100000"/>
-              </a:lnSpc>
-              <a:buNone/>
-              <a:defRPr sz="1275" b="0">
-                <a:solidFill>
-                  <a:srgbClr val="64748B"/>
-                </a:solidFill>
-                <a:latin typeface="Calibri"/>
-                <a:ea typeface="Calibri"/>
-                <a:cs typeface="Calibri"/>
-              </a:defRPr>
-            </a:pPr>
-            <a:r>
-              <a:rPr sz="1800" b="0">
-                <a:solidFill>
-                  <a:srgbClr val="64748B"/>
-                </a:solidFill>
-                <a:latin typeface="Calibri"/>
-                <a:ea typeface="Calibri"/>
-                <a:cs typeface="Calibri"/>
-              </a:rPr>
-              <a:t>Control</a:t>
-            </a:r>
-          </a:p>
-        </p:txBody>
-      </p:sp>
-      <p:sp>
-        <p:nvSpPr>
-          <p:cNvPr id="38" name="">
-            <a:extLst xmlns:a="http://schemas.openxmlformats.org/drawingml/2006/main">
-              <a:ext uri="{FF2B5EF4-FFF2-40B4-BE49-F238E27FC236}">
-                <a16:creationId xmlns:a16="http://schemas.microsoft.com/office/drawing/2014/main" id="{75B3CFBA-FD87-4351-8C2A-CF0B6F60B63E}"/>
-              </a:ext>
-            </a:extLst>
-          </p:cNvPr>
-          <p:cNvSpPr>
-            <a:spLocks xmlns:a="http://schemas.openxmlformats.org/drawingml/2006/main" noGrp="1"/>
-          </p:cNvSpPr>
-          <p:nvPr/>
-        </p:nvSpPr>
-        <p:spPr>
-          <a:xfrm xmlns:a="http://schemas.openxmlformats.org/drawingml/2006/main">
-            <a:off x="10972800" y="6858000"/>
-            <a:ext cx="2667000" cy="457200"/>
-          </a:xfrm>
-          <a:prstGeom xmlns:a="http://schemas.openxmlformats.org/drawingml/2006/main" prst="rect">
-            <a:avLst/>
-          </a:prstGeom>
-          <a:noFill xmlns:a="http://schemas.openxmlformats.org/drawingml/2006/main"/>
-          <a:ln xmlns:a="http://schemas.openxmlformats.org/drawingml/2006/main" w="0">
-            <a:noFill/>
-            <a:prstDash val="solid"/>
-          </a:ln>
-        </p:spPr>
-        <p:txBody>
-          <a:bodyPr xmlns:a="http://schemas.openxmlformats.org/drawingml/2006/main" wrap="square" lIns="0" tIns="0" rIns="0" bIns="0" anchor="ctr">
-            <a:normAutofit fontScale="100000"/>
-          </a:bodyPr>
-          <a:lstStyle xmlns:a="http://schemas.openxmlformats.org/drawingml/2006/main"/>
-          <a:p xmlns:a="http://schemas.openxmlformats.org/drawingml/2006/main">
-            <a:pPr algn="l">
-              <a:lnSpc>
-                <a:spcPct val="100000"/>
-              </a:lnSpc>
-              <a:buNone/>
-              <a:defRPr sz="2550" b="1">
-                <a:solidFill>
-                  <a:srgbClr val="2E8B57"/>
-                </a:solidFill>
-                <a:latin typeface="Calibri"/>
-                <a:ea typeface="Calibri"/>
-                <a:cs typeface="Calibri"/>
-              </a:defRPr>
-            </a:pPr>
-            <a:r>
-              <a:rPr sz="2550" b="1">
-                <a:solidFill>
-                  <a:srgbClr val="2E8B57"/>
-                </a:solidFill>
-                <a:latin typeface="Calibri"/>
-                <a:ea typeface="Calibri"/>
-                <a:cs typeface="Calibri"/>
-              </a:rPr>
-              <a:t>budget · stop</a:t>
-            </a:r>
-          </a:p>
-        </p:txBody>
-      </p:sp>
-      <p:sp>
-        <p:nvSpPr>
-          <p:cNvPr id="39" name="">
-            <a:extLst xmlns:a="http://schemas.openxmlformats.org/drawingml/2006/main">
-              <a:ext uri="{FF2B5EF4-FFF2-40B4-BE49-F238E27FC236}">
-                <a16:creationId xmlns:a16="http://schemas.microsoft.com/office/drawing/2014/main" id="{4846780A-5D65-4410-9457-661BBB6C3E5A}"/>
+                <a16:creationId xmlns:a16="http://schemas.microsoft.com/office/drawing/2014/main" id="{63E0B34D-9DCB-48D8-8070-C30B3364EBBD}"/>
               </a:ext>
             </a:extLst>
           </p:cNvPr>
@@ -4314,10 +3755,10 @@
       </p:sp>
       <p:sp>
         <p:nvSpPr>
-          <p:cNvPr id="40" name="">
-            <a:extLst xmlns:a="http://schemas.openxmlformats.org/drawingml/2006/main">
-              <a:ext uri="{FF2B5EF4-FFF2-40B4-BE49-F238E27FC236}">
-                <a16:creationId xmlns:a16="http://schemas.microsoft.com/office/drawing/2014/main" id="{0C69519E-645C-4800-9FE8-656AB5D56416}"/>
+          <p:cNvPr id="31" name="">
+            <a:extLst xmlns:a="http://schemas.openxmlformats.org/drawingml/2006/main">
+              <a:ext uri="{FF2B5EF4-FFF2-40B4-BE49-F238E27FC236}">
+                <a16:creationId xmlns:a16="http://schemas.microsoft.com/office/drawing/2014/main" id="{3EFB9970-6C67-40D6-AFF0-F0FE598EF906}"/>
               </a:ext>
             </a:extLst>
           </p:cNvPr>
@@ -4347,10 +3788,10 @@
       </p:sp>
       <p:sp>
         <p:nvSpPr>
-          <p:cNvPr id="41" name="">
-            <a:extLst xmlns:a="http://schemas.openxmlformats.org/drawingml/2006/main">
-              <a:ext uri="{FF2B5EF4-FFF2-40B4-BE49-F238E27FC236}">
-                <a16:creationId xmlns:a16="http://schemas.microsoft.com/office/drawing/2014/main" id="{17032C2C-E113-4AB5-9CC6-D6B41AEDB1C4}"/>
+          <p:cNvPr id="32" name="">
+            <a:extLst xmlns:a="http://schemas.openxmlformats.org/drawingml/2006/main">
+              <a:ext uri="{FF2B5EF4-FFF2-40B4-BE49-F238E27FC236}">
+                <a16:creationId xmlns:a16="http://schemas.microsoft.com/office/drawing/2014/main" id="{3503E1FB-8ACB-4423-AB2C-92A3E103D53A}"/>
               </a:ext>
             </a:extLst>
           </p:cNvPr>
@@ -4409,10 +3850,10 @@
       </p:sp>
       <p:sp>
         <p:nvSpPr>
-          <p:cNvPr id="42" name="">
-            <a:extLst xmlns:a="http://schemas.openxmlformats.org/drawingml/2006/main">
-              <a:ext uri="{FF2B5EF4-FFF2-40B4-BE49-F238E27FC236}">
-                <a16:creationId xmlns:a16="http://schemas.microsoft.com/office/drawing/2014/main" id="{23DD0EC2-8E86-44C8-B8C1-3DB1E93C5D33}"/>
+          <p:cNvPr id="33" name="">
+            <a:extLst xmlns:a="http://schemas.openxmlformats.org/drawingml/2006/main">
+              <a:ext uri="{FF2B5EF4-FFF2-40B4-BE49-F238E27FC236}">
+                <a16:creationId xmlns:a16="http://schemas.microsoft.com/office/drawing/2014/main" id="{C07028D7-2EEC-4312-806B-59F42D9F1CA8}"/>
               </a:ext>
             </a:extLst>
           </p:cNvPr>
@@ -4464,17 +3905,17 @@
                 <a:ea typeface="Calibri"/>
                 <a:cs typeface="Calibri"/>
               </a:rPr>
-              <a:t>AUTONOMY</a:t>
-            </a:r>
-          </a:p>
-        </p:txBody>
-      </p:sp>
-      <p:sp>
-        <p:nvSpPr>
-          <p:cNvPr id="43" name="">
-            <a:extLst xmlns:a="http://schemas.openxmlformats.org/drawingml/2006/main">
-              <a:ext uri="{FF2B5EF4-FFF2-40B4-BE49-F238E27FC236}">
-                <a16:creationId xmlns:a16="http://schemas.microsoft.com/office/drawing/2014/main" id="{A107089F-BB21-465D-B53D-42746B7A7540}"/>
+              <a:t>COMPARE</a:t>
+            </a:r>
+          </a:p>
+        </p:txBody>
+      </p:sp>
+      <p:sp>
+        <p:nvSpPr>
+          <p:cNvPr id="34" name="">
+            <a:extLst xmlns:a="http://schemas.openxmlformats.org/drawingml/2006/main">
+              <a:ext uri="{FF2B5EF4-FFF2-40B4-BE49-F238E27FC236}">
+                <a16:creationId xmlns:a16="http://schemas.microsoft.com/office/drawing/2014/main" id="{5334563E-9E00-41F4-886E-137032B6DD06}"/>
               </a:ext>
             </a:extLst>
           </p:cNvPr>
@@ -4534,7 +3975,7 @@
     </p:spTree>
     <p:extLst>
       <p:ext uri="{BB962C8B-B14F-4D97-AF65-F5344CB8AC3E}">
-        <p14:creationId xmlns:p14="http://schemas.microsoft.com/office/powerpoint/2010/main" val="349444305"/>
+        <p14:creationId xmlns:p14="http://schemas.microsoft.com/office/powerpoint/2010/main" val="926141459"/>
       </p:ext>
     </p:extLst>
   </p:cSld>
@@ -4562,10 +4003,10 @@
       </p:grpSpPr>
       <p:sp>
         <p:nvSpPr>
-          <p:cNvPr id="44" name="">
-            <a:extLst xmlns:a="http://schemas.openxmlformats.org/drawingml/2006/main">
-              <a:ext uri="{FF2B5EF4-FFF2-40B4-BE49-F238E27FC236}">
-                <a16:creationId xmlns:a16="http://schemas.microsoft.com/office/drawing/2014/main" id="{7F521A64-93BB-447D-87E9-41FC1E867CBC}"/>
+          <p:cNvPr id="35" name="">
+            <a:extLst xmlns:a="http://schemas.openxmlformats.org/drawingml/2006/main">
+              <a:ext uri="{FF2B5EF4-FFF2-40B4-BE49-F238E27FC236}">
+                <a16:creationId xmlns:a16="http://schemas.microsoft.com/office/drawing/2014/main" id="{45EAFBC5-0120-406B-9113-A189734D7D27}"/>
               </a:ext>
             </a:extLst>
           </p:cNvPr>
@@ -4617,7 +4058,7 @@
                 <a:ea typeface="Calibri"/>
                 <a:cs typeface="Calibri"/>
               </a:rPr>
-              <a:t>ARCHITECTURE DECISION</a:t>
+              <a:t>WORKFLOW OR AGENT?</a:t>
             </a:r>
           </a:p>
         </p:txBody>
@@ -4627,7 +4068,7 @@
           <p:cNvPr id="2" name="">
             <a:extLst xmlns:a="http://schemas.openxmlformats.org/drawingml/2006/main">
               <a:ext uri="{FF2B5EF4-FFF2-40B4-BE49-F238E27FC236}">
-                <a16:creationId xmlns:a16="http://schemas.microsoft.com/office/drawing/2014/main" id="{9C793F9E-8AD7-4755-853A-CFF63AEDB7A7}"/>
+                <a16:creationId xmlns:a16="http://schemas.microsoft.com/office/drawing/2014/main" id="{E788E1BA-062C-4D13-89C4-9762E55DD5F6}"/>
               </a:ext>
             </a:extLst>
           </p:cNvPr>
@@ -4679,99 +4120,925 @@
                 <a:ea typeface="Calibri"/>
                 <a:cs typeface="Calibri"/>
               </a:rPr>
-              <a:t>Dynamic dependencies—not task prestige—justify an agent</a:t>
-            </a:r>
-          </a:p>
-        </p:txBody>
-      </p:sp>
-      <p:sp>
-        <p:nvSpPr>
-          <p:cNvPr id="3" name="">
-            <a:extLst xmlns:a="http://schemas.openxmlformats.org/drawingml/2006/main">
-              <a:ext uri="{FF2B5EF4-FFF2-40B4-BE49-F238E27FC236}">
-                <a16:creationId xmlns:a16="http://schemas.microsoft.com/office/drawing/2014/main" id="{274302C1-E6C0-49C0-9FA8-BA7896D6FDBE}"/>
-              </a:ext>
-            </a:extLst>
-          </p:cNvPr>
-          <p:cNvSpPr>
-            <a:spLocks xmlns:a="http://schemas.openxmlformats.org/drawingml/2006/main" noGrp="1"/>
-          </p:cNvSpPr>
-          <p:nvPr/>
-        </p:nvSpPr>
-        <p:spPr>
-          <a:xfrm xmlns:a="http://schemas.openxmlformats.org/drawingml/2006/main">
-            <a:off x="1028700" y="2343150"/>
-            <a:ext cx="2667000" cy="285750"/>
-          </a:xfrm>
-          <a:prstGeom xmlns:a="http://schemas.openxmlformats.org/drawingml/2006/main" prst="rect">
-            <a:avLst/>
-          </a:prstGeom>
-          <a:noFill xmlns:a="http://schemas.openxmlformats.org/drawingml/2006/main"/>
-          <a:ln xmlns:a="http://schemas.openxmlformats.org/drawingml/2006/main" w="0">
-            <a:noFill/>
-            <a:prstDash val="solid"/>
-          </a:ln>
-        </p:spPr>
-        <p:txBody>
-          <a:bodyPr xmlns:a="http://schemas.openxmlformats.org/drawingml/2006/main" wrap="square" lIns="0" tIns="0" rIns="0" bIns="0" anchor="ctr">
-            <a:noAutofit/>
-          </a:bodyPr>
-          <a:lstStyle xmlns:a="http://schemas.openxmlformats.org/drawingml/2006/main"/>
-          <a:p xmlns:a="http://schemas.openxmlformats.org/drawingml/2006/main">
-            <a:pPr algn="l">
-              <a:lnSpc>
-                <a:spcPct val="100000"/>
-              </a:lnSpc>
-              <a:buNone/>
-              <a:defRPr sz="1350" b="1">
-                <a:solidFill>
-                  <a:srgbClr val="F07D00"/>
-                </a:solidFill>
-                <a:latin typeface="Calibri"/>
-                <a:ea typeface="Calibri"/>
-                <a:cs typeface="Calibri"/>
-              </a:defRPr>
-            </a:pPr>
-            <a:r>
-              <a:rPr sz="1800" b="1">
-                <a:solidFill>
-                  <a:srgbClr val="F07D00"/>
-                </a:solidFill>
-                <a:latin typeface="Calibri"/>
-                <a:ea typeface="Calibri"/>
-                <a:cs typeface="Calibri"/>
-              </a:rPr>
-              <a:t>WORKFLOW</a:t>
-            </a:r>
-          </a:p>
-        </p:txBody>
-      </p:sp>
-      <p:sp>
-        <p:nvSpPr>
-          <p:cNvPr id="4" name="fixed-one">
-            <a:extLst xmlns:a="http://schemas.openxmlformats.org/drawingml/2006/main">
-              <a:ext uri="{FF2B5EF4-FFF2-40B4-BE49-F238E27FC236}">
-                <a16:creationId xmlns:a16="http://schemas.microsoft.com/office/drawing/2014/main" id="{40C15356-6CC0-4340-AD48-214BA676B1CA}"/>
-              </a:ext>
-            </a:extLst>
-          </p:cNvPr>
-          <p:cNvSpPr>
-            <a:spLocks xmlns:a="http://schemas.openxmlformats.org/drawingml/2006/main" noGrp="1"/>
-          </p:cNvSpPr>
-          <p:nvPr/>
-        </p:nvSpPr>
-        <p:spPr>
-          <a:xfrm xmlns:a="http://schemas.openxmlformats.org/drawingml/2006/main">
-            <a:off x="1028700" y="2800350"/>
-            <a:ext cx="5334000" cy="1104900"/>
+              <a:t>Use five checks before you add a loop</a:t>
+            </a:r>
+          </a:p>
+        </p:txBody>
+      </p:sp>
+      <p:sp>
+        <p:nvSpPr>
+          <p:cNvPr id="3" name="ingestion-1">
+            <a:extLst xmlns:a="http://schemas.openxmlformats.org/drawingml/2006/main">
+              <a:ext uri="{FF2B5EF4-FFF2-40B4-BE49-F238E27FC236}">
+                <a16:creationId xmlns:a16="http://schemas.microsoft.com/office/drawing/2014/main" id="{EF5CEA91-0836-4E99-95C1-43A271A11FFF}"/>
+              </a:ext>
+            </a:extLst>
+          </p:cNvPr>
+          <p:cNvSpPr>
+            <a:spLocks xmlns:a="http://schemas.openxmlformats.org/drawingml/2006/main" noGrp="1"/>
+          </p:cNvSpPr>
+          <p:nvPr/>
+        </p:nvSpPr>
+        <p:spPr>
+          <a:xfrm xmlns:a="http://schemas.openxmlformats.org/drawingml/2006/main">
+            <a:off x="990600" y="3086100"/>
+            <a:ext cx="2247900" cy="2266950"/>
           </a:xfrm>
           <a:prstGeom xmlns:a="http://schemas.openxmlformats.org/drawingml/2006/main" prst="roundRect">
             <a:avLst>
-              <a:gd name="adj" fmla="val 10345"/>
+              <a:gd name="adj" fmla="val 5085"/>
             </a:avLst>
           </a:prstGeom>
           <a:solidFill xmlns:a="http://schemas.openxmlformats.org/drawingml/2006/main">
-            <a:srgbClr val="FFF1E5"/>
+            <a:srgbClr val="FFFFFF"/>
+          </a:solidFill>
+          <a:ln xmlns:a="http://schemas.openxmlformats.org/drawingml/2006/main" w="9525">
+            <a:solidFill>
+              <a:srgbClr val="E4E7E9"/>
+            </a:solidFill>
+            <a:prstDash val="solid"/>
+          </a:ln>
+        </p:spPr>
+      </p:sp>
+      <p:sp>
+        <p:nvSpPr>
+          <p:cNvPr id="4" name="">
+            <a:extLst xmlns:a="http://schemas.openxmlformats.org/drawingml/2006/main">
+              <a:ext uri="{FF2B5EF4-FFF2-40B4-BE49-F238E27FC236}">
+                <a16:creationId xmlns:a16="http://schemas.microsoft.com/office/drawing/2014/main" id="{4A163ADC-FDBA-49AB-AB53-62FA29104479}"/>
+              </a:ext>
+            </a:extLst>
+          </p:cNvPr>
+          <p:cNvSpPr>
+            <a:spLocks xmlns:a="http://schemas.openxmlformats.org/drawingml/2006/main" noGrp="1"/>
+          </p:cNvSpPr>
+          <p:nvPr/>
+        </p:nvSpPr>
+        <p:spPr>
+          <a:xfrm xmlns:a="http://schemas.openxmlformats.org/drawingml/2006/main">
+            <a:off x="1181100" y="3295650"/>
+            <a:ext cx="514350" cy="285750"/>
+          </a:xfrm>
+          <a:prstGeom xmlns:a="http://schemas.openxmlformats.org/drawingml/2006/main" prst="rect">
+            <a:avLst/>
+          </a:prstGeom>
+          <a:noFill xmlns:a="http://schemas.openxmlformats.org/drawingml/2006/main"/>
+          <a:ln xmlns:a="http://schemas.openxmlformats.org/drawingml/2006/main" w="0">
+            <a:noFill/>
+            <a:prstDash val="solid"/>
+          </a:ln>
+        </p:spPr>
+        <p:txBody>
+          <a:bodyPr xmlns:a="http://schemas.openxmlformats.org/drawingml/2006/main" wrap="square" lIns="0" tIns="0" rIns="0" bIns="0" anchor="ctr">
+            <a:noAutofit/>
+          </a:bodyPr>
+          <a:lstStyle xmlns:a="http://schemas.openxmlformats.org/drawingml/2006/main"/>
+          <a:p xmlns:a="http://schemas.openxmlformats.org/drawingml/2006/main">
+            <a:pPr algn="l">
+              <a:lnSpc>
+                <a:spcPct val="100000"/>
+              </a:lnSpc>
+              <a:buNone/>
+              <a:defRPr sz="1350" b="1">
+                <a:solidFill>
+                  <a:srgbClr val="00A2EB"/>
+                </a:solidFill>
+                <a:latin typeface="Calibri"/>
+                <a:ea typeface="Calibri"/>
+                <a:cs typeface="Calibri"/>
+              </a:defRPr>
+            </a:pPr>
+            <a:r>
+              <a:rPr sz="1800" b="1">
+                <a:solidFill>
+                  <a:srgbClr val="00A2EB"/>
+                </a:solidFill>
+                <a:latin typeface="Calibri"/>
+                <a:ea typeface="Calibri"/>
+                <a:cs typeface="Calibri"/>
+              </a:rPr>
+              <a:t>01</a:t>
+            </a:r>
+          </a:p>
+        </p:txBody>
+      </p:sp>
+      <p:sp>
+        <p:nvSpPr>
+          <p:cNvPr id="5" name="">
+            <a:extLst xmlns:a="http://schemas.openxmlformats.org/drawingml/2006/main">
+              <a:ext uri="{FF2B5EF4-FFF2-40B4-BE49-F238E27FC236}">
+                <a16:creationId xmlns:a16="http://schemas.microsoft.com/office/drawing/2014/main" id="{26D1AD73-F995-4369-A266-8FA41354CE3D}"/>
+              </a:ext>
+            </a:extLst>
+          </p:cNvPr>
+          <p:cNvSpPr>
+            <a:spLocks xmlns:a="http://schemas.openxmlformats.org/drawingml/2006/main" noGrp="1"/>
+          </p:cNvSpPr>
+          <p:nvPr/>
+        </p:nvSpPr>
+        <p:spPr>
+          <a:xfrm xmlns:a="http://schemas.openxmlformats.org/drawingml/2006/main">
+            <a:off x="1104900" y="3752850"/>
+            <a:ext cx="2019300" cy="685800"/>
+          </a:xfrm>
+          <a:prstGeom xmlns:a="http://schemas.openxmlformats.org/drawingml/2006/main" prst="rect">
+            <a:avLst/>
+          </a:prstGeom>
+          <a:noFill xmlns:a="http://schemas.openxmlformats.org/drawingml/2006/main"/>
+          <a:ln xmlns:a="http://schemas.openxmlformats.org/drawingml/2006/main" w="0">
+            <a:noFill/>
+            <a:prstDash val="solid"/>
+          </a:ln>
+        </p:spPr>
+        <p:txBody>
+          <a:bodyPr xmlns:a="http://schemas.openxmlformats.org/drawingml/2006/main" wrap="square" lIns="0" tIns="0" rIns="0" bIns="0" anchor="ctr">
+            <a:normAutofit fontScale="100000"/>
+          </a:bodyPr>
+          <a:lstStyle xmlns:a="http://schemas.openxmlformats.org/drawingml/2006/main"/>
+          <a:p xmlns:a="http://schemas.openxmlformats.org/drawingml/2006/main">
+            <a:pPr algn="l">
+              <a:lnSpc>
+                <a:spcPct val="100000"/>
+              </a:lnSpc>
+              <a:buNone/>
+              <a:defRPr sz="1950" b="1">
+                <a:solidFill>
+                  <a:srgbClr val="051C2A"/>
+                </a:solidFill>
+                <a:latin typeface="Calibri"/>
+                <a:ea typeface="Calibri"/>
+                <a:cs typeface="Calibri"/>
+              </a:defRPr>
+            </a:pPr>
+            <a:r>
+              <a:rPr sz="1950" b="1">
+                <a:solidFill>
+                  <a:srgbClr val="051C2A"/>
+                </a:solidFill>
+                <a:latin typeface="Calibri"/>
+                <a:ea typeface="Calibri"/>
+                <a:cs typeface="Calibri"/>
+              </a:rPr>
+              <a:t>Is the path known?</a:t>
+            </a:r>
+          </a:p>
+        </p:txBody>
+      </p:sp>
+      <p:sp>
+        <p:nvSpPr>
+          <p:cNvPr id="6" name="">
+            <a:extLst xmlns:a="http://schemas.openxmlformats.org/drawingml/2006/main">
+              <a:ext uri="{FF2B5EF4-FFF2-40B4-BE49-F238E27FC236}">
+                <a16:creationId xmlns:a16="http://schemas.microsoft.com/office/drawing/2014/main" id="{4CA7F72B-07B6-4BF4-A3F9-5860F8AC7245}"/>
+              </a:ext>
+            </a:extLst>
+          </p:cNvPr>
+          <p:cNvSpPr>
+            <a:spLocks xmlns:a="http://schemas.openxmlformats.org/drawingml/2006/main" noGrp="1"/>
+          </p:cNvSpPr>
+          <p:nvPr/>
+        </p:nvSpPr>
+        <p:spPr>
+          <a:xfrm xmlns:a="http://schemas.openxmlformats.org/drawingml/2006/main">
+            <a:off x="1181100" y="4610100"/>
+            <a:ext cx="1866900" cy="514350"/>
+          </a:xfrm>
+          <a:prstGeom xmlns:a="http://schemas.openxmlformats.org/drawingml/2006/main" prst="rect">
+            <a:avLst/>
+          </a:prstGeom>
+          <a:noFill xmlns:a="http://schemas.openxmlformats.org/drawingml/2006/main"/>
+          <a:ln xmlns:a="http://schemas.openxmlformats.org/drawingml/2006/main" w="0">
+            <a:noFill/>
+            <a:prstDash val="solid"/>
+          </a:ln>
+        </p:spPr>
+        <p:txBody>
+          <a:bodyPr xmlns:a="http://schemas.openxmlformats.org/drawingml/2006/main" wrap="square" lIns="0" tIns="0" rIns="0" bIns="0" anchor="ctr">
+            <a:normAutofit fontScale="100000"/>
+          </a:bodyPr>
+          <a:lstStyle xmlns:a="http://schemas.openxmlformats.org/drawingml/2006/main"/>
+          <a:p xmlns:a="http://schemas.openxmlformats.org/drawingml/2006/main">
+            <a:pPr algn="l">
+              <a:lnSpc>
+                <a:spcPct val="100000"/>
+              </a:lnSpc>
+              <a:buNone/>
+              <a:defRPr sz="1200" b="0">
+                <a:solidFill>
+                  <a:srgbClr val="1F40CB"/>
+                </a:solidFill>
+                <a:latin typeface="Calibri"/>
+                <a:ea typeface="Calibri"/>
+                <a:cs typeface="Calibri"/>
+              </a:defRPr>
+            </a:pPr>
+            <a:r>
+              <a:rPr sz="1200" b="0">
+                <a:solidFill>
+                  <a:srgbClr val="1F40CB"/>
+                </a:solidFill>
+                <a:latin typeface="Calibri"/>
+                <a:ea typeface="Calibri"/>
+                <a:cs typeface="Calibri"/>
+              </a:rPr>
+              <a:t>Workflow: Yes
+Agent: Not always</a:t>
+            </a:r>
+          </a:p>
+        </p:txBody>
+      </p:sp>
+      <p:sp>
+        <p:nvSpPr>
+          <p:cNvPr id="7" name="ingestion-2">
+            <a:extLst xmlns:a="http://schemas.openxmlformats.org/drawingml/2006/main">
+              <a:ext uri="{FF2B5EF4-FFF2-40B4-BE49-F238E27FC236}">
+                <a16:creationId xmlns:a16="http://schemas.microsoft.com/office/drawing/2014/main" id="{B39DEECB-E0D1-415A-8F2A-C8075A6D97BA}"/>
+              </a:ext>
+            </a:extLst>
+          </p:cNvPr>
+          <p:cNvSpPr>
+            <a:spLocks xmlns:a="http://schemas.openxmlformats.org/drawingml/2006/main" noGrp="1"/>
+          </p:cNvSpPr>
+          <p:nvPr/>
+        </p:nvSpPr>
+        <p:spPr>
+          <a:xfrm xmlns:a="http://schemas.openxmlformats.org/drawingml/2006/main">
+            <a:off x="3810000" y="3086100"/>
+            <a:ext cx="2247900" cy="2266950"/>
+          </a:xfrm>
+          <a:prstGeom xmlns:a="http://schemas.openxmlformats.org/drawingml/2006/main" prst="roundRect">
+            <a:avLst>
+              <a:gd name="adj" fmla="val 5085"/>
+            </a:avLst>
+          </a:prstGeom>
+          <a:solidFill xmlns:a="http://schemas.openxmlformats.org/drawingml/2006/main">
+            <a:srgbClr val="FFFFFF"/>
+          </a:solidFill>
+          <a:ln xmlns:a="http://schemas.openxmlformats.org/drawingml/2006/main" w="9525">
+            <a:solidFill>
+              <a:srgbClr val="E4E7E9"/>
+            </a:solidFill>
+            <a:prstDash val="solid"/>
+          </a:ln>
+        </p:spPr>
+      </p:sp>
+      <p:sp>
+        <p:nvSpPr>
+          <p:cNvPr id="8" name="">
+            <a:extLst xmlns:a="http://schemas.openxmlformats.org/drawingml/2006/main">
+              <a:ext uri="{FF2B5EF4-FFF2-40B4-BE49-F238E27FC236}">
+                <a16:creationId xmlns:a16="http://schemas.microsoft.com/office/drawing/2014/main" id="{18679081-8A68-4B7E-9199-340CF95714DE}"/>
+              </a:ext>
+            </a:extLst>
+          </p:cNvPr>
+          <p:cNvSpPr>
+            <a:spLocks xmlns:a="http://schemas.openxmlformats.org/drawingml/2006/main" noGrp="1"/>
+          </p:cNvSpPr>
+          <p:nvPr/>
+        </p:nvSpPr>
+        <p:spPr>
+          <a:xfrm xmlns:a="http://schemas.openxmlformats.org/drawingml/2006/main">
+            <a:off x="4000500" y="3295650"/>
+            <a:ext cx="514350" cy="285750"/>
+          </a:xfrm>
+          <a:prstGeom xmlns:a="http://schemas.openxmlformats.org/drawingml/2006/main" prst="rect">
+            <a:avLst/>
+          </a:prstGeom>
+          <a:noFill xmlns:a="http://schemas.openxmlformats.org/drawingml/2006/main"/>
+          <a:ln xmlns:a="http://schemas.openxmlformats.org/drawingml/2006/main" w="0">
+            <a:noFill/>
+            <a:prstDash val="solid"/>
+          </a:ln>
+        </p:spPr>
+        <p:txBody>
+          <a:bodyPr xmlns:a="http://schemas.openxmlformats.org/drawingml/2006/main" wrap="square" lIns="0" tIns="0" rIns="0" bIns="0" anchor="ctr">
+            <a:noAutofit/>
+          </a:bodyPr>
+          <a:lstStyle xmlns:a="http://schemas.openxmlformats.org/drawingml/2006/main"/>
+          <a:p xmlns:a="http://schemas.openxmlformats.org/drawingml/2006/main">
+            <a:pPr algn="l">
+              <a:lnSpc>
+                <a:spcPct val="100000"/>
+              </a:lnSpc>
+              <a:buNone/>
+              <a:defRPr sz="1350" b="1">
+                <a:solidFill>
+                  <a:srgbClr val="00A2EB"/>
+                </a:solidFill>
+                <a:latin typeface="Calibri"/>
+                <a:ea typeface="Calibri"/>
+                <a:cs typeface="Calibri"/>
+              </a:defRPr>
+            </a:pPr>
+            <a:r>
+              <a:rPr sz="1800" b="1">
+                <a:solidFill>
+                  <a:srgbClr val="00A2EB"/>
+                </a:solidFill>
+                <a:latin typeface="Calibri"/>
+                <a:ea typeface="Calibri"/>
+                <a:cs typeface="Calibri"/>
+              </a:rPr>
+              <a:t>02</a:t>
+            </a:r>
+          </a:p>
+        </p:txBody>
+      </p:sp>
+      <p:sp>
+        <p:nvSpPr>
+          <p:cNvPr id="9" name="">
+            <a:extLst xmlns:a="http://schemas.openxmlformats.org/drawingml/2006/main">
+              <a:ext uri="{FF2B5EF4-FFF2-40B4-BE49-F238E27FC236}">
+                <a16:creationId xmlns:a16="http://schemas.microsoft.com/office/drawing/2014/main" id="{ED095E54-44DC-4092-9EB7-0C81E4B47710}"/>
+              </a:ext>
+            </a:extLst>
+          </p:cNvPr>
+          <p:cNvSpPr>
+            <a:spLocks xmlns:a="http://schemas.openxmlformats.org/drawingml/2006/main" noGrp="1"/>
+          </p:cNvSpPr>
+          <p:nvPr/>
+        </p:nvSpPr>
+        <p:spPr>
+          <a:xfrm xmlns:a="http://schemas.openxmlformats.org/drawingml/2006/main">
+            <a:off x="3924300" y="3752850"/>
+            <a:ext cx="2019300" cy="685800"/>
+          </a:xfrm>
+          <a:prstGeom xmlns:a="http://schemas.openxmlformats.org/drawingml/2006/main" prst="rect">
+            <a:avLst/>
+          </a:prstGeom>
+          <a:noFill xmlns:a="http://schemas.openxmlformats.org/drawingml/2006/main"/>
+          <a:ln xmlns:a="http://schemas.openxmlformats.org/drawingml/2006/main" w="0">
+            <a:noFill/>
+            <a:prstDash val="solid"/>
+          </a:ln>
+        </p:spPr>
+        <p:txBody>
+          <a:bodyPr xmlns:a="http://schemas.openxmlformats.org/drawingml/2006/main" wrap="square" lIns="0" tIns="0" rIns="0" bIns="0" anchor="ctr">
+            <a:normAutofit fontScale="100000"/>
+          </a:bodyPr>
+          <a:lstStyle xmlns:a="http://schemas.openxmlformats.org/drawingml/2006/main"/>
+          <a:p xmlns:a="http://schemas.openxmlformats.org/drawingml/2006/main">
+            <a:pPr algn="l">
+              <a:lnSpc>
+                <a:spcPct val="100000"/>
+              </a:lnSpc>
+              <a:buNone/>
+              <a:defRPr sz="1950" b="1">
+                <a:solidFill>
+                  <a:srgbClr val="051C2A"/>
+                </a:solidFill>
+                <a:latin typeface="Calibri"/>
+                <a:ea typeface="Calibri"/>
+                <a:cs typeface="Calibri"/>
+              </a:defRPr>
+            </a:pPr>
+            <a:r>
+              <a:rPr sz="1950" b="1">
+                <a:solidFill>
+                  <a:srgbClr val="051C2A"/>
+                </a:solidFill>
+                <a:latin typeface="Calibri"/>
+                <a:ea typeface="Calibri"/>
+                <a:cs typeface="Calibri"/>
+              </a:rPr>
+              <a:t>LATENCY</a:t>
+            </a:r>
+          </a:p>
+        </p:txBody>
+      </p:sp>
+      <p:sp>
+        <p:nvSpPr>
+          <p:cNvPr id="10" name="">
+            <a:extLst xmlns:a="http://schemas.openxmlformats.org/drawingml/2006/main">
+              <a:ext uri="{FF2B5EF4-FFF2-40B4-BE49-F238E27FC236}">
+                <a16:creationId xmlns:a16="http://schemas.microsoft.com/office/drawing/2014/main" id="{4DB65E8E-6BA9-40DB-99F9-46D3397B13A3}"/>
+              </a:ext>
+            </a:extLst>
+          </p:cNvPr>
+          <p:cNvSpPr>
+            <a:spLocks xmlns:a="http://schemas.openxmlformats.org/drawingml/2006/main" noGrp="1"/>
+          </p:cNvSpPr>
+          <p:nvPr/>
+        </p:nvSpPr>
+        <p:spPr>
+          <a:xfrm xmlns:a="http://schemas.openxmlformats.org/drawingml/2006/main">
+            <a:off x="4000500" y="4610100"/>
+            <a:ext cx="1866900" cy="514350"/>
+          </a:xfrm>
+          <a:prstGeom xmlns:a="http://schemas.openxmlformats.org/drawingml/2006/main" prst="rect">
+            <a:avLst/>
+          </a:prstGeom>
+          <a:noFill xmlns:a="http://schemas.openxmlformats.org/drawingml/2006/main"/>
+          <a:ln xmlns:a="http://schemas.openxmlformats.org/drawingml/2006/main" w="0">
+            <a:noFill/>
+            <a:prstDash val="solid"/>
+          </a:ln>
+        </p:spPr>
+        <p:txBody>
+          <a:bodyPr xmlns:a="http://schemas.openxmlformats.org/drawingml/2006/main" wrap="square" lIns="0" tIns="0" rIns="0" bIns="0" anchor="ctr">
+            <a:normAutofit fontScale="100000"/>
+          </a:bodyPr>
+          <a:lstStyle xmlns:a="http://schemas.openxmlformats.org/drawingml/2006/main"/>
+          <a:p xmlns:a="http://schemas.openxmlformats.org/drawingml/2006/main">
+            <a:pPr algn="l">
+              <a:lnSpc>
+                <a:spcPct val="100000"/>
+              </a:lnSpc>
+              <a:buNone/>
+              <a:defRPr sz="1200" b="0">
+                <a:solidFill>
+                  <a:srgbClr val="1F40CB"/>
+                </a:solidFill>
+                <a:latin typeface="Calibri"/>
+                <a:ea typeface="Calibri"/>
+                <a:cs typeface="Calibri"/>
+              </a:defRPr>
+            </a:pPr>
+            <a:r>
+              <a:rPr sz="1200" b="0">
+                <a:solidFill>
+                  <a:srgbClr val="1F40CB"/>
+                </a:solidFill>
+                <a:latin typeface="Calibri"/>
+                <a:ea typeface="Calibri"/>
+                <a:cs typeface="Calibri"/>
+              </a:rPr>
+              <a:t>Workflow: Fixed
+Agent: Variable</a:t>
+            </a:r>
+          </a:p>
+        </p:txBody>
+      </p:sp>
+      <p:sp>
+        <p:nvSpPr>
+          <p:cNvPr id="11" name="ingestion-3">
+            <a:extLst xmlns:a="http://schemas.openxmlformats.org/drawingml/2006/main">
+              <a:ext uri="{FF2B5EF4-FFF2-40B4-BE49-F238E27FC236}">
+                <a16:creationId xmlns:a16="http://schemas.microsoft.com/office/drawing/2014/main" id="{D4342A97-3791-461F-A305-9671DA4948CE}"/>
+              </a:ext>
+            </a:extLst>
+          </p:cNvPr>
+          <p:cNvSpPr>
+            <a:spLocks xmlns:a="http://schemas.openxmlformats.org/drawingml/2006/main" noGrp="1"/>
+          </p:cNvSpPr>
+          <p:nvPr/>
+        </p:nvSpPr>
+        <p:spPr>
+          <a:xfrm xmlns:a="http://schemas.openxmlformats.org/drawingml/2006/main">
+            <a:off x="6629400" y="3086100"/>
+            <a:ext cx="2247900" cy="2266950"/>
+          </a:xfrm>
+          <a:prstGeom xmlns:a="http://schemas.openxmlformats.org/drawingml/2006/main" prst="roundRect">
+            <a:avLst>
+              <a:gd name="adj" fmla="val 5085"/>
+            </a:avLst>
+          </a:prstGeom>
+          <a:solidFill xmlns:a="http://schemas.openxmlformats.org/drawingml/2006/main">
+            <a:srgbClr val="062433"/>
+          </a:solidFill>
+          <a:ln xmlns:a="http://schemas.openxmlformats.org/drawingml/2006/main" w="9525">
+            <a:solidFill>
+              <a:srgbClr val="062433"/>
+            </a:solidFill>
+            <a:prstDash val="solid"/>
+          </a:ln>
+        </p:spPr>
+      </p:sp>
+      <p:sp>
+        <p:nvSpPr>
+          <p:cNvPr id="12" name="">
+            <a:extLst xmlns:a="http://schemas.openxmlformats.org/drawingml/2006/main">
+              <a:ext uri="{FF2B5EF4-FFF2-40B4-BE49-F238E27FC236}">
+                <a16:creationId xmlns:a16="http://schemas.microsoft.com/office/drawing/2014/main" id="{64E49A95-2D88-4387-8BD5-FA749ABD0960}"/>
+              </a:ext>
+            </a:extLst>
+          </p:cNvPr>
+          <p:cNvSpPr>
+            <a:spLocks xmlns:a="http://schemas.openxmlformats.org/drawingml/2006/main" noGrp="1"/>
+          </p:cNvSpPr>
+          <p:nvPr/>
+        </p:nvSpPr>
+        <p:spPr>
+          <a:xfrm xmlns:a="http://schemas.openxmlformats.org/drawingml/2006/main">
+            <a:off x="6819900" y="3295650"/>
+            <a:ext cx="514350" cy="285750"/>
+          </a:xfrm>
+          <a:prstGeom xmlns:a="http://schemas.openxmlformats.org/drawingml/2006/main" prst="rect">
+            <a:avLst/>
+          </a:prstGeom>
+          <a:noFill xmlns:a="http://schemas.openxmlformats.org/drawingml/2006/main"/>
+          <a:ln xmlns:a="http://schemas.openxmlformats.org/drawingml/2006/main" w="0">
+            <a:noFill/>
+            <a:prstDash val="solid"/>
+          </a:ln>
+        </p:spPr>
+        <p:txBody>
+          <a:bodyPr xmlns:a="http://schemas.openxmlformats.org/drawingml/2006/main" wrap="square" lIns="0" tIns="0" rIns="0" bIns="0" anchor="ctr">
+            <a:noAutofit/>
+          </a:bodyPr>
+          <a:lstStyle xmlns:a="http://schemas.openxmlformats.org/drawingml/2006/main"/>
+          <a:p xmlns:a="http://schemas.openxmlformats.org/drawingml/2006/main">
+            <a:pPr algn="l">
+              <a:lnSpc>
+                <a:spcPct val="100000"/>
+              </a:lnSpc>
+              <a:buNone/>
+              <a:defRPr sz="1350" b="1">
+                <a:solidFill>
+                  <a:srgbClr val="00A2EB"/>
+                </a:solidFill>
+                <a:latin typeface="Calibri"/>
+                <a:ea typeface="Calibri"/>
+                <a:cs typeface="Calibri"/>
+              </a:defRPr>
+            </a:pPr>
+            <a:r>
+              <a:rPr sz="1800" b="1">
+                <a:solidFill>
+                  <a:srgbClr val="00A2EB"/>
+                </a:solidFill>
+                <a:latin typeface="Calibri"/>
+                <a:ea typeface="Calibri"/>
+                <a:cs typeface="Calibri"/>
+              </a:rPr>
+              <a:t>03</a:t>
+            </a:r>
+          </a:p>
+        </p:txBody>
+      </p:sp>
+      <p:sp>
+        <p:nvSpPr>
+          <p:cNvPr id="13" name="">
+            <a:extLst xmlns:a="http://schemas.openxmlformats.org/drawingml/2006/main">
+              <a:ext uri="{FF2B5EF4-FFF2-40B4-BE49-F238E27FC236}">
+                <a16:creationId xmlns:a16="http://schemas.microsoft.com/office/drawing/2014/main" id="{572D3874-F985-4CD0-BBFF-D59F5B7B32BE}"/>
+              </a:ext>
+            </a:extLst>
+          </p:cNvPr>
+          <p:cNvSpPr>
+            <a:spLocks xmlns:a="http://schemas.openxmlformats.org/drawingml/2006/main" noGrp="1"/>
+          </p:cNvSpPr>
+          <p:nvPr/>
+        </p:nvSpPr>
+        <p:spPr>
+          <a:xfrm xmlns:a="http://schemas.openxmlformats.org/drawingml/2006/main">
+            <a:off x="6743700" y="3752850"/>
+            <a:ext cx="2019300" cy="685800"/>
+          </a:xfrm>
+          <a:prstGeom xmlns:a="http://schemas.openxmlformats.org/drawingml/2006/main" prst="rect">
+            <a:avLst/>
+          </a:prstGeom>
+          <a:noFill xmlns:a="http://schemas.openxmlformats.org/drawingml/2006/main"/>
+          <a:ln xmlns:a="http://schemas.openxmlformats.org/drawingml/2006/main" w="0">
+            <a:noFill/>
+            <a:prstDash val="solid"/>
+          </a:ln>
+        </p:spPr>
+        <p:txBody>
+          <a:bodyPr xmlns:a="http://schemas.openxmlformats.org/drawingml/2006/main" wrap="square" lIns="0" tIns="0" rIns="0" bIns="0" anchor="ctr">
+            <a:noAutofit/>
+          </a:bodyPr>
+          <a:lstStyle xmlns:a="http://schemas.openxmlformats.org/drawingml/2006/main"/>
+          <a:p xmlns:a="http://schemas.openxmlformats.org/drawingml/2006/main">
+            <a:pPr algn="l">
+              <a:lnSpc>
+                <a:spcPct val="100000"/>
+              </a:lnSpc>
+              <a:buNone/>
+              <a:defRPr sz="1650" b="1">
+                <a:solidFill>
+                  <a:srgbClr val="FFFFFF"/>
+                </a:solidFill>
+                <a:latin typeface="Calibri"/>
+                <a:ea typeface="Calibri"/>
+                <a:cs typeface="Calibri"/>
+              </a:defRPr>
+            </a:pPr>
+            <a:r>
+              <a:rPr sz="1800" b="1">
+                <a:solidFill>
+                  <a:srgbClr val="FFFFFF"/>
+                </a:solidFill>
+                <a:latin typeface="Calibri"/>
+                <a:ea typeface="Calibri"/>
+                <a:cs typeface="Calibri"/>
+              </a:rPr>
+              <a:t>DEBUGGING</a:t>
+            </a:r>
+          </a:p>
+        </p:txBody>
+      </p:sp>
+      <p:sp>
+        <p:nvSpPr>
+          <p:cNvPr id="14" name="">
+            <a:extLst xmlns:a="http://schemas.openxmlformats.org/drawingml/2006/main">
+              <a:ext uri="{FF2B5EF4-FFF2-40B4-BE49-F238E27FC236}">
+                <a16:creationId xmlns:a16="http://schemas.microsoft.com/office/drawing/2014/main" id="{9599AF29-91DE-47C0-8189-B0778BB52724}"/>
+              </a:ext>
+            </a:extLst>
+          </p:cNvPr>
+          <p:cNvSpPr>
+            <a:spLocks xmlns:a="http://schemas.openxmlformats.org/drawingml/2006/main" noGrp="1"/>
+          </p:cNvSpPr>
+          <p:nvPr/>
+        </p:nvSpPr>
+        <p:spPr>
+          <a:xfrm xmlns:a="http://schemas.openxmlformats.org/drawingml/2006/main">
+            <a:off x="6819900" y="4610100"/>
+            <a:ext cx="1866900" cy="514350"/>
+          </a:xfrm>
+          <a:prstGeom xmlns:a="http://schemas.openxmlformats.org/drawingml/2006/main" prst="rect">
+            <a:avLst/>
+          </a:prstGeom>
+          <a:noFill xmlns:a="http://schemas.openxmlformats.org/drawingml/2006/main"/>
+          <a:ln xmlns:a="http://schemas.openxmlformats.org/drawingml/2006/main" w="0">
+            <a:noFill/>
+            <a:prstDash val="solid"/>
+          </a:ln>
+        </p:spPr>
+        <p:txBody>
+          <a:bodyPr xmlns:a="http://schemas.openxmlformats.org/drawingml/2006/main" wrap="square" lIns="0" tIns="0" rIns="0" bIns="0" anchor="ctr">
+            <a:normAutofit fontScale="100000"/>
+          </a:bodyPr>
+          <a:lstStyle xmlns:a="http://schemas.openxmlformats.org/drawingml/2006/main"/>
+          <a:p xmlns:a="http://schemas.openxmlformats.org/drawingml/2006/main">
+            <a:pPr algn="l">
+              <a:lnSpc>
+                <a:spcPct val="100000"/>
+              </a:lnSpc>
+              <a:buNone/>
+              <a:defRPr sz="1200" b="0">
+                <a:solidFill>
+                  <a:srgbClr val="00A2EB"/>
+                </a:solidFill>
+                <a:latin typeface="Calibri"/>
+                <a:ea typeface="Calibri"/>
+                <a:cs typeface="Calibri"/>
+              </a:defRPr>
+            </a:pPr>
+            <a:r>
+              <a:rPr sz="1200" b="0">
+                <a:solidFill>
+                  <a:srgbClr val="00A2EB"/>
+                </a:solidFill>
+                <a:latin typeface="Calibri"/>
+                <a:ea typeface="Calibri"/>
+                <a:cs typeface="Calibri"/>
+              </a:rPr>
+              <a:t>Workflow: Easier
+Agent: Harder</a:t>
+            </a:r>
+          </a:p>
+        </p:txBody>
+      </p:sp>
+      <p:sp>
+        <p:nvSpPr>
+          <p:cNvPr id="15" name="ingestion-4">
+            <a:extLst xmlns:a="http://schemas.openxmlformats.org/drawingml/2006/main">
+              <a:ext uri="{FF2B5EF4-FFF2-40B4-BE49-F238E27FC236}">
+                <a16:creationId xmlns:a16="http://schemas.microsoft.com/office/drawing/2014/main" id="{7952DE37-BD86-481C-A575-8709971DD74E}"/>
+              </a:ext>
+            </a:extLst>
+          </p:cNvPr>
+          <p:cNvSpPr>
+            <a:spLocks xmlns:a="http://schemas.openxmlformats.org/drawingml/2006/main" noGrp="1"/>
+          </p:cNvSpPr>
+          <p:nvPr/>
+        </p:nvSpPr>
+        <p:spPr>
+          <a:xfrm xmlns:a="http://schemas.openxmlformats.org/drawingml/2006/main">
+            <a:off x="9448800" y="3086100"/>
+            <a:ext cx="2247900" cy="2266950"/>
+          </a:xfrm>
+          <a:prstGeom xmlns:a="http://schemas.openxmlformats.org/drawingml/2006/main" prst="roundRect">
+            <a:avLst>
+              <a:gd name="adj" fmla="val 5085"/>
+            </a:avLst>
+          </a:prstGeom>
+          <a:solidFill xmlns:a="http://schemas.openxmlformats.org/drawingml/2006/main">
+            <a:srgbClr val="FFFFFF"/>
+          </a:solidFill>
+          <a:ln xmlns:a="http://schemas.openxmlformats.org/drawingml/2006/main" w="9525">
+            <a:solidFill>
+              <a:srgbClr val="E4E7E9"/>
+            </a:solidFill>
+            <a:prstDash val="solid"/>
+          </a:ln>
+        </p:spPr>
+      </p:sp>
+      <p:sp>
+        <p:nvSpPr>
+          <p:cNvPr id="16" name="">
+            <a:extLst xmlns:a="http://schemas.openxmlformats.org/drawingml/2006/main">
+              <a:ext uri="{FF2B5EF4-FFF2-40B4-BE49-F238E27FC236}">
+                <a16:creationId xmlns:a16="http://schemas.microsoft.com/office/drawing/2014/main" id="{62EC2EC9-18A1-4F72-A64D-AF536DDC8F61}"/>
+              </a:ext>
+            </a:extLst>
+          </p:cNvPr>
+          <p:cNvSpPr>
+            <a:spLocks xmlns:a="http://schemas.openxmlformats.org/drawingml/2006/main" noGrp="1"/>
+          </p:cNvSpPr>
+          <p:nvPr/>
+        </p:nvSpPr>
+        <p:spPr>
+          <a:xfrm xmlns:a="http://schemas.openxmlformats.org/drawingml/2006/main">
+            <a:off x="9639300" y="3295650"/>
+            <a:ext cx="514350" cy="285750"/>
+          </a:xfrm>
+          <a:prstGeom xmlns:a="http://schemas.openxmlformats.org/drawingml/2006/main" prst="rect">
+            <a:avLst/>
+          </a:prstGeom>
+          <a:noFill xmlns:a="http://schemas.openxmlformats.org/drawingml/2006/main"/>
+          <a:ln xmlns:a="http://schemas.openxmlformats.org/drawingml/2006/main" w="0">
+            <a:noFill/>
+            <a:prstDash val="solid"/>
+          </a:ln>
+        </p:spPr>
+        <p:txBody>
+          <a:bodyPr xmlns:a="http://schemas.openxmlformats.org/drawingml/2006/main" wrap="square" lIns="0" tIns="0" rIns="0" bIns="0" anchor="ctr">
+            <a:noAutofit/>
+          </a:bodyPr>
+          <a:lstStyle xmlns:a="http://schemas.openxmlformats.org/drawingml/2006/main"/>
+          <a:p xmlns:a="http://schemas.openxmlformats.org/drawingml/2006/main">
+            <a:pPr algn="l">
+              <a:lnSpc>
+                <a:spcPct val="100000"/>
+              </a:lnSpc>
+              <a:buNone/>
+              <a:defRPr sz="1350" b="1">
+                <a:solidFill>
+                  <a:srgbClr val="00A2EB"/>
+                </a:solidFill>
+                <a:latin typeface="Calibri"/>
+                <a:ea typeface="Calibri"/>
+                <a:cs typeface="Calibri"/>
+              </a:defRPr>
+            </a:pPr>
+            <a:r>
+              <a:rPr sz="1800" b="1">
+                <a:solidFill>
+                  <a:srgbClr val="00A2EB"/>
+                </a:solidFill>
+                <a:latin typeface="Calibri"/>
+                <a:ea typeface="Calibri"/>
+                <a:cs typeface="Calibri"/>
+              </a:rPr>
+              <a:t>04</a:t>
+            </a:r>
+          </a:p>
+        </p:txBody>
+      </p:sp>
+      <p:sp>
+        <p:nvSpPr>
+          <p:cNvPr id="17" name="">
+            <a:extLst xmlns:a="http://schemas.openxmlformats.org/drawingml/2006/main">
+              <a:ext uri="{FF2B5EF4-FFF2-40B4-BE49-F238E27FC236}">
+                <a16:creationId xmlns:a16="http://schemas.microsoft.com/office/drawing/2014/main" id="{8540FD5A-1C0F-4BE1-B862-685F20D0F43C}"/>
+              </a:ext>
+            </a:extLst>
+          </p:cNvPr>
+          <p:cNvSpPr>
+            <a:spLocks xmlns:a="http://schemas.openxmlformats.org/drawingml/2006/main" noGrp="1"/>
+          </p:cNvSpPr>
+          <p:nvPr/>
+        </p:nvSpPr>
+        <p:spPr>
+          <a:xfrm xmlns:a="http://schemas.openxmlformats.org/drawingml/2006/main">
+            <a:off x="9563100" y="3752850"/>
+            <a:ext cx="2019300" cy="685800"/>
+          </a:xfrm>
+          <a:prstGeom xmlns:a="http://schemas.openxmlformats.org/drawingml/2006/main" prst="rect">
+            <a:avLst/>
+          </a:prstGeom>
+          <a:noFill xmlns:a="http://schemas.openxmlformats.org/drawingml/2006/main"/>
+          <a:ln xmlns:a="http://schemas.openxmlformats.org/drawingml/2006/main" w="0">
+            <a:noFill/>
+            <a:prstDash val="solid"/>
+          </a:ln>
+        </p:spPr>
+        <p:txBody>
+          <a:bodyPr xmlns:a="http://schemas.openxmlformats.org/drawingml/2006/main" wrap="square" lIns="0" tIns="0" rIns="0" bIns="0" anchor="ctr">
+            <a:normAutofit fontScale="100000"/>
+          </a:bodyPr>
+          <a:lstStyle xmlns:a="http://schemas.openxmlformats.org/drawingml/2006/main"/>
+          <a:p xmlns:a="http://schemas.openxmlformats.org/drawingml/2006/main">
+            <a:pPr algn="l">
+              <a:lnSpc>
+                <a:spcPct val="100000"/>
+              </a:lnSpc>
+              <a:buNone/>
+              <a:defRPr sz="1950" b="1">
+                <a:solidFill>
+                  <a:srgbClr val="051C2A"/>
+                </a:solidFill>
+                <a:latin typeface="Calibri"/>
+                <a:ea typeface="Calibri"/>
+                <a:cs typeface="Calibri"/>
+              </a:defRPr>
+            </a:pPr>
+            <a:r>
+              <a:rPr sz="1950" b="1">
+                <a:solidFill>
+                  <a:srgbClr val="051C2A"/>
+                </a:solidFill>
+                <a:latin typeface="Calibri"/>
+                <a:ea typeface="Calibri"/>
+                <a:cs typeface="Calibri"/>
+              </a:rPr>
+              <a:t>TOOL CHAINING</a:t>
+            </a:r>
+          </a:p>
+        </p:txBody>
+      </p:sp>
+      <p:sp>
+        <p:nvSpPr>
+          <p:cNvPr id="18" name="">
+            <a:extLst xmlns:a="http://schemas.openxmlformats.org/drawingml/2006/main">
+              <a:ext uri="{FF2B5EF4-FFF2-40B4-BE49-F238E27FC236}">
+                <a16:creationId xmlns:a16="http://schemas.microsoft.com/office/drawing/2014/main" id="{67E52B70-645C-40F7-B0DE-1D1D177875CC}"/>
+              </a:ext>
+            </a:extLst>
+          </p:cNvPr>
+          <p:cNvSpPr>
+            <a:spLocks xmlns:a="http://schemas.openxmlformats.org/drawingml/2006/main" noGrp="1"/>
+          </p:cNvSpPr>
+          <p:nvPr/>
+        </p:nvSpPr>
+        <p:spPr>
+          <a:xfrm xmlns:a="http://schemas.openxmlformats.org/drawingml/2006/main">
+            <a:off x="9639300" y="4610100"/>
+            <a:ext cx="1866900" cy="514350"/>
+          </a:xfrm>
+          <a:prstGeom xmlns:a="http://schemas.openxmlformats.org/drawingml/2006/main" prst="rect">
+            <a:avLst/>
+          </a:prstGeom>
+          <a:noFill xmlns:a="http://schemas.openxmlformats.org/drawingml/2006/main"/>
+          <a:ln xmlns:a="http://schemas.openxmlformats.org/drawingml/2006/main" w="0">
+            <a:noFill/>
+            <a:prstDash val="solid"/>
+          </a:ln>
+        </p:spPr>
+        <p:txBody>
+          <a:bodyPr xmlns:a="http://schemas.openxmlformats.org/drawingml/2006/main" wrap="square" lIns="0" tIns="0" rIns="0" bIns="0" anchor="ctr">
+            <a:normAutofit fontScale="100000"/>
+          </a:bodyPr>
+          <a:lstStyle xmlns:a="http://schemas.openxmlformats.org/drawingml/2006/main"/>
+          <a:p xmlns:a="http://schemas.openxmlformats.org/drawingml/2006/main">
+            <a:pPr algn="l">
+              <a:lnSpc>
+                <a:spcPct val="100000"/>
+              </a:lnSpc>
+              <a:buNone/>
+              <a:defRPr sz="1200" b="0">
+                <a:solidFill>
+                  <a:srgbClr val="1F40CB"/>
+                </a:solidFill>
+                <a:latin typeface="Calibri"/>
+                <a:ea typeface="Calibri"/>
+                <a:cs typeface="Calibri"/>
+              </a:defRPr>
+            </a:pPr>
+            <a:r>
+              <a:rPr sz="1200" b="0">
+                <a:solidFill>
+                  <a:srgbClr val="1F40CB"/>
+                </a:solidFill>
+                <a:latin typeface="Calibri"/>
+                <a:ea typeface="Calibri"/>
+                <a:cs typeface="Calibri"/>
+              </a:rPr>
+              <a:t>Workflow: Coded by you
+Agent: Uses results</a:t>
+            </a:r>
+          </a:p>
+        </p:txBody>
+      </p:sp>
+      <p:sp>
+        <p:nvSpPr>
+          <p:cNvPr id="19" name="ingestion-5">
+            <a:extLst xmlns:a="http://schemas.openxmlformats.org/drawingml/2006/main">
+              <a:ext uri="{FF2B5EF4-FFF2-40B4-BE49-F238E27FC236}">
+                <a16:creationId xmlns:a16="http://schemas.microsoft.com/office/drawing/2014/main" id="{43F7E1B1-E237-4A79-B0C4-38965CF32D74}"/>
+              </a:ext>
+            </a:extLst>
+          </p:cNvPr>
+          <p:cNvSpPr>
+            <a:spLocks xmlns:a="http://schemas.openxmlformats.org/drawingml/2006/main" noGrp="1"/>
+          </p:cNvSpPr>
+          <p:nvPr/>
+        </p:nvSpPr>
+        <p:spPr>
+          <a:xfrm xmlns:a="http://schemas.openxmlformats.org/drawingml/2006/main">
+            <a:off x="12268200" y="3086100"/>
+            <a:ext cx="2247900" cy="2266950"/>
+          </a:xfrm>
+          <a:prstGeom xmlns:a="http://schemas.openxmlformats.org/drawingml/2006/main" prst="roundRect">
+            <a:avLst>
+              <a:gd name="adj" fmla="val 5085"/>
+            </a:avLst>
+          </a:prstGeom>
+          <a:solidFill xmlns:a="http://schemas.openxmlformats.org/drawingml/2006/main">
+            <a:srgbClr val="FFFFFF"/>
           </a:solidFill>
           <a:ln xmlns:a="http://schemas.openxmlformats.org/drawingml/2006/main" w="19050">
             <a:solidFill>
@@ -4783,22 +5050,84 @@
       </p:sp>
       <p:sp>
         <p:nvSpPr>
-          <p:cNvPr id="5" name="">
-            <a:extLst xmlns:a="http://schemas.openxmlformats.org/drawingml/2006/main">
-              <a:ext uri="{FF2B5EF4-FFF2-40B4-BE49-F238E27FC236}">
-                <a16:creationId xmlns:a16="http://schemas.microsoft.com/office/drawing/2014/main" id="{2782FFA5-77A1-442E-984F-08CF9D903B3C}"/>
-              </a:ext>
-            </a:extLst>
-          </p:cNvPr>
-          <p:cNvSpPr>
-            <a:spLocks xmlns:a="http://schemas.openxmlformats.org/drawingml/2006/main" noGrp="1"/>
-          </p:cNvSpPr>
-          <p:nvPr/>
-        </p:nvSpPr>
-        <p:spPr>
-          <a:xfrm xmlns:a="http://schemas.openxmlformats.org/drawingml/2006/main">
-            <a:off x="1276350" y="2952750"/>
-            <a:ext cx="4838700" cy="800100"/>
+          <p:cNvPr id="20" name="">
+            <a:extLst xmlns:a="http://schemas.openxmlformats.org/drawingml/2006/main">
+              <a:ext uri="{FF2B5EF4-FFF2-40B4-BE49-F238E27FC236}">
+                <a16:creationId xmlns:a16="http://schemas.microsoft.com/office/drawing/2014/main" id="{51764D39-05B0-4F08-BC2B-2221BE2F38D6}"/>
+              </a:ext>
+            </a:extLst>
+          </p:cNvPr>
+          <p:cNvSpPr>
+            <a:spLocks xmlns:a="http://schemas.openxmlformats.org/drawingml/2006/main" noGrp="1"/>
+          </p:cNvSpPr>
+          <p:nvPr/>
+        </p:nvSpPr>
+        <p:spPr>
+          <a:xfrm xmlns:a="http://schemas.openxmlformats.org/drawingml/2006/main">
+            <a:off x="12458700" y="3295650"/>
+            <a:ext cx="514350" cy="285750"/>
+          </a:xfrm>
+          <a:prstGeom xmlns:a="http://schemas.openxmlformats.org/drawingml/2006/main" prst="rect">
+            <a:avLst/>
+          </a:prstGeom>
+          <a:noFill xmlns:a="http://schemas.openxmlformats.org/drawingml/2006/main"/>
+          <a:ln xmlns:a="http://schemas.openxmlformats.org/drawingml/2006/main" w="0">
+            <a:noFill/>
+            <a:prstDash val="solid"/>
+          </a:ln>
+        </p:spPr>
+        <p:txBody>
+          <a:bodyPr xmlns:a="http://schemas.openxmlformats.org/drawingml/2006/main" wrap="square" lIns="0" tIns="0" rIns="0" bIns="0" anchor="ctr">
+            <a:noAutofit/>
+          </a:bodyPr>
+          <a:lstStyle xmlns:a="http://schemas.openxmlformats.org/drawingml/2006/main"/>
+          <a:p xmlns:a="http://schemas.openxmlformats.org/drawingml/2006/main">
+            <a:pPr algn="l">
+              <a:lnSpc>
+                <a:spcPct val="100000"/>
+              </a:lnSpc>
+              <a:buNone/>
+              <a:defRPr sz="1350" b="1">
+                <a:solidFill>
+                  <a:srgbClr val="00A2EB"/>
+                </a:solidFill>
+                <a:latin typeface="Calibri"/>
+                <a:ea typeface="Calibri"/>
+                <a:cs typeface="Calibri"/>
+              </a:defRPr>
+            </a:pPr>
+            <a:r>
+              <a:rPr sz="1800" b="1">
+                <a:solidFill>
+                  <a:srgbClr val="00A2EB"/>
+                </a:solidFill>
+                <a:latin typeface="Calibri"/>
+                <a:ea typeface="Calibri"/>
+                <a:cs typeface="Calibri"/>
+              </a:rPr>
+              <a:t>05</a:t>
+            </a:r>
+          </a:p>
+        </p:txBody>
+      </p:sp>
+      <p:sp>
+        <p:nvSpPr>
+          <p:cNvPr id="21" name="">
+            <a:extLst xmlns:a="http://schemas.openxmlformats.org/drawingml/2006/main">
+              <a:ext uri="{FF2B5EF4-FFF2-40B4-BE49-F238E27FC236}">
+                <a16:creationId xmlns:a16="http://schemas.microsoft.com/office/drawing/2014/main" id="{C0F4CBB5-9FF7-4C7B-8D8C-5AA3541DD5E4}"/>
+              </a:ext>
+            </a:extLst>
+          </p:cNvPr>
+          <p:cNvSpPr>
+            <a:spLocks xmlns:a="http://schemas.openxmlformats.org/drawingml/2006/main" noGrp="1"/>
+          </p:cNvSpPr>
+          <p:nvPr/>
+        </p:nvSpPr>
+        <p:spPr>
+          <a:xfrm xmlns:a="http://schemas.openxmlformats.org/drawingml/2006/main">
+            <a:off x="12382500" y="3752850"/>
+            <a:ext cx="2019300" cy="685800"/>
           </a:xfrm>
           <a:prstGeom xmlns:a="http://schemas.openxmlformats.org/drawingml/2006/main" prst="rect">
             <a:avLst/>
@@ -4820,622 +5149,276 @@
                 <a:spcPct val="100000"/>
               </a:lnSpc>
               <a:buNone/>
-              <a:defRPr sz="1425" b="0">
+              <a:defRPr sz="1950" b="1">
                 <a:solidFill>
                   <a:srgbClr val="051C2A"/>
                 </a:solidFill>
-                <a:latin typeface="Courier New"/>
-                <a:ea typeface="Courier New"/>
-                <a:cs typeface="Courier New"/>
-              </a:defRPr>
-            </a:pPr>
-            <a:r>
-              <a:rPr sz="1425" b="0">
+                <a:latin typeface="Calibri"/>
+                <a:ea typeface="Calibri"/>
+                <a:cs typeface="Calibri"/>
+              </a:defRPr>
+            </a:pPr>
+            <a:r>
+              <a:rPr sz="1950" b="1">
                 <a:solidFill>
                   <a:srgbClr val="051C2A"/>
                 </a:solidFill>
-                <a:latin typeface="Courier New"/>
-                <a:ea typeface="Courier New"/>
-                <a:cs typeface="Courier New"/>
-              </a:rPr>
-              <a:t>Known route</a:t>
-            </a:r>
-          </a:p>
+                <a:latin typeface="Calibri"/>
+                <a:ea typeface="Calibri"/>
+                <a:cs typeface="Calibri"/>
+              </a:rPr>
+              <a:t>BEST FOR</a:t>
+            </a:r>
+          </a:p>
+        </p:txBody>
+      </p:sp>
+      <p:sp>
+        <p:nvSpPr>
+          <p:cNvPr id="22" name="">
+            <a:extLst xmlns:a="http://schemas.openxmlformats.org/drawingml/2006/main">
+              <a:ext uri="{FF2B5EF4-FFF2-40B4-BE49-F238E27FC236}">
+                <a16:creationId xmlns:a16="http://schemas.microsoft.com/office/drawing/2014/main" id="{8856B515-B8BF-4B9C-8D6B-EC909D2B3B4E}"/>
+              </a:ext>
+            </a:extLst>
+          </p:cNvPr>
+          <p:cNvSpPr>
+            <a:spLocks xmlns:a="http://schemas.openxmlformats.org/drawingml/2006/main" noGrp="1"/>
+          </p:cNvSpPr>
+          <p:nvPr/>
+        </p:nvSpPr>
+        <p:spPr>
+          <a:xfrm xmlns:a="http://schemas.openxmlformats.org/drawingml/2006/main">
+            <a:off x="12458700" y="4610100"/>
+            <a:ext cx="1866900" cy="514350"/>
+          </a:xfrm>
+          <a:prstGeom xmlns:a="http://schemas.openxmlformats.org/drawingml/2006/main" prst="rect">
+            <a:avLst/>
+          </a:prstGeom>
+          <a:noFill xmlns:a="http://schemas.openxmlformats.org/drawingml/2006/main"/>
+          <a:ln xmlns:a="http://schemas.openxmlformats.org/drawingml/2006/main" w="0">
+            <a:noFill/>
+            <a:prstDash val="solid"/>
+          </a:ln>
+        </p:spPr>
+        <p:txBody>
+          <a:bodyPr xmlns:a="http://schemas.openxmlformats.org/drawingml/2006/main" wrap="square" lIns="0" tIns="0" rIns="0" bIns="0" anchor="ctr">
+            <a:normAutofit fontScale="100000"/>
+          </a:bodyPr>
+          <a:lstStyle xmlns:a="http://schemas.openxmlformats.org/drawingml/2006/main"/>
           <a:p xmlns:a="http://schemas.openxmlformats.org/drawingml/2006/main">
             <a:pPr algn="l">
               <a:lnSpc>
                 <a:spcPct val="100000"/>
               </a:lnSpc>
               <a:buNone/>
-              <a:defRPr sz="1425" b="0">
+              <a:defRPr sz="1200" b="0">
+                <a:solidFill>
+                  <a:srgbClr val="1F40CB"/>
+                </a:solidFill>
+                <a:latin typeface="Calibri"/>
+                <a:ea typeface="Calibri"/>
+                <a:cs typeface="Calibri"/>
+              </a:defRPr>
+            </a:pPr>
+            <a:r>
+              <a:rPr sz="1200" b="0">
+                <a:solidFill>
+                  <a:srgbClr val="1F40CB"/>
+                </a:solidFill>
+                <a:latin typeface="Calibri"/>
+                <a:ea typeface="Calibri"/>
+                <a:cs typeface="Calibri"/>
+              </a:rPr>
+              <a:t>Workflow: Known steps
+Agent: Open path</a:t>
+            </a:r>
+          </a:p>
+        </p:txBody>
+      </p:sp>
+      <p:cxnSp>
+        <p:nvCxnSpPr>
+          <p:cNvPr id="473" name=""/>
+          <p:cNvCxnSpPr>
+            <a:stCxn xmlns:a="http://schemas.openxmlformats.org/drawingml/2006/main" id="3" idx="3"/>
+            <a:endCxn xmlns:a="http://schemas.openxmlformats.org/drawingml/2006/main" id="7" idx="1"/>
+          </p:cNvCxnSpPr>
+          <p:nvPr/>
+        </p:nvCxnSpPr>
+        <p:spPr>
+          <a:xfrm xmlns:a="http://schemas.openxmlformats.org/drawingml/2006/main">
+            <a:off x="3238500" y="4219575"/>
+            <a:ext cx="571500" cy="0"/>
+          </a:xfrm>
+          <a:prstGeom xmlns:a="http://schemas.openxmlformats.org/drawingml/2006/main" prst="straightConnector1">
+            <a:avLst/>
+          </a:prstGeom>
+          <a:ln xmlns:a="http://schemas.openxmlformats.org/drawingml/2006/main" w="28575">
+            <a:solidFill>
+              <a:srgbClr val="9A9A9F"/>
+            </a:solidFill>
+            <a:prstDash val="solid"/>
+            <a:tailEnd type="triangle" w="med" len="med"/>
+          </a:ln>
+        </p:spPr>
+      </p:cxnSp>
+      <p:cxnSp>
+        <p:nvCxnSpPr>
+          <p:cNvPr id="474" name=""/>
+          <p:cNvCxnSpPr>
+            <a:stCxn xmlns:a="http://schemas.openxmlformats.org/drawingml/2006/main" id="7" idx="3"/>
+            <a:endCxn xmlns:a="http://schemas.openxmlformats.org/drawingml/2006/main" id="11" idx="1"/>
+          </p:cNvCxnSpPr>
+          <p:nvPr/>
+        </p:nvCxnSpPr>
+        <p:spPr>
+          <a:xfrm xmlns:a="http://schemas.openxmlformats.org/drawingml/2006/main">
+            <a:off x="6057900" y="4219575"/>
+            <a:ext cx="571500" cy="0"/>
+          </a:xfrm>
+          <a:prstGeom xmlns:a="http://schemas.openxmlformats.org/drawingml/2006/main" prst="straightConnector1">
+            <a:avLst/>
+          </a:prstGeom>
+          <a:ln xmlns:a="http://schemas.openxmlformats.org/drawingml/2006/main" w="28575">
+            <a:solidFill>
+              <a:srgbClr val="9A9A9F"/>
+            </a:solidFill>
+            <a:prstDash val="solid"/>
+            <a:tailEnd type="triangle" w="med" len="med"/>
+          </a:ln>
+        </p:spPr>
+      </p:cxnSp>
+      <p:cxnSp>
+        <p:nvCxnSpPr>
+          <p:cNvPr id="475" name=""/>
+          <p:cNvCxnSpPr>
+            <a:stCxn xmlns:a="http://schemas.openxmlformats.org/drawingml/2006/main" id="11" idx="3"/>
+            <a:endCxn xmlns:a="http://schemas.openxmlformats.org/drawingml/2006/main" id="15" idx="1"/>
+          </p:cNvCxnSpPr>
+          <p:nvPr/>
+        </p:nvCxnSpPr>
+        <p:spPr>
+          <a:xfrm xmlns:a="http://schemas.openxmlformats.org/drawingml/2006/main">
+            <a:off x="8877300" y="4219575"/>
+            <a:ext cx="571500" cy="0"/>
+          </a:xfrm>
+          <a:prstGeom xmlns:a="http://schemas.openxmlformats.org/drawingml/2006/main" prst="straightConnector1">
+            <a:avLst/>
+          </a:prstGeom>
+          <a:ln xmlns:a="http://schemas.openxmlformats.org/drawingml/2006/main" w="28575">
+            <a:solidFill>
+              <a:srgbClr val="9A9A9F"/>
+            </a:solidFill>
+            <a:prstDash val="solid"/>
+            <a:tailEnd type="triangle" w="med" len="med"/>
+          </a:ln>
+        </p:spPr>
+      </p:cxnSp>
+      <p:cxnSp>
+        <p:nvCxnSpPr>
+          <p:cNvPr id="476" name=""/>
+          <p:cNvCxnSpPr>
+            <a:stCxn xmlns:a="http://schemas.openxmlformats.org/drawingml/2006/main" id="15" idx="3"/>
+            <a:endCxn xmlns:a="http://schemas.openxmlformats.org/drawingml/2006/main" id="19" idx="1"/>
+          </p:cNvCxnSpPr>
+          <p:nvPr/>
+        </p:nvCxnSpPr>
+        <p:spPr>
+          <a:xfrm xmlns:a="http://schemas.openxmlformats.org/drawingml/2006/main">
+            <a:off x="11696700" y="4219575"/>
+            <a:ext cx="571500" cy="0"/>
+          </a:xfrm>
+          <a:prstGeom xmlns:a="http://schemas.openxmlformats.org/drawingml/2006/main" prst="straightConnector1">
+            <a:avLst/>
+          </a:prstGeom>
+          <a:ln xmlns:a="http://schemas.openxmlformats.org/drawingml/2006/main" w="28575">
+            <a:solidFill>
+              <a:srgbClr val="9A9A9F"/>
+            </a:solidFill>
+            <a:prstDash val="solid"/>
+            <a:tailEnd type="triangle" w="med" len="med"/>
+          </a:ln>
+        </p:spPr>
+      </p:cxnSp>
+      <p:sp>
+        <p:nvSpPr>
+          <p:cNvPr id="27" name="">
+            <a:extLst xmlns:a="http://schemas.openxmlformats.org/drawingml/2006/main">
+              <a:ext uri="{FF2B5EF4-FFF2-40B4-BE49-F238E27FC236}">
+                <a16:creationId xmlns:a16="http://schemas.microsoft.com/office/drawing/2014/main" id="{79128475-820B-447C-A724-7D8A31328FFE}"/>
+              </a:ext>
+            </a:extLst>
+          </p:cNvPr>
+          <p:cNvSpPr>
+            <a:spLocks xmlns:a="http://schemas.openxmlformats.org/drawingml/2006/main" noGrp="1"/>
+          </p:cNvSpPr>
+          <p:nvPr/>
+        </p:nvSpPr>
+        <p:spPr>
+          <a:xfrm xmlns:a="http://schemas.openxmlformats.org/drawingml/2006/main">
+            <a:off x="2381250" y="6210300"/>
+            <a:ext cx="10477500" cy="457200"/>
+          </a:xfrm>
+          <a:prstGeom xmlns:a="http://schemas.openxmlformats.org/drawingml/2006/main" prst="rect">
+            <a:avLst/>
+          </a:prstGeom>
+          <a:noFill xmlns:a="http://schemas.openxmlformats.org/drawingml/2006/main"/>
+          <a:ln xmlns:a="http://schemas.openxmlformats.org/drawingml/2006/main" w="0">
+            <a:noFill/>
+            <a:prstDash val="solid"/>
+          </a:ln>
+        </p:spPr>
+        <p:txBody>
+          <a:bodyPr xmlns:a="http://schemas.openxmlformats.org/drawingml/2006/main" wrap="square" lIns="0" tIns="0" rIns="0" bIns="0" anchor="ctr">
+            <a:normAutofit fontScale="100000"/>
+          </a:bodyPr>
+          <a:lstStyle xmlns:a="http://schemas.openxmlformats.org/drawingml/2006/main"/>
+          <a:p xmlns:a="http://schemas.openxmlformats.org/drawingml/2006/main">
+            <a:pPr algn="ctr">
+              <a:lnSpc>
+                <a:spcPct val="100000"/>
+              </a:lnSpc>
+              <a:buNone/>
+              <a:defRPr sz="2100" b="1">
                 <a:solidFill>
                   <a:srgbClr val="051C2A"/>
                 </a:solidFill>
-                <a:latin typeface="Courier New"/>
-                <a:ea typeface="Courier New"/>
-                <a:cs typeface="Courier New"/>
-              </a:defRPr>
-            </a:pPr>
-            <a:r>
-              <a:rPr sz="1425" b="0">
+                <a:latin typeface="Calibri"/>
+                <a:ea typeface="Calibri"/>
+                <a:cs typeface="Calibri"/>
+              </a:defRPr>
+            </a:pPr>
+            <a:r>
+              <a:rPr sz="2100" b="1">
                 <a:solidFill>
                   <a:srgbClr val="051C2A"/>
                 </a:solidFill>
-                <a:latin typeface="Courier New"/>
-                <a:ea typeface="Courier New"/>
-                <a:cs typeface="Courier New"/>
-              </a:rPr>
-              <a:t>fixed before execution</a:t>
-            </a:r>
-          </a:p>
-        </p:txBody>
-      </p:sp>
-      <p:sp>
-        <p:nvSpPr>
-          <p:cNvPr id="6" name="fixed-two">
-            <a:extLst xmlns:a="http://schemas.openxmlformats.org/drawingml/2006/main">
-              <a:ext uri="{FF2B5EF4-FFF2-40B4-BE49-F238E27FC236}">
-                <a16:creationId xmlns:a16="http://schemas.microsoft.com/office/drawing/2014/main" id="{AD30FCD2-C657-4E45-B1A1-6793E46E7142}"/>
-              </a:ext>
-            </a:extLst>
-          </p:cNvPr>
-          <p:cNvSpPr>
-            <a:spLocks xmlns:a="http://schemas.openxmlformats.org/drawingml/2006/main" noGrp="1"/>
-          </p:cNvSpPr>
-          <p:nvPr/>
-        </p:nvSpPr>
-        <p:spPr>
-          <a:xfrm xmlns:a="http://schemas.openxmlformats.org/drawingml/2006/main">
-            <a:off x="1028700" y="4324350"/>
-            <a:ext cx="2857500" cy="723900"/>
-          </a:xfrm>
-          <a:prstGeom xmlns:a="http://schemas.openxmlformats.org/drawingml/2006/main" prst="roundRect">
-            <a:avLst>
-              <a:gd name="adj" fmla="val 15789"/>
-            </a:avLst>
-          </a:prstGeom>
-          <a:solidFill xmlns:a="http://schemas.openxmlformats.org/drawingml/2006/main">
-            <a:srgbClr val="FFF1E5"/>
-          </a:solidFill>
-          <a:ln xmlns:a="http://schemas.openxmlformats.org/drawingml/2006/main" w="19050">
-            <a:solidFill>
-              <a:srgbClr val="F07D00"/>
-            </a:solidFill>
-            <a:prstDash val="solid"/>
-          </a:ln>
-        </p:spPr>
-      </p:sp>
-      <p:sp>
-        <p:nvSpPr>
-          <p:cNvPr id="7" name="">
-            <a:extLst xmlns:a="http://schemas.openxmlformats.org/drawingml/2006/main">
-              <a:ext uri="{FF2B5EF4-FFF2-40B4-BE49-F238E27FC236}">
-                <a16:creationId xmlns:a16="http://schemas.microsoft.com/office/drawing/2014/main" id="{CF3EC4B2-CAE9-400F-B11D-2D4F3052F980}"/>
-              </a:ext>
-            </a:extLst>
-          </p:cNvPr>
-          <p:cNvSpPr>
-            <a:spLocks xmlns:a="http://schemas.openxmlformats.org/drawingml/2006/main" noGrp="1"/>
-          </p:cNvSpPr>
-          <p:nvPr/>
-        </p:nvSpPr>
-        <p:spPr>
-          <a:xfrm xmlns:a="http://schemas.openxmlformats.org/drawingml/2006/main">
-            <a:off x="1276350" y="4457700"/>
-            <a:ext cx="2381250" cy="438150"/>
-          </a:xfrm>
-          <a:prstGeom xmlns:a="http://schemas.openxmlformats.org/drawingml/2006/main" prst="rect">
-            <a:avLst/>
-          </a:prstGeom>
-          <a:noFill xmlns:a="http://schemas.openxmlformats.org/drawingml/2006/main"/>
-          <a:ln xmlns:a="http://schemas.openxmlformats.org/drawingml/2006/main" w="0">
-            <a:noFill/>
-            <a:prstDash val="solid"/>
-          </a:ln>
-        </p:spPr>
-        <p:txBody>
-          <a:bodyPr xmlns:a="http://schemas.openxmlformats.org/drawingml/2006/main" wrap="square" lIns="0" tIns="0" rIns="0" bIns="0" anchor="ctr">
-            <a:normAutofit fontScale="95833"/>
-          </a:bodyPr>
-          <a:lstStyle xmlns:a="http://schemas.openxmlformats.org/drawingml/2006/main"/>
-          <a:p xmlns:a="http://schemas.openxmlformats.org/drawingml/2006/main">
-            <a:pPr algn="l">
-              <a:lnSpc>
-                <a:spcPct val="100000"/>
-              </a:lnSpc>
-              <a:buNone/>
-              <a:defRPr sz="1500" b="1">
-                <a:solidFill>
-                  <a:srgbClr val="051C2A"/>
-                </a:solidFill>
-                <a:latin typeface="Courier New"/>
-                <a:ea typeface="Courier New"/>
-                <a:cs typeface="Courier New"/>
-              </a:defRPr>
-            </a:pPr>
-            <a:r>
-              <a:rPr sz="1500" b="1">
-                <a:solidFill>
-                  <a:srgbClr val="051C2A"/>
-                </a:solidFill>
-                <a:latin typeface="Courier New"/>
-                <a:ea typeface="Courier New"/>
-                <a:cs typeface="Courier New"/>
-              </a:rPr>
-              <a:t>Stable contract
-reproducible path</a:t>
-            </a:r>
-          </a:p>
-        </p:txBody>
-      </p:sp>
-      <p:sp>
-        <p:nvSpPr>
-          <p:cNvPr id="8" name="">
-            <a:extLst xmlns:a="http://schemas.openxmlformats.org/drawingml/2006/main">
-              <a:ext uri="{FF2B5EF4-FFF2-40B4-BE49-F238E27FC236}">
-                <a16:creationId xmlns:a16="http://schemas.microsoft.com/office/drawing/2014/main" id="{EF846D44-14BC-44D4-9667-69FFDFBE94EE}"/>
-              </a:ext>
-            </a:extLst>
-          </p:cNvPr>
-          <p:cNvSpPr>
-            <a:spLocks xmlns:a="http://schemas.openxmlformats.org/drawingml/2006/main" noGrp="1"/>
-          </p:cNvSpPr>
-          <p:nvPr/>
-        </p:nvSpPr>
-        <p:spPr>
-          <a:xfrm xmlns:a="http://schemas.openxmlformats.org/drawingml/2006/main">
-            <a:off x="1028700" y="5276850"/>
-            <a:ext cx="5334000" cy="419100"/>
-          </a:xfrm>
-          <a:prstGeom xmlns:a="http://schemas.openxmlformats.org/drawingml/2006/main" prst="rect">
-            <a:avLst/>
-          </a:prstGeom>
-          <a:noFill xmlns:a="http://schemas.openxmlformats.org/drawingml/2006/main"/>
-          <a:ln xmlns:a="http://schemas.openxmlformats.org/drawingml/2006/main" w="0">
-            <a:noFill/>
-            <a:prstDash val="solid"/>
-          </a:ln>
-        </p:spPr>
-        <p:txBody>
-          <a:bodyPr xmlns:a="http://schemas.openxmlformats.org/drawingml/2006/main" wrap="square" lIns="0" tIns="0" rIns="0" bIns="0" anchor="ctr">
-            <a:noAutofit/>
-          </a:bodyPr>
-          <a:lstStyle xmlns:a="http://schemas.openxmlformats.org/drawingml/2006/main"/>
-          <a:p xmlns:a="http://schemas.openxmlformats.org/drawingml/2006/main">
-            <a:pPr algn="l">
-              <a:lnSpc>
-                <a:spcPct val="100000"/>
-              </a:lnSpc>
-              <a:buNone/>
-              <a:defRPr sz="1575" b="1">
-                <a:solidFill>
-                  <a:srgbClr val="F07D00"/>
-                </a:solidFill>
-                <a:latin typeface="Calibri"/>
-                <a:ea typeface="Calibri"/>
-                <a:cs typeface="Calibri"/>
-              </a:defRPr>
-            </a:pPr>
-            <a:r>
-              <a:rPr sz="1800" b="1">
-                <a:solidFill>
-                  <a:srgbClr val="F07D00"/>
-                </a:solidFill>
-                <a:latin typeface="Calibri"/>
-                <a:ea typeface="Calibri"/>
-                <a:cs typeface="Calibri"/>
-              </a:rPr>
-              <a:t>Best default · lower latency · simpler tests</a:t>
-            </a:r>
-          </a:p>
-        </p:txBody>
-      </p:sp>
-      <p:sp>
-        <p:nvSpPr>
-          <p:cNvPr id="9" name="">
-            <a:extLst xmlns:a="http://schemas.openxmlformats.org/drawingml/2006/main">
-              <a:ext uri="{FF2B5EF4-FFF2-40B4-BE49-F238E27FC236}">
-                <a16:creationId xmlns:a16="http://schemas.microsoft.com/office/drawing/2014/main" id="{1106CDE7-35E6-4C8C-A738-6BACCF9A4851}"/>
-              </a:ext>
-            </a:extLst>
-          </p:cNvPr>
-          <p:cNvSpPr>
-            <a:spLocks xmlns:a="http://schemas.openxmlformats.org/drawingml/2006/main" noGrp="1"/>
-          </p:cNvSpPr>
-          <p:nvPr/>
-        </p:nvSpPr>
-        <p:spPr>
-          <a:xfrm xmlns:a="http://schemas.openxmlformats.org/drawingml/2006/main">
-            <a:off x="7334250" y="2343150"/>
-            <a:ext cx="2857500" cy="285750"/>
-          </a:xfrm>
-          <a:prstGeom xmlns:a="http://schemas.openxmlformats.org/drawingml/2006/main" prst="rect">
-            <a:avLst/>
-          </a:prstGeom>
-          <a:noFill xmlns:a="http://schemas.openxmlformats.org/drawingml/2006/main"/>
-          <a:ln xmlns:a="http://schemas.openxmlformats.org/drawingml/2006/main" w="0">
-            <a:noFill/>
-            <a:prstDash val="solid"/>
-          </a:ln>
-        </p:spPr>
-        <p:txBody>
-          <a:bodyPr xmlns:a="http://schemas.openxmlformats.org/drawingml/2006/main" wrap="square" lIns="0" tIns="0" rIns="0" bIns="0" anchor="ctr">
-            <a:noAutofit/>
-          </a:bodyPr>
-          <a:lstStyle xmlns:a="http://schemas.openxmlformats.org/drawingml/2006/main"/>
-          <a:p xmlns:a="http://schemas.openxmlformats.org/drawingml/2006/main">
-            <a:pPr algn="l">
-              <a:lnSpc>
-                <a:spcPct val="100000"/>
-              </a:lnSpc>
-              <a:buNone/>
-              <a:defRPr sz="1350" b="1">
-                <a:solidFill>
-                  <a:srgbClr val="2E8B57"/>
-                </a:solidFill>
-                <a:latin typeface="Calibri"/>
-                <a:ea typeface="Calibri"/>
-                <a:cs typeface="Calibri"/>
-              </a:defRPr>
-            </a:pPr>
-            <a:r>
-              <a:rPr sz="1800" b="1">
-                <a:solidFill>
-                  <a:srgbClr val="2E8B57"/>
-                </a:solidFill>
-                <a:latin typeface="Calibri"/>
-                <a:ea typeface="Calibri"/>
-                <a:cs typeface="Calibri"/>
-              </a:rPr>
-              <a:t>BOUNDED AGENT</a:t>
-            </a:r>
-          </a:p>
-        </p:txBody>
-      </p:sp>
-      <p:sp>
-        <p:nvSpPr>
-          <p:cNvPr id="10" name="">
-            <a:extLst xmlns:a="http://schemas.openxmlformats.org/drawingml/2006/main">
-              <a:ext uri="{FF2B5EF4-FFF2-40B4-BE49-F238E27FC236}">
-                <a16:creationId xmlns:a16="http://schemas.microsoft.com/office/drawing/2014/main" id="{562A6E03-2E74-4AA0-BC40-D36976B59F68}"/>
-              </a:ext>
-            </a:extLst>
-          </p:cNvPr>
-          <p:cNvSpPr>
-            <a:spLocks xmlns:a="http://schemas.openxmlformats.org/drawingml/2006/main" noGrp="1"/>
-          </p:cNvSpPr>
-          <p:nvPr/>
-        </p:nvSpPr>
-        <p:spPr>
-          <a:xfrm xmlns:a="http://schemas.openxmlformats.org/drawingml/2006/main">
-            <a:off x="7334250" y="2800350"/>
-            <a:ext cx="2152650" cy="609600"/>
-          </a:xfrm>
-          <a:prstGeom xmlns:a="http://schemas.openxmlformats.org/drawingml/2006/main" prst="roundRect">
-            <a:avLst>
-              <a:gd name="adj" fmla="val 3125"/>
-            </a:avLst>
-          </a:prstGeom>
-          <a:solidFill xmlns:a="http://schemas.openxmlformats.org/drawingml/2006/main">
-            <a:srgbClr val="E8F7EE"/>
-          </a:solidFill>
-          <a:ln xmlns:a="http://schemas.openxmlformats.org/drawingml/2006/main" w="9525">
-            <a:solidFill>
-              <a:srgbClr val="FFFFFF"/>
-            </a:solidFill>
-            <a:prstDash val="solid"/>
-          </a:ln>
-        </p:spPr>
-      </p:sp>
-      <p:sp>
-        <p:nvSpPr>
-          <p:cNvPr id="11" name="">
-            <a:extLst xmlns:a="http://schemas.openxmlformats.org/drawingml/2006/main">
-              <a:ext uri="{FF2B5EF4-FFF2-40B4-BE49-F238E27FC236}">
-                <a16:creationId xmlns:a16="http://schemas.microsoft.com/office/drawing/2014/main" id="{44E18B6A-26EA-404D-8004-B4AEFB1AC04F}"/>
-              </a:ext>
-            </a:extLst>
-          </p:cNvPr>
-          <p:cNvSpPr>
-            <a:spLocks xmlns:a="http://schemas.openxmlformats.org/drawingml/2006/main" noGrp="1"/>
-          </p:cNvSpPr>
-          <p:nvPr/>
-        </p:nvSpPr>
-        <p:spPr>
-          <a:xfrm xmlns:a="http://schemas.openxmlformats.org/drawingml/2006/main">
-            <a:off x="7448550" y="2905125"/>
-            <a:ext cx="1924050" cy="400050"/>
-          </a:xfrm>
-          <a:prstGeom xmlns:a="http://schemas.openxmlformats.org/drawingml/2006/main" prst="rect">
-            <a:avLst/>
-          </a:prstGeom>
-          <a:noFill xmlns:a="http://schemas.openxmlformats.org/drawingml/2006/main"/>
-          <a:ln xmlns:a="http://schemas.openxmlformats.org/drawingml/2006/main" w="0">
-            <a:noFill/>
-            <a:prstDash val="solid"/>
-          </a:ln>
-        </p:spPr>
-        <p:txBody>
-          <a:bodyPr xmlns:a="http://schemas.openxmlformats.org/drawingml/2006/main" wrap="square" lIns="0" tIns="0" rIns="0" bIns="0" anchor="ctr">
-            <a:noAutofit/>
-          </a:bodyPr>
-          <a:lstStyle xmlns:a="http://schemas.openxmlformats.org/drawingml/2006/main"/>
-          <a:p xmlns:a="http://schemas.openxmlformats.org/drawingml/2006/main">
-            <a:pPr algn="l">
-              <a:lnSpc>
-                <a:spcPct val="100000"/>
-              </a:lnSpc>
-              <a:buNone/>
-              <a:defRPr sz="1350" b="1">
-                <a:solidFill>
-                  <a:srgbClr val="051C2A"/>
-                </a:solidFill>
-                <a:latin typeface="Calibri"/>
-                <a:ea typeface="Calibri"/>
-                <a:cs typeface="Calibri"/>
-              </a:defRPr>
-            </a:pPr>
-            <a:r>
-              <a:rPr sz="1800" b="1">
-                <a:solidFill>
-                  <a:srgbClr val="051C2A"/>
-                </a:solidFill>
-                <a:latin typeface="Calibri"/>
-                <a:ea typeface="Calibri"/>
-                <a:cs typeface="Calibri"/>
-              </a:rPr>
-              <a:t>Test</a:t>
-            </a:r>
-          </a:p>
-        </p:txBody>
-      </p:sp>
-      <p:sp>
-        <p:nvSpPr>
-          <p:cNvPr id="12" name="">
-            <a:extLst xmlns:a="http://schemas.openxmlformats.org/drawingml/2006/main">
-              <a:ext uri="{FF2B5EF4-FFF2-40B4-BE49-F238E27FC236}">
-                <a16:creationId xmlns:a16="http://schemas.microsoft.com/office/drawing/2014/main" id="{4F7E5910-AC18-40D2-B2F3-6FC1F08D1B7D}"/>
-              </a:ext>
-            </a:extLst>
-          </p:cNvPr>
-          <p:cNvSpPr>
-            <a:spLocks xmlns:a="http://schemas.openxmlformats.org/drawingml/2006/main" noGrp="1"/>
-          </p:cNvSpPr>
-          <p:nvPr/>
-        </p:nvSpPr>
-        <p:spPr>
-          <a:xfrm xmlns:a="http://schemas.openxmlformats.org/drawingml/2006/main">
-            <a:off x="9544050" y="2800350"/>
-            <a:ext cx="1962150" cy="609600"/>
-          </a:xfrm>
-          <a:prstGeom xmlns:a="http://schemas.openxmlformats.org/drawingml/2006/main" prst="roundRect">
-            <a:avLst>
-              <a:gd name="adj" fmla="val 3125"/>
-            </a:avLst>
-          </a:prstGeom>
-          <a:solidFill xmlns:a="http://schemas.openxmlformats.org/drawingml/2006/main">
-            <a:srgbClr val="E8F7EE"/>
-          </a:solidFill>
-          <a:ln xmlns:a="http://schemas.openxmlformats.org/drawingml/2006/main" w="9525">
-            <a:solidFill>
-              <a:srgbClr val="FFFFFF"/>
-            </a:solidFill>
-            <a:prstDash val="solid"/>
-          </a:ln>
-        </p:spPr>
-      </p:sp>
-      <p:sp>
-        <p:nvSpPr>
-          <p:cNvPr id="13" name="">
-            <a:extLst xmlns:a="http://schemas.openxmlformats.org/drawingml/2006/main">
-              <a:ext uri="{FF2B5EF4-FFF2-40B4-BE49-F238E27FC236}">
-                <a16:creationId xmlns:a16="http://schemas.microsoft.com/office/drawing/2014/main" id="{664DBD99-75A2-4F76-80D2-886026B31195}"/>
-              </a:ext>
-            </a:extLst>
-          </p:cNvPr>
-          <p:cNvSpPr>
-            <a:spLocks xmlns:a="http://schemas.openxmlformats.org/drawingml/2006/main" noGrp="1"/>
-          </p:cNvSpPr>
-          <p:nvPr/>
-        </p:nvSpPr>
-        <p:spPr>
-          <a:xfrm xmlns:a="http://schemas.openxmlformats.org/drawingml/2006/main">
-            <a:off x="9658350" y="2905125"/>
-            <a:ext cx="1733550" cy="400050"/>
-          </a:xfrm>
-          <a:prstGeom xmlns:a="http://schemas.openxmlformats.org/drawingml/2006/main" prst="rect">
-            <a:avLst/>
-          </a:prstGeom>
-          <a:noFill xmlns:a="http://schemas.openxmlformats.org/drawingml/2006/main"/>
-          <a:ln xmlns:a="http://schemas.openxmlformats.org/drawingml/2006/main" w="0">
-            <a:noFill/>
-            <a:prstDash val="solid"/>
-          </a:ln>
-        </p:spPr>
-        <p:txBody>
-          <a:bodyPr xmlns:a="http://schemas.openxmlformats.org/drawingml/2006/main" wrap="square" lIns="0" tIns="0" rIns="0" bIns="0" anchor="ctr">
-            <a:noAutofit/>
-          </a:bodyPr>
-          <a:lstStyle xmlns:a="http://schemas.openxmlformats.org/drawingml/2006/main"/>
-          <a:p xmlns:a="http://schemas.openxmlformats.org/drawingml/2006/main">
-            <a:pPr algn="l">
-              <a:lnSpc>
-                <a:spcPct val="100000"/>
-              </a:lnSpc>
-              <a:buNone/>
-              <a:defRPr sz="1350" b="1">
-                <a:solidFill>
-                  <a:srgbClr val="051C2A"/>
-                </a:solidFill>
-                <a:latin typeface="Calibri"/>
-                <a:ea typeface="Calibri"/>
-                <a:cs typeface="Calibri"/>
-              </a:defRPr>
-            </a:pPr>
-            <a:r>
-              <a:rPr sz="1800" b="1">
-                <a:solidFill>
-                  <a:srgbClr val="051C2A"/>
-                </a:solidFill>
-                <a:latin typeface="Calibri"/>
-                <a:ea typeface="Calibri"/>
-                <a:cs typeface="Calibri"/>
-              </a:rPr>
-              <a:t>Workflow</a:t>
-            </a:r>
-          </a:p>
-        </p:txBody>
-      </p:sp>
-      <p:sp>
-        <p:nvSpPr>
-          <p:cNvPr id="14" name="">
-            <a:extLst xmlns:a="http://schemas.openxmlformats.org/drawingml/2006/main">
-              <a:ext uri="{FF2B5EF4-FFF2-40B4-BE49-F238E27FC236}">
-                <a16:creationId xmlns:a16="http://schemas.microsoft.com/office/drawing/2014/main" id="{90461F5A-F082-42F4-BA7B-33237B017D96}"/>
-              </a:ext>
-            </a:extLst>
-          </p:cNvPr>
-          <p:cNvSpPr>
-            <a:spLocks xmlns:a="http://schemas.openxmlformats.org/drawingml/2006/main" noGrp="1"/>
-          </p:cNvSpPr>
-          <p:nvPr/>
-        </p:nvSpPr>
-        <p:spPr>
-          <a:xfrm xmlns:a="http://schemas.openxmlformats.org/drawingml/2006/main">
-            <a:off x="11563350" y="2800350"/>
-            <a:ext cx="2571750" cy="609600"/>
-          </a:xfrm>
-          <a:prstGeom xmlns:a="http://schemas.openxmlformats.org/drawingml/2006/main" prst="roundRect">
-            <a:avLst>
-              <a:gd name="adj" fmla="val 3125"/>
-            </a:avLst>
-          </a:prstGeom>
-          <a:solidFill xmlns:a="http://schemas.openxmlformats.org/drawingml/2006/main">
-            <a:srgbClr val="E8F7EE"/>
-          </a:solidFill>
-          <a:ln xmlns:a="http://schemas.openxmlformats.org/drawingml/2006/main" w="9525">
-            <a:solidFill>
-              <a:srgbClr val="FFFFFF"/>
-            </a:solidFill>
-            <a:prstDash val="solid"/>
-          </a:ln>
-        </p:spPr>
-      </p:sp>
-      <p:sp>
-        <p:nvSpPr>
-          <p:cNvPr id="15" name="">
-            <a:extLst xmlns:a="http://schemas.openxmlformats.org/drawingml/2006/main">
-              <a:ext uri="{FF2B5EF4-FFF2-40B4-BE49-F238E27FC236}">
-                <a16:creationId xmlns:a16="http://schemas.microsoft.com/office/drawing/2014/main" id="{26A70624-C8CA-468D-98D9-3780748870C7}"/>
-              </a:ext>
-            </a:extLst>
-          </p:cNvPr>
-          <p:cNvSpPr>
-            <a:spLocks xmlns:a="http://schemas.openxmlformats.org/drawingml/2006/main" noGrp="1"/>
-          </p:cNvSpPr>
-          <p:nvPr/>
-        </p:nvSpPr>
-        <p:spPr>
-          <a:xfrm xmlns:a="http://schemas.openxmlformats.org/drawingml/2006/main">
-            <a:off x="11677650" y="2905125"/>
-            <a:ext cx="2343150" cy="400050"/>
-          </a:xfrm>
-          <a:prstGeom xmlns:a="http://schemas.openxmlformats.org/drawingml/2006/main" prst="rect">
-            <a:avLst/>
-          </a:prstGeom>
-          <a:noFill xmlns:a="http://schemas.openxmlformats.org/drawingml/2006/main"/>
-          <a:ln xmlns:a="http://schemas.openxmlformats.org/drawingml/2006/main" w="0">
-            <a:noFill/>
-            <a:prstDash val="solid"/>
-          </a:ln>
-        </p:spPr>
-        <p:txBody>
-          <a:bodyPr xmlns:a="http://schemas.openxmlformats.org/drawingml/2006/main" wrap="square" lIns="0" tIns="0" rIns="0" bIns="0" anchor="ctr">
-            <a:noAutofit/>
-          </a:bodyPr>
-          <a:lstStyle xmlns:a="http://schemas.openxmlformats.org/drawingml/2006/main"/>
-          <a:p xmlns:a="http://schemas.openxmlformats.org/drawingml/2006/main">
-            <a:pPr algn="l">
-              <a:lnSpc>
-                <a:spcPct val="100000"/>
-              </a:lnSpc>
-              <a:buNone/>
-              <a:defRPr sz="1350" b="1">
-                <a:solidFill>
-                  <a:srgbClr val="051C2A"/>
-                </a:solidFill>
-                <a:latin typeface="Calibri"/>
-                <a:ea typeface="Calibri"/>
-                <a:cs typeface="Calibri"/>
-              </a:defRPr>
-            </a:pPr>
-            <a:r>
-              <a:rPr sz="1800" b="1">
-                <a:solidFill>
-                  <a:srgbClr val="051C2A"/>
-                </a:solidFill>
-                <a:latin typeface="Calibri"/>
-                <a:ea typeface="Calibri"/>
-                <a:cs typeface="Calibri"/>
-              </a:rPr>
-              <a:t>Agent</a:t>
-            </a:r>
-          </a:p>
-        </p:txBody>
-      </p:sp>
-      <p:sp>
-        <p:nvSpPr>
-          <p:cNvPr id="16" name="">
-            <a:extLst xmlns:a="http://schemas.openxmlformats.org/drawingml/2006/main">
-              <a:ext uri="{FF2B5EF4-FFF2-40B4-BE49-F238E27FC236}">
-                <a16:creationId xmlns:a16="http://schemas.microsoft.com/office/drawing/2014/main" id="{D403A85A-2DFF-4A0D-A0C0-99283CEFD139}"/>
-              </a:ext>
-            </a:extLst>
-          </p:cNvPr>
-          <p:cNvSpPr>
-            <a:spLocks xmlns:a="http://schemas.openxmlformats.org/drawingml/2006/main" noGrp="1"/>
-          </p:cNvSpPr>
-          <p:nvPr/>
-        </p:nvSpPr>
-        <p:spPr>
-          <a:xfrm xmlns:a="http://schemas.openxmlformats.org/drawingml/2006/main">
-            <a:off x="7334250" y="3448050"/>
-            <a:ext cx="2152650" cy="666750"/>
-          </a:xfrm>
-          <a:prstGeom xmlns:a="http://schemas.openxmlformats.org/drawingml/2006/main" prst="roundRect">
-            <a:avLst>
-              <a:gd name="adj" fmla="val 2857"/>
-            </a:avLst>
-          </a:prstGeom>
-          <a:solidFill xmlns:a="http://schemas.openxmlformats.org/drawingml/2006/main">
-            <a:srgbClr val="F7FBF8"/>
-          </a:solidFill>
-          <a:ln xmlns:a="http://schemas.openxmlformats.org/drawingml/2006/main" w="9525">
-            <a:solidFill>
-              <a:srgbClr val="FFFFFF"/>
-            </a:solidFill>
-            <a:prstDash val="solid"/>
-          </a:ln>
-        </p:spPr>
-      </p:sp>
-      <p:sp>
-        <p:nvSpPr>
-          <p:cNvPr id="17" name="">
-            <a:extLst xmlns:a="http://schemas.openxmlformats.org/drawingml/2006/main">
-              <a:ext uri="{FF2B5EF4-FFF2-40B4-BE49-F238E27FC236}">
-                <a16:creationId xmlns:a16="http://schemas.microsoft.com/office/drawing/2014/main" id="{91684354-1A30-417B-8AE7-ECA5F6B039A6}"/>
-              </a:ext>
-            </a:extLst>
-          </p:cNvPr>
-          <p:cNvSpPr>
-            <a:spLocks xmlns:a="http://schemas.openxmlformats.org/drawingml/2006/main" noGrp="1"/>
-          </p:cNvSpPr>
-          <p:nvPr/>
-        </p:nvSpPr>
-        <p:spPr>
-          <a:xfrm xmlns:a="http://schemas.openxmlformats.org/drawingml/2006/main">
-            <a:off x="7448550" y="3562350"/>
-            <a:ext cx="1924050" cy="419100"/>
+                <a:latin typeface="Calibri"/>
+                <a:ea typeface="Calibri"/>
+                <a:cs typeface="Calibri"/>
+              </a:rPr>
+              <a:t>If you can draw every step before the run, use a workflow.</a:t>
+            </a:r>
+          </a:p>
+        </p:txBody>
+      </p:sp>
+      <p:sp>
+        <p:nvSpPr>
+          <p:cNvPr id="28" name="">
+            <a:extLst xmlns:a="http://schemas.openxmlformats.org/drawingml/2006/main">
+              <a:ext uri="{FF2B5EF4-FFF2-40B4-BE49-F238E27FC236}">
+                <a16:creationId xmlns:a16="http://schemas.microsoft.com/office/drawing/2014/main" id="{685F2AAD-81FC-436A-88F7-89F49C9F1671}"/>
+              </a:ext>
+            </a:extLst>
+          </p:cNvPr>
+          <p:cNvSpPr>
+            <a:spLocks xmlns:a="http://schemas.openxmlformats.org/drawingml/2006/main" noGrp="1"/>
+          </p:cNvSpPr>
+          <p:nvPr/>
+        </p:nvSpPr>
+        <p:spPr>
+          <a:xfrm xmlns:a="http://schemas.openxmlformats.org/drawingml/2006/main">
+            <a:off x="1885950" y="6838950"/>
+            <a:ext cx="4476750" cy="323850"/>
           </a:xfrm>
           <a:prstGeom xmlns:a="http://schemas.openxmlformats.org/drawingml/2006/main" prst="rect">
             <a:avLst/>
@@ -5452,87 +5435,52 @@
           </a:bodyPr>
           <a:lstStyle xmlns:a="http://schemas.openxmlformats.org/drawingml/2006/main"/>
           <a:p xmlns:a="http://schemas.openxmlformats.org/drawingml/2006/main">
-            <a:pPr algn="l">
-              <a:lnSpc>
-                <a:spcPct val="100000"/>
-              </a:lnSpc>
-              <a:buNone/>
-              <a:defRPr sz="1425" b="0">
-                <a:solidFill>
-                  <a:srgbClr val="051C2A"/>
-                </a:solidFill>
-                <a:latin typeface="Calibri"/>
-                <a:ea typeface="Calibri"/>
-                <a:cs typeface="Calibri"/>
-              </a:defRPr>
-            </a:pPr>
-            <a:r>
-              <a:rPr sz="1425" b="0">
-                <a:solidFill>
-                  <a:srgbClr val="051C2A"/>
-                </a:solidFill>
-                <a:latin typeface="Calibri"/>
-                <a:ea typeface="Calibri"/>
-                <a:cs typeface="Calibri"/>
-              </a:rPr>
-              <a:t>Path known?</a:t>
-            </a:r>
-          </a:p>
-        </p:txBody>
-      </p:sp>
-      <p:sp>
-        <p:nvSpPr>
-          <p:cNvPr id="18" name="">
-            <a:extLst xmlns:a="http://schemas.openxmlformats.org/drawingml/2006/main">
-              <a:ext uri="{FF2B5EF4-FFF2-40B4-BE49-F238E27FC236}">
-                <a16:creationId xmlns:a16="http://schemas.microsoft.com/office/drawing/2014/main" id="{65B55295-3DA8-457F-83F0-53BB6A03876C}"/>
-              </a:ext>
-            </a:extLst>
-          </p:cNvPr>
-          <p:cNvSpPr>
-            <a:spLocks xmlns:a="http://schemas.openxmlformats.org/drawingml/2006/main" noGrp="1"/>
-          </p:cNvSpPr>
-          <p:nvPr/>
-        </p:nvSpPr>
-        <p:spPr>
-          <a:xfrm xmlns:a="http://schemas.openxmlformats.org/drawingml/2006/main">
-            <a:off x="9544050" y="3448050"/>
-            <a:ext cx="1962150" cy="666750"/>
-          </a:xfrm>
-          <a:prstGeom xmlns:a="http://schemas.openxmlformats.org/drawingml/2006/main" prst="roundRect">
-            <a:avLst>
-              <a:gd name="adj" fmla="val 2857"/>
-            </a:avLst>
-          </a:prstGeom>
-          <a:solidFill xmlns:a="http://schemas.openxmlformats.org/drawingml/2006/main">
-            <a:srgbClr val="F7FBF8"/>
-          </a:solidFill>
-          <a:ln xmlns:a="http://schemas.openxmlformats.org/drawingml/2006/main" w="9525">
-            <a:solidFill>
-              <a:srgbClr val="FFFFFF"/>
-            </a:solidFill>
-            <a:prstDash val="solid"/>
-          </a:ln>
-        </p:spPr>
-      </p:sp>
-      <p:sp>
-        <p:nvSpPr>
-          <p:cNvPr id="19" name="">
-            <a:extLst xmlns:a="http://schemas.openxmlformats.org/drawingml/2006/main">
-              <a:ext uri="{FF2B5EF4-FFF2-40B4-BE49-F238E27FC236}">
-                <a16:creationId xmlns:a16="http://schemas.microsoft.com/office/drawing/2014/main" id="{3A696DF8-2386-42C4-91BD-18AC99A2924A}"/>
-              </a:ext>
-            </a:extLst>
-          </p:cNvPr>
-          <p:cNvSpPr>
-            <a:spLocks xmlns:a="http://schemas.openxmlformats.org/drawingml/2006/main" noGrp="1"/>
-          </p:cNvSpPr>
-          <p:nvPr/>
-        </p:nvSpPr>
-        <p:spPr>
-          <a:xfrm xmlns:a="http://schemas.openxmlformats.org/drawingml/2006/main">
-            <a:off x="9658350" y="3562350"/>
-            <a:ext cx="1733550" cy="419100"/>
+            <a:pPr algn="ctr">
+              <a:lnSpc>
+                <a:spcPct val="100000"/>
+              </a:lnSpc>
+              <a:buNone/>
+              <a:defRPr sz="1500" b="0">
+                <a:solidFill>
+                  <a:srgbClr val="64748B"/>
+                </a:solidFill>
+                <a:latin typeface="Calibri"/>
+                <a:ea typeface="Calibri"/>
+                <a:cs typeface="Calibri"/>
+              </a:defRPr>
+            </a:pPr>
+            <a:r>
+              <a:rPr sz="1500" b="0">
+                <a:solidFill>
+                  <a:srgbClr val="64748B"/>
+                </a:solidFill>
+                <a:latin typeface="Calibri"/>
+                <a:ea typeface="Calibri"/>
+                <a:cs typeface="Calibri"/>
+              </a:rPr>
+              <a:t>Agent: Chosen after each result</a:t>
+            </a:r>
+          </a:p>
+        </p:txBody>
+      </p:sp>
+      <p:sp>
+        <p:nvSpPr>
+          <p:cNvPr id="29" name="">
+            <a:extLst xmlns:a="http://schemas.openxmlformats.org/drawingml/2006/main">
+              <a:ext uri="{FF2B5EF4-FFF2-40B4-BE49-F238E27FC236}">
+                <a16:creationId xmlns:a16="http://schemas.microsoft.com/office/drawing/2014/main" id="{CDE04AD7-6CBE-4792-B549-765578FB3E1E}"/>
+              </a:ext>
+            </a:extLst>
+          </p:cNvPr>
+          <p:cNvSpPr>
+            <a:spLocks xmlns:a="http://schemas.openxmlformats.org/drawingml/2006/main" noGrp="1"/>
+          </p:cNvSpPr>
+          <p:nvPr/>
+        </p:nvSpPr>
+        <p:spPr>
+          <a:xfrm xmlns:a="http://schemas.openxmlformats.org/drawingml/2006/main">
+            <a:off x="8801100" y="6838950"/>
+            <a:ext cx="4762500" cy="323850"/>
           </a:xfrm>
           <a:prstGeom xmlns:a="http://schemas.openxmlformats.org/drawingml/2006/main" prst="rect">
             <a:avLst/>
@@ -5549,502 +5497,52 @@
           </a:bodyPr>
           <a:lstStyle xmlns:a="http://schemas.openxmlformats.org/drawingml/2006/main"/>
           <a:p xmlns:a="http://schemas.openxmlformats.org/drawingml/2006/main">
-            <a:pPr algn="l">
-              <a:lnSpc>
-                <a:spcPct val="100000"/>
-              </a:lnSpc>
-              <a:buNone/>
-              <a:defRPr sz="1425" b="0">
-                <a:solidFill>
-                  <a:srgbClr val="051C2A"/>
-                </a:solidFill>
-                <a:latin typeface="Calibri"/>
-                <a:ea typeface="Calibri"/>
-                <a:cs typeface="Calibri"/>
-              </a:defRPr>
-            </a:pPr>
-            <a:r>
-              <a:rPr sz="1425" b="0">
-                <a:solidFill>
-                  <a:srgbClr val="051C2A"/>
-                </a:solidFill>
-                <a:latin typeface="Calibri"/>
-                <a:ea typeface="Calibri"/>
-                <a:cs typeface="Calibri"/>
-              </a:rPr>
-              <a:t>yes</a:t>
-            </a:r>
-          </a:p>
-        </p:txBody>
-      </p:sp>
-      <p:sp>
-        <p:nvSpPr>
-          <p:cNvPr id="20" name="">
-            <a:extLst xmlns:a="http://schemas.openxmlformats.org/drawingml/2006/main">
-              <a:ext uri="{FF2B5EF4-FFF2-40B4-BE49-F238E27FC236}">
-                <a16:creationId xmlns:a16="http://schemas.microsoft.com/office/drawing/2014/main" id="{E339A1A9-4564-4056-8CDC-CEDB497A7AD1}"/>
-              </a:ext>
-            </a:extLst>
-          </p:cNvPr>
-          <p:cNvSpPr>
-            <a:spLocks xmlns:a="http://schemas.openxmlformats.org/drawingml/2006/main" noGrp="1"/>
-          </p:cNvSpPr>
-          <p:nvPr/>
-        </p:nvSpPr>
-        <p:spPr>
-          <a:xfrm xmlns:a="http://schemas.openxmlformats.org/drawingml/2006/main">
-            <a:off x="11563350" y="3448050"/>
-            <a:ext cx="2571750" cy="666750"/>
-          </a:xfrm>
-          <a:prstGeom xmlns:a="http://schemas.openxmlformats.org/drawingml/2006/main" prst="roundRect">
-            <a:avLst>
-              <a:gd name="adj" fmla="val 2857"/>
-            </a:avLst>
-          </a:prstGeom>
-          <a:solidFill xmlns:a="http://schemas.openxmlformats.org/drawingml/2006/main">
-            <a:srgbClr val="F7FBF8"/>
-          </a:solidFill>
-          <a:ln xmlns:a="http://schemas.openxmlformats.org/drawingml/2006/main" w="9525">
-            <a:solidFill>
-              <a:srgbClr val="FFFFFF"/>
-            </a:solidFill>
-            <a:prstDash val="solid"/>
-          </a:ln>
-        </p:spPr>
-      </p:sp>
-      <p:sp>
-        <p:nvSpPr>
-          <p:cNvPr id="21" name="">
-            <a:extLst xmlns:a="http://schemas.openxmlformats.org/drawingml/2006/main">
-              <a:ext uri="{FF2B5EF4-FFF2-40B4-BE49-F238E27FC236}">
-                <a16:creationId xmlns:a16="http://schemas.microsoft.com/office/drawing/2014/main" id="{9BC725B4-5DC5-4222-B581-EB84BE90E77A}"/>
-              </a:ext>
-            </a:extLst>
-          </p:cNvPr>
-          <p:cNvSpPr>
-            <a:spLocks xmlns:a="http://schemas.openxmlformats.org/drawingml/2006/main" noGrp="1"/>
-          </p:cNvSpPr>
-          <p:nvPr/>
-        </p:nvSpPr>
-        <p:spPr>
-          <a:xfrm xmlns:a="http://schemas.openxmlformats.org/drawingml/2006/main">
-            <a:off x="11677650" y="3562350"/>
-            <a:ext cx="2343150" cy="419100"/>
-          </a:xfrm>
-          <a:prstGeom xmlns:a="http://schemas.openxmlformats.org/drawingml/2006/main" prst="rect">
-            <a:avLst/>
-          </a:prstGeom>
-          <a:noFill xmlns:a="http://schemas.openxmlformats.org/drawingml/2006/main"/>
-          <a:ln xmlns:a="http://schemas.openxmlformats.org/drawingml/2006/main" w="0">
-            <a:noFill/>
-            <a:prstDash val="solid"/>
-          </a:ln>
-        </p:spPr>
-        <p:txBody>
-          <a:bodyPr xmlns:a="http://schemas.openxmlformats.org/drawingml/2006/main" wrap="square" lIns="0" tIns="0" rIns="0" bIns="0" anchor="ctr">
-            <a:normAutofit fontScale="100000"/>
-          </a:bodyPr>
-          <a:lstStyle xmlns:a="http://schemas.openxmlformats.org/drawingml/2006/main"/>
-          <a:p xmlns:a="http://schemas.openxmlformats.org/drawingml/2006/main">
-            <a:pPr algn="l">
-              <a:lnSpc>
-                <a:spcPct val="100000"/>
-              </a:lnSpc>
-              <a:buNone/>
-              <a:defRPr sz="1425" b="0">
-                <a:solidFill>
-                  <a:srgbClr val="051C2A"/>
-                </a:solidFill>
-                <a:latin typeface="Calibri"/>
-                <a:ea typeface="Calibri"/>
-                <a:cs typeface="Calibri"/>
-              </a:defRPr>
-            </a:pPr>
-            <a:r>
-              <a:rPr sz="1425" b="0">
-                <a:solidFill>
-                  <a:srgbClr val="051C2A"/>
-                </a:solidFill>
-                <a:latin typeface="Calibri"/>
-                <a:ea typeface="Calibri"/>
-                <a:cs typeface="Calibri"/>
-              </a:rPr>
-              <a:t>not yet</a:t>
-            </a:r>
-          </a:p>
-        </p:txBody>
-      </p:sp>
-      <p:sp>
-        <p:nvSpPr>
-          <p:cNvPr id="22" name="">
-            <a:extLst xmlns:a="http://schemas.openxmlformats.org/drawingml/2006/main">
-              <a:ext uri="{FF2B5EF4-FFF2-40B4-BE49-F238E27FC236}">
-                <a16:creationId xmlns:a16="http://schemas.microsoft.com/office/drawing/2014/main" id="{0D160DDC-C4FB-4932-B81B-093415961B73}"/>
-              </a:ext>
-            </a:extLst>
-          </p:cNvPr>
-          <p:cNvSpPr>
-            <a:spLocks xmlns:a="http://schemas.openxmlformats.org/drawingml/2006/main" noGrp="1"/>
-          </p:cNvSpPr>
-          <p:nvPr/>
-        </p:nvSpPr>
-        <p:spPr>
-          <a:xfrm xmlns:a="http://schemas.openxmlformats.org/drawingml/2006/main">
-            <a:off x="7334250" y="4171950"/>
-            <a:ext cx="2152650" cy="666750"/>
-          </a:xfrm>
-          <a:prstGeom xmlns:a="http://schemas.openxmlformats.org/drawingml/2006/main" prst="roundRect">
-            <a:avLst>
-              <a:gd name="adj" fmla="val 2857"/>
-            </a:avLst>
-          </a:prstGeom>
-          <a:solidFill xmlns:a="http://schemas.openxmlformats.org/drawingml/2006/main">
-            <a:srgbClr val="F7FBF8"/>
-          </a:solidFill>
-          <a:ln xmlns:a="http://schemas.openxmlformats.org/drawingml/2006/main" w="9525">
-            <a:solidFill>
-              <a:srgbClr val="FFFFFF"/>
-            </a:solidFill>
-            <a:prstDash val="solid"/>
-          </a:ln>
-        </p:spPr>
-      </p:sp>
-      <p:sp>
-        <p:nvSpPr>
-          <p:cNvPr id="23" name="">
-            <a:extLst xmlns:a="http://schemas.openxmlformats.org/drawingml/2006/main">
-              <a:ext uri="{FF2B5EF4-FFF2-40B4-BE49-F238E27FC236}">
-                <a16:creationId xmlns:a16="http://schemas.microsoft.com/office/drawing/2014/main" id="{328C8390-620E-4337-B177-E20E16662614}"/>
-              </a:ext>
-            </a:extLst>
-          </p:cNvPr>
-          <p:cNvSpPr>
-            <a:spLocks xmlns:a="http://schemas.openxmlformats.org/drawingml/2006/main" noGrp="1"/>
-          </p:cNvSpPr>
-          <p:nvPr/>
-        </p:nvSpPr>
-        <p:spPr>
-          <a:xfrm xmlns:a="http://schemas.openxmlformats.org/drawingml/2006/main">
-            <a:off x="7448550" y="4286250"/>
-            <a:ext cx="1924050" cy="419100"/>
-          </a:xfrm>
-          <a:prstGeom xmlns:a="http://schemas.openxmlformats.org/drawingml/2006/main" prst="rect">
-            <a:avLst/>
-          </a:prstGeom>
-          <a:noFill xmlns:a="http://schemas.openxmlformats.org/drawingml/2006/main"/>
-          <a:ln xmlns:a="http://schemas.openxmlformats.org/drawingml/2006/main" w="0">
-            <a:noFill/>
-            <a:prstDash val="solid"/>
-          </a:ln>
-        </p:spPr>
-        <p:txBody>
-          <a:bodyPr xmlns:a="http://schemas.openxmlformats.org/drawingml/2006/main" wrap="square" lIns="0" tIns="0" rIns="0" bIns="0" anchor="ctr">
-            <a:normAutofit fontScale="100000"/>
-          </a:bodyPr>
-          <a:lstStyle xmlns:a="http://schemas.openxmlformats.org/drawingml/2006/main"/>
-          <a:p xmlns:a="http://schemas.openxmlformats.org/drawingml/2006/main">
-            <a:pPr algn="l">
-              <a:lnSpc>
-                <a:spcPct val="100000"/>
-              </a:lnSpc>
-              <a:buNone/>
-              <a:defRPr sz="1425" b="0">
-                <a:solidFill>
-                  <a:srgbClr val="051C2A"/>
-                </a:solidFill>
-                <a:latin typeface="Calibri"/>
-                <a:ea typeface="Calibri"/>
-                <a:cs typeface="Calibri"/>
-              </a:defRPr>
-            </a:pPr>
-            <a:r>
-              <a:rPr sz="1425" b="0">
-                <a:solidFill>
-                  <a:srgbClr val="051C2A"/>
-                </a:solidFill>
-                <a:latin typeface="Calibri"/>
-                <a:ea typeface="Calibri"/>
-                <a:cs typeface="Calibri"/>
-              </a:rPr>
-              <a:t>Tool choice</a:t>
-            </a:r>
-          </a:p>
-        </p:txBody>
-      </p:sp>
-      <p:sp>
-        <p:nvSpPr>
-          <p:cNvPr id="24" name="">
-            <a:extLst xmlns:a="http://schemas.openxmlformats.org/drawingml/2006/main">
-              <a:ext uri="{FF2B5EF4-FFF2-40B4-BE49-F238E27FC236}">
-                <a16:creationId xmlns:a16="http://schemas.microsoft.com/office/drawing/2014/main" id="{78123193-7BA4-459F-B618-D3AB37E4EFEA}"/>
-              </a:ext>
-            </a:extLst>
-          </p:cNvPr>
-          <p:cNvSpPr>
-            <a:spLocks xmlns:a="http://schemas.openxmlformats.org/drawingml/2006/main" noGrp="1"/>
-          </p:cNvSpPr>
-          <p:nvPr/>
-        </p:nvSpPr>
-        <p:spPr>
-          <a:xfrm xmlns:a="http://schemas.openxmlformats.org/drawingml/2006/main">
-            <a:off x="9544050" y="4171950"/>
-            <a:ext cx="1962150" cy="666750"/>
-          </a:xfrm>
-          <a:prstGeom xmlns:a="http://schemas.openxmlformats.org/drawingml/2006/main" prst="roundRect">
-            <a:avLst>
-              <a:gd name="adj" fmla="val 2857"/>
-            </a:avLst>
-          </a:prstGeom>
-          <a:solidFill xmlns:a="http://schemas.openxmlformats.org/drawingml/2006/main">
-            <a:srgbClr val="F7FBF8"/>
-          </a:solidFill>
-          <a:ln xmlns:a="http://schemas.openxmlformats.org/drawingml/2006/main" w="9525">
-            <a:solidFill>
-              <a:srgbClr val="FFFFFF"/>
-            </a:solidFill>
-            <a:prstDash val="solid"/>
-          </a:ln>
-        </p:spPr>
-      </p:sp>
-      <p:sp>
-        <p:nvSpPr>
-          <p:cNvPr id="25" name="">
-            <a:extLst xmlns:a="http://schemas.openxmlformats.org/drawingml/2006/main">
-              <a:ext uri="{FF2B5EF4-FFF2-40B4-BE49-F238E27FC236}">
-                <a16:creationId xmlns:a16="http://schemas.microsoft.com/office/drawing/2014/main" id="{CAA33689-B136-4C82-B577-8954D2056B7F}"/>
-              </a:ext>
-            </a:extLst>
-          </p:cNvPr>
-          <p:cNvSpPr>
-            <a:spLocks xmlns:a="http://schemas.openxmlformats.org/drawingml/2006/main" noGrp="1"/>
-          </p:cNvSpPr>
-          <p:nvPr/>
-        </p:nvSpPr>
-        <p:spPr>
-          <a:xfrm xmlns:a="http://schemas.openxmlformats.org/drawingml/2006/main">
-            <a:off x="9658350" y="4286250"/>
-            <a:ext cx="1733550" cy="419100"/>
-          </a:xfrm>
-          <a:prstGeom xmlns:a="http://schemas.openxmlformats.org/drawingml/2006/main" prst="rect">
-            <a:avLst/>
-          </a:prstGeom>
-          <a:noFill xmlns:a="http://schemas.openxmlformats.org/drawingml/2006/main"/>
-          <a:ln xmlns:a="http://schemas.openxmlformats.org/drawingml/2006/main" w="0">
-            <a:noFill/>
-            <a:prstDash val="solid"/>
-          </a:ln>
-        </p:spPr>
-        <p:txBody>
-          <a:bodyPr xmlns:a="http://schemas.openxmlformats.org/drawingml/2006/main" wrap="square" lIns="0" tIns="0" rIns="0" bIns="0" anchor="ctr">
-            <a:normAutofit fontScale="100000"/>
-          </a:bodyPr>
-          <a:lstStyle xmlns:a="http://schemas.openxmlformats.org/drawingml/2006/main"/>
-          <a:p xmlns:a="http://schemas.openxmlformats.org/drawingml/2006/main">
-            <a:pPr algn="l">
-              <a:lnSpc>
-                <a:spcPct val="100000"/>
-              </a:lnSpc>
-              <a:buNone/>
-              <a:defRPr sz="1425" b="0">
-                <a:solidFill>
-                  <a:srgbClr val="051C2A"/>
-                </a:solidFill>
-                <a:latin typeface="Calibri"/>
-                <a:ea typeface="Calibri"/>
-                <a:cs typeface="Calibri"/>
-              </a:defRPr>
-            </a:pPr>
-            <a:r>
-              <a:rPr sz="1425" b="0">
-                <a:solidFill>
-                  <a:srgbClr val="051C2A"/>
-                </a:solidFill>
-                <a:latin typeface="Calibri"/>
-                <a:ea typeface="Calibri"/>
-                <a:cs typeface="Calibri"/>
-              </a:rPr>
-              <a:t>fixed</a:t>
-            </a:r>
-          </a:p>
-        </p:txBody>
-      </p:sp>
-      <p:sp>
-        <p:nvSpPr>
-          <p:cNvPr id="26" name="">
-            <a:extLst xmlns:a="http://schemas.openxmlformats.org/drawingml/2006/main">
-              <a:ext uri="{FF2B5EF4-FFF2-40B4-BE49-F238E27FC236}">
-                <a16:creationId xmlns:a16="http://schemas.microsoft.com/office/drawing/2014/main" id="{BF49AE3A-93EC-4D6A-8CF3-2D01BDBDCB84}"/>
-              </a:ext>
-            </a:extLst>
-          </p:cNvPr>
-          <p:cNvSpPr>
-            <a:spLocks xmlns:a="http://schemas.openxmlformats.org/drawingml/2006/main" noGrp="1"/>
-          </p:cNvSpPr>
-          <p:nvPr/>
-        </p:nvSpPr>
-        <p:spPr>
-          <a:xfrm xmlns:a="http://schemas.openxmlformats.org/drawingml/2006/main">
-            <a:off x="11563350" y="4171950"/>
-            <a:ext cx="2571750" cy="666750"/>
-          </a:xfrm>
-          <a:prstGeom xmlns:a="http://schemas.openxmlformats.org/drawingml/2006/main" prst="roundRect">
-            <a:avLst>
-              <a:gd name="adj" fmla="val 2857"/>
-            </a:avLst>
-          </a:prstGeom>
-          <a:solidFill xmlns:a="http://schemas.openxmlformats.org/drawingml/2006/main">
-            <a:srgbClr val="F7FBF8"/>
-          </a:solidFill>
-          <a:ln xmlns:a="http://schemas.openxmlformats.org/drawingml/2006/main" w="9525">
-            <a:solidFill>
-              <a:srgbClr val="FFFFFF"/>
-            </a:solidFill>
-            <a:prstDash val="solid"/>
-          </a:ln>
-        </p:spPr>
-      </p:sp>
-      <p:sp>
-        <p:nvSpPr>
-          <p:cNvPr id="27" name="">
-            <a:extLst xmlns:a="http://schemas.openxmlformats.org/drawingml/2006/main">
-              <a:ext uri="{FF2B5EF4-FFF2-40B4-BE49-F238E27FC236}">
-                <a16:creationId xmlns:a16="http://schemas.microsoft.com/office/drawing/2014/main" id="{6F772D1E-8248-480D-BA11-3458C9BA2755}"/>
-              </a:ext>
-            </a:extLst>
-          </p:cNvPr>
-          <p:cNvSpPr>
-            <a:spLocks xmlns:a="http://schemas.openxmlformats.org/drawingml/2006/main" noGrp="1"/>
-          </p:cNvSpPr>
-          <p:nvPr/>
-        </p:nvSpPr>
-        <p:spPr>
-          <a:xfrm xmlns:a="http://schemas.openxmlformats.org/drawingml/2006/main">
-            <a:off x="11677650" y="4286250"/>
-            <a:ext cx="2343150" cy="419100"/>
-          </a:xfrm>
-          <a:prstGeom xmlns:a="http://schemas.openxmlformats.org/drawingml/2006/main" prst="rect">
-            <a:avLst/>
-          </a:prstGeom>
-          <a:noFill xmlns:a="http://schemas.openxmlformats.org/drawingml/2006/main"/>
-          <a:ln xmlns:a="http://schemas.openxmlformats.org/drawingml/2006/main" w="0">
-            <a:noFill/>
-            <a:prstDash val="solid"/>
-          </a:ln>
-        </p:spPr>
-        <p:txBody>
-          <a:bodyPr xmlns:a="http://schemas.openxmlformats.org/drawingml/2006/main" wrap="square" lIns="0" tIns="0" rIns="0" bIns="0" anchor="ctr">
-            <a:normAutofit fontScale="100000"/>
-          </a:bodyPr>
-          <a:lstStyle xmlns:a="http://schemas.openxmlformats.org/drawingml/2006/main"/>
-          <a:p xmlns:a="http://schemas.openxmlformats.org/drawingml/2006/main">
-            <a:pPr algn="l">
-              <a:lnSpc>
-                <a:spcPct val="100000"/>
-              </a:lnSpc>
-              <a:buNone/>
-              <a:defRPr sz="1425" b="0">
-                <a:solidFill>
-                  <a:srgbClr val="051C2A"/>
-                </a:solidFill>
-                <a:latin typeface="Calibri"/>
-                <a:ea typeface="Calibri"/>
-                <a:cs typeface="Calibri"/>
-              </a:defRPr>
-            </a:pPr>
-            <a:r>
-              <a:rPr sz="1425" b="0">
-                <a:solidFill>
-                  <a:srgbClr val="051C2A"/>
-                </a:solidFill>
-                <a:latin typeface="Calibri"/>
-                <a:ea typeface="Calibri"/>
-                <a:cs typeface="Calibri"/>
-              </a:rPr>
-              <a:t>after observation</a:t>
-            </a:r>
-          </a:p>
-        </p:txBody>
-      </p:sp>
-      <p:sp>
-        <p:nvSpPr>
-          <p:cNvPr id="28" name="">
-            <a:extLst xmlns:a="http://schemas.openxmlformats.org/drawingml/2006/main">
-              <a:ext uri="{FF2B5EF4-FFF2-40B4-BE49-F238E27FC236}">
-                <a16:creationId xmlns:a16="http://schemas.microsoft.com/office/drawing/2014/main" id="{3EF86CEA-598B-4254-9CEF-1D77B357BD37}"/>
-              </a:ext>
-            </a:extLst>
-          </p:cNvPr>
-          <p:cNvSpPr>
-            <a:spLocks xmlns:a="http://schemas.openxmlformats.org/drawingml/2006/main" noGrp="1"/>
-          </p:cNvSpPr>
-          <p:nvPr/>
-        </p:nvSpPr>
-        <p:spPr>
-          <a:xfrm xmlns:a="http://schemas.openxmlformats.org/drawingml/2006/main">
-            <a:off x="7334250" y="5124450"/>
-            <a:ext cx="6800850" cy="400050"/>
-          </a:xfrm>
-          <a:prstGeom xmlns:a="http://schemas.openxmlformats.org/drawingml/2006/main" prst="rect">
-            <a:avLst/>
-          </a:prstGeom>
-          <a:noFill xmlns:a="http://schemas.openxmlformats.org/drawingml/2006/main"/>
-          <a:ln xmlns:a="http://schemas.openxmlformats.org/drawingml/2006/main" w="0">
-            <a:noFill/>
-            <a:prstDash val="solid"/>
-          </a:ln>
-        </p:spPr>
-        <p:txBody>
-          <a:bodyPr xmlns:a="http://schemas.openxmlformats.org/drawingml/2006/main" wrap="square" lIns="0" tIns="0" rIns="0" bIns="0" anchor="ctr">
-            <a:noAutofit/>
-          </a:bodyPr>
-          <a:lstStyle xmlns:a="http://schemas.openxmlformats.org/drawingml/2006/main"/>
-          <a:p xmlns:a="http://schemas.openxmlformats.org/drawingml/2006/main">
             <a:pPr algn="ctr">
               <a:lnSpc>
                 <a:spcPct val="100000"/>
               </a:lnSpc>
               <a:buNone/>
-              <a:defRPr sz="1575" b="1">
-                <a:solidFill>
-                  <a:srgbClr val="2E8B57"/>
-                </a:solidFill>
-                <a:latin typeface="Calibri"/>
-                <a:ea typeface="Calibri"/>
-                <a:cs typeface="Calibri"/>
-              </a:defRPr>
-            </a:pPr>
-            <a:r>
-              <a:rPr sz="1800" b="1">
-                <a:solidFill>
-                  <a:srgbClr val="2E8B57"/>
-                </a:solidFill>
-                <a:latin typeface="Calibri"/>
-                <a:ea typeface="Calibri"/>
-                <a:cs typeface="Calibri"/>
-              </a:rPr>
-              <a:t>Prefer a workflow unless new evidence changes the next valid action.</a:t>
-            </a:r>
-          </a:p>
-        </p:txBody>
-      </p:sp>
-      <p:sp>
-        <p:nvSpPr>
-          <p:cNvPr id="29" name="">
-            <a:extLst xmlns:a="http://schemas.openxmlformats.org/drawingml/2006/main">
-              <a:ext uri="{FF2B5EF4-FFF2-40B4-BE49-F238E27FC236}">
-                <a16:creationId xmlns:a16="http://schemas.microsoft.com/office/drawing/2014/main" id="{B65E3BAB-E11C-4A7E-89F3-AB1868F4F013}"/>
-              </a:ext>
-            </a:extLst>
-          </p:cNvPr>
-          <p:cNvSpPr>
-            <a:spLocks xmlns:a="http://schemas.openxmlformats.org/drawingml/2006/main" noGrp="1"/>
-          </p:cNvSpPr>
-          <p:nvPr/>
-        </p:nvSpPr>
-        <p:spPr>
-          <a:xfrm xmlns:a="http://schemas.openxmlformats.org/drawingml/2006/main">
-            <a:off x="6953250" y="2362200"/>
-            <a:ext cx="28575" cy="3390900"/>
+              <a:defRPr sz="1500" b="0">
+                <a:solidFill>
+                  <a:srgbClr val="64748B"/>
+                </a:solidFill>
+                <a:latin typeface="Calibri"/>
+                <a:ea typeface="Calibri"/>
+                <a:cs typeface="Calibri"/>
+              </a:defRPr>
+            </a:pPr>
+            <a:r>
+              <a:rPr sz="1500" b="0">
+                <a:solidFill>
+                  <a:srgbClr val="64748B"/>
+                </a:solidFill>
+                <a:latin typeface="Calibri"/>
+                <a:ea typeface="Calibri"/>
+                <a:cs typeface="Calibri"/>
+              </a:rPr>
+              <a:t>If the next step depends on a tool result, use an agent.</a:t>
+            </a:r>
+          </a:p>
+        </p:txBody>
+      </p:sp>
+      <p:sp>
+        <p:nvSpPr>
+          <p:cNvPr id="30" name="">
+            <a:extLst xmlns:a="http://schemas.openxmlformats.org/drawingml/2006/main">
+              <a:ext uri="{FF2B5EF4-FFF2-40B4-BE49-F238E27FC236}">
+                <a16:creationId xmlns:a16="http://schemas.microsoft.com/office/drawing/2014/main" id="{28CBA7AE-993C-4F84-A696-8D1323AC4E80}"/>
+              </a:ext>
+            </a:extLst>
+          </p:cNvPr>
+          <p:cNvSpPr>
+            <a:spLocks xmlns:a="http://schemas.openxmlformats.org/drawingml/2006/main" noGrp="1"/>
+          </p:cNvSpPr>
+          <p:nvPr/>
+        </p:nvSpPr>
+        <p:spPr>
+          <a:xfrm xmlns:a="http://schemas.openxmlformats.org/drawingml/2006/main">
+            <a:off x="857250" y="7896225"/>
+            <a:ext cx="13525500" cy="28575"/>
           </a:xfrm>
           <a:prstGeom xmlns:a="http://schemas.openxmlformats.org/drawingml/2006/main" prst="rect">
             <a:avLst/>
@@ -6062,601 +5560,10 @@
       </p:sp>
       <p:sp>
         <p:nvSpPr>
-          <p:cNvPr id="30" name="">
-            <a:extLst xmlns:a="http://schemas.openxmlformats.org/drawingml/2006/main">
-              <a:ext uri="{FF2B5EF4-FFF2-40B4-BE49-F238E27FC236}">
-                <a16:creationId xmlns:a16="http://schemas.microsoft.com/office/drawing/2014/main" id="{71233CBA-8C3B-4B18-A5D5-D4F7061FDCF8}"/>
-              </a:ext>
-            </a:extLst>
-          </p:cNvPr>
-          <p:cNvSpPr>
-            <a:spLocks xmlns:a="http://schemas.openxmlformats.org/drawingml/2006/main" noGrp="1"/>
-          </p:cNvSpPr>
-          <p:nvPr/>
-        </p:nvSpPr>
-        <p:spPr>
-          <a:xfrm xmlns:a="http://schemas.openxmlformats.org/drawingml/2006/main">
-            <a:off x="1028700" y="6153150"/>
-            <a:ext cx="4286250" cy="285750"/>
-          </a:xfrm>
-          <a:prstGeom xmlns:a="http://schemas.openxmlformats.org/drawingml/2006/main" prst="rect">
-            <a:avLst/>
-          </a:prstGeom>
-          <a:noFill xmlns:a="http://schemas.openxmlformats.org/drawingml/2006/main"/>
-          <a:ln xmlns:a="http://schemas.openxmlformats.org/drawingml/2006/main" w="0">
-            <a:noFill/>
-            <a:prstDash val="solid"/>
-          </a:ln>
-        </p:spPr>
-        <p:txBody>
-          <a:bodyPr xmlns:a="http://schemas.openxmlformats.org/drawingml/2006/main" wrap="square" lIns="0" tIns="0" rIns="0" bIns="0" anchor="ctr">
-            <a:noAutofit/>
-          </a:bodyPr>
-          <a:lstStyle xmlns:a="http://schemas.openxmlformats.org/drawingml/2006/main"/>
-          <a:p xmlns:a="http://schemas.openxmlformats.org/drawingml/2006/main">
-            <a:pPr algn="l">
-              <a:lnSpc>
-                <a:spcPct val="100000"/>
-              </a:lnSpc>
-              <a:buNone/>
-              <a:defRPr sz="1275" b="1">
-                <a:solidFill>
-                  <a:srgbClr val="1F40CB"/>
-                </a:solidFill>
-                <a:latin typeface="Calibri"/>
-                <a:ea typeface="Calibri"/>
-                <a:cs typeface="Calibri"/>
-              </a:defRPr>
-            </a:pPr>
-            <a:r>
-              <a:rPr sz="1800" b="1">
-                <a:solidFill>
-                  <a:srgbClr val="1F40CB"/>
-                </a:solidFill>
-                <a:latin typeface="Calibri"/>
-                <a:ea typeface="Calibri"/>
-                <a:cs typeface="Calibri"/>
-              </a:rPr>
-              <a:t>SAME ENGINEERING CONTRACT</a:t>
-            </a:r>
-          </a:p>
-        </p:txBody>
-      </p:sp>
-      <p:sp>
-        <p:nvSpPr>
           <p:cNvPr id="31" name="">
             <a:extLst xmlns:a="http://schemas.openxmlformats.org/drawingml/2006/main">
               <a:ext uri="{FF2B5EF4-FFF2-40B4-BE49-F238E27FC236}">
-                <a16:creationId xmlns:a16="http://schemas.microsoft.com/office/drawing/2014/main" id="{5DEA1FB2-5ABC-4E19-B39E-FBEB026EF177}"/>
-              </a:ext>
-            </a:extLst>
-          </p:cNvPr>
-          <p:cNvSpPr>
-            <a:spLocks xmlns:a="http://schemas.openxmlformats.org/drawingml/2006/main" noGrp="1"/>
-          </p:cNvSpPr>
-          <p:nvPr/>
-        </p:nvSpPr>
-        <p:spPr>
-          <a:xfrm xmlns:a="http://schemas.openxmlformats.org/drawingml/2006/main">
-            <a:off x="1028700" y="6534150"/>
-            <a:ext cx="2667000" cy="285750"/>
-          </a:xfrm>
-          <a:prstGeom xmlns:a="http://schemas.openxmlformats.org/drawingml/2006/main" prst="rect">
-            <a:avLst/>
-          </a:prstGeom>
-          <a:noFill xmlns:a="http://schemas.openxmlformats.org/drawingml/2006/main"/>
-          <a:ln xmlns:a="http://schemas.openxmlformats.org/drawingml/2006/main" w="0">
-            <a:noFill/>
-            <a:prstDash val="solid"/>
-          </a:ln>
-        </p:spPr>
-        <p:txBody>
-          <a:bodyPr xmlns:a="http://schemas.openxmlformats.org/drawingml/2006/main" wrap="square" lIns="0" tIns="0" rIns="0" bIns="0" anchor="ctr">
-            <a:noAutofit/>
-          </a:bodyPr>
-          <a:lstStyle xmlns:a="http://schemas.openxmlformats.org/drawingml/2006/main"/>
-          <a:p xmlns:a="http://schemas.openxmlformats.org/drawingml/2006/main">
-            <a:pPr algn="l">
-              <a:lnSpc>
-                <a:spcPct val="100000"/>
-              </a:lnSpc>
-              <a:buNone/>
-              <a:defRPr sz="1275" b="0">
-                <a:solidFill>
-                  <a:srgbClr val="64748B"/>
-                </a:solidFill>
-                <a:latin typeface="Calibri"/>
-                <a:ea typeface="Calibri"/>
-                <a:cs typeface="Calibri"/>
-              </a:defRPr>
-            </a:pPr>
-            <a:r>
-              <a:rPr sz="1800" b="0">
-                <a:solidFill>
-                  <a:srgbClr val="64748B"/>
-                </a:solidFill>
-                <a:latin typeface="Calibri"/>
-                <a:ea typeface="Calibri"/>
-                <a:cs typeface="Calibri"/>
-              </a:rPr>
-              <a:t>Schemas</a:t>
-            </a:r>
-          </a:p>
-        </p:txBody>
-      </p:sp>
-      <p:sp>
-        <p:nvSpPr>
-          <p:cNvPr id="32" name="">
-            <a:extLst xmlns:a="http://schemas.openxmlformats.org/drawingml/2006/main">
-              <a:ext uri="{FF2B5EF4-FFF2-40B4-BE49-F238E27FC236}">
-                <a16:creationId xmlns:a16="http://schemas.microsoft.com/office/drawing/2014/main" id="{79EE73CC-AED7-4593-A08D-4913CB1DF80E}"/>
-              </a:ext>
-            </a:extLst>
-          </p:cNvPr>
-          <p:cNvSpPr>
-            <a:spLocks xmlns:a="http://schemas.openxmlformats.org/drawingml/2006/main" noGrp="1"/>
-          </p:cNvSpPr>
-          <p:nvPr/>
-        </p:nvSpPr>
-        <p:spPr>
-          <a:xfrm xmlns:a="http://schemas.openxmlformats.org/drawingml/2006/main">
-            <a:off x="1028700" y="6858000"/>
-            <a:ext cx="2667000" cy="457200"/>
-          </a:xfrm>
-          <a:prstGeom xmlns:a="http://schemas.openxmlformats.org/drawingml/2006/main" prst="rect">
-            <a:avLst/>
-          </a:prstGeom>
-          <a:noFill xmlns:a="http://schemas.openxmlformats.org/drawingml/2006/main"/>
-          <a:ln xmlns:a="http://schemas.openxmlformats.org/drawingml/2006/main" w="0">
-            <a:noFill/>
-            <a:prstDash val="solid"/>
-          </a:ln>
-        </p:spPr>
-        <p:txBody>
-          <a:bodyPr xmlns:a="http://schemas.openxmlformats.org/drawingml/2006/main" wrap="square" lIns="0" tIns="0" rIns="0" bIns="0" anchor="ctr">
-            <a:normAutofit fontScale="100000"/>
-          </a:bodyPr>
-          <a:lstStyle xmlns:a="http://schemas.openxmlformats.org/drawingml/2006/main"/>
-          <a:p xmlns:a="http://schemas.openxmlformats.org/drawingml/2006/main">
-            <a:pPr algn="l">
-              <a:lnSpc>
-                <a:spcPct val="100000"/>
-              </a:lnSpc>
-              <a:buNone/>
-              <a:defRPr sz="2550" b="1">
-                <a:solidFill>
-                  <a:srgbClr val="F07D00"/>
-                </a:solidFill>
-                <a:latin typeface="Calibri"/>
-                <a:ea typeface="Calibri"/>
-                <a:cs typeface="Calibri"/>
-              </a:defRPr>
-            </a:pPr>
-            <a:r>
-              <a:rPr sz="2550" b="1">
-                <a:solidFill>
-                  <a:srgbClr val="F07D00"/>
-                </a:solidFill>
-                <a:latin typeface="Calibri"/>
-                <a:ea typeface="Calibri"/>
-                <a:cs typeface="Calibri"/>
-              </a:rPr>
-              <a:t>typed</a:t>
-            </a:r>
-          </a:p>
-        </p:txBody>
-      </p:sp>
-      <p:sp>
-        <p:nvSpPr>
-          <p:cNvPr id="33" name="">
-            <a:extLst xmlns:a="http://schemas.openxmlformats.org/drawingml/2006/main">
-              <a:ext uri="{FF2B5EF4-FFF2-40B4-BE49-F238E27FC236}">
-                <a16:creationId xmlns:a16="http://schemas.microsoft.com/office/drawing/2014/main" id="{043BC68A-D5B2-4F89-AC7A-F4A6B12238B6}"/>
-              </a:ext>
-            </a:extLst>
-          </p:cNvPr>
-          <p:cNvSpPr>
-            <a:spLocks xmlns:a="http://schemas.openxmlformats.org/drawingml/2006/main" noGrp="1"/>
-          </p:cNvSpPr>
-          <p:nvPr/>
-        </p:nvSpPr>
-        <p:spPr>
-          <a:xfrm xmlns:a="http://schemas.openxmlformats.org/drawingml/2006/main">
-            <a:off x="4343400" y="6534150"/>
-            <a:ext cx="2667000" cy="285750"/>
-          </a:xfrm>
-          <a:prstGeom xmlns:a="http://schemas.openxmlformats.org/drawingml/2006/main" prst="rect">
-            <a:avLst/>
-          </a:prstGeom>
-          <a:noFill xmlns:a="http://schemas.openxmlformats.org/drawingml/2006/main"/>
-          <a:ln xmlns:a="http://schemas.openxmlformats.org/drawingml/2006/main" w="0">
-            <a:noFill/>
-            <a:prstDash val="solid"/>
-          </a:ln>
-        </p:spPr>
-        <p:txBody>
-          <a:bodyPr xmlns:a="http://schemas.openxmlformats.org/drawingml/2006/main" wrap="square" lIns="0" tIns="0" rIns="0" bIns="0" anchor="ctr">
-            <a:noAutofit/>
-          </a:bodyPr>
-          <a:lstStyle xmlns:a="http://schemas.openxmlformats.org/drawingml/2006/main"/>
-          <a:p xmlns:a="http://schemas.openxmlformats.org/drawingml/2006/main">
-            <a:pPr algn="l">
-              <a:lnSpc>
-                <a:spcPct val="100000"/>
-              </a:lnSpc>
-              <a:buNone/>
-              <a:defRPr sz="1275" b="0">
-                <a:solidFill>
-                  <a:srgbClr val="64748B"/>
-                </a:solidFill>
-                <a:latin typeface="Calibri"/>
-                <a:ea typeface="Calibri"/>
-                <a:cs typeface="Calibri"/>
-              </a:defRPr>
-            </a:pPr>
-            <a:r>
-              <a:rPr sz="1800" b="0">
-                <a:solidFill>
-                  <a:srgbClr val="64748B"/>
-                </a:solidFill>
-                <a:latin typeface="Calibri"/>
-                <a:ea typeface="Calibri"/>
-                <a:cs typeface="Calibri"/>
-              </a:rPr>
-              <a:t>Tools</a:t>
-            </a:r>
-          </a:p>
-        </p:txBody>
-      </p:sp>
-      <p:sp>
-        <p:nvSpPr>
-          <p:cNvPr id="34" name="">
-            <a:extLst xmlns:a="http://schemas.openxmlformats.org/drawingml/2006/main">
-              <a:ext uri="{FF2B5EF4-FFF2-40B4-BE49-F238E27FC236}">
-                <a16:creationId xmlns:a16="http://schemas.microsoft.com/office/drawing/2014/main" id="{CD38EEE4-AA29-40C4-BA3C-01E40A9D56EB}"/>
-              </a:ext>
-            </a:extLst>
-          </p:cNvPr>
-          <p:cNvSpPr>
-            <a:spLocks xmlns:a="http://schemas.openxmlformats.org/drawingml/2006/main" noGrp="1"/>
-          </p:cNvSpPr>
-          <p:nvPr/>
-        </p:nvSpPr>
-        <p:spPr>
-          <a:xfrm xmlns:a="http://schemas.openxmlformats.org/drawingml/2006/main">
-            <a:off x="4343400" y="6858000"/>
-            <a:ext cx="2667000" cy="457200"/>
-          </a:xfrm>
-          <a:prstGeom xmlns:a="http://schemas.openxmlformats.org/drawingml/2006/main" prst="rect">
-            <a:avLst/>
-          </a:prstGeom>
-          <a:noFill xmlns:a="http://schemas.openxmlformats.org/drawingml/2006/main"/>
-          <a:ln xmlns:a="http://schemas.openxmlformats.org/drawingml/2006/main" w="0">
-            <a:noFill/>
-            <a:prstDash val="solid"/>
-          </a:ln>
-        </p:spPr>
-        <p:txBody>
-          <a:bodyPr xmlns:a="http://schemas.openxmlformats.org/drawingml/2006/main" wrap="square" lIns="0" tIns="0" rIns="0" bIns="0" anchor="ctr">
-            <a:normAutofit fontScale="100000"/>
-          </a:bodyPr>
-          <a:lstStyle xmlns:a="http://schemas.openxmlformats.org/drawingml/2006/main"/>
-          <a:p xmlns:a="http://schemas.openxmlformats.org/drawingml/2006/main">
-            <a:pPr algn="l">
-              <a:lnSpc>
-                <a:spcPct val="100000"/>
-              </a:lnSpc>
-              <a:buNone/>
-              <a:defRPr sz="2550" b="1">
-                <a:solidFill>
-                  <a:srgbClr val="2E8B57"/>
-                </a:solidFill>
-                <a:latin typeface="Calibri"/>
-                <a:ea typeface="Calibri"/>
-                <a:cs typeface="Calibri"/>
-              </a:defRPr>
-            </a:pPr>
-            <a:r>
-              <a:rPr sz="2550" b="1">
-                <a:solidFill>
-                  <a:srgbClr val="2E8B57"/>
-                </a:solidFill>
-                <a:latin typeface="Calibri"/>
-                <a:ea typeface="Calibri"/>
-                <a:cs typeface="Calibri"/>
-              </a:rPr>
-              <a:t>deterministic</a:t>
-            </a:r>
-          </a:p>
-        </p:txBody>
-      </p:sp>
-      <p:sp>
-        <p:nvSpPr>
-          <p:cNvPr id="35" name="">
-            <a:extLst xmlns:a="http://schemas.openxmlformats.org/drawingml/2006/main">
-              <a:ext uri="{FF2B5EF4-FFF2-40B4-BE49-F238E27FC236}">
-                <a16:creationId xmlns:a16="http://schemas.microsoft.com/office/drawing/2014/main" id="{4B5D4A6D-C246-49F7-9388-C795B5E0FCC0}"/>
-              </a:ext>
-            </a:extLst>
-          </p:cNvPr>
-          <p:cNvSpPr>
-            <a:spLocks xmlns:a="http://schemas.openxmlformats.org/drawingml/2006/main" noGrp="1"/>
-          </p:cNvSpPr>
-          <p:nvPr/>
-        </p:nvSpPr>
-        <p:spPr>
-          <a:xfrm xmlns:a="http://schemas.openxmlformats.org/drawingml/2006/main">
-            <a:off x="7658100" y="6534150"/>
-            <a:ext cx="2667000" cy="285750"/>
-          </a:xfrm>
-          <a:prstGeom xmlns:a="http://schemas.openxmlformats.org/drawingml/2006/main" prst="rect">
-            <a:avLst/>
-          </a:prstGeom>
-          <a:noFill xmlns:a="http://schemas.openxmlformats.org/drawingml/2006/main"/>
-          <a:ln xmlns:a="http://schemas.openxmlformats.org/drawingml/2006/main" w="0">
-            <a:noFill/>
-            <a:prstDash val="solid"/>
-          </a:ln>
-        </p:spPr>
-        <p:txBody>
-          <a:bodyPr xmlns:a="http://schemas.openxmlformats.org/drawingml/2006/main" wrap="square" lIns="0" tIns="0" rIns="0" bIns="0" anchor="ctr">
-            <a:noAutofit/>
-          </a:bodyPr>
-          <a:lstStyle xmlns:a="http://schemas.openxmlformats.org/drawingml/2006/main"/>
-          <a:p xmlns:a="http://schemas.openxmlformats.org/drawingml/2006/main">
-            <a:pPr algn="l">
-              <a:lnSpc>
-                <a:spcPct val="100000"/>
-              </a:lnSpc>
-              <a:buNone/>
-              <a:defRPr sz="1275" b="0">
-                <a:solidFill>
-                  <a:srgbClr val="64748B"/>
-                </a:solidFill>
-                <a:latin typeface="Calibri"/>
-                <a:ea typeface="Calibri"/>
-                <a:cs typeface="Calibri"/>
-              </a:defRPr>
-            </a:pPr>
-            <a:r>
-              <a:rPr sz="1800" b="0">
-                <a:solidFill>
-                  <a:srgbClr val="64748B"/>
-                </a:solidFill>
-                <a:latin typeface="Calibri"/>
-                <a:ea typeface="Calibri"/>
-                <a:cs typeface="Calibri"/>
-              </a:rPr>
-              <a:t>Trace</a:t>
-            </a:r>
-          </a:p>
-        </p:txBody>
-      </p:sp>
-      <p:sp>
-        <p:nvSpPr>
-          <p:cNvPr id="36" name="">
-            <a:extLst xmlns:a="http://schemas.openxmlformats.org/drawingml/2006/main">
-              <a:ext uri="{FF2B5EF4-FFF2-40B4-BE49-F238E27FC236}">
-                <a16:creationId xmlns:a16="http://schemas.microsoft.com/office/drawing/2014/main" id="{02066664-5058-4CD5-A636-49C7B36A91B5}"/>
-              </a:ext>
-            </a:extLst>
-          </p:cNvPr>
-          <p:cNvSpPr>
-            <a:spLocks xmlns:a="http://schemas.openxmlformats.org/drawingml/2006/main" noGrp="1"/>
-          </p:cNvSpPr>
-          <p:nvPr/>
-        </p:nvSpPr>
-        <p:spPr>
-          <a:xfrm xmlns:a="http://schemas.openxmlformats.org/drawingml/2006/main">
-            <a:off x="7658100" y="6858000"/>
-            <a:ext cx="2667000" cy="457200"/>
-          </a:xfrm>
-          <a:prstGeom xmlns:a="http://schemas.openxmlformats.org/drawingml/2006/main" prst="rect">
-            <a:avLst/>
-          </a:prstGeom>
-          <a:noFill xmlns:a="http://schemas.openxmlformats.org/drawingml/2006/main"/>
-          <a:ln xmlns:a="http://schemas.openxmlformats.org/drawingml/2006/main" w="0">
-            <a:noFill/>
-            <a:prstDash val="solid"/>
-          </a:ln>
-        </p:spPr>
-        <p:txBody>
-          <a:bodyPr xmlns:a="http://schemas.openxmlformats.org/drawingml/2006/main" wrap="square" lIns="0" tIns="0" rIns="0" bIns="0" anchor="ctr">
-            <a:normAutofit fontScale="100000"/>
-          </a:bodyPr>
-          <a:lstStyle xmlns:a="http://schemas.openxmlformats.org/drawingml/2006/main"/>
-          <a:p xmlns:a="http://schemas.openxmlformats.org/drawingml/2006/main">
-            <a:pPr algn="l">
-              <a:lnSpc>
-                <a:spcPct val="100000"/>
-              </a:lnSpc>
-              <a:buNone/>
-              <a:defRPr sz="2550" b="1">
-                <a:solidFill>
-                  <a:srgbClr val="F07D00"/>
-                </a:solidFill>
-                <a:latin typeface="Calibri"/>
-                <a:ea typeface="Calibri"/>
-                <a:cs typeface="Calibri"/>
-              </a:defRPr>
-            </a:pPr>
-            <a:r>
-              <a:rPr sz="2550" b="1">
-                <a:solidFill>
-                  <a:srgbClr val="F07D00"/>
-                </a:solidFill>
-                <a:latin typeface="Calibri"/>
-                <a:ea typeface="Calibri"/>
-                <a:cs typeface="Calibri"/>
-              </a:rPr>
-              <a:t>aligned</a:t>
-            </a:r>
-          </a:p>
-        </p:txBody>
-      </p:sp>
-      <p:sp>
-        <p:nvSpPr>
-          <p:cNvPr id="37" name="">
-            <a:extLst xmlns:a="http://schemas.openxmlformats.org/drawingml/2006/main">
-              <a:ext uri="{FF2B5EF4-FFF2-40B4-BE49-F238E27FC236}">
-                <a16:creationId xmlns:a16="http://schemas.microsoft.com/office/drawing/2014/main" id="{D2483989-A3BC-4F4A-A656-ACD3BAC9F2F1}"/>
-              </a:ext>
-            </a:extLst>
-          </p:cNvPr>
-          <p:cNvSpPr>
-            <a:spLocks xmlns:a="http://schemas.openxmlformats.org/drawingml/2006/main" noGrp="1"/>
-          </p:cNvSpPr>
-          <p:nvPr/>
-        </p:nvSpPr>
-        <p:spPr>
-          <a:xfrm xmlns:a="http://schemas.openxmlformats.org/drawingml/2006/main">
-            <a:off x="10972800" y="6534150"/>
-            <a:ext cx="2667000" cy="285750"/>
-          </a:xfrm>
-          <a:prstGeom xmlns:a="http://schemas.openxmlformats.org/drawingml/2006/main" prst="rect">
-            <a:avLst/>
-          </a:prstGeom>
-          <a:noFill xmlns:a="http://schemas.openxmlformats.org/drawingml/2006/main"/>
-          <a:ln xmlns:a="http://schemas.openxmlformats.org/drawingml/2006/main" w="0">
-            <a:noFill/>
-            <a:prstDash val="solid"/>
-          </a:ln>
-        </p:spPr>
-        <p:txBody>
-          <a:bodyPr xmlns:a="http://schemas.openxmlformats.org/drawingml/2006/main" wrap="square" lIns="0" tIns="0" rIns="0" bIns="0" anchor="ctr">
-            <a:noAutofit/>
-          </a:bodyPr>
-          <a:lstStyle xmlns:a="http://schemas.openxmlformats.org/drawingml/2006/main"/>
-          <a:p xmlns:a="http://schemas.openxmlformats.org/drawingml/2006/main">
-            <a:pPr algn="l">
-              <a:lnSpc>
-                <a:spcPct val="100000"/>
-              </a:lnSpc>
-              <a:buNone/>
-              <a:defRPr sz="1275" b="0">
-                <a:solidFill>
-                  <a:srgbClr val="64748B"/>
-                </a:solidFill>
-                <a:latin typeface="Calibri"/>
-                <a:ea typeface="Calibri"/>
-                <a:cs typeface="Calibri"/>
-              </a:defRPr>
-            </a:pPr>
-            <a:r>
-              <a:rPr sz="1800" b="0">
-                <a:solidFill>
-                  <a:srgbClr val="64748B"/>
-                </a:solidFill>
-                <a:latin typeface="Calibri"/>
-                <a:ea typeface="Calibri"/>
-                <a:cs typeface="Calibri"/>
-              </a:rPr>
-              <a:t>Budget</a:t>
-            </a:r>
-          </a:p>
-        </p:txBody>
-      </p:sp>
-      <p:sp>
-        <p:nvSpPr>
-          <p:cNvPr id="38" name="">
-            <a:extLst xmlns:a="http://schemas.openxmlformats.org/drawingml/2006/main">
-              <a:ext uri="{FF2B5EF4-FFF2-40B4-BE49-F238E27FC236}">
-                <a16:creationId xmlns:a16="http://schemas.microsoft.com/office/drawing/2014/main" id="{75B3CFBA-FD87-4351-8C2A-CF0B6F60B63E}"/>
-              </a:ext>
-            </a:extLst>
-          </p:cNvPr>
-          <p:cNvSpPr>
-            <a:spLocks xmlns:a="http://schemas.openxmlformats.org/drawingml/2006/main" noGrp="1"/>
-          </p:cNvSpPr>
-          <p:nvPr/>
-        </p:nvSpPr>
-        <p:spPr>
-          <a:xfrm xmlns:a="http://schemas.openxmlformats.org/drawingml/2006/main">
-            <a:off x="10972800" y="6858000"/>
-            <a:ext cx="2667000" cy="457200"/>
-          </a:xfrm>
-          <a:prstGeom xmlns:a="http://schemas.openxmlformats.org/drawingml/2006/main" prst="rect">
-            <a:avLst/>
-          </a:prstGeom>
-          <a:noFill xmlns:a="http://schemas.openxmlformats.org/drawingml/2006/main"/>
-          <a:ln xmlns:a="http://schemas.openxmlformats.org/drawingml/2006/main" w="0">
-            <a:noFill/>
-            <a:prstDash val="solid"/>
-          </a:ln>
-        </p:spPr>
-        <p:txBody>
-          <a:bodyPr xmlns:a="http://schemas.openxmlformats.org/drawingml/2006/main" wrap="square" lIns="0" tIns="0" rIns="0" bIns="0" anchor="ctr">
-            <a:normAutofit fontScale="100000"/>
-          </a:bodyPr>
-          <a:lstStyle xmlns:a="http://schemas.openxmlformats.org/drawingml/2006/main"/>
-          <a:p xmlns:a="http://schemas.openxmlformats.org/drawingml/2006/main">
-            <a:pPr algn="l">
-              <a:lnSpc>
-                <a:spcPct val="100000"/>
-              </a:lnSpc>
-              <a:buNone/>
-              <a:defRPr sz="2550" b="1">
-                <a:solidFill>
-                  <a:srgbClr val="2E8B57"/>
-                </a:solidFill>
-                <a:latin typeface="Calibri"/>
-                <a:ea typeface="Calibri"/>
-                <a:cs typeface="Calibri"/>
-              </a:defRPr>
-            </a:pPr>
-            <a:r>
-              <a:rPr sz="2550" b="1">
-                <a:solidFill>
-                  <a:srgbClr val="2E8B57"/>
-                </a:solidFill>
-                <a:latin typeface="Calibri"/>
-                <a:ea typeface="Calibri"/>
-                <a:cs typeface="Calibri"/>
-              </a:rPr>
-              <a:t>explicit</a:t>
-            </a:r>
-          </a:p>
-        </p:txBody>
-      </p:sp>
-      <p:sp>
-        <p:nvSpPr>
-          <p:cNvPr id="39" name="">
-            <a:extLst xmlns:a="http://schemas.openxmlformats.org/drawingml/2006/main">
-              <a:ext uri="{FF2B5EF4-FFF2-40B4-BE49-F238E27FC236}">
-                <a16:creationId xmlns:a16="http://schemas.microsoft.com/office/drawing/2014/main" id="{4846780A-5D65-4410-9457-661BBB6C3E5A}"/>
-              </a:ext>
-            </a:extLst>
-          </p:cNvPr>
-          <p:cNvSpPr>
-            <a:spLocks xmlns:a="http://schemas.openxmlformats.org/drawingml/2006/main" noGrp="1"/>
-          </p:cNvSpPr>
-          <p:nvPr/>
-        </p:nvSpPr>
-        <p:spPr>
-          <a:xfrm xmlns:a="http://schemas.openxmlformats.org/drawingml/2006/main">
-            <a:off x="857250" y="7896225"/>
-            <a:ext cx="13525500" cy="28575"/>
-          </a:xfrm>
-          <a:prstGeom xmlns:a="http://schemas.openxmlformats.org/drawingml/2006/main" prst="rect">
-            <a:avLst/>
-          </a:prstGeom>
-          <a:solidFill xmlns:a="http://schemas.openxmlformats.org/drawingml/2006/main">
-            <a:srgbClr val="E4E7E9"/>
-          </a:solidFill>
-          <a:ln xmlns:a="http://schemas.openxmlformats.org/drawingml/2006/main" w="0">
-            <a:solidFill>
-              <a:srgbClr val="E4E7E9"/>
-            </a:solidFill>
-            <a:prstDash val="solid"/>
-          </a:ln>
-        </p:spPr>
-      </p:sp>
-      <p:sp>
-        <p:nvSpPr>
-          <p:cNvPr id="40" name="">
-            <a:extLst xmlns:a="http://schemas.openxmlformats.org/drawingml/2006/main">
-              <a:ext uri="{FF2B5EF4-FFF2-40B4-BE49-F238E27FC236}">
-                <a16:creationId xmlns:a16="http://schemas.microsoft.com/office/drawing/2014/main" id="{0C69519E-645C-4800-9FE8-656AB5D56416}"/>
+                <a16:creationId xmlns:a16="http://schemas.microsoft.com/office/drawing/2014/main" id="{DE97BF4D-EDBC-4480-A82B-512A72221950}"/>
               </a:ext>
             </a:extLst>
           </p:cNvPr>
@@ -6686,10 +5593,10 @@
       </p:sp>
       <p:sp>
         <p:nvSpPr>
-          <p:cNvPr id="41" name="">
-            <a:extLst xmlns:a="http://schemas.openxmlformats.org/drawingml/2006/main">
-              <a:ext uri="{FF2B5EF4-FFF2-40B4-BE49-F238E27FC236}">
-                <a16:creationId xmlns:a16="http://schemas.microsoft.com/office/drawing/2014/main" id="{17032C2C-E113-4AB5-9CC6-D6B41AEDB1C4}"/>
+          <p:cNvPr id="32" name="">
+            <a:extLst xmlns:a="http://schemas.openxmlformats.org/drawingml/2006/main">
+              <a:ext uri="{FF2B5EF4-FFF2-40B4-BE49-F238E27FC236}">
+                <a16:creationId xmlns:a16="http://schemas.microsoft.com/office/drawing/2014/main" id="{49281B64-2F0F-4357-A085-C65451F28236}"/>
               </a:ext>
             </a:extLst>
           </p:cNvPr>
@@ -6748,10 +5655,10 @@
       </p:sp>
       <p:sp>
         <p:nvSpPr>
-          <p:cNvPr id="42" name="">
-            <a:extLst xmlns:a="http://schemas.openxmlformats.org/drawingml/2006/main">
-              <a:ext uri="{FF2B5EF4-FFF2-40B4-BE49-F238E27FC236}">
-                <a16:creationId xmlns:a16="http://schemas.microsoft.com/office/drawing/2014/main" id="{23DD0EC2-8E86-44C8-B8C1-3DB1E93C5D33}"/>
+          <p:cNvPr id="33" name="">
+            <a:extLst xmlns:a="http://schemas.openxmlformats.org/drawingml/2006/main">
+              <a:ext uri="{FF2B5EF4-FFF2-40B4-BE49-F238E27FC236}">
+                <a16:creationId xmlns:a16="http://schemas.microsoft.com/office/drawing/2014/main" id="{EAA325A4-7EC6-42CE-A13A-4B38A32DE7F2}"/>
               </a:ext>
             </a:extLst>
           </p:cNvPr>
@@ -6803,17 +5710,17 @@
                 <a:ea typeface="Calibri"/>
                 <a:cs typeface="Calibri"/>
               </a:rPr>
-              <a:t>DECIDE</a:t>
-            </a:r>
-          </a:p>
-        </p:txBody>
-      </p:sp>
-      <p:sp>
-        <p:nvSpPr>
-          <p:cNvPr id="43" name="">
-            <a:extLst xmlns:a="http://schemas.openxmlformats.org/drawingml/2006/main">
-              <a:ext uri="{FF2B5EF4-FFF2-40B4-BE49-F238E27FC236}">
-                <a16:creationId xmlns:a16="http://schemas.microsoft.com/office/drawing/2014/main" id="{A107089F-BB21-465D-B53D-42746B7A7540}"/>
+              <a:t>COMPARE</a:t>
+            </a:r>
+          </a:p>
+        </p:txBody>
+      </p:sp>
+      <p:sp>
+        <p:nvSpPr>
+          <p:cNvPr id="34" name="">
+            <a:extLst xmlns:a="http://schemas.openxmlformats.org/drawingml/2006/main">
+              <a:ext uri="{FF2B5EF4-FFF2-40B4-BE49-F238E27FC236}">
+                <a16:creationId xmlns:a16="http://schemas.microsoft.com/office/drawing/2014/main" id="{5F7FB65A-4A0D-4595-92F4-FD9B71638842}"/>
               </a:ext>
             </a:extLst>
           </p:cNvPr>
@@ -6873,7 +5780,7 @@
     </p:spTree>
     <p:extLst>
       <p:ext uri="{BB962C8B-B14F-4D97-AF65-F5344CB8AC3E}">
-        <p14:creationId xmlns:p14="http://schemas.microsoft.com/office/powerpoint/2010/main" val="349444305"/>
+        <p14:creationId xmlns:p14="http://schemas.microsoft.com/office/powerpoint/2010/main" val="1169510731"/>
       </p:ext>
     </p:extLst>
   </p:cSld>
@@ -7018,7 +5925,7 @@
                 <a:ea typeface="Calibri"/>
                 <a:cs typeface="Calibri"/>
               </a:rPr>
-              <a:t>The model requests; deterministic Python executes</a:t>
+              <a:t>The model chooses a tool. Python runs it.</a:t>
             </a:r>
           </a:p>
         </p:txBody>
@@ -7530,7 +6437,7 @@
                 <a:ea typeface="Calibri"/>
                 <a:cs typeface="Calibri"/>
               </a:rPr>
-              <a:t>Pydantic rejects invalid requests</a:t>
+              <a:t>Invalid requests stop here</a:t>
             </a:r>
           </a:p>
         </p:txBody>
@@ -7592,7 +6499,7 @@
                 <a:ea typeface="Calibri"/>
                 <a:cs typeface="Calibri"/>
               </a:rPr>
-              <a:t>DETERMINISTIC EXECUTION</a:t>
+              <a:t>PYTHON EXECUTION</a:t>
             </a:r>
           </a:p>
         </p:txBody>
@@ -7883,7 +6790,7 @@
                 <a:ea typeface="Calibri"/>
                 <a:cs typeface="Calibri"/>
               </a:rPr>
-              <a:t>via registry</a:t>
+              <a:t>tool registry</a:t>
             </a:r>
           </a:p>
         </p:txBody>
@@ -7945,7 +6852,7 @@
                 <a:ea typeface="Calibri"/>
                 <a:cs typeface="Calibri"/>
               </a:rPr>
-              <a:t>observation</a:t>
+              <a:t>tool result</a:t>
             </a:r>
           </a:p>
         </p:txBody>
@@ -8201,7 +7108,7 @@
                 <a:ea typeface="Calibri"/>
                 <a:cs typeface="Calibri"/>
               </a:rPr>
-              <a:t>source · timestamp</a:t>
+              <a:t>source · date</a:t>
             </a:r>
           </a:p>
         </p:txBody>
@@ -8263,7 +7170,7 @@
                 <a:ea typeface="Calibri"/>
                 <a:cs typeface="Calibri"/>
               </a:rPr>
-              <a:t>grounded</a:t>
+              <a:t>verified</a:t>
             </a:r>
           </a:p>
         </p:txBody>
@@ -8393,7 +7300,7 @@
                 <a:ea typeface="Calibri"/>
                 <a:cs typeface="Calibri"/>
               </a:rPr>
-              <a:t>The model never executes finance logic; it emits a request the registry can validate and trace.</a:t>
+              <a:t>The model requests an action. Python validates and runs it.</a:t>
             </a:r>
           </a:p>
         </p:txBody>
@@ -8798,7 +7705,7 @@
                 <a:ea typeface="Calibri"/>
                 <a:cs typeface="Calibri"/>
               </a:rPr>
-              <a:t>A fixed route succeeds when one lookup is enough</a:t>
+              <a:t>A workflow works when every step is known</a:t>
             </a:r>
           </a:p>
         </p:txBody>
@@ -9178,7 +8085,7 @@
                 <a:ea typeface="Calibri"/>
                 <a:cs typeface="Calibri"/>
               </a:rPr>
-              <a:t>Plan once</a:t>
+              <a:t>Choose tool</a:t>
             </a:r>
           </a:p>
         </p:txBody>
@@ -9461,7 +8368,7 @@
                 <a:ea typeface="Calibri"/>
                 <a:cs typeface="Calibri"/>
               </a:rPr>
-              <a:t>deterministic call</a:t>
+              <a:t>Python call</a:t>
             </a:r>
           </a:p>
         </p:txBody>
@@ -9841,7 +8748,7 @@
                 <a:ea typeface="Calibri"/>
                 <a:cs typeface="Calibri"/>
               </a:rPr>
-              <a:t>Final answer</a:t>
+              <a:t>Answer</a:t>
             </a:r>
           </a:p>
         </p:txBody>
@@ -9903,14 +8810,14 @@
                 <a:ea typeface="Calibri"/>
                 <a:cs typeface="Calibri"/>
               </a:rPr>
-              <a:t>grounded response</a:t>
+              <a:t>from tool data</a:t>
             </a:r>
           </a:p>
         </p:txBody>
       </p:sp>
       <p:cxnSp>
         <p:nvCxnSpPr>
-          <p:cNvPr id="421" name=""/>
+          <p:cNvPr id="473" name=""/>
           <p:cNvCxnSpPr>
             <a:stCxn xmlns:a="http://schemas.openxmlformats.org/drawingml/2006/main" id="3" idx="3"/>
             <a:endCxn xmlns:a="http://schemas.openxmlformats.org/drawingml/2006/main" id="7" idx="1"/>
@@ -9936,7 +8843,7 @@
       </p:cxnSp>
       <p:cxnSp>
         <p:nvCxnSpPr>
-          <p:cNvPr id="422" name=""/>
+          <p:cNvPr id="474" name=""/>
           <p:cNvCxnSpPr>
             <a:stCxn xmlns:a="http://schemas.openxmlformats.org/drawingml/2006/main" id="7" idx="3"/>
             <a:endCxn xmlns:a="http://schemas.openxmlformats.org/drawingml/2006/main" id="11" idx="1"/>
@@ -9962,7 +8869,7 @@
       </p:cxnSp>
       <p:cxnSp>
         <p:nvCxnSpPr>
-          <p:cNvPr id="423" name=""/>
+          <p:cNvPr id="475" name=""/>
           <p:cNvCxnSpPr>
             <a:stCxn xmlns:a="http://schemas.openxmlformats.org/drawingml/2006/main" id="11" idx="3"/>
             <a:endCxn xmlns:a="http://schemas.openxmlformats.org/drawingml/2006/main" id="15" idx="1"/>
@@ -9988,7 +8895,7 @@
       </p:cxnSp>
       <p:cxnSp>
         <p:nvCxnSpPr>
-          <p:cNvPr id="424" name=""/>
+          <p:cNvPr id="476" name=""/>
           <p:cNvCxnSpPr>
             <a:stCxn xmlns:a="http://schemas.openxmlformats.org/drawingml/2006/main" id="15" idx="3"/>
             <a:endCxn xmlns:a="http://schemas.openxmlformats.org/drawingml/2006/main" id="19" idx="1"/>
@@ -10069,7 +8976,7 @@
                 <a:ea typeface="Calibri"/>
                 <a:cs typeface="Calibri"/>
               </a:rPr>
-              <a:t>No loop is needed when the route is known before execution.</a:t>
+              <a:t>The workflow needs only one tool call.</a:t>
             </a:r>
           </a:p>
         </p:txBody>
@@ -10131,7 +9038,7 @@
                 <a:ea typeface="Calibri"/>
                 <a:cs typeface="Calibri"/>
               </a:rPr>
-              <a:t>same typed registry</a:t>
+              <a:t>known path</a:t>
             </a:r>
           </a:p>
         </p:txBody>
@@ -10193,7 +9100,7 @@
                 <a:ea typeface="Calibri"/>
                 <a:cs typeface="Calibri"/>
               </a:rPr>
-              <a:t>one tool call · full trace</a:t>
+              <a:t>predictable · easy to test</a:t>
             </a:r>
           </a:p>
         </p:txBody>
@@ -10598,7 +9505,7 @@
                 <a:ea typeface="Calibri"/>
                 <a:cs typeface="Calibri"/>
               </a:rPr>
-              <a:t>The EUR amount does not exist before the price observation</a:t>
+              <a:t>The workflow cannot know the EUR amount yet</a:t>
             </a:r>
           </a:p>
         </p:txBody>
@@ -10978,7 +9885,7 @@
                 <a:ea typeface="Calibri"/>
                 <a:cs typeface="Calibri"/>
               </a:rPr>
-              <a:t>Plan once</a:t>
+              <a:t>Plan both</a:t>
             </a:r>
           </a:p>
         </p:txBody>
@@ -11040,7 +9947,7 @@
                 <a:ea typeface="Calibri"/>
                 <a:cs typeface="Calibri"/>
               </a:rPr>
-              <a:t>two tools requested</a:t>
+              <a:t>price then FX</a:t>
             </a:r>
           </a:p>
         </p:txBody>
@@ -11710,7 +10617,7 @@
       </p:sp>
       <p:cxnSp>
         <p:nvCxnSpPr>
-          <p:cNvPr id="421" name=""/>
+          <p:cNvPr id="473" name=""/>
           <p:cNvCxnSpPr>
             <a:stCxn xmlns:a="http://schemas.openxmlformats.org/drawingml/2006/main" id="3" idx="3"/>
             <a:endCxn xmlns:a="http://schemas.openxmlformats.org/drawingml/2006/main" id="7" idx="1"/>
@@ -11736,7 +10643,7 @@
       </p:cxnSp>
       <p:cxnSp>
         <p:nvCxnSpPr>
-          <p:cNvPr id="422" name=""/>
+          <p:cNvPr id="474" name=""/>
           <p:cNvCxnSpPr>
             <a:stCxn xmlns:a="http://schemas.openxmlformats.org/drawingml/2006/main" id="7" idx="3"/>
             <a:endCxn xmlns:a="http://schemas.openxmlformats.org/drawingml/2006/main" id="11" idx="1"/>
@@ -11762,7 +10669,7 @@
       </p:cxnSp>
       <p:cxnSp>
         <p:nvCxnSpPr>
-          <p:cNvPr id="423" name=""/>
+          <p:cNvPr id="475" name=""/>
           <p:cNvCxnSpPr>
             <a:stCxn xmlns:a="http://schemas.openxmlformats.org/drawingml/2006/main" id="11" idx="3"/>
             <a:endCxn xmlns:a="http://schemas.openxmlformats.org/drawingml/2006/main" id="15" idx="1"/>
@@ -11788,7 +10695,7 @@
       </p:cxnSp>
       <p:cxnSp>
         <p:nvCxnSpPr>
-          <p:cNvPr id="424" name=""/>
+          <p:cNvPr id="476" name=""/>
           <p:cNvCxnSpPr>
             <a:stCxn xmlns:a="http://schemas.openxmlformats.org/drawingml/2006/main" id="15" idx="3"/>
             <a:endCxn xmlns:a="http://schemas.openxmlformats.org/drawingml/2006/main" id="19" idx="1"/>
@@ -11869,7 +10776,7 @@
                 <a:ea typeface="Calibri"/>
                 <a:cs typeface="Calibri"/>
               </a:rPr>
-              <a:t>A workflow must never invent the missing amount just to complete the route.</a:t>
+              <a:t>Stop. Do not invent a missing value.</a:t>
             </a:r>
           </a:p>
         </p:txBody>
@@ -11931,7 +10838,7 @@
                 <a:ea typeface="Calibri"/>
                 <a:cs typeface="Calibri"/>
               </a:rPr>
-              <a:t>dependency exposed</a:t>
+              <a:t>missing input shown</a:t>
             </a:r>
           </a:p>
         </p:txBody>
@@ -11993,7 +10900,7 @@
                 <a:ea typeface="Calibri"/>
                 <a:cs typeface="Calibri"/>
               </a:rPr>
-              <a:t>no silent fabrication</a:t>
+              <a:t>safe stop</a:t>
             </a:r>
           </a:p>
         </p:txBody>
@@ -12398,7 +11305,7 @@
                 <a:ea typeface="Calibri"/>
                 <a:cs typeface="Calibri"/>
               </a:rPr>
-              <a:t>An observation can select the next typed action</a:t>
+              <a:t>The agent uses each result to choose the next step</a:t>
             </a:r>
           </a:p>
         </p:txBody>
@@ -13503,14 +12410,14 @@
                 <a:ea typeface="Calibri"/>
                 <a:cs typeface="Calibri"/>
               </a:rPr>
-              <a:t>grounded response</a:t>
+              <a:t>from tool data</a:t>
             </a:r>
           </a:p>
         </p:txBody>
       </p:sp>
       <p:cxnSp>
         <p:nvCxnSpPr>
-          <p:cNvPr id="421" name=""/>
+          <p:cNvPr id="473" name=""/>
           <p:cNvCxnSpPr>
             <a:stCxn xmlns:a="http://schemas.openxmlformats.org/drawingml/2006/main" id="3" idx="3"/>
             <a:endCxn xmlns:a="http://schemas.openxmlformats.org/drawingml/2006/main" id="7" idx="1"/>
@@ -13536,7 +12443,7 @@
       </p:cxnSp>
       <p:cxnSp>
         <p:nvCxnSpPr>
-          <p:cNvPr id="422" name=""/>
+          <p:cNvPr id="474" name=""/>
           <p:cNvCxnSpPr>
             <a:stCxn xmlns:a="http://schemas.openxmlformats.org/drawingml/2006/main" id="7" idx="3"/>
             <a:endCxn xmlns:a="http://schemas.openxmlformats.org/drawingml/2006/main" id="11" idx="1"/>
@@ -13562,7 +12469,7 @@
       </p:cxnSp>
       <p:cxnSp>
         <p:nvCxnSpPr>
-          <p:cNvPr id="423" name=""/>
+          <p:cNvPr id="475" name=""/>
           <p:cNvCxnSpPr>
             <a:stCxn xmlns:a="http://schemas.openxmlformats.org/drawingml/2006/main" id="11" idx="3"/>
             <a:endCxn xmlns:a="http://schemas.openxmlformats.org/drawingml/2006/main" id="15" idx="1"/>
@@ -13588,7 +12495,7 @@
       </p:cxnSp>
       <p:cxnSp>
         <p:nvCxnSpPr>
-          <p:cNvPr id="424" name=""/>
+          <p:cNvPr id="476" name=""/>
           <p:cNvCxnSpPr>
             <a:stCxn xmlns:a="http://schemas.openxmlformats.org/drawingml/2006/main" id="15" idx="3"/>
             <a:endCxn xmlns:a="http://schemas.openxmlformats.org/drawingml/2006/main" id="19" idx="1"/>
@@ -13669,7 +12576,7 @@
                 <a:ea typeface="Calibri"/>
                 <a:cs typeface="Calibri"/>
               </a:rPr>
-              <a:t>The loop is useful because the second request depends on the first observation.</a:t>
+              <a:t>The FX call uses the price returned by the first tool.</a:t>
             </a:r>
           </a:p>
         </p:txBody>
@@ -13793,7 +12700,7 @@
                 <a:ea typeface="Calibri"/>
                 <a:cs typeface="Calibri"/>
               </a:rPr>
-              <a:t>same tools · same snapshot</a:t>
+              <a:t>two calls · one answer</a:t>
             </a:r>
           </a:p>
         </p:txBody>
@@ -14136,7 +13043,7 @@
                 <a:ea typeface="Calibri"/>
                 <a:cs typeface="Calibri"/>
               </a:rPr>
-              <a:t>ALIGNED TRACE</a:t>
+              <a:t>EXECUTION TRACE</a:t>
             </a:r>
           </a:p>
         </p:txBody>
@@ -14198,7 +13105,7 @@
                 <a:ea typeface="Calibri"/>
                 <a:cs typeface="Calibri"/>
               </a:rPr>
-              <a:t>The trajectory shows exactly why the agent succeeds</a:t>
+              <a:t>The trace shows why the agent works</a:t>
             </a:r>
           </a:p>
         </p:txBody>
@@ -14419,7 +13326,7 @@
                 <a:ea typeface="Calibri"/>
                 <a:cs typeface="Calibri"/>
               </a:rPr>
-              <a:t>same question · snapshot</a:t>
+              <a:t>same question · same data</a:t>
             </a:r>
           </a:p>
         </p:txBody>
@@ -15303,14 +14210,14 @@
                 <a:ea typeface="Calibri"/>
                 <a:cs typeface="Calibri"/>
               </a:rPr>
-              <a:t>status · calls · events</a:t>
+              <a:t>status · calls · steps</a:t>
             </a:r>
           </a:p>
         </p:txBody>
       </p:sp>
       <p:cxnSp>
         <p:nvCxnSpPr>
-          <p:cNvPr id="421" name=""/>
+          <p:cNvPr id="473" name=""/>
           <p:cNvCxnSpPr>
             <a:stCxn xmlns:a="http://schemas.openxmlformats.org/drawingml/2006/main" id="3" idx="3"/>
             <a:endCxn xmlns:a="http://schemas.openxmlformats.org/drawingml/2006/main" id="7" idx="1"/>
@@ -15336,7 +14243,7 @@
       </p:cxnSp>
       <p:cxnSp>
         <p:nvCxnSpPr>
-          <p:cNvPr id="422" name=""/>
+          <p:cNvPr id="474" name=""/>
           <p:cNvCxnSpPr>
             <a:stCxn xmlns:a="http://schemas.openxmlformats.org/drawingml/2006/main" id="7" idx="3"/>
             <a:endCxn xmlns:a="http://schemas.openxmlformats.org/drawingml/2006/main" id="11" idx="1"/>
@@ -15362,7 +14269,7 @@
       </p:cxnSp>
       <p:cxnSp>
         <p:nvCxnSpPr>
-          <p:cNvPr id="423" name=""/>
+          <p:cNvPr id="475" name=""/>
           <p:cNvCxnSpPr>
             <a:stCxn xmlns:a="http://schemas.openxmlformats.org/drawingml/2006/main" id="11" idx="3"/>
             <a:endCxn xmlns:a="http://schemas.openxmlformats.org/drawingml/2006/main" id="15" idx="1"/>
@@ -15388,7 +14295,7 @@
       </p:cxnSp>
       <p:cxnSp>
         <p:nvCxnSpPr>
-          <p:cNvPr id="424" name=""/>
+          <p:cNvPr id="476" name=""/>
           <p:cNvCxnSpPr>
             <a:stCxn xmlns:a="http://schemas.openxmlformats.org/drawingml/2006/main" id="15" idx="3"/>
             <a:endCxn xmlns:a="http://schemas.openxmlformats.org/drawingml/2006/main" id="19" idx="1"/>
@@ -15469,7 +14376,7 @@
                 <a:ea typeface="Calibri"/>
                 <a:cs typeface="Calibri"/>
               </a:rPr>
-              <a:t>Same tools and data; only the orchestration policy changes.</a:t>
+              <a:t>Same tools and data. Only the control logic changes.</a:t>
             </a:r>
           </a:p>
         </p:txBody>
@@ -15531,7 +14438,7 @@
                 <a:ea typeface="Calibri"/>
                 <a:cs typeface="Calibri"/>
               </a:rPr>
-              <a:t>workflow · no fabrication</a:t>
+              <a:t>workflow · safe stop</a:t>
             </a:r>
           </a:p>
         </p:txBody>
@@ -15593,7 +14500,7 @@
                 <a:ea typeface="Calibri"/>
                 <a:cs typeface="Calibri"/>
               </a:rPr>
-              <a:t>agent · two grounded calls</a:t>
+              <a:t>agent · two verified calls</a:t>
             </a:r>
           </a:p>
         </p:txBody>
@@ -15936,7 +14843,7 @@
                 <a:ea typeface="Calibri"/>
                 <a:cs typeface="Calibri"/>
               </a:rPr>
-              <a:t>ENGINEERING DECISION</a:t>
+              <a:t>FINAL DECISION</a:t>
             </a:r>
           </a:p>
         </p:txBody>
@@ -15998,7 +14905,7 @@
                 <a:ea typeface="Calibri"/>
                 <a:cs typeface="Calibri"/>
               </a:rPr>
-              <a:t>Keep the agent only while the path remains open-ended</a:t>
+              <a:t>Use the simplest system that works</a:t>
             </a:r>
           </a:p>
         </p:txBody>
@@ -16157,7 +15064,7 @@
                 <a:ea typeface="Calibri"/>
                 <a:cs typeface="Calibri"/>
               </a:rPr>
-              <a:t>known path</a:t>
+              <a:t>known steps</a:t>
             </a:r>
           </a:p>
           <a:p xmlns:a="http://schemas.openxmlformats.org/drawingml/2006/main">
@@ -16184,7 +15091,7 @@
                 <a:ea typeface="Calibri"/>
                 <a:cs typeface="Calibri"/>
               </a:rPr>
-              <a:t>fixed sequence</a:t>
+              <a:t>fixed logic</a:t>
             </a:r>
           </a:p>
         </p:txBody>
@@ -16344,7 +15251,7 @@
                 <a:ea typeface="Calibri"/>
                 <a:cs typeface="Calibri"/>
               </a:rPr>
-              <a:t>observation changes</a:t>
+              <a:t>tool result changes</a:t>
             </a:r>
           </a:p>
           <a:p xmlns:a="http://schemas.openxmlformats.org/drawingml/2006/main">
@@ -16371,7 +15278,7 @@
                 <a:ea typeface="Calibri"/>
                 <a:cs typeface="Calibri"/>
               </a:rPr>
-              <a:t>next action</a:t>
+              <a:t>next step</a:t>
             </a:r>
           </a:p>
           <a:p xmlns:a="http://schemas.openxmlformats.org/drawingml/2006/main">
@@ -16460,7 +15367,7 @@
                 <a:ea typeface="Calibri"/>
                 <a:cs typeface="Calibri"/>
               </a:rPr>
-              <a:t>typed tools · trace</a:t>
+              <a:t>typed tools · clear trace</a:t>
             </a:r>
           </a:p>
           <a:p xmlns:a="http://schemas.openxmlformats.org/drawingml/2006/main">
@@ -16487,7 +15394,7 @@
                 <a:ea typeface="Calibri"/>
                 <a:cs typeface="Calibri"/>
               </a:rPr>
-              <a:t>explicit budget</a:t>
+              <a:t>step limit</a:t>
             </a:r>
           </a:p>
         </p:txBody>
@@ -16673,14 +15580,14 @@
                 <a:ea typeface="Calibri"/>
                 <a:cs typeface="Calibri"/>
               </a:rPr>
-              <a:t>+ graph retry</a:t>
+              <a:t>+ safe retry</a:t>
             </a:r>
           </a:p>
         </p:txBody>
       </p:sp>
       <p:cxnSp>
         <p:nvCxnSpPr>
-          <p:cNvPr id="236" name=""/>
+          <p:cNvPr id="264" name=""/>
           <p:cNvCxnSpPr>
             <a:stCxn xmlns:a="http://schemas.openxmlformats.org/drawingml/2006/main" id="3" idx="3"/>
             <a:endCxn xmlns:a="http://schemas.openxmlformats.org/drawingml/2006/main" id="6" idx="1"/>
@@ -16706,7 +15613,7 @@
       </p:cxnSp>
       <p:cxnSp>
         <p:nvCxnSpPr>
-          <p:cNvPr id="237" name=""/>
+          <p:cNvPr id="265" name=""/>
           <p:cNvCxnSpPr>
             <a:stCxn xmlns:a="http://schemas.openxmlformats.org/drawingml/2006/main" id="6" idx="3"/>
             <a:endCxn xmlns:a="http://schemas.openxmlformats.org/drawingml/2006/main" id="10" idx="1"/>
@@ -16822,7 +15729,7 @@
                 <a:ea typeface="Calibri"/>
                 <a:cs typeface="Calibri"/>
               </a:rPr>
-              <a:t>LOWEST AUTONOMY</a:t>
+              <a:t>SIMPLE FIRST</a:t>
             </a:r>
           </a:p>
         </p:txBody>
@@ -16884,7 +15791,7 @@
                 <a:ea typeface="Calibri"/>
                 <a:cs typeface="Calibri"/>
               </a:rPr>
-              <a:t>Use the lowest useful autonomy: agents only when observations change the next valid action.</a:t>
+              <a:t>Start with a workflow. Use an agent only when a tool result changes the next step.</a:t>
             </a:r>
           </a:p>
         </p:txBody>
@@ -16979,7 +15886,7 @@
                 <a:ea typeface="Calibri"/>
                 <a:cs typeface="Calibri"/>
               </a:rPr>
-              <a:t>CONTROL CONTRACT</a:t>
+              <a:t>SAME CONTRACT</a:t>
             </a:r>
           </a:p>
         </p:txBody>
@@ -17041,7 +15948,7 @@
                 <a:ea typeface="Calibri"/>
                 <a:cs typeface="Calibri"/>
               </a:rPr>
-              <a:t>same schemas · tools · trace · stop condition</a:t>
+              <a:t>same schemas · tools · trace · stop rule</a:t>
             </a:r>
           </a:p>
         </p:txBody>
@@ -17165,7 +16072,7 @@
                 <a:ea typeface="Calibri"/>
                 <a:cs typeface="Calibri"/>
               </a:rPr>
-              <a:t>Next: model failures explicitly with LangGraph state and bounded retries.</a:t>
+              <a:t>Next: handle tool failures with LangGraph state and safe retries.</a:t>
             </a:r>
           </a:p>
         </p:txBody>

--- a/decks/08-workflows-vs-agents.pptx
+++ b/decks/08-workflows-vs-agents.pptx
@@ -2,21 +2,23 @@
 <file path=ppt/presentation.xml><?xml version="1.0" encoding="utf-8"?>
 <p:presentation xmlns:p="http://schemas.openxmlformats.org/presentationml/2006/main">
   <p:sldMasterIdLst>
-    <p:sldMasterId xmlns:r="http://schemas.openxmlformats.org/officeDocument/2006/relationships" id="2147483648" r:id="Rbe115f322e7340fb"/>
+    <p:sldMasterId xmlns:r="http://schemas.openxmlformats.org/officeDocument/2006/relationships" id="2147483648" r:id="R5f23296d2a154e2f"/>
   </p:sldMasterIdLst>
   <p:notesMasterIdLst>
-    <p:notesMasterId xmlns:r="http://schemas.openxmlformats.org/officeDocument/2006/relationships" r:id="R181d9f9d395e4dc4"/>
+    <p:notesMasterId xmlns:r="http://schemas.openxmlformats.org/officeDocument/2006/relationships" r:id="R6395f2bbef224280"/>
   </p:notesMasterIdLst>
   <p:sldIdLst>
-    <p:sldId xmlns:r="http://schemas.openxmlformats.org/officeDocument/2006/relationships" id="256" r:id="R90f6552860704d7e"/>
-    <p:sldId xmlns:r="http://schemas.openxmlformats.org/officeDocument/2006/relationships" id="257" r:id="R80e49952a289419d"/>
-    <p:sldId xmlns:r="http://schemas.openxmlformats.org/officeDocument/2006/relationships" id="258" r:id="R85995328e563446e"/>
-    <p:sldId xmlns:r="http://schemas.openxmlformats.org/officeDocument/2006/relationships" id="259" r:id="R44a6694f0e9547f1"/>
-    <p:sldId xmlns:r="http://schemas.openxmlformats.org/officeDocument/2006/relationships" id="260" r:id="R0b6ac64bb6034eaf"/>
-    <p:sldId xmlns:r="http://schemas.openxmlformats.org/officeDocument/2006/relationships" id="261" r:id="Ra88039a2621d4097"/>
-    <p:sldId xmlns:r="http://schemas.openxmlformats.org/officeDocument/2006/relationships" id="262" r:id="Rabac2817a30e45fe"/>
-    <p:sldId xmlns:r="http://schemas.openxmlformats.org/officeDocument/2006/relationships" id="263" r:id="Ra3e4051241374c90"/>
-    <p:sldId xmlns:r="http://schemas.openxmlformats.org/officeDocument/2006/relationships" id="264" r:id="Ra5fd65af1add42fe"/>
+    <p:sldId xmlns:r="http://schemas.openxmlformats.org/officeDocument/2006/relationships" id="256" r:id="R5b22878f94dd4dbf"/>
+    <p:sldId xmlns:r="http://schemas.openxmlformats.org/officeDocument/2006/relationships" id="257" r:id="R2c2c462e565b40e1"/>
+    <p:sldId xmlns:r="http://schemas.openxmlformats.org/officeDocument/2006/relationships" id="258" r:id="R215b02a006ce4859"/>
+    <p:sldId xmlns:r="http://schemas.openxmlformats.org/officeDocument/2006/relationships" id="259" r:id="R2a6d5f8f51564107"/>
+    <p:sldId xmlns:r="http://schemas.openxmlformats.org/officeDocument/2006/relationships" id="260" r:id="R58ed4d011a284d2f"/>
+    <p:sldId xmlns:r="http://schemas.openxmlformats.org/officeDocument/2006/relationships" id="261" r:id="R5946775aefe340a1"/>
+    <p:sldId xmlns:r="http://schemas.openxmlformats.org/officeDocument/2006/relationships" id="262" r:id="Rc52556952c9342c7"/>
+    <p:sldId xmlns:r="http://schemas.openxmlformats.org/officeDocument/2006/relationships" id="263" r:id="Rdf3f7064b4a442c5"/>
+    <p:sldId xmlns:r="http://schemas.openxmlformats.org/officeDocument/2006/relationships" id="264" r:id="R45f4145bd5ab45d1"/>
+    <p:sldId xmlns:r="http://schemas.openxmlformats.org/officeDocument/2006/relationships" id="265" r:id="R592c2621eac04178"/>
+    <p:sldId xmlns:r="http://schemas.openxmlformats.org/officeDocument/2006/relationships" id="266" r:id="R83e09f6f490244f5"/>
   </p:sldIdLst>
   <p:sldSz cx="15240000" cy="8572500"/>
   <p:notesSz cx="6858000" cy="9144000"/>
@@ -505,6 +507,196 @@
 </p:notes>
 </file>
 
+<file path=ppt/notesSlides/notesSlide10.xml><?xml version="1.0" encoding="utf-8"?>
+<p:notes xmlns:p="http://schemas.openxmlformats.org/presentationml/2006/main">
+  <p:cSld>
+    <p:spTree>
+      <p:nvGrpSpPr>
+        <p:cNvPr id="1" name=""/>
+        <p:cNvGrpSpPr/>
+        <p:nvPr/>
+      </p:nvGrpSpPr>
+      <p:grpSpPr>
+        <a:xfrm xmlns:a="http://schemas.openxmlformats.org/drawingml/2006/main"/>
+      </p:grpSpPr>
+      <p:sp>
+        <p:nvSpPr>
+          <p:cNvPr id="2" name="Slide Image Placeholder 1"/>
+          <p:cNvSpPr>
+            <a:spLocks xmlns:a="http://schemas.openxmlformats.org/drawingml/2006/main" noGrp="1"/>
+          </p:cNvSpPr>
+          <p:nvPr>
+            <p:ph type="sldImg" idx="0"/>
+          </p:nvPr>
+        </p:nvSpPr>
+        <p:spPr/>
+      </p:sp>
+      <p:sp>
+        <p:nvSpPr>
+          <p:cNvPr id="3" name="Notes Placeholder 2"/>
+          <p:cNvSpPr>
+            <a:spLocks xmlns:a="http://schemas.openxmlformats.org/drawingml/2006/main" noGrp="1"/>
+          </p:cNvSpPr>
+          <p:nvPr>
+            <p:ph type="body" idx="1"/>
+          </p:nvPr>
+        </p:nvSpPr>
+        <p:spPr/>
+        <p:txBody>
+          <a:bodyPr xmlns:a="http://schemas.openxmlformats.org/drawingml/2006/main"/>
+          <a:lstStyle xmlns:a="http://schemas.openxmlformats.org/drawingml/2006/main"/>
+          <a:p xmlns:a="http://schemas.openxmlformats.org/drawingml/2006/main">
+            <a:r>
+              <a:t>Instructor purpose: Check the three core decisions before the lesson closes.</a:t>
+            </a:r>
+          </a:p>
+          <a:p xmlns:a="http://schemas.openxmlformats.org/drawingml/2006/main">
+            <a:r>
+              <a:t>Planned timing: 3 minutes.</a:t>
+            </a:r>
+          </a:p>
+          <a:p xmlns:a="http://schemas.openxmlformats.org/drawingml/2006/main">
+            <a:r>
+              <a:t>Facilitation: ask for one letter per question.</a:t>
+            </a:r>
+          </a:p>
+          <a:p xmlns:a="http://schemas.openxmlformats.org/drawingml/2006/main">
+            <a:r>
+              <a:t>[Sources]</a:t>
+            </a:r>
+          </a:p>
+          <a:p xmlns:a="http://schemas.openxmlformats.org/drawingml/2006/main">
+            <a:r>
+              <a:t>- chapters/08-workflows-vs-agents.md</a:t>
+            </a:r>
+          </a:p>
+          <a:p xmlns:a="http://schemas.openxmlformats.org/drawingml/2006/main">
+            <a:r>
+              <a:t>[/Sources]</a:t>
+            </a:r>
+          </a:p>
+        </p:txBody>
+      </p:sp>
+      <p:sp>
+        <p:nvSpPr>
+          <p:cNvPr id="4" name="Slide Number Placeholder 3"/>
+          <p:cNvSpPr>
+            <a:spLocks xmlns:a="http://schemas.openxmlformats.org/drawingml/2006/main" noGrp="1"/>
+          </p:cNvSpPr>
+          <p:nvPr>
+            <p:ph type="sldNum" idx="5"/>
+          </p:nvPr>
+        </p:nvSpPr>
+        <p:spPr/>
+        <p:txBody>
+          <a:bodyPr xmlns:a="http://schemas.openxmlformats.org/drawingml/2006/main"/>
+          <a:lstStyle xmlns:a="http://schemas.openxmlformats.org/drawingml/2006/main"/>
+          <a:p xmlns:a="http://schemas.openxmlformats.org/drawingml/2006/main"/>
+        </p:txBody>
+      </p:sp>
+    </p:spTree>
+  </p:cSld>
+  <p:clrMapOvr>
+    <a:masterClrMapping xmlns:a="http://schemas.openxmlformats.org/drawingml/2006/main"/>
+  </p:clrMapOvr>
+</p:notes>
+</file>
+
+<file path=ppt/notesSlides/notesSlide11.xml><?xml version="1.0" encoding="utf-8"?>
+<p:notes xmlns:p="http://schemas.openxmlformats.org/presentationml/2006/main">
+  <p:cSld>
+    <p:spTree>
+      <p:nvGrpSpPr>
+        <p:cNvPr id="1" name=""/>
+        <p:cNvGrpSpPr/>
+        <p:nvPr/>
+      </p:nvGrpSpPr>
+      <p:grpSpPr>
+        <a:xfrm xmlns:a="http://schemas.openxmlformats.org/drawingml/2006/main"/>
+      </p:grpSpPr>
+      <p:sp>
+        <p:nvSpPr>
+          <p:cNvPr id="2" name="Slide Image Placeholder 1"/>
+          <p:cNvSpPr>
+            <a:spLocks xmlns:a="http://schemas.openxmlformats.org/drawingml/2006/main" noGrp="1"/>
+          </p:cNvSpPr>
+          <p:nvPr>
+            <p:ph type="sldImg" idx="0"/>
+          </p:nvPr>
+        </p:nvSpPr>
+        <p:spPr/>
+      </p:sp>
+      <p:sp>
+        <p:nvSpPr>
+          <p:cNvPr id="3" name="Notes Placeholder 2"/>
+          <p:cNvSpPr>
+            <a:spLocks xmlns:a="http://schemas.openxmlformats.org/drawingml/2006/main" noGrp="1"/>
+          </p:cNvSpPr>
+          <p:nvPr>
+            <p:ph type="body" idx="1"/>
+          </p:nvPr>
+        </p:nvSpPr>
+        <p:spPr/>
+        <p:txBody>
+          <a:bodyPr xmlns:a="http://schemas.openxmlformats.org/drawingml/2006/main"/>
+          <a:lstStyle xmlns:a="http://schemas.openxmlformats.org/drawingml/2006/main"/>
+          <a:p xmlns:a="http://schemas.openxmlformats.org/drawingml/2006/main">
+            <a:r>
+              <a:t>Instructor purpose: Correct the quiz and restate the practical rule behind each answer.</a:t>
+            </a:r>
+          </a:p>
+          <a:p xmlns:a="http://schemas.openxmlformats.org/drawingml/2006/main">
+            <a:r>
+              <a:t>Planned timing: 3 minutes.</a:t>
+            </a:r>
+          </a:p>
+          <a:p xmlns:a="http://schemas.openxmlformats.org/drawingml/2006/main">
+            <a:r>
+              <a:t>Facilitation: ask learners to explain each rule in their own words.</a:t>
+            </a:r>
+          </a:p>
+          <a:p xmlns:a="http://schemas.openxmlformats.org/drawingml/2006/main">
+            <a:r>
+              <a:t>[Sources]</a:t>
+            </a:r>
+          </a:p>
+          <a:p xmlns:a="http://schemas.openxmlformats.org/drawingml/2006/main">
+            <a:r>
+              <a:t>- chapters/08-workflows-vs-agents.md</a:t>
+            </a:r>
+          </a:p>
+          <a:p xmlns:a="http://schemas.openxmlformats.org/drawingml/2006/main">
+            <a:r>
+              <a:t>[/Sources]</a:t>
+            </a:r>
+          </a:p>
+        </p:txBody>
+      </p:sp>
+      <p:sp>
+        <p:nvSpPr>
+          <p:cNvPr id="4" name="Slide Number Placeholder 3"/>
+          <p:cNvSpPr>
+            <a:spLocks xmlns:a="http://schemas.openxmlformats.org/drawingml/2006/main" noGrp="1"/>
+          </p:cNvSpPr>
+          <p:nvPr>
+            <p:ph type="sldNum" idx="5"/>
+          </p:nvPr>
+        </p:nvSpPr>
+        <p:spPr/>
+        <p:txBody>
+          <a:bodyPr xmlns:a="http://schemas.openxmlformats.org/drawingml/2006/main"/>
+          <a:lstStyle xmlns:a="http://schemas.openxmlformats.org/drawingml/2006/main"/>
+          <a:p xmlns:a="http://schemas.openxmlformats.org/drawingml/2006/main"/>
+        </p:txBody>
+      </p:sp>
+    </p:spTree>
+  </p:cSld>
+  <p:clrMapOvr>
+    <a:masterClrMapping xmlns:a="http://schemas.openxmlformats.org/drawingml/2006/main"/>
+  </p:clrMapOvr>
+</p:notes>
+</file>
+
 <file path=ppt/notesSlides/notesSlide2.xml><?xml version="1.0" encoding="utf-8"?>
 <p:notes xmlns:p="http://schemas.openxmlformats.org/presentationml/2006/main">
   <p:cSld>
@@ -1303,7 +1495,7 @@
   </p:cSld>
   <p:clrMap bg1="lt1" tx1="dk1" bg2="lt2" tx2="dk2" accent1="accent1" accent2="accent2" accent3="accent3" accent4="accent4" accent5="accent5" accent6="accent6" hlink="hlink" folHlink="folHlink"/>
   <p:sldLayoutIdLst>
-    <p:sldLayoutId xmlns:r="http://schemas.openxmlformats.org/officeDocument/2006/relationships" id="2147483649" r:id="R9cabc63eaf004962"/>
+    <p:sldLayoutId xmlns:r="http://schemas.openxmlformats.org/officeDocument/2006/relationships" id="2147483649" r:id="Re50359802ea842f5"/>
   </p:sldLayoutIdLst>
   <p:txStyles>
     <p:titleStyle>
@@ -2202,6 +2394,1350 @@
 </p:sld>
 </file>
 
+<file path=ppt/slides/slide10.xml><?xml version="1.0" encoding="utf-8"?>
+<p:sld xmlns:p="http://schemas.openxmlformats.org/presentationml/2006/main">
+  <p:cSld>
+    <p:bg>
+      <p:bgPr>
+        <a:solidFill xmlns:a="http://schemas.openxmlformats.org/drawingml/2006/main">
+          <a:srgbClr val="F5F5F5"/>
+        </a:solidFill>
+      </p:bgPr>
+    </p:bg>
+    <p:spTree>
+      <p:nvGrpSpPr>
+        <p:cNvPr id="1" name=""/>
+        <p:cNvGrpSpPr/>
+        <p:nvPr/>
+      </p:nvGrpSpPr>
+      <p:grpSpPr>
+        <a:xfrm xmlns:a="http://schemas.openxmlformats.org/drawingml/2006/main"/>
+      </p:grpSpPr>
+      <p:sp>
+        <p:nvSpPr>
+          <p:cNvPr id="7" name="">
+            <a:extLst xmlns:a="http://schemas.openxmlformats.org/drawingml/2006/main">
+              <a:ext uri="{FF2B5EF4-FFF2-40B4-BE49-F238E27FC236}">
+                <a16:creationId xmlns:a16="http://schemas.microsoft.com/office/drawing/2014/main" id="{2E1E88F9-4976-411E-8732-D45BE311BBD2}"/>
+              </a:ext>
+            </a:extLst>
+          </p:cNvPr>
+          <p:cNvSpPr>
+            <a:spLocks xmlns:a="http://schemas.openxmlformats.org/drawingml/2006/main" noGrp="1"/>
+          </p:cNvSpPr>
+          <p:nvPr/>
+        </p:nvSpPr>
+        <p:spPr>
+          <a:xfrm xmlns:a="http://schemas.openxmlformats.org/drawingml/2006/main">
+            <a:off x="971550" y="781050"/>
+            <a:ext cx="1257300" cy="76200"/>
+          </a:xfrm>
+          <a:prstGeom xmlns:a="http://schemas.openxmlformats.org/drawingml/2006/main" prst="rect">
+            <a:avLst/>
+          </a:prstGeom>
+          <a:solidFill xmlns:a="http://schemas.openxmlformats.org/drawingml/2006/main">
+            <a:srgbClr val="00A2EB"/>
+          </a:solidFill>
+          <a:ln xmlns:a="http://schemas.openxmlformats.org/drawingml/2006/main" w="0">
+            <a:solidFill>
+              <a:srgbClr val="00A2EB"/>
+            </a:solidFill>
+            <a:prstDash val="solid"/>
+          </a:ln>
+        </p:spPr>
+      </p:sp>
+      <p:sp>
+        <p:nvSpPr>
+          <p:cNvPr id="2" name="">
+            <a:extLst xmlns:a="http://schemas.openxmlformats.org/drawingml/2006/main">
+              <a:ext uri="{FF2B5EF4-FFF2-40B4-BE49-F238E27FC236}">
+                <a16:creationId xmlns:a16="http://schemas.microsoft.com/office/drawing/2014/main" id="{35C43047-00B1-4B7A-BB36-D272D2C9B6CA}"/>
+              </a:ext>
+            </a:extLst>
+          </p:cNvPr>
+          <p:cNvSpPr>
+            <a:spLocks xmlns:a="http://schemas.openxmlformats.org/drawingml/2006/main" noGrp="1"/>
+          </p:cNvSpPr>
+          <p:nvPr/>
+        </p:nvSpPr>
+        <p:spPr>
+          <a:xfrm xmlns:a="http://schemas.openxmlformats.org/drawingml/2006/main">
+            <a:off x="971550" y="1066800"/>
+            <a:ext cx="2857500" cy="419100"/>
+          </a:xfrm>
+          <a:prstGeom xmlns:a="http://schemas.openxmlformats.org/drawingml/2006/main" prst="rect">
+            <a:avLst/>
+          </a:prstGeom>
+          <a:noFill xmlns:a="http://schemas.openxmlformats.org/drawingml/2006/main"/>
+          <a:ln xmlns:a="http://schemas.openxmlformats.org/drawingml/2006/main" w="0">
+            <a:noFill/>
+            <a:prstDash val="solid"/>
+          </a:ln>
+        </p:spPr>
+        <p:txBody>
+          <a:bodyPr xmlns:a="http://schemas.openxmlformats.org/drawingml/2006/main" wrap="square" lIns="0" tIns="0" rIns="0" bIns="0" anchor="ctr">
+            <a:normAutofit fontScale="100000"/>
+          </a:bodyPr>
+          <a:lstStyle xmlns:a="http://schemas.openxmlformats.org/drawingml/2006/main"/>
+          <a:p xmlns:a="http://schemas.openxmlformats.org/drawingml/2006/main">
+            <a:pPr algn="l">
+              <a:lnSpc>
+                <a:spcPct val="100000"/>
+              </a:lnSpc>
+              <a:buNone/>
+              <a:defRPr sz="1575" b="1">
+                <a:solidFill>
+                  <a:srgbClr val="1F40CB"/>
+                </a:solidFill>
+                <a:latin typeface="Calibri"/>
+                <a:ea typeface="Calibri"/>
+                <a:cs typeface="Calibri"/>
+              </a:defRPr>
+            </a:pPr>
+            <a:r>
+              <a:rPr sz="1575" b="1">
+                <a:solidFill>
+                  <a:srgbClr val="1F40CB"/>
+                </a:solidFill>
+                <a:latin typeface="Calibri"/>
+                <a:ea typeface="Calibri"/>
+                <a:cs typeface="Calibri"/>
+              </a:rPr>
+              <a:t>FIRST FINANCE</a:t>
+            </a:r>
+          </a:p>
+        </p:txBody>
+      </p:sp>
+      <p:sp>
+        <p:nvSpPr>
+          <p:cNvPr id="3" name="">
+            <a:extLst xmlns:a="http://schemas.openxmlformats.org/drawingml/2006/main">
+              <a:ext uri="{FF2B5EF4-FFF2-40B4-BE49-F238E27FC236}">
+                <a16:creationId xmlns:a16="http://schemas.microsoft.com/office/drawing/2014/main" id="{2EBB9B00-5773-4D90-9774-8BB7FE35221F}"/>
+              </a:ext>
+            </a:extLst>
+          </p:cNvPr>
+          <p:cNvSpPr>
+            <a:spLocks xmlns:a="http://schemas.openxmlformats.org/drawingml/2006/main" noGrp="1"/>
+          </p:cNvSpPr>
+          <p:nvPr/>
+        </p:nvSpPr>
+        <p:spPr>
+          <a:xfrm xmlns:a="http://schemas.openxmlformats.org/drawingml/2006/main">
+            <a:off x="971550" y="2362200"/>
+            <a:ext cx="13296900" cy="895350"/>
+          </a:xfrm>
+          <a:prstGeom xmlns:a="http://schemas.openxmlformats.org/drawingml/2006/main" prst="rect">
+            <a:avLst/>
+          </a:prstGeom>
+          <a:noFill xmlns:a="http://schemas.openxmlformats.org/drawingml/2006/main"/>
+          <a:ln xmlns:a="http://schemas.openxmlformats.org/drawingml/2006/main" w="0">
+            <a:noFill/>
+            <a:prstDash val="solid"/>
+          </a:ln>
+        </p:spPr>
+        <p:txBody>
+          <a:bodyPr xmlns:a="http://schemas.openxmlformats.org/drawingml/2006/main" wrap="none" lIns="0" tIns="0" rIns="0" bIns="0" anchor="ctr">
+            <a:normAutofit fontScale="100000"/>
+          </a:bodyPr>
+          <a:lstStyle xmlns:a="http://schemas.openxmlformats.org/drawingml/2006/main"/>
+          <a:p xmlns:a="http://schemas.openxmlformats.org/drawingml/2006/main">
+            <a:pPr algn="l">
+              <a:lnSpc>
+                <a:spcPct val="100000"/>
+              </a:lnSpc>
+              <a:buNone/>
+              <a:defRPr sz="4800" b="1">
+                <a:solidFill>
+                  <a:srgbClr val="051C2A"/>
+                </a:solidFill>
+                <a:latin typeface="Calibri"/>
+                <a:ea typeface="Calibri"/>
+                <a:cs typeface="Calibri"/>
+              </a:defRPr>
+            </a:pPr>
+            <a:r>
+              <a:rPr sz="4800" b="1">
+                <a:solidFill>
+                  <a:srgbClr val="051C2A"/>
+                </a:solidFill>
+                <a:latin typeface="Calibri"/>
+                <a:ea typeface="Calibri"/>
+                <a:cs typeface="Calibri"/>
+              </a:rPr>
+              <a:t>Quick quiz</a:t>
+            </a:r>
+          </a:p>
+        </p:txBody>
+      </p:sp>
+      <p:sp>
+        <p:nvSpPr>
+          <p:cNvPr id="4" name="">
+            <a:extLst xmlns:a="http://schemas.openxmlformats.org/drawingml/2006/main">
+              <a:ext uri="{FF2B5EF4-FFF2-40B4-BE49-F238E27FC236}">
+                <a16:creationId xmlns:a16="http://schemas.microsoft.com/office/drawing/2014/main" id="{601F96F8-8EA3-4B69-A3AF-EBD5CBCD09C1}"/>
+              </a:ext>
+            </a:extLst>
+          </p:cNvPr>
+          <p:cNvSpPr>
+            <a:spLocks xmlns:a="http://schemas.openxmlformats.org/drawingml/2006/main" noGrp="1"/>
+          </p:cNvSpPr>
+          <p:nvPr/>
+        </p:nvSpPr>
+        <p:spPr>
+          <a:xfrm xmlns:a="http://schemas.openxmlformats.org/drawingml/2006/main">
+            <a:off x="971550" y="3562350"/>
+            <a:ext cx="11239500" cy="514350"/>
+          </a:xfrm>
+          <a:prstGeom xmlns:a="http://schemas.openxmlformats.org/drawingml/2006/main" prst="rect">
+            <a:avLst/>
+          </a:prstGeom>
+          <a:noFill xmlns:a="http://schemas.openxmlformats.org/drawingml/2006/main"/>
+          <a:ln xmlns:a="http://schemas.openxmlformats.org/drawingml/2006/main" w="0">
+            <a:noFill/>
+            <a:prstDash val="solid"/>
+          </a:ln>
+        </p:spPr>
+        <p:txBody>
+          <a:bodyPr xmlns:a="http://schemas.openxmlformats.org/drawingml/2006/main" wrap="square" lIns="0" tIns="0" rIns="0" bIns="0" anchor="ctr">
+            <a:normAutofit fontScale="100000"/>
+          </a:bodyPr>
+          <a:lstStyle xmlns:a="http://schemas.openxmlformats.org/drawingml/2006/main"/>
+          <a:p xmlns:a="http://schemas.openxmlformats.org/drawingml/2006/main">
+            <a:pPr algn="l">
+              <a:lnSpc>
+                <a:spcPct val="100000"/>
+              </a:lnSpc>
+              <a:buNone/>
+              <a:defRPr sz="2400" b="0">
+                <a:solidFill>
+                  <a:srgbClr val="3F3F42"/>
+                </a:solidFill>
+                <a:latin typeface="Calibri"/>
+                <a:ea typeface="Calibri"/>
+                <a:cs typeface="Calibri"/>
+              </a:defRPr>
+            </a:pPr>
+            <a:r>
+              <a:rPr sz="2400" b="0">
+                <a:solidFill>
+                  <a:srgbClr val="3F3F42"/>
+                </a:solidFill>
+                <a:latin typeface="Calibri"/>
+                <a:ea typeface="Calibri"/>
+                <a:cs typeface="Calibri"/>
+              </a:rPr>
+              <a:t>Choose one answer for each question.</a:t>
+            </a:r>
+          </a:p>
+        </p:txBody>
+      </p:sp>
+      <p:sp>
+        <p:nvSpPr>
+          <p:cNvPr id="5" name="">
+            <a:extLst xmlns:a="http://schemas.openxmlformats.org/drawingml/2006/main">
+              <a:ext uri="{FF2B5EF4-FFF2-40B4-BE49-F238E27FC236}">
+                <a16:creationId xmlns:a16="http://schemas.microsoft.com/office/drawing/2014/main" id="{D4A6E89B-2708-4600-B820-727EF660DE6B}"/>
+              </a:ext>
+            </a:extLst>
+          </p:cNvPr>
+          <p:cNvSpPr>
+            <a:spLocks xmlns:a="http://schemas.openxmlformats.org/drawingml/2006/main" noGrp="1"/>
+          </p:cNvSpPr>
+          <p:nvPr/>
+        </p:nvSpPr>
+        <p:spPr>
+          <a:xfrm xmlns:a="http://schemas.openxmlformats.org/drawingml/2006/main">
+            <a:off x="971550" y="6477000"/>
+            <a:ext cx="9525000" cy="400050"/>
+          </a:xfrm>
+          <a:prstGeom xmlns:a="http://schemas.openxmlformats.org/drawingml/2006/main" prst="rect">
+            <a:avLst/>
+          </a:prstGeom>
+          <a:noFill xmlns:a="http://schemas.openxmlformats.org/drawingml/2006/main"/>
+          <a:ln xmlns:a="http://schemas.openxmlformats.org/drawingml/2006/main" w="0">
+            <a:noFill/>
+            <a:prstDash val="solid"/>
+          </a:ln>
+        </p:spPr>
+        <p:txBody>
+          <a:bodyPr xmlns:a="http://schemas.openxmlformats.org/drawingml/2006/main" wrap="square" lIns="0" tIns="0" rIns="0" bIns="0" anchor="ctr">
+            <a:normAutofit fontScale="100000"/>
+          </a:bodyPr>
+          <a:lstStyle xmlns:a="http://schemas.openxmlformats.org/drawingml/2006/main"/>
+          <a:p xmlns:a="http://schemas.openxmlformats.org/drawingml/2006/main">
+            <a:pPr algn="l">
+              <a:lnSpc>
+                <a:spcPct val="100000"/>
+              </a:lnSpc>
+              <a:buNone/>
+              <a:defRPr sz="1350" b="1">
+                <a:solidFill>
+                  <a:srgbClr val="1F40CB"/>
+                </a:solidFill>
+                <a:latin typeface="Calibri"/>
+                <a:ea typeface="Calibri"/>
+                <a:cs typeface="Calibri"/>
+              </a:defRPr>
+            </a:pPr>
+            <a:r>
+              <a:rPr sz="1350" b="1">
+                <a:solidFill>
+                  <a:srgbClr val="1F40CB"/>
+                </a:solidFill>
+                <a:latin typeface="Calibri"/>
+                <a:ea typeface="Calibri"/>
+                <a:cs typeface="Calibri"/>
+              </a:rPr>
+              <a:t>LESSON 08  ·  3 QUESTIONS  ·  3 MINUTES</a:t>
+            </a:r>
+          </a:p>
+        </p:txBody>
+      </p:sp>
+      <p:sp>
+        <p:nvSpPr>
+          <p:cNvPr id="6" name="">
+            <a:extLst xmlns:a="http://schemas.openxmlformats.org/drawingml/2006/main">
+              <a:ext uri="{FF2B5EF4-FFF2-40B4-BE49-F238E27FC236}">
+                <a16:creationId xmlns:a16="http://schemas.microsoft.com/office/drawing/2014/main" id="{053831D6-7D46-4F1A-929F-D2CAD97F1627}"/>
+              </a:ext>
+            </a:extLst>
+          </p:cNvPr>
+          <p:cNvSpPr>
+            <a:spLocks xmlns:a="http://schemas.openxmlformats.org/drawingml/2006/main" noGrp="1"/>
+          </p:cNvSpPr>
+          <p:nvPr/>
+        </p:nvSpPr>
+        <p:spPr>
+          <a:xfrm xmlns:a="http://schemas.openxmlformats.org/drawingml/2006/main">
+            <a:off x="971550" y="7067550"/>
+            <a:ext cx="4762500" cy="381000"/>
+          </a:xfrm>
+          <a:prstGeom xmlns:a="http://schemas.openxmlformats.org/drawingml/2006/main" prst="rect">
+            <a:avLst/>
+          </a:prstGeom>
+          <a:noFill xmlns:a="http://schemas.openxmlformats.org/drawingml/2006/main"/>
+          <a:ln xmlns:a="http://schemas.openxmlformats.org/drawingml/2006/main" w="0">
+            <a:noFill/>
+            <a:prstDash val="solid"/>
+          </a:ln>
+        </p:spPr>
+        <p:txBody>
+          <a:bodyPr xmlns:a="http://schemas.openxmlformats.org/drawingml/2006/main" wrap="square" lIns="0" tIns="0" rIns="0" bIns="0" anchor="ctr">
+            <a:normAutofit fontScale="100000"/>
+          </a:bodyPr>
+          <a:lstStyle xmlns:a="http://schemas.openxmlformats.org/drawingml/2006/main"/>
+          <a:p xmlns:a="http://schemas.openxmlformats.org/drawingml/2006/main">
+            <a:pPr algn="l">
+              <a:lnSpc>
+                <a:spcPct val="100000"/>
+              </a:lnSpc>
+              <a:buNone/>
+              <a:defRPr sz="1725" b="0">
+                <a:solidFill>
+                  <a:srgbClr val="051C2A"/>
+                </a:solidFill>
+                <a:latin typeface="Calibri"/>
+                <a:ea typeface="Calibri"/>
+                <a:cs typeface="Calibri"/>
+              </a:defRPr>
+            </a:pPr>
+            <a:r>
+              <a:rPr sz="1725" b="0">
+                <a:solidFill>
+                  <a:srgbClr val="051C2A"/>
+                </a:solidFill>
+                <a:latin typeface="Calibri"/>
+                <a:ea typeface="Calibri"/>
+                <a:cs typeface="Calibri"/>
+              </a:rPr>
+              <a:t>First Finance - Arnaud Demes</a:t>
+            </a:r>
+          </a:p>
+        </p:txBody>
+      </p:sp>
+      <p:sp>
+        <p:nvSpPr>
+          <p:cNvPr id="8" name="quiz-question-1">
+            <a:extLst xmlns:a="http://schemas.openxmlformats.org/drawingml/2006/main">
+              <a:ext uri="{FF2B5EF4-FFF2-40B4-BE49-F238E27FC236}">
+                <a16:creationId xmlns:a16="http://schemas.microsoft.com/office/drawing/2014/main" id="{A22FBA4B-A32B-4E0B-BFC1-53EA0C170DFF}"/>
+              </a:ext>
+            </a:extLst>
+          </p:cNvPr>
+          <p:cNvSpPr>
+            <a:spLocks xmlns:a="http://schemas.openxmlformats.org/drawingml/2006/main" noGrp="1"/>
+          </p:cNvSpPr>
+          <p:nvPr/>
+        </p:nvSpPr>
+        <p:spPr>
+          <a:xfrm xmlns:a="http://schemas.openxmlformats.org/drawingml/2006/main">
+            <a:off x="971550" y="4400550"/>
+            <a:ext cx="13296900" cy="285750"/>
+          </a:xfrm>
+          <a:prstGeom xmlns:a="http://schemas.openxmlformats.org/drawingml/2006/main" prst="rect">
+            <a:avLst/>
+          </a:prstGeom>
+          <a:noFill xmlns:a="http://schemas.openxmlformats.org/drawingml/2006/main"/>
+          <a:ln xmlns:a="http://schemas.openxmlformats.org/drawingml/2006/main" w="0">
+            <a:noFill/>
+            <a:prstDash val="solid"/>
+          </a:ln>
+        </p:spPr>
+        <p:txBody>
+          <a:bodyPr xmlns:a="http://schemas.openxmlformats.org/drawingml/2006/main"/>
+          <a:lstStyle xmlns:a="http://schemas.openxmlformats.org/drawingml/2006/main"/>
+          <a:p xmlns:a="http://schemas.openxmlformats.org/drawingml/2006/main">
+            <a:pPr>
+              <a:defRPr sz="1500" b="1">
+                <a:solidFill>
+                  <a:srgbClr val="001B2E"/>
+                </a:solidFill>
+              </a:defRPr>
+            </a:pPr>
+            <a:r>
+              <a:rPr sz="1500" b="1">
+                <a:solidFill>
+                  <a:srgbClr val="001B2E"/>
+                </a:solidFill>
+              </a:rPr>
+              <a:t>1. When is a workflow the best first choice?</a:t>
+            </a:r>
+          </a:p>
+        </p:txBody>
+      </p:sp>
+      <p:sp>
+        <p:nvSpPr>
+          <p:cNvPr id="9" name="quiz-options-1">
+            <a:extLst xmlns:a="http://schemas.openxmlformats.org/drawingml/2006/main">
+              <a:ext uri="{FF2B5EF4-FFF2-40B4-BE49-F238E27FC236}">
+                <a16:creationId xmlns:a16="http://schemas.microsoft.com/office/drawing/2014/main" id="{7F7EFDC0-5A12-4118-8D8C-E460584D0F3E}"/>
+              </a:ext>
+            </a:extLst>
+          </p:cNvPr>
+          <p:cNvSpPr>
+            <a:spLocks xmlns:a="http://schemas.openxmlformats.org/drawingml/2006/main" noGrp="1"/>
+          </p:cNvSpPr>
+          <p:nvPr/>
+        </p:nvSpPr>
+        <p:spPr>
+          <a:xfrm xmlns:a="http://schemas.openxmlformats.org/drawingml/2006/main">
+            <a:off x="1257300" y="4705350"/>
+            <a:ext cx="13011150" cy="247650"/>
+          </a:xfrm>
+          <a:prstGeom xmlns:a="http://schemas.openxmlformats.org/drawingml/2006/main" prst="rect">
+            <a:avLst/>
+          </a:prstGeom>
+          <a:noFill xmlns:a="http://schemas.openxmlformats.org/drawingml/2006/main"/>
+          <a:ln xmlns:a="http://schemas.openxmlformats.org/drawingml/2006/main" w="0">
+            <a:noFill/>
+            <a:prstDash val="solid"/>
+          </a:ln>
+        </p:spPr>
+        <p:txBody>
+          <a:bodyPr xmlns:a="http://schemas.openxmlformats.org/drawingml/2006/main"/>
+          <a:lstStyle xmlns:a="http://schemas.openxmlformats.org/drawingml/2006/main"/>
+          <a:p xmlns:a="http://schemas.openxmlformats.org/drawingml/2006/main">
+            <a:pPr>
+              <a:defRPr sz="1200" b="0">
+                <a:solidFill>
+                  <a:srgbClr val="334155"/>
+                </a:solidFill>
+              </a:defRPr>
+            </a:pPr>
+            <a:r>
+              <a:rPr sz="1200" b="0">
+                <a:solidFill>
+                  <a:srgbClr val="334155"/>
+                </a:solidFill>
+              </a:rPr>
+              <a:t>A  Steps are known     |     B  Every step is unknown     |     C  Many agents are available</a:t>
+            </a:r>
+          </a:p>
+        </p:txBody>
+      </p:sp>
+      <p:sp>
+        <p:nvSpPr>
+          <p:cNvPr id="10" name="quiz-question-2">
+            <a:extLst xmlns:a="http://schemas.openxmlformats.org/drawingml/2006/main">
+              <a:ext uri="{FF2B5EF4-FFF2-40B4-BE49-F238E27FC236}">
+                <a16:creationId xmlns:a16="http://schemas.microsoft.com/office/drawing/2014/main" id="{F6C9F60E-40B2-484F-9A1F-8ACA13694A49}"/>
+              </a:ext>
+            </a:extLst>
+          </p:cNvPr>
+          <p:cNvSpPr>
+            <a:spLocks xmlns:a="http://schemas.openxmlformats.org/drawingml/2006/main" noGrp="1"/>
+          </p:cNvSpPr>
+          <p:nvPr/>
+        </p:nvSpPr>
+        <p:spPr>
+          <a:xfrm xmlns:a="http://schemas.openxmlformats.org/drawingml/2006/main">
+            <a:off x="971550" y="5086350"/>
+            <a:ext cx="13296900" cy="285750"/>
+          </a:xfrm>
+          <a:prstGeom xmlns:a="http://schemas.openxmlformats.org/drawingml/2006/main" prst="rect">
+            <a:avLst/>
+          </a:prstGeom>
+          <a:noFill xmlns:a="http://schemas.openxmlformats.org/drawingml/2006/main"/>
+          <a:ln xmlns:a="http://schemas.openxmlformats.org/drawingml/2006/main" w="0">
+            <a:noFill/>
+            <a:prstDash val="solid"/>
+          </a:ln>
+        </p:spPr>
+        <p:txBody>
+          <a:bodyPr xmlns:a="http://schemas.openxmlformats.org/drawingml/2006/main"/>
+          <a:lstStyle xmlns:a="http://schemas.openxmlformats.org/drawingml/2006/main"/>
+          <a:p xmlns:a="http://schemas.openxmlformats.org/drawingml/2006/main">
+            <a:pPr>
+              <a:defRPr sz="1500" b="1">
+                <a:solidFill>
+                  <a:srgbClr val="001B2E"/>
+                </a:solidFill>
+              </a:defRPr>
+            </a:pPr>
+            <a:r>
+              <a:rPr sz="1500" b="1">
+                <a:solidFill>
+                  <a:srgbClr val="001B2E"/>
+                </a:solidFill>
+              </a:rPr>
+              <a:t>2. When is an agent useful?</a:t>
+            </a:r>
+          </a:p>
+        </p:txBody>
+      </p:sp>
+      <p:sp>
+        <p:nvSpPr>
+          <p:cNvPr id="11" name="quiz-options-2">
+            <a:extLst xmlns:a="http://schemas.openxmlformats.org/drawingml/2006/main">
+              <a:ext uri="{FF2B5EF4-FFF2-40B4-BE49-F238E27FC236}">
+                <a16:creationId xmlns:a16="http://schemas.microsoft.com/office/drawing/2014/main" id="{20D52223-62E0-4113-9B99-ADAB0BC2D8B0}"/>
+              </a:ext>
+            </a:extLst>
+          </p:cNvPr>
+          <p:cNvSpPr>
+            <a:spLocks xmlns:a="http://schemas.openxmlformats.org/drawingml/2006/main" noGrp="1"/>
+          </p:cNvSpPr>
+          <p:nvPr/>
+        </p:nvSpPr>
+        <p:spPr>
+          <a:xfrm xmlns:a="http://schemas.openxmlformats.org/drawingml/2006/main">
+            <a:off x="1257300" y="5391150"/>
+            <a:ext cx="13011150" cy="247650"/>
+          </a:xfrm>
+          <a:prstGeom xmlns:a="http://schemas.openxmlformats.org/drawingml/2006/main" prst="rect">
+            <a:avLst/>
+          </a:prstGeom>
+          <a:noFill xmlns:a="http://schemas.openxmlformats.org/drawingml/2006/main"/>
+          <a:ln xmlns:a="http://schemas.openxmlformats.org/drawingml/2006/main" w="0">
+            <a:noFill/>
+            <a:prstDash val="solid"/>
+          </a:ln>
+        </p:spPr>
+        <p:txBody>
+          <a:bodyPr xmlns:a="http://schemas.openxmlformats.org/drawingml/2006/main"/>
+          <a:lstStyle xmlns:a="http://schemas.openxmlformats.org/drawingml/2006/main"/>
+          <a:p xmlns:a="http://schemas.openxmlformats.org/drawingml/2006/main">
+            <a:pPr>
+              <a:defRPr sz="1200" b="0">
+                <a:solidFill>
+                  <a:srgbClr val="334155"/>
+                </a:solidFill>
+              </a:defRPr>
+            </a:pPr>
+            <a:r>
+              <a:rPr sz="1200" b="0">
+                <a:solidFill>
+                  <a:srgbClr val="334155"/>
+                </a:solidFill>
+              </a:rPr>
+              <a:t>A  Next action depends on results     |     B  One fixed call is enough     |     C  No tools exist</a:t>
+            </a:r>
+          </a:p>
+        </p:txBody>
+      </p:sp>
+      <p:sp>
+        <p:nvSpPr>
+          <p:cNvPr id="12" name="quiz-question-3">
+            <a:extLst xmlns:a="http://schemas.openxmlformats.org/drawingml/2006/main">
+              <a:ext uri="{FF2B5EF4-FFF2-40B4-BE49-F238E27FC236}">
+                <a16:creationId xmlns:a16="http://schemas.microsoft.com/office/drawing/2014/main" id="{FF6A2B7E-2832-4229-AC43-3471534ADA86}"/>
+              </a:ext>
+            </a:extLst>
+          </p:cNvPr>
+          <p:cNvSpPr>
+            <a:spLocks xmlns:a="http://schemas.openxmlformats.org/drawingml/2006/main" noGrp="1"/>
+          </p:cNvSpPr>
+          <p:nvPr/>
+        </p:nvSpPr>
+        <p:spPr>
+          <a:xfrm xmlns:a="http://schemas.openxmlformats.org/drawingml/2006/main">
+            <a:off x="971550" y="5772150"/>
+            <a:ext cx="13296900" cy="285750"/>
+          </a:xfrm>
+          <a:prstGeom xmlns:a="http://schemas.openxmlformats.org/drawingml/2006/main" prst="rect">
+            <a:avLst/>
+          </a:prstGeom>
+          <a:noFill xmlns:a="http://schemas.openxmlformats.org/drawingml/2006/main"/>
+          <a:ln xmlns:a="http://schemas.openxmlformats.org/drawingml/2006/main" w="0">
+            <a:noFill/>
+            <a:prstDash val="solid"/>
+          </a:ln>
+        </p:spPr>
+        <p:txBody>
+          <a:bodyPr xmlns:a="http://schemas.openxmlformats.org/drawingml/2006/main"/>
+          <a:lstStyle xmlns:a="http://schemas.openxmlformats.org/drawingml/2006/main"/>
+          <a:p xmlns:a="http://schemas.openxmlformats.org/drawingml/2006/main">
+            <a:pPr>
+              <a:defRPr sz="1500" b="1">
+                <a:solidFill>
+                  <a:srgbClr val="001B2E"/>
+                </a:solidFill>
+              </a:defRPr>
+            </a:pPr>
+            <a:r>
+              <a:rPr sz="1500" b="1">
+                <a:solidFill>
+                  <a:srgbClr val="001B2E"/>
+                </a:solidFill>
+              </a:rPr>
+              <a:t>3. Who validates and runs financial tool calls?</a:t>
+            </a:r>
+          </a:p>
+        </p:txBody>
+      </p:sp>
+      <p:sp>
+        <p:nvSpPr>
+          <p:cNvPr id="13" name="quiz-options-3">
+            <a:extLst xmlns:a="http://schemas.openxmlformats.org/drawingml/2006/main">
+              <a:ext uri="{FF2B5EF4-FFF2-40B4-BE49-F238E27FC236}">
+                <a16:creationId xmlns:a16="http://schemas.microsoft.com/office/drawing/2014/main" id="{D31374D8-5F86-4EBA-B834-11D12030F0C2}"/>
+              </a:ext>
+            </a:extLst>
+          </p:cNvPr>
+          <p:cNvSpPr>
+            <a:spLocks xmlns:a="http://schemas.openxmlformats.org/drawingml/2006/main" noGrp="1"/>
+          </p:cNvSpPr>
+          <p:nvPr/>
+        </p:nvSpPr>
+        <p:spPr>
+          <a:xfrm xmlns:a="http://schemas.openxmlformats.org/drawingml/2006/main">
+            <a:off x="1257300" y="6076950"/>
+            <a:ext cx="13011150" cy="247650"/>
+          </a:xfrm>
+          <a:prstGeom xmlns:a="http://schemas.openxmlformats.org/drawingml/2006/main" prst="rect">
+            <a:avLst/>
+          </a:prstGeom>
+          <a:noFill xmlns:a="http://schemas.openxmlformats.org/drawingml/2006/main"/>
+          <a:ln xmlns:a="http://schemas.openxmlformats.org/drawingml/2006/main" w="0">
+            <a:noFill/>
+            <a:prstDash val="solid"/>
+          </a:ln>
+        </p:spPr>
+        <p:txBody>
+          <a:bodyPr xmlns:a="http://schemas.openxmlformats.org/drawingml/2006/main"/>
+          <a:lstStyle xmlns:a="http://schemas.openxmlformats.org/drawingml/2006/main"/>
+          <a:p xmlns:a="http://schemas.openxmlformats.org/drawingml/2006/main">
+            <a:pPr>
+              <a:defRPr sz="1200" b="0">
+                <a:solidFill>
+                  <a:srgbClr val="334155"/>
+                </a:solidFill>
+              </a:defRPr>
+            </a:pPr>
+            <a:r>
+              <a:rPr sz="1200" b="0">
+                <a:solidFill>
+                  <a:srgbClr val="334155"/>
+                </a:solidFill>
+              </a:rPr>
+              <a:t>A  Python host     |     B  The model alone     |     C  The slide deck</a:t>
+            </a:r>
+          </a:p>
+        </p:txBody>
+      </p:sp>
+    </p:spTree>
+    <p:extLst>
+      <p:ext uri="{BB962C8B-B14F-4D97-AF65-F5344CB8AC3E}">
+        <p14:creationId xmlns:p14="http://schemas.microsoft.com/office/powerpoint/2010/main" val="1316229138"/>
+      </p:ext>
+    </p:extLst>
+  </p:cSld>
+</p:sld>
+</file>
+
+<file path=ppt/slides/slide11.xml><?xml version="1.0" encoding="utf-8"?>
+<p:sld xmlns:p="http://schemas.openxmlformats.org/presentationml/2006/main">
+  <p:cSld>
+    <p:bg>
+      <p:bgPr>
+        <a:solidFill xmlns:a="http://schemas.openxmlformats.org/drawingml/2006/main">
+          <a:srgbClr val="F5F5F5"/>
+        </a:solidFill>
+      </p:bgPr>
+    </p:bg>
+    <p:spTree>
+      <p:nvGrpSpPr>
+        <p:cNvPr id="1" name=""/>
+        <p:cNvGrpSpPr/>
+        <p:nvPr/>
+      </p:nvGrpSpPr>
+      <p:grpSpPr>
+        <a:xfrm xmlns:a="http://schemas.openxmlformats.org/drawingml/2006/main"/>
+      </p:grpSpPr>
+      <p:sp>
+        <p:nvSpPr>
+          <p:cNvPr id="7" name="">
+            <a:extLst xmlns:a="http://schemas.openxmlformats.org/drawingml/2006/main">
+              <a:ext uri="{FF2B5EF4-FFF2-40B4-BE49-F238E27FC236}">
+                <a16:creationId xmlns:a16="http://schemas.microsoft.com/office/drawing/2014/main" id="{2E1E88F9-4976-411E-8732-D45BE311BBD2}"/>
+              </a:ext>
+            </a:extLst>
+          </p:cNvPr>
+          <p:cNvSpPr>
+            <a:spLocks xmlns:a="http://schemas.openxmlformats.org/drawingml/2006/main" noGrp="1"/>
+          </p:cNvSpPr>
+          <p:nvPr/>
+        </p:nvSpPr>
+        <p:spPr>
+          <a:xfrm xmlns:a="http://schemas.openxmlformats.org/drawingml/2006/main">
+            <a:off x="971550" y="781050"/>
+            <a:ext cx="1257300" cy="76200"/>
+          </a:xfrm>
+          <a:prstGeom xmlns:a="http://schemas.openxmlformats.org/drawingml/2006/main" prst="rect">
+            <a:avLst/>
+          </a:prstGeom>
+          <a:solidFill xmlns:a="http://schemas.openxmlformats.org/drawingml/2006/main">
+            <a:srgbClr val="00A2EB"/>
+          </a:solidFill>
+          <a:ln xmlns:a="http://schemas.openxmlformats.org/drawingml/2006/main" w="0">
+            <a:solidFill>
+              <a:srgbClr val="00A2EB"/>
+            </a:solidFill>
+            <a:prstDash val="solid"/>
+          </a:ln>
+        </p:spPr>
+      </p:sp>
+      <p:sp>
+        <p:nvSpPr>
+          <p:cNvPr id="2" name="">
+            <a:extLst xmlns:a="http://schemas.openxmlformats.org/drawingml/2006/main">
+              <a:ext uri="{FF2B5EF4-FFF2-40B4-BE49-F238E27FC236}">
+                <a16:creationId xmlns:a16="http://schemas.microsoft.com/office/drawing/2014/main" id="{35C43047-00B1-4B7A-BB36-D272D2C9B6CA}"/>
+              </a:ext>
+            </a:extLst>
+          </p:cNvPr>
+          <p:cNvSpPr>
+            <a:spLocks xmlns:a="http://schemas.openxmlformats.org/drawingml/2006/main" noGrp="1"/>
+          </p:cNvSpPr>
+          <p:nvPr/>
+        </p:nvSpPr>
+        <p:spPr>
+          <a:xfrm xmlns:a="http://schemas.openxmlformats.org/drawingml/2006/main">
+            <a:off x="971550" y="1066800"/>
+            <a:ext cx="2857500" cy="419100"/>
+          </a:xfrm>
+          <a:prstGeom xmlns:a="http://schemas.openxmlformats.org/drawingml/2006/main" prst="rect">
+            <a:avLst/>
+          </a:prstGeom>
+          <a:noFill xmlns:a="http://schemas.openxmlformats.org/drawingml/2006/main"/>
+          <a:ln xmlns:a="http://schemas.openxmlformats.org/drawingml/2006/main" w="0">
+            <a:noFill/>
+            <a:prstDash val="solid"/>
+          </a:ln>
+        </p:spPr>
+        <p:txBody>
+          <a:bodyPr xmlns:a="http://schemas.openxmlformats.org/drawingml/2006/main" wrap="square" lIns="0" tIns="0" rIns="0" bIns="0" anchor="ctr">
+            <a:normAutofit fontScale="100000"/>
+          </a:bodyPr>
+          <a:lstStyle xmlns:a="http://schemas.openxmlformats.org/drawingml/2006/main"/>
+          <a:p xmlns:a="http://schemas.openxmlformats.org/drawingml/2006/main">
+            <a:pPr algn="l">
+              <a:lnSpc>
+                <a:spcPct val="100000"/>
+              </a:lnSpc>
+              <a:buNone/>
+              <a:defRPr sz="1575" b="1">
+                <a:solidFill>
+                  <a:srgbClr val="1F40CB"/>
+                </a:solidFill>
+                <a:latin typeface="Calibri"/>
+                <a:ea typeface="Calibri"/>
+                <a:cs typeface="Calibri"/>
+              </a:defRPr>
+            </a:pPr>
+            <a:r>
+              <a:rPr sz="1575" b="1">
+                <a:solidFill>
+                  <a:srgbClr val="1F40CB"/>
+                </a:solidFill>
+                <a:latin typeface="Calibri"/>
+                <a:ea typeface="Calibri"/>
+                <a:cs typeface="Calibri"/>
+              </a:rPr>
+              <a:t>FIRST FINANCE</a:t>
+            </a:r>
+          </a:p>
+        </p:txBody>
+      </p:sp>
+      <p:sp>
+        <p:nvSpPr>
+          <p:cNvPr id="3" name="">
+            <a:extLst xmlns:a="http://schemas.openxmlformats.org/drawingml/2006/main">
+              <a:ext uri="{FF2B5EF4-FFF2-40B4-BE49-F238E27FC236}">
+                <a16:creationId xmlns:a16="http://schemas.microsoft.com/office/drawing/2014/main" id="{2EBB9B00-5773-4D90-9774-8BB7FE35221F}"/>
+              </a:ext>
+            </a:extLst>
+          </p:cNvPr>
+          <p:cNvSpPr>
+            <a:spLocks xmlns:a="http://schemas.openxmlformats.org/drawingml/2006/main" noGrp="1"/>
+          </p:cNvSpPr>
+          <p:nvPr/>
+        </p:nvSpPr>
+        <p:spPr>
+          <a:xfrm xmlns:a="http://schemas.openxmlformats.org/drawingml/2006/main">
+            <a:off x="971550" y="2362200"/>
+            <a:ext cx="13296900" cy="895350"/>
+          </a:xfrm>
+          <a:prstGeom xmlns:a="http://schemas.openxmlformats.org/drawingml/2006/main" prst="rect">
+            <a:avLst/>
+          </a:prstGeom>
+          <a:noFill xmlns:a="http://schemas.openxmlformats.org/drawingml/2006/main"/>
+          <a:ln xmlns:a="http://schemas.openxmlformats.org/drawingml/2006/main" w="0">
+            <a:noFill/>
+            <a:prstDash val="solid"/>
+          </a:ln>
+        </p:spPr>
+        <p:txBody>
+          <a:bodyPr xmlns:a="http://schemas.openxmlformats.org/drawingml/2006/main" wrap="none" lIns="0" tIns="0" rIns="0" bIns="0" anchor="ctr">
+            <a:normAutofit fontScale="100000"/>
+          </a:bodyPr>
+          <a:lstStyle xmlns:a="http://schemas.openxmlformats.org/drawingml/2006/main"/>
+          <a:p xmlns:a="http://schemas.openxmlformats.org/drawingml/2006/main">
+            <a:pPr algn="l">
+              <a:lnSpc>
+                <a:spcPct val="100000"/>
+              </a:lnSpc>
+              <a:buNone/>
+              <a:defRPr sz="4800" b="1">
+                <a:solidFill>
+                  <a:srgbClr val="051C2A"/>
+                </a:solidFill>
+                <a:latin typeface="Calibri"/>
+                <a:ea typeface="Calibri"/>
+                <a:cs typeface="Calibri"/>
+              </a:defRPr>
+            </a:pPr>
+            <a:r>
+              <a:rPr sz="4800" b="1">
+                <a:solidFill>
+                  <a:srgbClr val="051C2A"/>
+                </a:solidFill>
+                <a:latin typeface="Calibri"/>
+                <a:ea typeface="Calibri"/>
+                <a:cs typeface="Calibri"/>
+              </a:rPr>
+              <a:t>Answers</a:t>
+            </a:r>
+          </a:p>
+        </p:txBody>
+      </p:sp>
+      <p:sp>
+        <p:nvSpPr>
+          <p:cNvPr id="4" name="">
+            <a:extLst xmlns:a="http://schemas.openxmlformats.org/drawingml/2006/main">
+              <a:ext uri="{FF2B5EF4-FFF2-40B4-BE49-F238E27FC236}">
+                <a16:creationId xmlns:a16="http://schemas.microsoft.com/office/drawing/2014/main" id="{601F96F8-8EA3-4B69-A3AF-EBD5CBCD09C1}"/>
+              </a:ext>
+            </a:extLst>
+          </p:cNvPr>
+          <p:cNvSpPr>
+            <a:spLocks xmlns:a="http://schemas.openxmlformats.org/drawingml/2006/main" noGrp="1"/>
+          </p:cNvSpPr>
+          <p:nvPr/>
+        </p:nvSpPr>
+        <p:spPr>
+          <a:xfrm xmlns:a="http://schemas.openxmlformats.org/drawingml/2006/main">
+            <a:off x="971550" y="3562350"/>
+            <a:ext cx="11239500" cy="514350"/>
+          </a:xfrm>
+          <a:prstGeom xmlns:a="http://schemas.openxmlformats.org/drawingml/2006/main" prst="rect">
+            <a:avLst/>
+          </a:prstGeom>
+          <a:noFill xmlns:a="http://schemas.openxmlformats.org/drawingml/2006/main"/>
+          <a:ln xmlns:a="http://schemas.openxmlformats.org/drawingml/2006/main" w="0">
+            <a:noFill/>
+            <a:prstDash val="solid"/>
+          </a:ln>
+        </p:spPr>
+        <p:txBody>
+          <a:bodyPr xmlns:a="http://schemas.openxmlformats.org/drawingml/2006/main" wrap="square" lIns="0" tIns="0" rIns="0" bIns="0" anchor="ctr">
+            <a:normAutofit fontScale="100000"/>
+          </a:bodyPr>
+          <a:lstStyle xmlns:a="http://schemas.openxmlformats.org/drawingml/2006/main"/>
+          <a:p xmlns:a="http://schemas.openxmlformats.org/drawingml/2006/main">
+            <a:pPr algn="l">
+              <a:lnSpc>
+                <a:spcPct val="100000"/>
+              </a:lnSpc>
+              <a:buNone/>
+              <a:defRPr sz="2400" b="0">
+                <a:solidFill>
+                  <a:srgbClr val="3F3F42"/>
+                </a:solidFill>
+                <a:latin typeface="Calibri"/>
+                <a:ea typeface="Calibri"/>
+                <a:cs typeface="Calibri"/>
+              </a:defRPr>
+            </a:pPr>
+            <a:r>
+              <a:rPr sz="2400" b="0">
+                <a:solidFill>
+                  <a:srgbClr val="3F3F42"/>
+                </a:solidFill>
+                <a:latin typeface="Calibri"/>
+                <a:ea typeface="Calibri"/>
+                <a:cs typeface="Calibri"/>
+              </a:rPr>
+              <a:t>Check the idea, not only the letter.</a:t>
+            </a:r>
+          </a:p>
+        </p:txBody>
+      </p:sp>
+      <p:sp>
+        <p:nvSpPr>
+          <p:cNvPr id="5" name="">
+            <a:extLst xmlns:a="http://schemas.openxmlformats.org/drawingml/2006/main">
+              <a:ext uri="{FF2B5EF4-FFF2-40B4-BE49-F238E27FC236}">
+                <a16:creationId xmlns:a16="http://schemas.microsoft.com/office/drawing/2014/main" id="{D4A6E89B-2708-4600-B820-727EF660DE6B}"/>
+              </a:ext>
+            </a:extLst>
+          </p:cNvPr>
+          <p:cNvSpPr>
+            <a:spLocks xmlns:a="http://schemas.openxmlformats.org/drawingml/2006/main" noGrp="1"/>
+          </p:cNvSpPr>
+          <p:nvPr/>
+        </p:nvSpPr>
+        <p:spPr>
+          <a:xfrm xmlns:a="http://schemas.openxmlformats.org/drawingml/2006/main">
+            <a:off x="971550" y="6477000"/>
+            <a:ext cx="9525000" cy="400050"/>
+          </a:xfrm>
+          <a:prstGeom xmlns:a="http://schemas.openxmlformats.org/drawingml/2006/main" prst="rect">
+            <a:avLst/>
+          </a:prstGeom>
+          <a:noFill xmlns:a="http://schemas.openxmlformats.org/drawingml/2006/main"/>
+          <a:ln xmlns:a="http://schemas.openxmlformats.org/drawingml/2006/main" w="0">
+            <a:noFill/>
+            <a:prstDash val="solid"/>
+          </a:ln>
+        </p:spPr>
+        <p:txBody>
+          <a:bodyPr xmlns:a="http://schemas.openxmlformats.org/drawingml/2006/main" wrap="square" lIns="0" tIns="0" rIns="0" bIns="0" anchor="ctr">
+            <a:normAutofit fontScale="100000"/>
+          </a:bodyPr>
+          <a:lstStyle xmlns:a="http://schemas.openxmlformats.org/drawingml/2006/main"/>
+          <a:p xmlns:a="http://schemas.openxmlformats.org/drawingml/2006/main">
+            <a:pPr algn="l">
+              <a:lnSpc>
+                <a:spcPct val="100000"/>
+              </a:lnSpc>
+              <a:buNone/>
+              <a:defRPr sz="1350" b="1">
+                <a:solidFill>
+                  <a:srgbClr val="1F40CB"/>
+                </a:solidFill>
+                <a:latin typeface="Calibri"/>
+                <a:ea typeface="Calibri"/>
+                <a:cs typeface="Calibri"/>
+              </a:defRPr>
+            </a:pPr>
+            <a:r>
+              <a:rPr sz="1350" b="1">
+                <a:solidFill>
+                  <a:srgbClr val="1F40CB"/>
+                </a:solidFill>
+                <a:latin typeface="Calibri"/>
+                <a:ea typeface="Calibri"/>
+                <a:cs typeface="Calibri"/>
+              </a:rPr>
+              <a:t>LESSON 08  ·  CORRECTION</a:t>
+            </a:r>
+          </a:p>
+        </p:txBody>
+      </p:sp>
+      <p:sp>
+        <p:nvSpPr>
+          <p:cNvPr id="6" name="">
+            <a:extLst xmlns:a="http://schemas.openxmlformats.org/drawingml/2006/main">
+              <a:ext uri="{FF2B5EF4-FFF2-40B4-BE49-F238E27FC236}">
+                <a16:creationId xmlns:a16="http://schemas.microsoft.com/office/drawing/2014/main" id="{053831D6-7D46-4F1A-929F-D2CAD97F1627}"/>
+              </a:ext>
+            </a:extLst>
+          </p:cNvPr>
+          <p:cNvSpPr>
+            <a:spLocks xmlns:a="http://schemas.openxmlformats.org/drawingml/2006/main" noGrp="1"/>
+          </p:cNvSpPr>
+          <p:nvPr/>
+        </p:nvSpPr>
+        <p:spPr>
+          <a:xfrm xmlns:a="http://schemas.openxmlformats.org/drawingml/2006/main">
+            <a:off x="971550" y="7067550"/>
+            <a:ext cx="4762500" cy="381000"/>
+          </a:xfrm>
+          <a:prstGeom xmlns:a="http://schemas.openxmlformats.org/drawingml/2006/main" prst="rect">
+            <a:avLst/>
+          </a:prstGeom>
+          <a:noFill xmlns:a="http://schemas.openxmlformats.org/drawingml/2006/main"/>
+          <a:ln xmlns:a="http://schemas.openxmlformats.org/drawingml/2006/main" w="0">
+            <a:noFill/>
+            <a:prstDash val="solid"/>
+          </a:ln>
+        </p:spPr>
+        <p:txBody>
+          <a:bodyPr xmlns:a="http://schemas.openxmlformats.org/drawingml/2006/main" wrap="square" lIns="0" tIns="0" rIns="0" bIns="0" anchor="ctr">
+            <a:normAutofit fontScale="100000"/>
+          </a:bodyPr>
+          <a:lstStyle xmlns:a="http://schemas.openxmlformats.org/drawingml/2006/main"/>
+          <a:p xmlns:a="http://schemas.openxmlformats.org/drawingml/2006/main">
+            <a:pPr algn="l">
+              <a:lnSpc>
+                <a:spcPct val="100000"/>
+              </a:lnSpc>
+              <a:buNone/>
+              <a:defRPr sz="1725" b="0">
+                <a:solidFill>
+                  <a:srgbClr val="051C2A"/>
+                </a:solidFill>
+                <a:latin typeface="Calibri"/>
+                <a:ea typeface="Calibri"/>
+                <a:cs typeface="Calibri"/>
+              </a:defRPr>
+            </a:pPr>
+            <a:r>
+              <a:rPr sz="1725" b="0">
+                <a:solidFill>
+                  <a:srgbClr val="051C2A"/>
+                </a:solidFill>
+                <a:latin typeface="Calibri"/>
+                <a:ea typeface="Calibri"/>
+                <a:cs typeface="Calibri"/>
+              </a:rPr>
+              <a:t>First Finance - Arnaud Demes</a:t>
+            </a:r>
+          </a:p>
+        </p:txBody>
+      </p:sp>
+      <p:sp>
+        <p:nvSpPr>
+          <p:cNvPr id="8" name="quiz-answer-1">
+            <a:extLst xmlns:a="http://schemas.openxmlformats.org/drawingml/2006/main">
+              <a:ext uri="{FF2B5EF4-FFF2-40B4-BE49-F238E27FC236}">
+                <a16:creationId xmlns:a16="http://schemas.microsoft.com/office/drawing/2014/main" id="{695168D3-A440-48E1-B278-691346A48E81}"/>
+              </a:ext>
+            </a:extLst>
+          </p:cNvPr>
+          <p:cNvSpPr>
+            <a:spLocks xmlns:a="http://schemas.openxmlformats.org/drawingml/2006/main" noGrp="1"/>
+          </p:cNvSpPr>
+          <p:nvPr/>
+        </p:nvSpPr>
+        <p:spPr>
+          <a:xfrm xmlns:a="http://schemas.openxmlformats.org/drawingml/2006/main">
+            <a:off x="971550" y="4400550"/>
+            <a:ext cx="13296900" cy="285750"/>
+          </a:xfrm>
+          <a:prstGeom xmlns:a="http://schemas.openxmlformats.org/drawingml/2006/main" prst="rect">
+            <a:avLst/>
+          </a:prstGeom>
+          <a:noFill xmlns:a="http://schemas.openxmlformats.org/drawingml/2006/main"/>
+          <a:ln xmlns:a="http://schemas.openxmlformats.org/drawingml/2006/main" w="0">
+            <a:noFill/>
+            <a:prstDash val="solid"/>
+          </a:ln>
+        </p:spPr>
+        <p:txBody>
+          <a:bodyPr xmlns:a="http://schemas.openxmlformats.org/drawingml/2006/main"/>
+          <a:lstStyle xmlns:a="http://schemas.openxmlformats.org/drawingml/2006/main"/>
+          <a:p xmlns:a="http://schemas.openxmlformats.org/drawingml/2006/main">
+            <a:pPr>
+              <a:defRPr sz="1500" b="1">
+                <a:solidFill>
+                  <a:srgbClr val="1F40CB"/>
+                </a:solidFill>
+              </a:defRPr>
+            </a:pPr>
+            <a:r>
+              <a:rPr sz="1500" b="1">
+                <a:solidFill>
+                  <a:srgbClr val="1F40CB"/>
+                </a:solidFill>
+              </a:rPr>
+              <a:t>1. A. Steps are known</a:t>
+            </a:r>
+          </a:p>
+        </p:txBody>
+      </p:sp>
+      <p:sp>
+        <p:nvSpPr>
+          <p:cNvPr id="9" name="quiz-explanation-1">
+            <a:extLst xmlns:a="http://schemas.openxmlformats.org/drawingml/2006/main">
+              <a:ext uri="{FF2B5EF4-FFF2-40B4-BE49-F238E27FC236}">
+                <a16:creationId xmlns:a16="http://schemas.microsoft.com/office/drawing/2014/main" id="{2322894C-72E6-4952-908E-CA3942C31BCD}"/>
+              </a:ext>
+            </a:extLst>
+          </p:cNvPr>
+          <p:cNvSpPr>
+            <a:spLocks xmlns:a="http://schemas.openxmlformats.org/drawingml/2006/main" noGrp="1"/>
+          </p:cNvSpPr>
+          <p:nvPr/>
+        </p:nvSpPr>
+        <p:spPr>
+          <a:xfrm xmlns:a="http://schemas.openxmlformats.org/drawingml/2006/main">
+            <a:off x="1257300" y="4705350"/>
+            <a:ext cx="13011150" cy="247650"/>
+          </a:xfrm>
+          <a:prstGeom xmlns:a="http://schemas.openxmlformats.org/drawingml/2006/main" prst="rect">
+            <a:avLst/>
+          </a:prstGeom>
+          <a:noFill xmlns:a="http://schemas.openxmlformats.org/drawingml/2006/main"/>
+          <a:ln xmlns:a="http://schemas.openxmlformats.org/drawingml/2006/main" w="0">
+            <a:noFill/>
+            <a:prstDash val="solid"/>
+          </a:ln>
+        </p:spPr>
+        <p:txBody>
+          <a:bodyPr xmlns:a="http://schemas.openxmlformats.org/drawingml/2006/main"/>
+          <a:lstStyle xmlns:a="http://schemas.openxmlformats.org/drawingml/2006/main"/>
+          <a:p xmlns:a="http://schemas.openxmlformats.org/drawingml/2006/main">
+            <a:pPr>
+              <a:defRPr sz="1200" b="0">
+                <a:solidFill>
+                  <a:srgbClr val="334155"/>
+                </a:solidFill>
+              </a:defRPr>
+            </a:pPr>
+            <a:r>
+              <a:rPr sz="1200" b="0">
+                <a:solidFill>
+                  <a:srgbClr val="334155"/>
+                </a:solidFill>
+              </a:rPr>
+              <a:t>A deterministic route is simpler to test, explain and control.</a:t>
+            </a:r>
+          </a:p>
+        </p:txBody>
+      </p:sp>
+      <p:sp>
+        <p:nvSpPr>
+          <p:cNvPr id="10" name="quiz-answer-2">
+            <a:extLst xmlns:a="http://schemas.openxmlformats.org/drawingml/2006/main">
+              <a:ext uri="{FF2B5EF4-FFF2-40B4-BE49-F238E27FC236}">
+                <a16:creationId xmlns:a16="http://schemas.microsoft.com/office/drawing/2014/main" id="{B4B6F4C2-04CC-4E9D-9EFD-D495623E7F98}"/>
+              </a:ext>
+            </a:extLst>
+          </p:cNvPr>
+          <p:cNvSpPr>
+            <a:spLocks xmlns:a="http://schemas.openxmlformats.org/drawingml/2006/main" noGrp="1"/>
+          </p:cNvSpPr>
+          <p:nvPr/>
+        </p:nvSpPr>
+        <p:spPr>
+          <a:xfrm xmlns:a="http://schemas.openxmlformats.org/drawingml/2006/main">
+            <a:off x="971550" y="5086350"/>
+            <a:ext cx="13296900" cy="285750"/>
+          </a:xfrm>
+          <a:prstGeom xmlns:a="http://schemas.openxmlformats.org/drawingml/2006/main" prst="rect">
+            <a:avLst/>
+          </a:prstGeom>
+          <a:noFill xmlns:a="http://schemas.openxmlformats.org/drawingml/2006/main"/>
+          <a:ln xmlns:a="http://schemas.openxmlformats.org/drawingml/2006/main" w="0">
+            <a:noFill/>
+            <a:prstDash val="solid"/>
+          </a:ln>
+        </p:spPr>
+        <p:txBody>
+          <a:bodyPr xmlns:a="http://schemas.openxmlformats.org/drawingml/2006/main"/>
+          <a:lstStyle xmlns:a="http://schemas.openxmlformats.org/drawingml/2006/main"/>
+          <a:p xmlns:a="http://schemas.openxmlformats.org/drawingml/2006/main">
+            <a:pPr>
+              <a:defRPr sz="1500" b="1">
+                <a:solidFill>
+                  <a:srgbClr val="1F40CB"/>
+                </a:solidFill>
+              </a:defRPr>
+            </a:pPr>
+            <a:r>
+              <a:rPr sz="1500" b="1">
+                <a:solidFill>
+                  <a:srgbClr val="1F40CB"/>
+                </a:solidFill>
+              </a:rPr>
+              <a:t>2. A. Next action depends on results</a:t>
+            </a:r>
+          </a:p>
+        </p:txBody>
+      </p:sp>
+      <p:sp>
+        <p:nvSpPr>
+          <p:cNvPr id="11" name="quiz-explanation-2">
+            <a:extLst xmlns:a="http://schemas.openxmlformats.org/drawingml/2006/main">
+              <a:ext uri="{FF2B5EF4-FFF2-40B4-BE49-F238E27FC236}">
+                <a16:creationId xmlns:a16="http://schemas.microsoft.com/office/drawing/2014/main" id="{C2D9E6B6-ED6F-4D35-B423-34CC2FF8F623}"/>
+              </a:ext>
+            </a:extLst>
+          </p:cNvPr>
+          <p:cNvSpPr>
+            <a:spLocks xmlns:a="http://schemas.openxmlformats.org/drawingml/2006/main" noGrp="1"/>
+          </p:cNvSpPr>
+          <p:nvPr/>
+        </p:nvSpPr>
+        <p:spPr>
+          <a:xfrm xmlns:a="http://schemas.openxmlformats.org/drawingml/2006/main">
+            <a:off x="1257300" y="5391150"/>
+            <a:ext cx="13011150" cy="247650"/>
+          </a:xfrm>
+          <a:prstGeom xmlns:a="http://schemas.openxmlformats.org/drawingml/2006/main" prst="rect">
+            <a:avLst/>
+          </a:prstGeom>
+          <a:noFill xmlns:a="http://schemas.openxmlformats.org/drawingml/2006/main"/>
+          <a:ln xmlns:a="http://schemas.openxmlformats.org/drawingml/2006/main" w="0">
+            <a:noFill/>
+            <a:prstDash val="solid"/>
+          </a:ln>
+        </p:spPr>
+        <p:txBody>
+          <a:bodyPr xmlns:a="http://schemas.openxmlformats.org/drawingml/2006/main"/>
+          <a:lstStyle xmlns:a="http://schemas.openxmlformats.org/drawingml/2006/main"/>
+          <a:p xmlns:a="http://schemas.openxmlformats.org/drawingml/2006/main">
+            <a:pPr>
+              <a:defRPr sz="1200" b="0">
+                <a:solidFill>
+                  <a:srgbClr val="334155"/>
+                </a:solidFill>
+              </a:defRPr>
+            </a:pPr>
+            <a:r>
+              <a:rPr sz="1200" b="0">
+                <a:solidFill>
+                  <a:srgbClr val="334155"/>
+                </a:solidFill>
+              </a:rPr>
+              <a:t>The agent observes one result before choosing the next step.</a:t>
+            </a:r>
+          </a:p>
+        </p:txBody>
+      </p:sp>
+      <p:sp>
+        <p:nvSpPr>
+          <p:cNvPr id="12" name="quiz-answer-3">
+            <a:extLst xmlns:a="http://schemas.openxmlformats.org/drawingml/2006/main">
+              <a:ext uri="{FF2B5EF4-FFF2-40B4-BE49-F238E27FC236}">
+                <a16:creationId xmlns:a16="http://schemas.microsoft.com/office/drawing/2014/main" id="{5FC826F1-DD2F-4A77-BD31-B4BD0CD03341}"/>
+              </a:ext>
+            </a:extLst>
+          </p:cNvPr>
+          <p:cNvSpPr>
+            <a:spLocks xmlns:a="http://schemas.openxmlformats.org/drawingml/2006/main" noGrp="1"/>
+          </p:cNvSpPr>
+          <p:nvPr/>
+        </p:nvSpPr>
+        <p:spPr>
+          <a:xfrm xmlns:a="http://schemas.openxmlformats.org/drawingml/2006/main">
+            <a:off x="971550" y="5772150"/>
+            <a:ext cx="13296900" cy="285750"/>
+          </a:xfrm>
+          <a:prstGeom xmlns:a="http://schemas.openxmlformats.org/drawingml/2006/main" prst="rect">
+            <a:avLst/>
+          </a:prstGeom>
+          <a:noFill xmlns:a="http://schemas.openxmlformats.org/drawingml/2006/main"/>
+          <a:ln xmlns:a="http://schemas.openxmlformats.org/drawingml/2006/main" w="0">
+            <a:noFill/>
+            <a:prstDash val="solid"/>
+          </a:ln>
+        </p:spPr>
+        <p:txBody>
+          <a:bodyPr xmlns:a="http://schemas.openxmlformats.org/drawingml/2006/main"/>
+          <a:lstStyle xmlns:a="http://schemas.openxmlformats.org/drawingml/2006/main"/>
+          <a:p xmlns:a="http://schemas.openxmlformats.org/drawingml/2006/main">
+            <a:pPr>
+              <a:defRPr sz="1500" b="1">
+                <a:solidFill>
+                  <a:srgbClr val="1F40CB"/>
+                </a:solidFill>
+              </a:defRPr>
+            </a:pPr>
+            <a:r>
+              <a:rPr sz="1500" b="1">
+                <a:solidFill>
+                  <a:srgbClr val="1F40CB"/>
+                </a:solidFill>
+              </a:rPr>
+              <a:t>3. A. Python host</a:t>
+            </a:r>
+          </a:p>
+        </p:txBody>
+      </p:sp>
+      <p:sp>
+        <p:nvSpPr>
+          <p:cNvPr id="13" name="quiz-explanation-3">
+            <a:extLst xmlns:a="http://schemas.openxmlformats.org/drawingml/2006/main">
+              <a:ext uri="{FF2B5EF4-FFF2-40B4-BE49-F238E27FC236}">
+                <a16:creationId xmlns:a16="http://schemas.microsoft.com/office/drawing/2014/main" id="{B9DC46F2-9E33-4E64-8325-68F75E786D43}"/>
+              </a:ext>
+            </a:extLst>
+          </p:cNvPr>
+          <p:cNvSpPr>
+            <a:spLocks xmlns:a="http://schemas.openxmlformats.org/drawingml/2006/main" noGrp="1"/>
+          </p:cNvSpPr>
+          <p:nvPr/>
+        </p:nvSpPr>
+        <p:spPr>
+          <a:xfrm xmlns:a="http://schemas.openxmlformats.org/drawingml/2006/main">
+            <a:off x="1257300" y="6076950"/>
+            <a:ext cx="13011150" cy="247650"/>
+          </a:xfrm>
+          <a:prstGeom xmlns:a="http://schemas.openxmlformats.org/drawingml/2006/main" prst="rect">
+            <a:avLst/>
+          </a:prstGeom>
+          <a:noFill xmlns:a="http://schemas.openxmlformats.org/drawingml/2006/main"/>
+          <a:ln xmlns:a="http://schemas.openxmlformats.org/drawingml/2006/main" w="0">
+            <a:noFill/>
+            <a:prstDash val="solid"/>
+          </a:ln>
+        </p:spPr>
+        <p:txBody>
+          <a:bodyPr xmlns:a="http://schemas.openxmlformats.org/drawingml/2006/main"/>
+          <a:lstStyle xmlns:a="http://schemas.openxmlformats.org/drawingml/2006/main"/>
+          <a:p xmlns:a="http://schemas.openxmlformats.org/drawingml/2006/main">
+            <a:pPr>
+              <a:defRPr sz="1200" b="0">
+                <a:solidFill>
+                  <a:srgbClr val="334155"/>
+                </a:solidFill>
+              </a:defRPr>
+            </a:pPr>
+            <a:r>
+              <a:rPr sz="1200" b="0">
+                <a:solidFill>
+                  <a:srgbClr val="334155"/>
+                </a:solidFill>
+              </a:rPr>
+              <a:t>The model proposes; application code validates and executes.</a:t>
+            </a:r>
+          </a:p>
+        </p:txBody>
+      </p:sp>
+    </p:spTree>
+    <p:extLst>
+      <p:ext uri="{BB962C8B-B14F-4D97-AF65-F5344CB8AC3E}">
+        <p14:creationId xmlns:p14="http://schemas.microsoft.com/office/powerpoint/2010/main" val="1316229138"/>
+      </p:ext>
+    </p:extLst>
+  </p:cSld>
+</p:sld>
+</file>
+
 <file path=ppt/slides/slide2.xml><?xml version="1.0" encoding="utf-8"?>
 <p:sld xmlns:p="http://schemas.openxmlformats.org/presentationml/2006/main">
   <p:cSld>
@@ -5237,7 +6773,7 @@
       </p:sp>
       <p:cxnSp>
         <p:nvCxnSpPr>
-          <p:cNvPr id="473" name=""/>
+          <p:cNvPr id="525" name=""/>
           <p:cNvCxnSpPr>
             <a:stCxn xmlns:a="http://schemas.openxmlformats.org/drawingml/2006/main" id="3" idx="3"/>
             <a:endCxn xmlns:a="http://schemas.openxmlformats.org/drawingml/2006/main" id="7" idx="1"/>
@@ -5263,7 +6799,7 @@
       </p:cxnSp>
       <p:cxnSp>
         <p:nvCxnSpPr>
-          <p:cNvPr id="474" name=""/>
+          <p:cNvPr id="526" name=""/>
           <p:cNvCxnSpPr>
             <a:stCxn xmlns:a="http://schemas.openxmlformats.org/drawingml/2006/main" id="7" idx="3"/>
             <a:endCxn xmlns:a="http://schemas.openxmlformats.org/drawingml/2006/main" id="11" idx="1"/>
@@ -5289,7 +6825,7 @@
       </p:cxnSp>
       <p:cxnSp>
         <p:nvCxnSpPr>
-          <p:cNvPr id="475" name=""/>
+          <p:cNvPr id="527" name=""/>
           <p:cNvCxnSpPr>
             <a:stCxn xmlns:a="http://schemas.openxmlformats.org/drawingml/2006/main" id="11" idx="3"/>
             <a:endCxn xmlns:a="http://schemas.openxmlformats.org/drawingml/2006/main" id="15" idx="1"/>
@@ -5315,7 +6851,7 @@
       </p:cxnSp>
       <p:cxnSp>
         <p:nvCxnSpPr>
-          <p:cNvPr id="476" name=""/>
+          <p:cNvPr id="528" name=""/>
           <p:cNvCxnSpPr>
             <a:stCxn xmlns:a="http://schemas.openxmlformats.org/drawingml/2006/main" id="15" idx="3"/>
             <a:endCxn xmlns:a="http://schemas.openxmlformats.org/drawingml/2006/main" id="19" idx="1"/>
@@ -8817,7 +10353,7 @@
       </p:sp>
       <p:cxnSp>
         <p:nvCxnSpPr>
-          <p:cNvPr id="473" name=""/>
+          <p:cNvPr id="525" name=""/>
           <p:cNvCxnSpPr>
             <a:stCxn xmlns:a="http://schemas.openxmlformats.org/drawingml/2006/main" id="3" idx="3"/>
             <a:endCxn xmlns:a="http://schemas.openxmlformats.org/drawingml/2006/main" id="7" idx="1"/>
@@ -8843,7 +10379,7 @@
       </p:cxnSp>
       <p:cxnSp>
         <p:nvCxnSpPr>
-          <p:cNvPr id="474" name=""/>
+          <p:cNvPr id="526" name=""/>
           <p:cNvCxnSpPr>
             <a:stCxn xmlns:a="http://schemas.openxmlformats.org/drawingml/2006/main" id="7" idx="3"/>
             <a:endCxn xmlns:a="http://schemas.openxmlformats.org/drawingml/2006/main" id="11" idx="1"/>
@@ -8869,7 +10405,7 @@
       </p:cxnSp>
       <p:cxnSp>
         <p:nvCxnSpPr>
-          <p:cNvPr id="475" name=""/>
+          <p:cNvPr id="527" name=""/>
           <p:cNvCxnSpPr>
             <a:stCxn xmlns:a="http://schemas.openxmlformats.org/drawingml/2006/main" id="11" idx="3"/>
             <a:endCxn xmlns:a="http://schemas.openxmlformats.org/drawingml/2006/main" id="15" idx="1"/>
@@ -8895,7 +10431,7 @@
       </p:cxnSp>
       <p:cxnSp>
         <p:nvCxnSpPr>
-          <p:cNvPr id="476" name=""/>
+          <p:cNvPr id="528" name=""/>
           <p:cNvCxnSpPr>
             <a:stCxn xmlns:a="http://schemas.openxmlformats.org/drawingml/2006/main" id="15" idx="3"/>
             <a:endCxn xmlns:a="http://schemas.openxmlformats.org/drawingml/2006/main" id="19" idx="1"/>
@@ -10617,7 +12153,7 @@
       </p:sp>
       <p:cxnSp>
         <p:nvCxnSpPr>
-          <p:cNvPr id="473" name=""/>
+          <p:cNvPr id="525" name=""/>
           <p:cNvCxnSpPr>
             <a:stCxn xmlns:a="http://schemas.openxmlformats.org/drawingml/2006/main" id="3" idx="3"/>
             <a:endCxn xmlns:a="http://schemas.openxmlformats.org/drawingml/2006/main" id="7" idx="1"/>
@@ -10643,7 +12179,7 @@
       </p:cxnSp>
       <p:cxnSp>
         <p:nvCxnSpPr>
-          <p:cNvPr id="474" name=""/>
+          <p:cNvPr id="526" name=""/>
           <p:cNvCxnSpPr>
             <a:stCxn xmlns:a="http://schemas.openxmlformats.org/drawingml/2006/main" id="7" idx="3"/>
             <a:endCxn xmlns:a="http://schemas.openxmlformats.org/drawingml/2006/main" id="11" idx="1"/>
@@ -10669,7 +12205,7 @@
       </p:cxnSp>
       <p:cxnSp>
         <p:nvCxnSpPr>
-          <p:cNvPr id="475" name=""/>
+          <p:cNvPr id="527" name=""/>
           <p:cNvCxnSpPr>
             <a:stCxn xmlns:a="http://schemas.openxmlformats.org/drawingml/2006/main" id="11" idx="3"/>
             <a:endCxn xmlns:a="http://schemas.openxmlformats.org/drawingml/2006/main" id="15" idx="1"/>
@@ -10695,7 +12231,7 @@
       </p:cxnSp>
       <p:cxnSp>
         <p:nvCxnSpPr>
-          <p:cNvPr id="476" name=""/>
+          <p:cNvPr id="528" name=""/>
           <p:cNvCxnSpPr>
             <a:stCxn xmlns:a="http://schemas.openxmlformats.org/drawingml/2006/main" id="15" idx="3"/>
             <a:endCxn xmlns:a="http://schemas.openxmlformats.org/drawingml/2006/main" id="19" idx="1"/>
@@ -12417,7 +13953,7 @@
       </p:sp>
       <p:cxnSp>
         <p:nvCxnSpPr>
-          <p:cNvPr id="473" name=""/>
+          <p:cNvPr id="525" name=""/>
           <p:cNvCxnSpPr>
             <a:stCxn xmlns:a="http://schemas.openxmlformats.org/drawingml/2006/main" id="3" idx="3"/>
             <a:endCxn xmlns:a="http://schemas.openxmlformats.org/drawingml/2006/main" id="7" idx="1"/>
@@ -12443,7 +13979,7 @@
       </p:cxnSp>
       <p:cxnSp>
         <p:nvCxnSpPr>
-          <p:cNvPr id="474" name=""/>
+          <p:cNvPr id="526" name=""/>
           <p:cNvCxnSpPr>
             <a:stCxn xmlns:a="http://schemas.openxmlformats.org/drawingml/2006/main" id="7" idx="3"/>
             <a:endCxn xmlns:a="http://schemas.openxmlformats.org/drawingml/2006/main" id="11" idx="1"/>
@@ -12469,7 +14005,7 @@
       </p:cxnSp>
       <p:cxnSp>
         <p:nvCxnSpPr>
-          <p:cNvPr id="475" name=""/>
+          <p:cNvPr id="527" name=""/>
           <p:cNvCxnSpPr>
             <a:stCxn xmlns:a="http://schemas.openxmlformats.org/drawingml/2006/main" id="11" idx="3"/>
             <a:endCxn xmlns:a="http://schemas.openxmlformats.org/drawingml/2006/main" id="15" idx="1"/>
@@ -12495,7 +14031,7 @@
       </p:cxnSp>
       <p:cxnSp>
         <p:nvCxnSpPr>
-          <p:cNvPr id="476" name=""/>
+          <p:cNvPr id="528" name=""/>
           <p:cNvCxnSpPr>
             <a:stCxn xmlns:a="http://schemas.openxmlformats.org/drawingml/2006/main" id="15" idx="3"/>
             <a:endCxn xmlns:a="http://schemas.openxmlformats.org/drawingml/2006/main" id="19" idx="1"/>
@@ -14217,7 +15753,7 @@
       </p:sp>
       <p:cxnSp>
         <p:nvCxnSpPr>
-          <p:cNvPr id="473" name=""/>
+          <p:cNvPr id="525" name=""/>
           <p:cNvCxnSpPr>
             <a:stCxn xmlns:a="http://schemas.openxmlformats.org/drawingml/2006/main" id="3" idx="3"/>
             <a:endCxn xmlns:a="http://schemas.openxmlformats.org/drawingml/2006/main" id="7" idx="1"/>
@@ -14243,7 +15779,7 @@
       </p:cxnSp>
       <p:cxnSp>
         <p:nvCxnSpPr>
-          <p:cNvPr id="474" name=""/>
+          <p:cNvPr id="526" name=""/>
           <p:cNvCxnSpPr>
             <a:stCxn xmlns:a="http://schemas.openxmlformats.org/drawingml/2006/main" id="7" idx="3"/>
             <a:endCxn xmlns:a="http://schemas.openxmlformats.org/drawingml/2006/main" id="11" idx="1"/>
@@ -14269,7 +15805,7 @@
       </p:cxnSp>
       <p:cxnSp>
         <p:nvCxnSpPr>
-          <p:cNvPr id="475" name=""/>
+          <p:cNvPr id="527" name=""/>
           <p:cNvCxnSpPr>
             <a:stCxn xmlns:a="http://schemas.openxmlformats.org/drawingml/2006/main" id="11" idx="3"/>
             <a:endCxn xmlns:a="http://schemas.openxmlformats.org/drawingml/2006/main" id="15" idx="1"/>
@@ -14295,7 +15831,7 @@
       </p:cxnSp>
       <p:cxnSp>
         <p:nvCxnSpPr>
-          <p:cNvPr id="476" name=""/>
+          <p:cNvPr id="528" name=""/>
           <p:cNvCxnSpPr>
             <a:stCxn xmlns:a="http://schemas.openxmlformats.org/drawingml/2006/main" id="15" idx="3"/>
             <a:endCxn xmlns:a="http://schemas.openxmlformats.org/drawingml/2006/main" id="19" idx="1"/>
@@ -15587,7 +17123,7 @@
       </p:sp>
       <p:cxnSp>
         <p:nvCxnSpPr>
-          <p:cNvPr id="264" name=""/>
+          <p:cNvPr id="292" name=""/>
           <p:cNvCxnSpPr>
             <a:stCxn xmlns:a="http://schemas.openxmlformats.org/drawingml/2006/main" id="3" idx="3"/>
             <a:endCxn xmlns:a="http://schemas.openxmlformats.org/drawingml/2006/main" id="6" idx="1"/>
@@ -15613,7 +17149,7 @@
       </p:cxnSp>
       <p:cxnSp>
         <p:nvCxnSpPr>
-          <p:cNvPr id="265" name=""/>
+          <p:cNvPr id="293" name=""/>
           <p:cNvCxnSpPr>
             <a:stCxn xmlns:a="http://schemas.openxmlformats.org/drawingml/2006/main" id="6" idx="3"/>
             <a:endCxn xmlns:a="http://schemas.openxmlformats.org/drawingml/2006/main" id="10" idx="1"/>

--- a/decks/08-workflows-vs-agents.pptx
+++ b/decks/08-workflows-vs-agents.pptx
@@ -2,23 +2,23 @@
 <file path=ppt/presentation.xml><?xml version="1.0" encoding="utf-8"?>
 <p:presentation xmlns:p="http://schemas.openxmlformats.org/presentationml/2006/main">
   <p:sldMasterIdLst>
-    <p:sldMasterId xmlns:r="http://schemas.openxmlformats.org/officeDocument/2006/relationships" id="2147483648" r:id="R5f23296d2a154e2f"/>
+    <p:sldMasterId xmlns:r="http://schemas.openxmlformats.org/officeDocument/2006/relationships" id="2147483648" r:id="R1aa40cb056d34413"/>
   </p:sldMasterIdLst>
   <p:notesMasterIdLst>
-    <p:notesMasterId xmlns:r="http://schemas.openxmlformats.org/officeDocument/2006/relationships" r:id="R6395f2bbef224280"/>
+    <p:notesMasterId xmlns:r="http://schemas.openxmlformats.org/officeDocument/2006/relationships" r:id="Ra53f5c6e17ed410d"/>
   </p:notesMasterIdLst>
   <p:sldIdLst>
-    <p:sldId xmlns:r="http://schemas.openxmlformats.org/officeDocument/2006/relationships" id="256" r:id="R5b22878f94dd4dbf"/>
-    <p:sldId xmlns:r="http://schemas.openxmlformats.org/officeDocument/2006/relationships" id="257" r:id="R2c2c462e565b40e1"/>
-    <p:sldId xmlns:r="http://schemas.openxmlformats.org/officeDocument/2006/relationships" id="258" r:id="R215b02a006ce4859"/>
-    <p:sldId xmlns:r="http://schemas.openxmlformats.org/officeDocument/2006/relationships" id="259" r:id="R2a6d5f8f51564107"/>
-    <p:sldId xmlns:r="http://schemas.openxmlformats.org/officeDocument/2006/relationships" id="260" r:id="R58ed4d011a284d2f"/>
-    <p:sldId xmlns:r="http://schemas.openxmlformats.org/officeDocument/2006/relationships" id="261" r:id="R5946775aefe340a1"/>
-    <p:sldId xmlns:r="http://schemas.openxmlformats.org/officeDocument/2006/relationships" id="262" r:id="Rc52556952c9342c7"/>
-    <p:sldId xmlns:r="http://schemas.openxmlformats.org/officeDocument/2006/relationships" id="263" r:id="Rdf3f7064b4a442c5"/>
-    <p:sldId xmlns:r="http://schemas.openxmlformats.org/officeDocument/2006/relationships" id="264" r:id="R45f4145bd5ab45d1"/>
-    <p:sldId xmlns:r="http://schemas.openxmlformats.org/officeDocument/2006/relationships" id="265" r:id="R592c2621eac04178"/>
-    <p:sldId xmlns:r="http://schemas.openxmlformats.org/officeDocument/2006/relationships" id="266" r:id="R83e09f6f490244f5"/>
+    <p:sldId xmlns:r="http://schemas.openxmlformats.org/officeDocument/2006/relationships" id="256" r:id="Rbdc6bb1c52594a9e"/>
+    <p:sldId xmlns:r="http://schemas.openxmlformats.org/officeDocument/2006/relationships" id="257" r:id="R2ef2d4d88dcb48d1"/>
+    <p:sldId xmlns:r="http://schemas.openxmlformats.org/officeDocument/2006/relationships" id="258" r:id="R653bd88751834a2b"/>
+    <p:sldId xmlns:r="http://schemas.openxmlformats.org/officeDocument/2006/relationships" id="259" r:id="Rba0b1f929fb44a79"/>
+    <p:sldId xmlns:r="http://schemas.openxmlformats.org/officeDocument/2006/relationships" id="260" r:id="Rc8e5ce0fef9f4cc6"/>
+    <p:sldId xmlns:r="http://schemas.openxmlformats.org/officeDocument/2006/relationships" id="261" r:id="R9088b7e62d354f92"/>
+    <p:sldId xmlns:r="http://schemas.openxmlformats.org/officeDocument/2006/relationships" id="262" r:id="R8a156347238b4320"/>
+    <p:sldId xmlns:r="http://schemas.openxmlformats.org/officeDocument/2006/relationships" id="263" r:id="Rcc20a5371bdd4918"/>
+    <p:sldId xmlns:r="http://schemas.openxmlformats.org/officeDocument/2006/relationships" id="264" r:id="Rc1a993a70fb9474a"/>
+    <p:sldId xmlns:r="http://schemas.openxmlformats.org/officeDocument/2006/relationships" id="265" r:id="Rb02e0a774596421f"/>
+    <p:sldId xmlns:r="http://schemas.openxmlformats.org/officeDocument/2006/relationships" id="266" r:id="R1928745de0124ab1"/>
   </p:sldIdLst>
   <p:sldSz cx="15240000" cy="8572500"/>
   <p:notesSz cx="6858000" cy="9144000"/>
@@ -452,7 +452,7 @@
           <a:lstStyle xmlns:a="http://schemas.openxmlformats.org/drawingml/2006/main"/>
           <a:p xmlns:a="http://schemas.openxmlformats.org/drawingml/2006/main">
             <a:r>
-              <a:t>Lesson 08 compares workflows and agents before introducing an agent framework. Students use the same finance tools and change only the control logic.</a:t>
+              <a:t>Opening: workflows and agents can use the same models and tools; the controller is different.</a:t>
             </a:r>
           </a:p>
           <a:p xmlns:a="http://schemas.openxmlformats.org/drawingml/2006/main">
@@ -467,12 +467,12 @@
           </a:p>
           <a:p xmlns:a="http://schemas.openxmlformats.org/drawingml/2006/main">
             <a:r>
-              <a:t>- Course chapter: chapters/08-workflows-vs-agents.md</a:t>
-            </a:r>
-          </a:p>
-          <a:p xmlns:a="http://schemas.openxmlformats.org/drawingml/2006/main">
-            <a:r>
-              <a:t>- Course notebook: notebooks/08_workflows_vs_agents.ipynb</a:t>
+              <a:t>- chapters/08-workflows-vs-agents.md</a:t>
+            </a:r>
+          </a:p>
+          <a:p xmlns:a="http://schemas.openxmlformats.org/drawingml/2006/main">
+            <a:r>
+              <a:t>- https://www.anthropic.com/engineering/building-effective-agents</a:t>
             </a:r>
           </a:p>
           <a:p xmlns:a="http://schemas.openxmlformats.org/drawingml/2006/main">
@@ -547,17 +547,12 @@
           <a:lstStyle xmlns:a="http://schemas.openxmlformats.org/drawingml/2006/main"/>
           <a:p xmlns:a="http://schemas.openxmlformats.org/drawingml/2006/main">
             <a:r>
-              <a:t>Instructor purpose: Check the three core decisions before the lesson closes.</a:t>
-            </a:r>
-          </a:p>
-          <a:p xmlns:a="http://schemas.openxmlformats.org/drawingml/2006/main">
-            <a:r>
-              <a:t>Planned timing: 3 minutes.</a:t>
-            </a:r>
-          </a:p>
-          <a:p xmlns:a="http://schemas.openxmlformats.org/drawingml/2006/main">
-            <a:r>
-              <a:t>Facilitation: ask for one letter per question.</a:t>
+              <a:t>Instructor purpose: test the corrected workflow-versus-agent distinction.</a:t>
+            </a:r>
+          </a:p>
+          <a:p xmlns:a="http://schemas.openxmlformats.org/drawingml/2006/main">
+            <a:r>
+              <a:t/>
             </a:r>
           </a:p>
           <a:p xmlns:a="http://schemas.openxmlformats.org/drawingml/2006/main">
@@ -642,17 +637,12 @@
           <a:lstStyle xmlns:a="http://schemas.openxmlformats.org/drawingml/2006/main"/>
           <a:p xmlns:a="http://schemas.openxmlformats.org/drawingml/2006/main">
             <a:r>
-              <a:t>Instructor purpose: Correct the quiz and restate the practical rule behind each answer.</a:t>
-            </a:r>
-          </a:p>
-          <a:p xmlns:a="http://schemas.openxmlformats.org/drawingml/2006/main">
-            <a:r>
-              <a:t>Planned timing: 3 minutes.</a:t>
-            </a:r>
-          </a:p>
-          <a:p xmlns:a="http://schemas.openxmlformats.org/drawingml/2006/main">
-            <a:r>
-              <a:t>Facilitation: ask learners to explain each rule in their own words.</a:t>
+              <a:t>Instructor purpose: correct the quiz and restate the decision rule.</a:t>
+            </a:r>
+          </a:p>
+          <a:p xmlns:a="http://schemas.openxmlformats.org/drawingml/2006/main">
+            <a:r>
+              <a:t/>
             </a:r>
           </a:p>
           <a:p xmlns:a="http://schemas.openxmlformats.org/drawingml/2006/main">
@@ -737,7 +727,7 @@
           <a:lstStyle xmlns:a="http://schemas.openxmlformats.org/drawingml/2006/main"/>
           <a:p xmlns:a="http://schemas.openxmlformats.org/drawingml/2006/main">
             <a:r>
-              <a:t>This recap compares who controls the next step. A workflow follows Python code, an agent lets one model choose, and a multi-agent system coordinates several models.</a:t>
+              <a:t>Use the rows to separate code-defined control from model-directed control.</a:t>
             </a:r>
           </a:p>
           <a:p xmlns:a="http://schemas.openxmlformats.org/drawingml/2006/main">
@@ -752,12 +742,17 @@
           </a:p>
           <a:p xmlns:a="http://schemas.openxmlformats.org/drawingml/2006/main">
             <a:r>
-              <a:t>- https://www.mlexpert.io/academy/v1/ai-agents/workflows-vs-agents</a:t>
-            </a:r>
-          </a:p>
-          <a:p xmlns:a="http://schemas.openxmlformats.org/drawingml/2006/main">
-            <a:r>
-              <a:t>- Course chapter: chapters/08-workflows-vs-agents.md</a:t>
+              <a:t>- https://www.anthropic.com/engineering/building-effective-agents</a:t>
+            </a:r>
+          </a:p>
+          <a:p xmlns:a="http://schemas.openxmlformats.org/drawingml/2006/main">
+            <a:r>
+              <a:t>- https://docs.langchain.com/oss/python/langgraph/workflows-agents</a:t>
+            </a:r>
+          </a:p>
+          <a:p xmlns:a="http://schemas.openxmlformats.org/drawingml/2006/main">
+            <a:r>
+              <a:t>- chapters/08-workflows-vs-agents.md</a:t>
             </a:r>
           </a:p>
           <a:p xmlns:a="http://schemas.openxmlformats.org/drawingml/2006/main">
@@ -832,7 +827,7 @@
           <a:lstStyle xmlns:a="http://schemas.openxmlformats.org/drawingml/2006/main"/>
           <a:p xmlns:a="http://schemas.openxmlformats.org/drawingml/2006/main">
             <a:r>
-              <a:t>Use five practical checks before adding an agent: path, latency, debugging, tool chaining, and best use case.</a:t>
+              <a:t>Anthropic's prompt-chaining example proves that workflow steps can consume previous outputs and include gates.</a:t>
             </a:r>
           </a:p>
           <a:p xmlns:a="http://schemas.openxmlformats.org/drawingml/2006/main">
@@ -847,12 +842,12 @@
           </a:p>
           <a:p xmlns:a="http://schemas.openxmlformats.org/drawingml/2006/main">
             <a:r>
-              <a:t>- https://www.mlexpert.io/academy/v1/ai-agents/workflows-vs-agents</a:t>
-            </a:r>
-          </a:p>
-          <a:p xmlns:a="http://schemas.openxmlformats.org/drawingml/2006/main">
-            <a:r>
-              <a:t>- Course chapter: chapters/08-workflows-vs-agents.md</a:t>
+              <a:t>- https://www.anthropic.com/engineering/building-effective-agents</a:t>
+            </a:r>
+          </a:p>
+          <a:p xmlns:a="http://schemas.openxmlformats.org/drawingml/2006/main">
+            <a:r>
+              <a:t>- assets/lesson-08/anthropic-prompt-chaining.png</a:t>
             </a:r>
           </a:p>
           <a:p xmlns:a="http://schemas.openxmlformats.org/drawingml/2006/main">
@@ -927,7 +922,7 @@
           <a:lstStyle xmlns:a="http://schemas.openxmlformats.org/drawingml/2006/main"/>
           <a:p xmlns:a="http://schemas.openxmlformats.org/drawingml/2006/main">
             <a:r>
-              <a:t>The model returns a typed tool request. Python validates it, runs the registered function, and returns a typed result with source information.</a:t>
+              <a:t>The model proposes typed fields; Python validates, invokes the allowlisted function and records provenance.</a:t>
             </a:r>
           </a:p>
           <a:p xmlns:a="http://schemas.openxmlformats.org/drawingml/2006/main">
@@ -947,7 +942,12 @@
           </a:p>
           <a:p xmlns:a="http://schemas.openxmlformats.org/drawingml/2006/main">
             <a:r>
-              <a:t>- Course notebook: notebooks/08_workflows_vs_agents.ipynb</a:t>
+              <a:t>- https://developers.openai.com/api/docs/guides/structured-outputs</a:t>
+            </a:r>
+          </a:p>
+          <a:p xmlns:a="http://schemas.openxmlformats.org/drawingml/2006/main">
+            <a:r>
+              <a:t>- https://developers.openai.com/api/docs/guides/function-calling</a:t>
             </a:r>
           </a:p>
           <a:p xmlns:a="http://schemas.openxmlformats.org/drawingml/2006/main">
@@ -1022,7 +1022,7 @@
           <a:lstStyle xmlns:a="http://schemas.openxmlformats.org/drawingml/2006/main"/>
           <a:p xmlns:a="http://schemas.openxmlformats.org/drawingml/2006/main">
             <a:r>
-              <a:t>A single price lookup has a known path. One workflow call is enough and is easier to test than an agent loop.</a:t>
+              <a:t>A direct lookup has one known action, so a workflow is the simplest adequate controller.</a:t>
             </a:r>
           </a:p>
           <a:p xmlns:a="http://schemas.openxmlformats.org/drawingml/2006/main">
@@ -1037,12 +1037,12 @@
           </a:p>
           <a:p xmlns:a="http://schemas.openxmlformats.org/drawingml/2006/main">
             <a:r>
+              <a:t>- notebooks/08_workflows_vs_agents.ipynb</a:t>
+            </a:r>
+          </a:p>
+          <a:p xmlns:a="http://schemas.openxmlformats.org/drawingml/2006/main">
+            <a:r>
               <a:t>- src/finai_academy/agent_workflows.py</a:t>
-            </a:r>
-          </a:p>
-          <a:p xmlns:a="http://schemas.openxmlformats.org/drawingml/2006/main">
-            <a:r>
-              <a:t>- assets/course-data/market/lesson08_market_snapshot_v1.json</a:t>
             </a:r>
           </a:p>
           <a:p xmlns:a="http://schemas.openxmlformats.org/drawingml/2006/main">
@@ -1117,7 +1117,7 @@
           <a:lstStyle xmlns:a="http://schemas.openxmlformats.org/drawingml/2006/main"/>
           <a:p xmlns:a="http://schemas.openxmlformats.org/drawingml/2006/main">
             <a:r>
-              <a:t>The conversion amount is not available before the market-price result. The fixed workflow stops with unsupported_dependency instead of inventing a value.</a:t>
+              <a:t>The route is known before execution: price, then FX. Code passes the observed price and currency into conversion.</a:t>
             </a:r>
           </a:p>
           <a:p xmlns:a="http://schemas.openxmlformats.org/drawingml/2006/main">
@@ -1132,12 +1132,17 @@
           </a:p>
           <a:p xmlns:a="http://schemas.openxmlformats.org/drawingml/2006/main">
             <a:r>
+              <a:t>- notebooks/08_workflows_vs_agents.ipynb</a:t>
+            </a:r>
+          </a:p>
+          <a:p xmlns:a="http://schemas.openxmlformats.org/drawingml/2006/main">
+            <a:r>
               <a:t>- src/finai_academy/agent_workflows.py</a:t>
             </a:r>
           </a:p>
           <a:p xmlns:a="http://schemas.openxmlformats.org/drawingml/2006/main">
             <a:r>
-              <a:t>- Course notebook: notebooks/08_workflows_vs_agents.ipynb</a:t>
+              <a:t>- assets/course-data/market/lesson08_market_snapshot_v1.json</a:t>
             </a:r>
           </a:p>
           <a:p xmlns:a="http://schemas.openxmlformats.org/drawingml/2006/main">
@@ -1212,7 +1217,7 @@
           <a:lstStyle xmlns:a="http://schemas.openxmlformats.org/drawingml/2006/main"/>
           <a:p xmlns:a="http://schemas.openxmlformats.org/drawingml/2006/main">
             <a:r>
-              <a:t>The bounded agent first gets the USD price, then uses that result as the input to the FX tool. MAX_STEPS limits the loop.</a:t>
+              <a:t>Anthropic depicts an autonomous agent as an LLM acting on and receiving feedback from its environment, with a stop path.</a:t>
             </a:r>
           </a:p>
           <a:p xmlns:a="http://schemas.openxmlformats.org/drawingml/2006/main">
@@ -1227,12 +1232,12 @@
           </a:p>
           <a:p xmlns:a="http://schemas.openxmlformats.org/drawingml/2006/main">
             <a:r>
-              <a:t>- src/finai_academy/agent_workflows.py</a:t>
-            </a:r>
-          </a:p>
-          <a:p xmlns:a="http://schemas.openxmlformats.org/drawingml/2006/main">
-            <a:r>
-              <a:t>- assets/course-data/market/lesson08_market_snapshot_v1.json</a:t>
+              <a:t>- https://www.anthropic.com/engineering/building-effective-agents</a:t>
+            </a:r>
+          </a:p>
+          <a:p xmlns:a="http://schemas.openxmlformats.org/drawingml/2006/main">
+            <a:r>
+              <a:t>- assets/lesson-08/anthropic-autonomous-agent.png</a:t>
             </a:r>
           </a:p>
           <a:p xmlns:a="http://schemas.openxmlformats.org/drawingml/2006/main">
@@ -1307,7 +1312,7 @@
           <a:lstStyle xmlns:a="http://schemas.openxmlformats.org/drawingml/2006/main"/>
           <a:p xmlns:a="http://schemas.openxmlformats.org/drawingml/2006/main">
             <a:r>
-              <a:t>The trace makes the difference visible: the workflow stops safely, while the agent uses the first result to make a valid second call.</a:t>
+              <a:t>OpenAI recommends an incremental approach and describes agent runs as loops with exit conditions such as errors or maximum turns.</a:t>
             </a:r>
           </a:p>
           <a:p xmlns:a="http://schemas.openxmlformats.org/drawingml/2006/main">
@@ -1322,12 +1327,12 @@
           </a:p>
           <a:p xmlns:a="http://schemas.openxmlformats.org/drawingml/2006/main">
             <a:r>
-              <a:t>- Course notebook: notebooks/08_workflows_vs_agents.ipynb</a:t>
-            </a:r>
-          </a:p>
-          <a:p xmlns:a="http://schemas.openxmlformats.org/drawingml/2006/main">
-            <a:r>
-              <a:t>- src/finai_academy/agent_workflows.py</a:t>
+              <a:t>- https://openai.com/business/guides-and-resources/a-practical-guide-to-building-ai-agents/</a:t>
+            </a:r>
+          </a:p>
+          <a:p xmlns:a="http://schemas.openxmlformats.org/drawingml/2006/main">
+            <a:r>
+              <a:t>- assets/lesson-08/openai-single-agent-loop.png</a:t>
             </a:r>
           </a:p>
           <a:p xmlns:a="http://schemas.openxmlformats.org/drawingml/2006/main">
@@ -1402,7 +1407,7 @@
           <a:lstStyle xmlns:a="http://schemas.openxmlformats.org/drawingml/2006/main"/>
           <a:p xmlns:a="http://schemas.openxmlformats.org/drawingml/2006/main">
             <a:r>
-              <a:t>The final rule is simple: choose a workflow for known steps and a bounded agent only when a tool result changes the next step. Lesson 09 adds explicit graph state and retries.</a:t>
+              <a:t>Choose the lowest-complexity controller that reaches the quality target. Measure any agent advantage.</a:t>
             </a:r>
           </a:p>
           <a:p xmlns:a="http://schemas.openxmlformats.org/drawingml/2006/main">
@@ -1417,12 +1422,17 @@
           </a:p>
           <a:p xmlns:a="http://schemas.openxmlformats.org/drawingml/2006/main">
             <a:r>
-              <a:t>- Course chapter: chapters/08-workflows-vs-agents.md</a:t>
-            </a:r>
-          </a:p>
-          <a:p xmlns:a="http://schemas.openxmlformats.org/drawingml/2006/main">
-            <a:r>
-              <a:t>- Course notebook: notebooks/08_workflows_vs_agents.ipynb</a:t>
+              <a:t>- https://www.anthropic.com/engineering/building-effective-agents</a:t>
+            </a:r>
+          </a:p>
+          <a:p xmlns:a="http://schemas.openxmlformats.org/drawingml/2006/main">
+            <a:r>
+              <a:t>- https://openai.com/business/guides-and-resources/a-practical-guide-to-building-ai-agents/</a:t>
+            </a:r>
+          </a:p>
+          <a:p xmlns:a="http://schemas.openxmlformats.org/drawingml/2006/main">
+            <a:r>
+              <a:t>- chapters/08-workflows-vs-agents.md</a:t>
             </a:r>
           </a:p>
           <a:p xmlns:a="http://schemas.openxmlformats.org/drawingml/2006/main">
@@ -1495,7 +1505,7 @@
   </p:cSld>
   <p:clrMap bg1="lt1" tx1="dk1" bg2="lt2" tx2="dk2" accent1="accent1" accent2="accent2" accent3="accent3" accent4="accent4" accent5="accent5" accent6="accent6" hlink="hlink" folHlink="folHlink"/>
   <p:sldLayoutIdLst>
-    <p:sldLayoutId xmlns:r="http://schemas.openxmlformats.org/officeDocument/2006/relationships" id="2147483649" r:id="Re50359802ea842f5"/>
+    <p:sldLayoutId xmlns:r="http://schemas.openxmlformats.org/officeDocument/2006/relationships" id="2147483649" r:id="R636b849ae1524b2a"/>
   </p:sldLayoutIdLst>
   <p:txStyles>
     <p:titleStyle>
@@ -2193,7 +2203,7 @@
                 <a:ea typeface="Calibri"/>
                 <a:cs typeface="Calibri"/>
               </a:rPr>
-              <a:t>Workflows Versus Agents</a:t>
+              <a:t>Who Chooses the Next Step?</a:t>
             </a:r>
           </a:p>
         </p:txBody>
@@ -2255,7 +2265,7 @@
                 <a:ea typeface="Calibri"/>
                 <a:cs typeface="Calibri"/>
               </a:rPr>
-              <a:t>Use the simplest system that can complete the task</a:t>
+              <a:t>Workflows use code-defined routes. Agents let the model direct execution.</a:t>
             </a:r>
           </a:p>
         </p:txBody>
@@ -2789,6 +2799,7 @@
           <a:lstStyle xmlns:a="http://schemas.openxmlformats.org/drawingml/2006/main"/>
           <a:p xmlns:a="http://schemas.openxmlformats.org/drawingml/2006/main">
             <a:pPr>
+              <a:buNone/>
               <a:defRPr sz="1500" b="1">
                 <a:solidFill>
                   <a:srgbClr val="001B2E"/>
@@ -2801,7 +2812,7 @@
                   <a:srgbClr val="001B2E"/>
                 </a:solidFill>
               </a:rPr>
-              <a:t>1. When is a workflow the best first choice?</a:t>
+              <a:t>1. Can a workflow pass one tool result into the next step?</a:t>
             </a:r>
           </a:p>
         </p:txBody>
@@ -2839,6 +2850,7 @@
           <a:lstStyle xmlns:a="http://schemas.openxmlformats.org/drawingml/2006/main"/>
           <a:p xmlns:a="http://schemas.openxmlformats.org/drawingml/2006/main">
             <a:pPr>
+              <a:buNone/>
               <a:defRPr sz="1200" b="0">
                 <a:solidFill>
                   <a:srgbClr val="334155"/>
@@ -2851,7 +2863,7 @@
                   <a:srgbClr val="334155"/>
                 </a:solidFill>
               </a:rPr>
-              <a:t>A  Steps are known     |     B  Every step is unknown     |     C  Many agents are available</a:t>
+              <a:t>A  Yes, if code defines the route     |     B  No     |     C  Only with agents</a:t>
             </a:r>
           </a:p>
         </p:txBody>
@@ -2889,6 +2901,7 @@
           <a:lstStyle xmlns:a="http://schemas.openxmlformats.org/drawingml/2006/main"/>
           <a:p xmlns:a="http://schemas.openxmlformats.org/drawingml/2006/main">
             <a:pPr>
+              <a:buNone/>
               <a:defRPr sz="1500" b="1">
                 <a:solidFill>
                   <a:srgbClr val="001B2E"/>
@@ -2901,7 +2914,7 @@
                   <a:srgbClr val="001B2E"/>
                 </a:solidFill>
               </a:rPr>
-              <a:t>2. When is an agent useful?</a:t>
+              <a:t>2. What makes the system an agent?</a:t>
             </a:r>
           </a:p>
         </p:txBody>
@@ -2939,6 +2952,7 @@
           <a:lstStyle xmlns:a="http://schemas.openxmlformats.org/drawingml/2006/main"/>
           <a:p xmlns:a="http://schemas.openxmlformats.org/drawingml/2006/main">
             <a:pPr>
+              <a:buNone/>
               <a:defRPr sz="1200" b="0">
                 <a:solidFill>
                   <a:srgbClr val="334155"/>
@@ -2951,7 +2965,7 @@
                   <a:srgbClr val="334155"/>
                 </a:solidFill>
               </a:rPr>
-              <a:t>A  Next action depends on results     |     B  One fixed call is enough     |     C  No tools exist</a:t>
+              <a:t>A  The model chooses the next action     |     B  It uses two tools     |     C  It has a loop</a:t>
             </a:r>
           </a:p>
         </p:txBody>
@@ -2989,6 +3003,7 @@
           <a:lstStyle xmlns:a="http://schemas.openxmlformats.org/drawingml/2006/main"/>
           <a:p xmlns:a="http://schemas.openxmlformats.org/drawingml/2006/main">
             <a:pPr>
+              <a:buNone/>
               <a:defRPr sz="1500" b="1">
                 <a:solidFill>
                   <a:srgbClr val="001B2E"/>
@@ -3001,7 +3016,7 @@
                   <a:srgbClr val="001B2E"/>
                 </a:solidFill>
               </a:rPr>
-              <a:t>3. Who validates and runs financial tool calls?</a:t>
+              <a:t>3. When should you add an agent?</a:t>
             </a:r>
           </a:p>
         </p:txBody>
@@ -3039,6 +3054,7 @@
           <a:lstStyle xmlns:a="http://schemas.openxmlformats.org/drawingml/2006/main"/>
           <a:p xmlns:a="http://schemas.openxmlformats.org/drawingml/2006/main">
             <a:pPr>
+              <a:buNone/>
               <a:defRPr sz="1200" b="0">
                 <a:solidFill>
                   <a:srgbClr val="334155"/>
@@ -3051,7 +3067,7 @@
                   <a:srgbClr val="334155"/>
                 </a:solidFill>
               </a:rPr>
-              <a:t>A  Python host     |     B  The model alone     |     C  The slide deck</a:t>
+              <a:t>A  Measured value on an open path     |     B  Every multi-step task     |     C  When code is hard</a:t>
             </a:r>
           </a:p>
         </p:txBody>
@@ -3461,6 +3477,7 @@
           <a:lstStyle xmlns:a="http://schemas.openxmlformats.org/drawingml/2006/main"/>
           <a:p xmlns:a="http://schemas.openxmlformats.org/drawingml/2006/main">
             <a:pPr>
+              <a:buNone/>
               <a:defRPr sz="1500" b="1">
                 <a:solidFill>
                   <a:srgbClr val="1F40CB"/>
@@ -3473,7 +3490,7 @@
                   <a:srgbClr val="1F40CB"/>
                 </a:solidFill>
               </a:rPr>
-              <a:t>1. A. Steps are known</a:t>
+              <a:t>1. A. Yes, if code defines the route</a:t>
             </a:r>
           </a:p>
         </p:txBody>
@@ -3511,6 +3528,7 @@
           <a:lstStyle xmlns:a="http://schemas.openxmlformats.org/drawingml/2006/main"/>
           <a:p xmlns:a="http://schemas.openxmlformats.org/drawingml/2006/main">
             <a:pPr>
+              <a:buNone/>
               <a:defRPr sz="1200" b="0">
                 <a:solidFill>
                   <a:srgbClr val="334155"/>
@@ -3523,7 +3541,7 @@
                   <a:srgbClr val="334155"/>
                 </a:solidFill>
               </a:rPr>
-              <a:t>A deterministic route is simpler to test, explain and control.</a:t>
+              <a:t>Workflows can chain, branch and loop through observed data.</a:t>
             </a:r>
           </a:p>
         </p:txBody>
@@ -3561,6 +3579,7 @@
           <a:lstStyle xmlns:a="http://schemas.openxmlformats.org/drawingml/2006/main"/>
           <a:p xmlns:a="http://schemas.openxmlformats.org/drawingml/2006/main">
             <a:pPr>
+              <a:buNone/>
               <a:defRPr sz="1500" b="1">
                 <a:solidFill>
                   <a:srgbClr val="1F40CB"/>
@@ -3573,7 +3592,7 @@
                   <a:srgbClr val="1F40CB"/>
                 </a:solidFill>
               </a:rPr>
-              <a:t>2. A. Next action depends on results</a:t>
+              <a:t>2. A. The model chooses the next action</a:t>
             </a:r>
           </a:p>
         </p:txBody>
@@ -3611,6 +3630,7 @@
           <a:lstStyle xmlns:a="http://schemas.openxmlformats.org/drawingml/2006/main"/>
           <a:p xmlns:a="http://schemas.openxmlformats.org/drawingml/2006/main">
             <a:pPr>
+              <a:buNone/>
               <a:defRPr sz="1200" b="0">
                 <a:solidFill>
                   <a:srgbClr val="334155"/>
@@ -3623,7 +3643,7 @@
                   <a:srgbClr val="334155"/>
                 </a:solidFill>
               </a:rPr>
-              <a:t>The agent observes one result before choosing the next step.</a:t>
+              <a:t>Control flow, not tool count, defines an agent.</a:t>
             </a:r>
           </a:p>
         </p:txBody>
@@ -3661,6 +3681,7 @@
           <a:lstStyle xmlns:a="http://schemas.openxmlformats.org/drawingml/2006/main"/>
           <a:p xmlns:a="http://schemas.openxmlformats.org/drawingml/2006/main">
             <a:pPr>
+              <a:buNone/>
               <a:defRPr sz="1500" b="1">
                 <a:solidFill>
                   <a:srgbClr val="1F40CB"/>
@@ -3673,7 +3694,7 @@
                   <a:srgbClr val="1F40CB"/>
                 </a:solidFill>
               </a:rPr>
-              <a:t>3. A. Python host</a:t>
+              <a:t>3. A. Measured value on an open path</a:t>
             </a:r>
           </a:p>
         </p:txBody>
@@ -3711,6 +3732,7 @@
           <a:lstStyle xmlns:a="http://schemas.openxmlformats.org/drawingml/2006/main"/>
           <a:p xmlns:a="http://schemas.openxmlformats.org/drawingml/2006/main">
             <a:pPr>
+              <a:buNone/>
               <a:defRPr sz="1200" b="0">
                 <a:solidFill>
                   <a:srgbClr val="334155"/>
@@ -3723,7 +3745,7 @@
                   <a:srgbClr val="334155"/>
                 </a:solidFill>
               </a:rPr>
-              <a:t>The model proposes; application code validates and executes.</a:t>
+              <a:t>Extra autonomy must improve quality enough to justify its cost.</a:t>
             </a:r>
           </a:p>
         </p:txBody>
@@ -3814,7 +3836,7 @@
                 <a:ea typeface="Calibri"/>
                 <a:cs typeface="Calibri"/>
               </a:rPr>
-              <a:t>THREE SYSTEMS AT A GLANCE</a:t>
+              <a:t>Is the path known?</a:t>
             </a:r>
           </a:p>
         </p:txBody>
@@ -4132,7 +4154,7 @@
                 <a:ea typeface="Calibri"/>
                 <a:cs typeface="Calibri"/>
               </a:rPr>
-              <a:t>Fixed steps</a:t>
+              <a:t>Coded by you</a:t>
             </a:r>
           </a:p>
         </p:txBody>
@@ -4229,7 +4251,7 @@
                 <a:ea typeface="Calibri"/>
                 <a:cs typeface="Calibri"/>
               </a:rPr>
-              <a:t>Price lookup</a:t>
+              <a:t>Uses results</a:t>
             </a:r>
           </a:p>
         </p:txBody>
@@ -4326,7 +4348,7 @@
                 <a:ea typeface="Calibri"/>
                 <a:cs typeface="Calibri"/>
               </a:rPr>
-              <a:t>0 to 3 calls</a:t>
+              <a:t>Known route</a:t>
             </a:r>
           </a:p>
         </p:txBody>
@@ -4388,7 +4410,7 @@
                 <a:ea typeface="Calibri"/>
                 <a:cs typeface="Calibri"/>
               </a:rPr>
-              <a:t>LOW COST</a:t>
+              <a:t>PREDICTABLE</a:t>
             </a:r>
           </a:p>
         </p:txBody>
@@ -4547,7 +4569,7 @@
                 <a:ea typeface="Calibri"/>
                 <a:cs typeface="Calibri"/>
               </a:rPr>
-              <a:t>One LLM</a:t>
+              <a:t>One model</a:t>
             </a:r>
           </a:p>
         </p:txBody>
@@ -4644,7 +4666,7 @@
                 <a:ea typeface="Calibri"/>
                 <a:cs typeface="Calibri"/>
               </a:rPr>
-              <a:t>Chooses after each result</a:t>
+              <a:t>Chosen by the model</a:t>
             </a:r>
           </a:p>
         </p:txBody>
@@ -4741,7 +4763,7 @@
                 <a:ea typeface="Calibri"/>
                 <a:cs typeface="Calibri"/>
               </a:rPr>
-              <a:t>Price then FX</a:t>
+              <a:t>Selects tools</a:t>
             </a:r>
           </a:p>
         </p:txBody>
@@ -4803,7 +4825,7 @@
                 <a:ea typeface="Calibri"/>
                 <a:cs typeface="Calibri"/>
               </a:rPr>
-              <a:t>MEDIUM COST</a:t>
+              <a:t>VARIABLE</a:t>
             </a:r>
           </a:p>
         </p:txBody>
@@ -4865,7 +4887,7 @@
                 <a:ea typeface="Calibri"/>
                 <a:cs typeface="Calibri"/>
               </a:rPr>
-              <a:t>MULTI-AGENT</a:t>
+              <a:t>VALUE TEST</a:t>
             </a:r>
           </a:p>
         </p:txBody>
@@ -4962,7 +4984,7 @@
                 <a:ea typeface="Calibri"/>
                 <a:cs typeface="Calibri"/>
               </a:rPr>
-              <a:t>Several LLMs</a:t>
+              <a:t>Quality gain?</a:t>
             </a:r>
           </a:p>
         </p:txBody>
@@ -5059,7 +5081,7 @@
                 <a:ea typeface="Calibri"/>
                 <a:cs typeface="Calibri"/>
               </a:rPr>
-              <a:t>Researcher, analyst, writer</a:t>
+              <a:t>Must beat workflow baseline</a:t>
             </a:r>
           </a:p>
         </p:txBody>
@@ -5121,7 +5143,7 @@
                 <a:ea typeface="Calibri"/>
                 <a:cs typeface="Calibri"/>
               </a:rPr>
-              <a:t>HIGH COST</a:t>
+              <a:t>MEASURE IT</a:t>
             </a:r>
           </a:p>
         </p:txBody>
@@ -5251,7 +5273,7 @@
                 <a:ea typeface="Calibri"/>
                 <a:cs typeface="Calibri"/>
               </a:rPr>
-              <a:t>Start with a workflow. Add an agent only when the next step is not known yet.</a:t>
+              <a:t>Tool output does not define an agent. The controller does.</a:t>
             </a:r>
           </a:p>
         </p:txBody>
@@ -5594,7 +5616,7 @@
                 <a:ea typeface="Calibri"/>
                 <a:cs typeface="Calibri"/>
               </a:rPr>
-              <a:t>WORKFLOW OR AGENT?</a:t>
+              <a:t>WORKFLOW PROOF</a:t>
             </a:r>
           </a:p>
         </p:txBody>
@@ -5656,39 +5678,223 @@
                 <a:ea typeface="Calibri"/>
                 <a:cs typeface="Calibri"/>
               </a:rPr>
-              <a:t>Use five checks before you add a loop</a:t>
-            </a:r>
-          </a:p>
-        </p:txBody>
-      </p:sp>
-      <p:sp>
-        <p:nvSpPr>
-          <p:cNvPr id="3" name="ingestion-1">
-            <a:extLst xmlns:a="http://schemas.openxmlformats.org/drawingml/2006/main">
-              <a:ext uri="{FF2B5EF4-FFF2-40B4-BE49-F238E27FC236}">
-                <a16:creationId xmlns:a16="http://schemas.microsoft.com/office/drawing/2014/main" id="{EF5CEA91-0836-4E99-95C1-43A271A11FFF}"/>
-              </a:ext>
-            </a:extLst>
-          </p:cNvPr>
-          <p:cNvSpPr>
-            <a:spLocks xmlns:a="http://schemas.openxmlformats.org/drawingml/2006/main" noGrp="1"/>
-          </p:cNvSpPr>
-          <p:nvPr/>
-        </p:nvSpPr>
-        <p:spPr>
-          <a:xfrm xmlns:a="http://schemas.openxmlformats.org/drawingml/2006/main">
-            <a:off x="990600" y="3086100"/>
-            <a:ext cx="2247900" cy="2266950"/>
-          </a:xfrm>
-          <a:prstGeom xmlns:a="http://schemas.openxmlformats.org/drawingml/2006/main" prst="roundRect">
-            <a:avLst>
-              <a:gd name="adj" fmla="val 5085"/>
-            </a:avLst>
+              <a:t>Workflows can use results, branch and stop</a:t>
+            </a:r>
+          </a:p>
+        </p:txBody>
+      </p:sp>
+      <p:sp>
+        <p:nvSpPr>
+          <p:cNvPr id="27" name="">
+            <a:extLst xmlns:a="http://schemas.openxmlformats.org/drawingml/2006/main">
+              <a:ext uri="{FF2B5EF4-FFF2-40B4-BE49-F238E27FC236}">
+                <a16:creationId xmlns:a16="http://schemas.microsoft.com/office/drawing/2014/main" id="{79128475-820B-447C-A724-7D8A31328FFE}"/>
+              </a:ext>
+            </a:extLst>
+          </p:cNvPr>
+          <p:cNvSpPr>
+            <a:spLocks xmlns:a="http://schemas.openxmlformats.org/drawingml/2006/main" noGrp="1"/>
+          </p:cNvSpPr>
+          <p:nvPr/>
+        </p:nvSpPr>
+        <p:spPr>
+          <a:xfrm xmlns:a="http://schemas.openxmlformats.org/drawingml/2006/main">
+            <a:off x="2381250" y="6210300"/>
+            <a:ext cx="10477500" cy="457200"/>
+          </a:xfrm>
+          <a:prstGeom xmlns:a="http://schemas.openxmlformats.org/drawingml/2006/main" prst="rect">
+            <a:avLst/>
+          </a:prstGeom>
+          <a:noFill xmlns:a="http://schemas.openxmlformats.org/drawingml/2006/main"/>
+          <a:ln xmlns:a="http://schemas.openxmlformats.org/drawingml/2006/main" w="0">
+            <a:noFill/>
+            <a:prstDash val="solid"/>
+          </a:ln>
+        </p:spPr>
+        <p:txBody>
+          <a:bodyPr xmlns:a="http://schemas.openxmlformats.org/drawingml/2006/main" wrap="square" lIns="0" tIns="0" rIns="0" bIns="0" anchor="ctr">
+            <a:normAutofit fontScale="100000"/>
+          </a:bodyPr>
+          <a:lstStyle xmlns:a="http://schemas.openxmlformats.org/drawingml/2006/main"/>
+          <a:p xmlns:a="http://schemas.openxmlformats.org/drawingml/2006/main">
+            <a:pPr algn="ctr">
+              <a:lnSpc>
+                <a:spcPct val="100000"/>
+              </a:lnSpc>
+              <a:buNone/>
+              <a:defRPr sz="2100" b="1">
+                <a:solidFill>
+                  <a:srgbClr val="051C2A"/>
+                </a:solidFill>
+                <a:latin typeface="Calibri"/>
+                <a:ea typeface="Calibri"/>
+                <a:cs typeface="Calibri"/>
+              </a:defRPr>
+            </a:pPr>
+            <a:r>
+              <a:rPr sz="2100" b="1">
+                <a:solidFill>
+                  <a:srgbClr val="051C2A"/>
+                </a:solidFill>
+                <a:latin typeface="Calibri"/>
+                <a:ea typeface="Calibri"/>
+                <a:cs typeface="Calibri"/>
+              </a:rPr>
+              <a:t>If you can draw every step before the run, use a workflow.</a:t>
+            </a:r>
+          </a:p>
+        </p:txBody>
+      </p:sp>
+      <p:sp>
+        <p:nvSpPr>
+          <p:cNvPr id="28" name="">
+            <a:extLst xmlns:a="http://schemas.openxmlformats.org/drawingml/2006/main">
+              <a:ext uri="{FF2B5EF4-FFF2-40B4-BE49-F238E27FC236}">
+                <a16:creationId xmlns:a16="http://schemas.microsoft.com/office/drawing/2014/main" id="{685F2AAD-81FC-436A-88F7-89F49C9F1671}"/>
+              </a:ext>
+            </a:extLst>
+          </p:cNvPr>
+          <p:cNvSpPr>
+            <a:spLocks xmlns:a="http://schemas.openxmlformats.org/drawingml/2006/main" noGrp="1"/>
+          </p:cNvSpPr>
+          <p:nvPr/>
+        </p:nvSpPr>
+        <p:spPr>
+          <a:xfrm xmlns:a="http://schemas.openxmlformats.org/drawingml/2006/main">
+            <a:off x="1885950" y="6838950"/>
+            <a:ext cx="4476750" cy="323850"/>
+          </a:xfrm>
+          <a:prstGeom xmlns:a="http://schemas.openxmlformats.org/drawingml/2006/main" prst="rect">
+            <a:avLst/>
+          </a:prstGeom>
+          <a:noFill xmlns:a="http://schemas.openxmlformats.org/drawingml/2006/main"/>
+          <a:ln xmlns:a="http://schemas.openxmlformats.org/drawingml/2006/main" w="0">
+            <a:noFill/>
+            <a:prstDash val="solid"/>
+          </a:ln>
+        </p:spPr>
+        <p:txBody>
+          <a:bodyPr xmlns:a="http://schemas.openxmlformats.org/drawingml/2006/main" wrap="square" lIns="0" tIns="0" rIns="0" bIns="0" anchor="ctr">
+            <a:normAutofit fontScale="100000"/>
+          </a:bodyPr>
+          <a:lstStyle xmlns:a="http://schemas.openxmlformats.org/drawingml/2006/main"/>
+          <a:p xmlns:a="http://schemas.openxmlformats.org/drawingml/2006/main">
+            <a:pPr algn="ctr">
+              <a:lnSpc>
+                <a:spcPct val="100000"/>
+              </a:lnSpc>
+              <a:buNone/>
+              <a:defRPr sz="1500" b="0">
+                <a:solidFill>
+                  <a:srgbClr val="64748B"/>
+                </a:solidFill>
+                <a:latin typeface="Calibri"/>
+                <a:ea typeface="Calibri"/>
+                <a:cs typeface="Calibri"/>
+              </a:defRPr>
+            </a:pPr>
+            <a:r>
+              <a:rPr sz="1500" b="0">
+                <a:solidFill>
+                  <a:srgbClr val="64748B"/>
+                </a:solidFill>
+                <a:latin typeface="Calibri"/>
+                <a:ea typeface="Calibri"/>
+                <a:cs typeface="Calibri"/>
+              </a:rPr>
+              <a:t>Anthropic · prompt chaining</a:t>
+            </a:r>
+          </a:p>
+        </p:txBody>
+      </p:sp>
+      <p:sp>
+        <p:nvSpPr>
+          <p:cNvPr id="29" name="">
+            <a:extLst xmlns:a="http://schemas.openxmlformats.org/drawingml/2006/main">
+              <a:ext uri="{FF2B5EF4-FFF2-40B4-BE49-F238E27FC236}">
+                <a16:creationId xmlns:a16="http://schemas.microsoft.com/office/drawing/2014/main" id="{CDE04AD7-6CBE-4792-B549-765578FB3E1E}"/>
+              </a:ext>
+            </a:extLst>
+          </p:cNvPr>
+          <p:cNvSpPr>
+            <a:spLocks xmlns:a="http://schemas.openxmlformats.org/drawingml/2006/main" noGrp="1"/>
+          </p:cNvSpPr>
+          <p:nvPr/>
+        </p:nvSpPr>
+        <p:spPr>
+          <a:xfrm xmlns:a="http://schemas.openxmlformats.org/drawingml/2006/main">
+            <a:off x="8801100" y="6838950"/>
+            <a:ext cx="4762500" cy="323850"/>
+          </a:xfrm>
+          <a:prstGeom xmlns:a="http://schemas.openxmlformats.org/drawingml/2006/main" prst="rect">
+            <a:avLst/>
+          </a:prstGeom>
+          <a:noFill xmlns:a="http://schemas.openxmlformats.org/drawingml/2006/main"/>
+          <a:ln xmlns:a="http://schemas.openxmlformats.org/drawingml/2006/main" w="0">
+            <a:noFill/>
+            <a:prstDash val="solid"/>
+          </a:ln>
+        </p:spPr>
+        <p:txBody>
+          <a:bodyPr xmlns:a="http://schemas.openxmlformats.org/drawingml/2006/main" wrap="square" lIns="0" tIns="0" rIns="0" bIns="0" anchor="ctr">
+            <a:normAutofit fontScale="100000"/>
+          </a:bodyPr>
+          <a:lstStyle xmlns:a="http://schemas.openxmlformats.org/drawingml/2006/main"/>
+          <a:p xmlns:a="http://schemas.openxmlformats.org/drawingml/2006/main">
+            <a:pPr algn="ctr">
+              <a:lnSpc>
+                <a:spcPct val="100000"/>
+              </a:lnSpc>
+              <a:buNone/>
+              <a:defRPr sz="1500" b="0">
+                <a:solidFill>
+                  <a:srgbClr val="64748B"/>
+                </a:solidFill>
+                <a:latin typeface="Calibri"/>
+                <a:ea typeface="Calibri"/>
+                <a:cs typeface="Calibri"/>
+              </a:defRPr>
+            </a:pPr>
+            <a:r>
+              <a:rPr sz="1500" b="0">
+                <a:solidFill>
+                  <a:srgbClr val="64748B"/>
+                </a:solidFill>
+                <a:latin typeface="Calibri"/>
+                <a:ea typeface="Calibri"/>
+                <a:cs typeface="Calibri"/>
+              </a:rPr>
+              <a:t>Fixed path + programmatic gate</a:t>
+            </a:r>
+          </a:p>
+        </p:txBody>
+      </p:sp>
+      <p:sp>
+        <p:nvSpPr>
+          <p:cNvPr id="30" name="">
+            <a:extLst xmlns:a="http://schemas.openxmlformats.org/drawingml/2006/main">
+              <a:ext uri="{FF2B5EF4-FFF2-40B4-BE49-F238E27FC236}">
+                <a16:creationId xmlns:a16="http://schemas.microsoft.com/office/drawing/2014/main" id="{28CBA7AE-993C-4F84-A696-8D1323AC4E80}"/>
+              </a:ext>
+            </a:extLst>
+          </p:cNvPr>
+          <p:cNvSpPr>
+            <a:spLocks xmlns:a="http://schemas.openxmlformats.org/drawingml/2006/main" noGrp="1"/>
+          </p:cNvSpPr>
+          <p:nvPr/>
+        </p:nvSpPr>
+        <p:spPr>
+          <a:xfrm xmlns:a="http://schemas.openxmlformats.org/drawingml/2006/main">
+            <a:off x="857250" y="7896225"/>
+            <a:ext cx="13525500" cy="28575"/>
+          </a:xfrm>
+          <a:prstGeom xmlns:a="http://schemas.openxmlformats.org/drawingml/2006/main" prst="rect">
+            <a:avLst/>
           </a:prstGeom>
           <a:solidFill xmlns:a="http://schemas.openxmlformats.org/drawingml/2006/main">
-            <a:srgbClr val="FFFFFF"/>
+            <a:srgbClr val="E4E7E9"/>
           </a:solidFill>
-          <a:ln xmlns:a="http://schemas.openxmlformats.org/drawingml/2006/main" w="9525">
+          <a:ln xmlns:a="http://schemas.openxmlformats.org/drawingml/2006/main" w="0">
             <a:solidFill>
               <a:srgbClr val="E4E7E9"/>
             </a:solidFill>
@@ -5698,84 +5904,55 @@
       </p:sp>
       <p:sp>
         <p:nvSpPr>
-          <p:cNvPr id="4" name="">
-            <a:extLst xmlns:a="http://schemas.openxmlformats.org/drawingml/2006/main">
-              <a:ext uri="{FF2B5EF4-FFF2-40B4-BE49-F238E27FC236}">
-                <a16:creationId xmlns:a16="http://schemas.microsoft.com/office/drawing/2014/main" id="{4A163ADC-FDBA-49AB-AB53-62FA29104479}"/>
-              </a:ext>
-            </a:extLst>
-          </p:cNvPr>
-          <p:cNvSpPr>
-            <a:spLocks xmlns:a="http://schemas.openxmlformats.org/drawingml/2006/main" noGrp="1"/>
-          </p:cNvSpPr>
-          <p:nvPr/>
-        </p:nvSpPr>
-        <p:spPr>
-          <a:xfrm xmlns:a="http://schemas.openxmlformats.org/drawingml/2006/main">
-            <a:off x="1181100" y="3295650"/>
-            <a:ext cx="514350" cy="285750"/>
-          </a:xfrm>
-          <a:prstGeom xmlns:a="http://schemas.openxmlformats.org/drawingml/2006/main" prst="rect">
-            <a:avLst/>
-          </a:prstGeom>
-          <a:noFill xmlns:a="http://schemas.openxmlformats.org/drawingml/2006/main"/>
-          <a:ln xmlns:a="http://schemas.openxmlformats.org/drawingml/2006/main" w="0">
-            <a:noFill/>
-            <a:prstDash val="solid"/>
-          </a:ln>
-        </p:spPr>
-        <p:txBody>
-          <a:bodyPr xmlns:a="http://schemas.openxmlformats.org/drawingml/2006/main" wrap="square" lIns="0" tIns="0" rIns="0" bIns="0" anchor="ctr">
-            <a:noAutofit/>
-          </a:bodyPr>
-          <a:lstStyle xmlns:a="http://schemas.openxmlformats.org/drawingml/2006/main"/>
-          <a:p xmlns:a="http://schemas.openxmlformats.org/drawingml/2006/main">
-            <a:pPr algn="l">
-              <a:lnSpc>
-                <a:spcPct val="100000"/>
-              </a:lnSpc>
-              <a:buNone/>
-              <a:defRPr sz="1350" b="1">
-                <a:solidFill>
-                  <a:srgbClr val="00A2EB"/>
-                </a:solidFill>
-                <a:latin typeface="Calibri"/>
-                <a:ea typeface="Calibri"/>
-                <a:cs typeface="Calibri"/>
-              </a:defRPr>
-            </a:pPr>
-            <a:r>
-              <a:rPr sz="1800" b="1">
-                <a:solidFill>
-                  <a:srgbClr val="00A2EB"/>
-                </a:solidFill>
-                <a:latin typeface="Calibri"/>
-                <a:ea typeface="Calibri"/>
-                <a:cs typeface="Calibri"/>
-              </a:rPr>
-              <a:t>01</a:t>
-            </a:r>
-          </a:p>
-        </p:txBody>
-      </p:sp>
-      <p:sp>
-        <p:nvSpPr>
-          <p:cNvPr id="5" name="">
-            <a:extLst xmlns:a="http://schemas.openxmlformats.org/drawingml/2006/main">
-              <a:ext uri="{FF2B5EF4-FFF2-40B4-BE49-F238E27FC236}">
-                <a16:creationId xmlns:a16="http://schemas.microsoft.com/office/drawing/2014/main" id="{26D1AD73-F995-4369-A266-8FA41354CE3D}"/>
-              </a:ext>
-            </a:extLst>
-          </p:cNvPr>
-          <p:cNvSpPr>
-            <a:spLocks xmlns:a="http://schemas.openxmlformats.org/drawingml/2006/main" noGrp="1"/>
-          </p:cNvSpPr>
-          <p:nvPr/>
-        </p:nvSpPr>
-        <p:spPr>
-          <a:xfrm xmlns:a="http://schemas.openxmlformats.org/drawingml/2006/main">
-            <a:off x="1104900" y="3752850"/>
-            <a:ext cx="2019300" cy="685800"/>
+          <p:cNvPr id="31" name="">
+            <a:extLst xmlns:a="http://schemas.openxmlformats.org/drawingml/2006/main">
+              <a:ext uri="{FF2B5EF4-FFF2-40B4-BE49-F238E27FC236}">
+                <a16:creationId xmlns:a16="http://schemas.microsoft.com/office/drawing/2014/main" id="{DE97BF4D-EDBC-4480-A82B-512A72221950}"/>
+              </a:ext>
+            </a:extLst>
+          </p:cNvPr>
+          <p:cNvSpPr>
+            <a:spLocks xmlns:a="http://schemas.openxmlformats.org/drawingml/2006/main" noGrp="1"/>
+          </p:cNvSpPr>
+          <p:nvPr/>
+        </p:nvSpPr>
+        <p:spPr>
+          <a:xfrm xmlns:a="http://schemas.openxmlformats.org/drawingml/2006/main">
+            <a:off x="857250" y="7896225"/>
+            <a:ext cx="8001000" cy="38100"/>
+          </a:xfrm>
+          <a:prstGeom xmlns:a="http://schemas.openxmlformats.org/drawingml/2006/main" prst="rect">
+            <a:avLst/>
+          </a:prstGeom>
+          <a:solidFill xmlns:a="http://schemas.openxmlformats.org/drawingml/2006/main">
+            <a:srgbClr val="00A2EB"/>
+          </a:solidFill>
+          <a:ln xmlns:a="http://schemas.openxmlformats.org/drawingml/2006/main" w="0">
+            <a:solidFill>
+              <a:srgbClr val="00A2EB"/>
+            </a:solidFill>
+            <a:prstDash val="solid"/>
+          </a:ln>
+        </p:spPr>
+      </p:sp>
+      <p:sp>
+        <p:nvSpPr>
+          <p:cNvPr id="32" name="">
+            <a:extLst xmlns:a="http://schemas.openxmlformats.org/drawingml/2006/main">
+              <a:ext uri="{FF2B5EF4-FFF2-40B4-BE49-F238E27FC236}">
+                <a16:creationId xmlns:a16="http://schemas.microsoft.com/office/drawing/2014/main" id="{49281B64-2F0F-4357-A085-C65451F28236}"/>
+              </a:ext>
+            </a:extLst>
+          </p:cNvPr>
+          <p:cNvSpPr>
+            <a:spLocks xmlns:a="http://schemas.openxmlformats.org/drawingml/2006/main" noGrp="1"/>
+          </p:cNvSpPr>
+          <p:nvPr/>
+        </p:nvSpPr>
+        <p:spPr>
+          <a:xfrm xmlns:a="http://schemas.openxmlformats.org/drawingml/2006/main">
+            <a:off x="971550" y="8058150"/>
+            <a:ext cx="3714750" cy="323850"/>
           </a:xfrm>
           <a:prstGeom xmlns:a="http://schemas.openxmlformats.org/drawingml/2006/main" prst="rect">
             <a:avLst/>
@@ -5797,47 +5974,47 @@
                 <a:spcPct val="100000"/>
               </a:lnSpc>
               <a:buNone/>
-              <a:defRPr sz="1950" b="1">
-                <a:solidFill>
-                  <a:srgbClr val="051C2A"/>
-                </a:solidFill>
-                <a:latin typeface="Calibri"/>
-                <a:ea typeface="Calibri"/>
-                <a:cs typeface="Calibri"/>
-              </a:defRPr>
-            </a:pPr>
-            <a:r>
-              <a:rPr sz="1950" b="1">
-                <a:solidFill>
-                  <a:srgbClr val="051C2A"/>
-                </a:solidFill>
-                <a:latin typeface="Calibri"/>
-                <a:ea typeface="Calibri"/>
-                <a:cs typeface="Calibri"/>
-              </a:rPr>
-              <a:t>Is the path known?</a:t>
-            </a:r>
-          </a:p>
-        </p:txBody>
-      </p:sp>
-      <p:sp>
-        <p:nvSpPr>
-          <p:cNvPr id="6" name="">
-            <a:extLst xmlns:a="http://schemas.openxmlformats.org/drawingml/2006/main">
-              <a:ext uri="{FF2B5EF4-FFF2-40B4-BE49-F238E27FC236}">
-                <a16:creationId xmlns:a16="http://schemas.microsoft.com/office/drawing/2014/main" id="{4CA7F72B-07B6-4BF4-A3F9-5860F8AC7245}"/>
-              </a:ext>
-            </a:extLst>
-          </p:cNvPr>
-          <p:cNvSpPr>
-            <a:spLocks xmlns:a="http://schemas.openxmlformats.org/drawingml/2006/main" noGrp="1"/>
-          </p:cNvSpPr>
-          <p:nvPr/>
-        </p:nvSpPr>
-        <p:spPr>
-          <a:xfrm xmlns:a="http://schemas.openxmlformats.org/drawingml/2006/main">
-            <a:off x="1181100" y="4610100"/>
-            <a:ext cx="1866900" cy="514350"/>
+              <a:defRPr sz="1200" b="0">
+                <a:solidFill>
+                  <a:srgbClr val="9A9A9F"/>
+                </a:solidFill>
+                <a:latin typeface="Calibri"/>
+                <a:ea typeface="Calibri"/>
+                <a:cs typeface="Calibri"/>
+              </a:defRPr>
+            </a:pPr>
+            <a:r>
+              <a:rPr sz="1200" b="0">
+                <a:solidFill>
+                  <a:srgbClr val="9A9A9F"/>
+                </a:solidFill>
+                <a:latin typeface="Calibri"/>
+                <a:ea typeface="Calibri"/>
+                <a:cs typeface="Calibri"/>
+              </a:rPr>
+              <a:t>First Finance - Arnaud Demes</a:t>
+            </a:r>
+          </a:p>
+        </p:txBody>
+      </p:sp>
+      <p:sp>
+        <p:nvSpPr>
+          <p:cNvPr id="33" name="">
+            <a:extLst xmlns:a="http://schemas.openxmlformats.org/drawingml/2006/main">
+              <a:ext uri="{FF2B5EF4-FFF2-40B4-BE49-F238E27FC236}">
+                <a16:creationId xmlns:a16="http://schemas.microsoft.com/office/drawing/2014/main" id="{EAA325A4-7EC6-42CE-A13A-4B38A32DE7F2}"/>
+              </a:ext>
+            </a:extLst>
+          </p:cNvPr>
+          <p:cNvSpPr>
+            <a:spLocks xmlns:a="http://schemas.openxmlformats.org/drawingml/2006/main" noGrp="1"/>
+          </p:cNvSpPr>
+          <p:nvPr/>
+        </p:nvSpPr>
+        <p:spPr>
+          <a:xfrm xmlns:a="http://schemas.openxmlformats.org/drawingml/2006/main">
+            <a:off x="12192000" y="8058150"/>
+            <a:ext cx="1809750" cy="323850"/>
           </a:xfrm>
           <a:prstGeom xmlns:a="http://schemas.openxmlformats.org/drawingml/2006/main" prst="rect">
             <a:avLst/>
@@ -5854,150 +6031,52 @@
           </a:bodyPr>
           <a:lstStyle xmlns:a="http://schemas.openxmlformats.org/drawingml/2006/main"/>
           <a:p xmlns:a="http://schemas.openxmlformats.org/drawingml/2006/main">
-            <a:pPr algn="l">
+            <a:pPr algn="r">
               <a:lnSpc>
                 <a:spcPct val="100000"/>
               </a:lnSpc>
               <a:buNone/>
-              <a:defRPr sz="1200" b="0">
-                <a:solidFill>
-                  <a:srgbClr val="1F40CB"/>
-                </a:solidFill>
-                <a:latin typeface="Calibri"/>
-                <a:ea typeface="Calibri"/>
-                <a:cs typeface="Calibri"/>
-              </a:defRPr>
-            </a:pPr>
-            <a:r>
-              <a:rPr sz="1200" b="0">
-                <a:solidFill>
-                  <a:srgbClr val="1F40CB"/>
-                </a:solidFill>
-                <a:latin typeface="Calibri"/>
-                <a:ea typeface="Calibri"/>
-                <a:cs typeface="Calibri"/>
-              </a:rPr>
-              <a:t>Workflow: Yes
-Agent: Not always</a:t>
-            </a:r>
-          </a:p>
-        </p:txBody>
-      </p:sp>
-      <p:sp>
-        <p:nvSpPr>
-          <p:cNvPr id="7" name="ingestion-2">
-            <a:extLst xmlns:a="http://schemas.openxmlformats.org/drawingml/2006/main">
-              <a:ext uri="{FF2B5EF4-FFF2-40B4-BE49-F238E27FC236}">
-                <a16:creationId xmlns:a16="http://schemas.microsoft.com/office/drawing/2014/main" id="{B39DEECB-E0D1-415A-8F2A-C8075A6D97BA}"/>
-              </a:ext>
-            </a:extLst>
-          </p:cNvPr>
-          <p:cNvSpPr>
-            <a:spLocks xmlns:a="http://schemas.openxmlformats.org/drawingml/2006/main" noGrp="1"/>
-          </p:cNvSpPr>
-          <p:nvPr/>
-        </p:nvSpPr>
-        <p:spPr>
-          <a:xfrm xmlns:a="http://schemas.openxmlformats.org/drawingml/2006/main">
-            <a:off x="3810000" y="3086100"/>
-            <a:ext cx="2247900" cy="2266950"/>
-          </a:xfrm>
-          <a:prstGeom xmlns:a="http://schemas.openxmlformats.org/drawingml/2006/main" prst="roundRect">
-            <a:avLst>
-              <a:gd name="adj" fmla="val 5085"/>
-            </a:avLst>
-          </a:prstGeom>
-          <a:solidFill xmlns:a="http://schemas.openxmlformats.org/drawingml/2006/main">
-            <a:srgbClr val="FFFFFF"/>
-          </a:solidFill>
-          <a:ln xmlns:a="http://schemas.openxmlformats.org/drawingml/2006/main" w="9525">
-            <a:solidFill>
-              <a:srgbClr val="E4E7E9"/>
-            </a:solidFill>
-            <a:prstDash val="solid"/>
-          </a:ln>
-        </p:spPr>
-      </p:sp>
-      <p:sp>
-        <p:nvSpPr>
-          <p:cNvPr id="8" name="">
-            <a:extLst xmlns:a="http://schemas.openxmlformats.org/drawingml/2006/main">
-              <a:ext uri="{FF2B5EF4-FFF2-40B4-BE49-F238E27FC236}">
-                <a16:creationId xmlns:a16="http://schemas.microsoft.com/office/drawing/2014/main" id="{18679081-8A68-4B7E-9199-340CF95714DE}"/>
-              </a:ext>
-            </a:extLst>
-          </p:cNvPr>
-          <p:cNvSpPr>
-            <a:spLocks xmlns:a="http://schemas.openxmlformats.org/drawingml/2006/main" noGrp="1"/>
-          </p:cNvSpPr>
-          <p:nvPr/>
-        </p:nvSpPr>
-        <p:spPr>
-          <a:xfrm xmlns:a="http://schemas.openxmlformats.org/drawingml/2006/main">
-            <a:off x="4000500" y="3295650"/>
-            <a:ext cx="514350" cy="285750"/>
-          </a:xfrm>
-          <a:prstGeom xmlns:a="http://schemas.openxmlformats.org/drawingml/2006/main" prst="rect">
-            <a:avLst/>
-          </a:prstGeom>
-          <a:noFill xmlns:a="http://schemas.openxmlformats.org/drawingml/2006/main"/>
-          <a:ln xmlns:a="http://schemas.openxmlformats.org/drawingml/2006/main" w="0">
-            <a:noFill/>
-            <a:prstDash val="solid"/>
-          </a:ln>
-        </p:spPr>
-        <p:txBody>
-          <a:bodyPr xmlns:a="http://schemas.openxmlformats.org/drawingml/2006/main" wrap="square" lIns="0" tIns="0" rIns="0" bIns="0" anchor="ctr">
-            <a:noAutofit/>
-          </a:bodyPr>
-          <a:lstStyle xmlns:a="http://schemas.openxmlformats.org/drawingml/2006/main"/>
-          <a:p xmlns:a="http://schemas.openxmlformats.org/drawingml/2006/main">
-            <a:pPr algn="l">
-              <a:lnSpc>
-                <a:spcPct val="100000"/>
-              </a:lnSpc>
-              <a:buNone/>
-              <a:defRPr sz="1350" b="1">
-                <a:solidFill>
-                  <a:srgbClr val="00A2EB"/>
-                </a:solidFill>
-                <a:latin typeface="Calibri"/>
-                <a:ea typeface="Calibri"/>
-                <a:cs typeface="Calibri"/>
-              </a:defRPr>
-            </a:pPr>
-            <a:r>
-              <a:rPr sz="1800" b="1">
-                <a:solidFill>
-                  <a:srgbClr val="00A2EB"/>
-                </a:solidFill>
-                <a:latin typeface="Calibri"/>
-                <a:ea typeface="Calibri"/>
-                <a:cs typeface="Calibri"/>
-              </a:rPr>
-              <a:t>02</a:t>
-            </a:r>
-          </a:p>
-        </p:txBody>
-      </p:sp>
-      <p:sp>
-        <p:nvSpPr>
-          <p:cNvPr id="9" name="">
-            <a:extLst xmlns:a="http://schemas.openxmlformats.org/drawingml/2006/main">
-              <a:ext uri="{FF2B5EF4-FFF2-40B4-BE49-F238E27FC236}">
-                <a16:creationId xmlns:a16="http://schemas.microsoft.com/office/drawing/2014/main" id="{ED095E54-44DC-4092-9EB7-0C81E4B47710}"/>
-              </a:ext>
-            </a:extLst>
-          </p:cNvPr>
-          <p:cNvSpPr>
-            <a:spLocks xmlns:a="http://schemas.openxmlformats.org/drawingml/2006/main" noGrp="1"/>
-          </p:cNvSpPr>
-          <p:nvPr/>
-        </p:nvSpPr>
-        <p:spPr>
-          <a:xfrm xmlns:a="http://schemas.openxmlformats.org/drawingml/2006/main">
-            <a:off x="3924300" y="3752850"/>
-            <a:ext cx="2019300" cy="685800"/>
+              <a:defRPr sz="1200" b="1">
+                <a:solidFill>
+                  <a:srgbClr val="9A9A9F"/>
+                </a:solidFill>
+                <a:latin typeface="Calibri"/>
+                <a:ea typeface="Calibri"/>
+                <a:cs typeface="Calibri"/>
+              </a:defRPr>
+            </a:pPr>
+            <a:r>
+              <a:rPr sz="1200" b="1">
+                <a:solidFill>
+                  <a:srgbClr val="9A9A9F"/>
+                </a:solidFill>
+                <a:latin typeface="Calibri"/>
+                <a:ea typeface="Calibri"/>
+                <a:cs typeface="Calibri"/>
+              </a:rPr>
+              <a:t>COMPARE</a:t>
+            </a:r>
+          </a:p>
+        </p:txBody>
+      </p:sp>
+      <p:sp>
+        <p:nvSpPr>
+          <p:cNvPr id="34" name="">
+            <a:extLst xmlns:a="http://schemas.openxmlformats.org/drawingml/2006/main">
+              <a:ext uri="{FF2B5EF4-FFF2-40B4-BE49-F238E27FC236}">
+                <a16:creationId xmlns:a16="http://schemas.microsoft.com/office/drawing/2014/main" id="{5F7FB65A-4A0D-4595-92F4-FD9B71638842}"/>
+              </a:ext>
+            </a:extLst>
+          </p:cNvPr>
+          <p:cNvSpPr>
+            <a:spLocks xmlns:a="http://schemas.openxmlformats.org/drawingml/2006/main" noGrp="1"/>
+          </p:cNvSpPr>
+          <p:nvPr/>
+        </p:nvSpPr>
+        <p:spPr>
+          <a:xfrm xmlns:a="http://schemas.openxmlformats.org/drawingml/2006/main">
+            <a:off x="14135100" y="8058150"/>
+            <a:ext cx="266700" cy="323850"/>
           </a:xfrm>
           <a:prstGeom xmlns:a="http://schemas.openxmlformats.org/drawingml/2006/main" prst="rect">
             <a:avLst/>
@@ -6014,184 +6093,24 @@
           </a:bodyPr>
           <a:lstStyle xmlns:a="http://schemas.openxmlformats.org/drawingml/2006/main"/>
           <a:p xmlns:a="http://schemas.openxmlformats.org/drawingml/2006/main">
-            <a:pPr algn="l">
+            <a:pPr algn="r">
               <a:lnSpc>
                 <a:spcPct val="100000"/>
               </a:lnSpc>
               <a:buNone/>
-              <a:defRPr sz="1950" b="1">
-                <a:solidFill>
-                  <a:srgbClr val="051C2A"/>
-                </a:solidFill>
-                <a:latin typeface="Calibri"/>
-                <a:ea typeface="Calibri"/>
-                <a:cs typeface="Calibri"/>
-              </a:defRPr>
-            </a:pPr>
-            <a:r>
-              <a:rPr sz="1950" b="1">
-                <a:solidFill>
-                  <a:srgbClr val="051C2A"/>
-                </a:solidFill>
-                <a:latin typeface="Calibri"/>
-                <a:ea typeface="Calibri"/>
-                <a:cs typeface="Calibri"/>
-              </a:rPr>
-              <a:t>LATENCY</a:t>
-            </a:r>
-          </a:p>
-        </p:txBody>
-      </p:sp>
-      <p:sp>
-        <p:nvSpPr>
-          <p:cNvPr id="10" name="">
-            <a:extLst xmlns:a="http://schemas.openxmlformats.org/drawingml/2006/main">
-              <a:ext uri="{FF2B5EF4-FFF2-40B4-BE49-F238E27FC236}">
-                <a16:creationId xmlns:a16="http://schemas.microsoft.com/office/drawing/2014/main" id="{4DB65E8E-6BA9-40DB-99F9-46D3397B13A3}"/>
-              </a:ext>
-            </a:extLst>
-          </p:cNvPr>
-          <p:cNvSpPr>
-            <a:spLocks xmlns:a="http://schemas.openxmlformats.org/drawingml/2006/main" noGrp="1"/>
-          </p:cNvSpPr>
-          <p:nvPr/>
-        </p:nvSpPr>
-        <p:spPr>
-          <a:xfrm xmlns:a="http://schemas.openxmlformats.org/drawingml/2006/main">
-            <a:off x="4000500" y="4610100"/>
-            <a:ext cx="1866900" cy="514350"/>
-          </a:xfrm>
-          <a:prstGeom xmlns:a="http://schemas.openxmlformats.org/drawingml/2006/main" prst="rect">
-            <a:avLst/>
-          </a:prstGeom>
-          <a:noFill xmlns:a="http://schemas.openxmlformats.org/drawingml/2006/main"/>
-          <a:ln xmlns:a="http://schemas.openxmlformats.org/drawingml/2006/main" w="0">
-            <a:noFill/>
-            <a:prstDash val="solid"/>
-          </a:ln>
-        </p:spPr>
-        <p:txBody>
-          <a:bodyPr xmlns:a="http://schemas.openxmlformats.org/drawingml/2006/main" wrap="square" lIns="0" tIns="0" rIns="0" bIns="0" anchor="ctr">
-            <a:normAutofit fontScale="100000"/>
-          </a:bodyPr>
-          <a:lstStyle xmlns:a="http://schemas.openxmlformats.org/drawingml/2006/main"/>
-          <a:p xmlns:a="http://schemas.openxmlformats.org/drawingml/2006/main">
-            <a:pPr algn="l">
-              <a:lnSpc>
-                <a:spcPct val="100000"/>
-              </a:lnSpc>
-              <a:buNone/>
-              <a:defRPr sz="1200" b="0">
-                <a:solidFill>
-                  <a:srgbClr val="1F40CB"/>
-                </a:solidFill>
-                <a:latin typeface="Calibri"/>
-                <a:ea typeface="Calibri"/>
-                <a:cs typeface="Calibri"/>
-              </a:defRPr>
-            </a:pPr>
-            <a:r>
-              <a:rPr sz="1200" b="0">
-                <a:solidFill>
-                  <a:srgbClr val="1F40CB"/>
-                </a:solidFill>
-                <a:latin typeface="Calibri"/>
-                <a:ea typeface="Calibri"/>
-                <a:cs typeface="Calibri"/>
-              </a:rPr>
-              <a:t>Workflow: Fixed
-Agent: Variable</a:t>
-            </a:r>
-          </a:p>
-        </p:txBody>
-      </p:sp>
-      <p:sp>
-        <p:nvSpPr>
-          <p:cNvPr id="11" name="ingestion-3">
-            <a:extLst xmlns:a="http://schemas.openxmlformats.org/drawingml/2006/main">
-              <a:ext uri="{FF2B5EF4-FFF2-40B4-BE49-F238E27FC236}">
-                <a16:creationId xmlns:a16="http://schemas.microsoft.com/office/drawing/2014/main" id="{D4342A97-3791-461F-A305-9671DA4948CE}"/>
-              </a:ext>
-            </a:extLst>
-          </p:cNvPr>
-          <p:cNvSpPr>
-            <a:spLocks xmlns:a="http://schemas.openxmlformats.org/drawingml/2006/main" noGrp="1"/>
-          </p:cNvSpPr>
-          <p:nvPr/>
-        </p:nvSpPr>
-        <p:spPr>
-          <a:xfrm xmlns:a="http://schemas.openxmlformats.org/drawingml/2006/main">
-            <a:off x="6629400" y="3086100"/>
-            <a:ext cx="2247900" cy="2266950"/>
-          </a:xfrm>
-          <a:prstGeom xmlns:a="http://schemas.openxmlformats.org/drawingml/2006/main" prst="roundRect">
-            <a:avLst>
-              <a:gd name="adj" fmla="val 5085"/>
-            </a:avLst>
-          </a:prstGeom>
-          <a:solidFill xmlns:a="http://schemas.openxmlformats.org/drawingml/2006/main">
-            <a:srgbClr val="062433"/>
-          </a:solidFill>
-          <a:ln xmlns:a="http://schemas.openxmlformats.org/drawingml/2006/main" w="9525">
-            <a:solidFill>
-              <a:srgbClr val="062433"/>
-            </a:solidFill>
-            <a:prstDash val="solid"/>
-          </a:ln>
-        </p:spPr>
-      </p:sp>
-      <p:sp>
-        <p:nvSpPr>
-          <p:cNvPr id="12" name="">
-            <a:extLst xmlns:a="http://schemas.openxmlformats.org/drawingml/2006/main">
-              <a:ext uri="{FF2B5EF4-FFF2-40B4-BE49-F238E27FC236}">
-                <a16:creationId xmlns:a16="http://schemas.microsoft.com/office/drawing/2014/main" id="{64E49A95-2D88-4387-8BD5-FA749ABD0960}"/>
-              </a:ext>
-            </a:extLst>
-          </p:cNvPr>
-          <p:cNvSpPr>
-            <a:spLocks xmlns:a="http://schemas.openxmlformats.org/drawingml/2006/main" noGrp="1"/>
-          </p:cNvSpPr>
-          <p:nvPr/>
-        </p:nvSpPr>
-        <p:spPr>
-          <a:xfrm xmlns:a="http://schemas.openxmlformats.org/drawingml/2006/main">
-            <a:off x="6819900" y="3295650"/>
-            <a:ext cx="514350" cy="285750"/>
-          </a:xfrm>
-          <a:prstGeom xmlns:a="http://schemas.openxmlformats.org/drawingml/2006/main" prst="rect">
-            <a:avLst/>
-          </a:prstGeom>
-          <a:noFill xmlns:a="http://schemas.openxmlformats.org/drawingml/2006/main"/>
-          <a:ln xmlns:a="http://schemas.openxmlformats.org/drawingml/2006/main" w="0">
-            <a:noFill/>
-            <a:prstDash val="solid"/>
-          </a:ln>
-        </p:spPr>
-        <p:txBody>
-          <a:bodyPr xmlns:a="http://schemas.openxmlformats.org/drawingml/2006/main" wrap="square" lIns="0" tIns="0" rIns="0" bIns="0" anchor="ctr">
-            <a:noAutofit/>
-          </a:bodyPr>
-          <a:lstStyle xmlns:a="http://schemas.openxmlformats.org/drawingml/2006/main"/>
-          <a:p xmlns:a="http://schemas.openxmlformats.org/drawingml/2006/main">
-            <a:pPr algn="l">
-              <a:lnSpc>
-                <a:spcPct val="100000"/>
-              </a:lnSpc>
-              <a:buNone/>
-              <a:defRPr sz="1350" b="1">
-                <a:solidFill>
-                  <a:srgbClr val="00A2EB"/>
-                </a:solidFill>
-                <a:latin typeface="Calibri"/>
-                <a:ea typeface="Calibri"/>
-                <a:cs typeface="Calibri"/>
-              </a:defRPr>
-            </a:pPr>
-            <a:r>
-              <a:rPr sz="1800" b="1">
-                <a:solidFill>
-                  <a:srgbClr val="00A2EB"/>
+              <a:defRPr sz="1200" b="1">
+                <a:solidFill>
+                  <a:srgbClr val="9A9A9F"/>
+                </a:solidFill>
+                <a:latin typeface="Calibri"/>
+                <a:ea typeface="Calibri"/>
+                <a:cs typeface="Calibri"/>
+              </a:defRPr>
+            </a:pPr>
+            <a:r>
+              <a:rPr sz="1200" b="1">
+                <a:solidFill>
+                  <a:srgbClr val="9A9A9F"/>
                 </a:solidFill>
                 <a:latin typeface="Calibri"/>
                 <a:ea typeface="Calibri"/>
@@ -6202,1117 +6121,31 @@
           </a:p>
         </p:txBody>
       </p:sp>
-      <p:sp>
-        <p:nvSpPr>
-          <p:cNvPr id="13" name="">
-            <a:extLst xmlns:a="http://schemas.openxmlformats.org/drawingml/2006/main">
-              <a:ext uri="{FF2B5EF4-FFF2-40B4-BE49-F238E27FC236}">
-                <a16:creationId xmlns:a16="http://schemas.microsoft.com/office/drawing/2014/main" id="{572D3874-F985-4CD0-BBFF-D59F5B7B32BE}"/>
-              </a:ext>
-            </a:extLst>
-          </p:cNvPr>
-          <p:cNvSpPr>
-            <a:spLocks xmlns:a="http://schemas.openxmlformats.org/drawingml/2006/main" noGrp="1"/>
-          </p:cNvSpPr>
-          <p:nvPr/>
-        </p:nvSpPr>
-        <p:spPr>
-          <a:xfrm xmlns:a="http://schemas.openxmlformats.org/drawingml/2006/main">
-            <a:off x="6743700" y="3752850"/>
-            <a:ext cx="2019300" cy="685800"/>
-          </a:xfrm>
-          <a:prstGeom xmlns:a="http://schemas.openxmlformats.org/drawingml/2006/main" prst="rect">
-            <a:avLst/>
-          </a:prstGeom>
-          <a:noFill xmlns:a="http://schemas.openxmlformats.org/drawingml/2006/main"/>
-          <a:ln xmlns:a="http://schemas.openxmlformats.org/drawingml/2006/main" w="0">
-            <a:noFill/>
-            <a:prstDash val="solid"/>
-          </a:ln>
-        </p:spPr>
-        <p:txBody>
-          <a:bodyPr xmlns:a="http://schemas.openxmlformats.org/drawingml/2006/main" wrap="square" lIns="0" tIns="0" rIns="0" bIns="0" anchor="ctr">
-            <a:noAutofit/>
-          </a:bodyPr>
-          <a:lstStyle xmlns:a="http://schemas.openxmlformats.org/drawingml/2006/main"/>
-          <a:p xmlns:a="http://schemas.openxmlformats.org/drawingml/2006/main">
-            <a:pPr algn="l">
-              <a:lnSpc>
-                <a:spcPct val="100000"/>
-              </a:lnSpc>
-              <a:buNone/>
-              <a:defRPr sz="1650" b="1">
-                <a:solidFill>
-                  <a:srgbClr val="FFFFFF"/>
-                </a:solidFill>
-                <a:latin typeface="Calibri"/>
-                <a:ea typeface="Calibri"/>
-                <a:cs typeface="Calibri"/>
-              </a:defRPr>
-            </a:pPr>
-            <a:r>
-              <a:rPr sz="1800" b="1">
-                <a:solidFill>
-                  <a:srgbClr val="FFFFFF"/>
-                </a:solidFill>
-                <a:latin typeface="Calibri"/>
-                <a:ea typeface="Calibri"/>
-                <a:cs typeface="Calibri"/>
-              </a:rPr>
-              <a:t>DEBUGGING</a:t>
-            </a:r>
-          </a:p>
-        </p:txBody>
-      </p:sp>
-      <p:sp>
-        <p:nvSpPr>
-          <p:cNvPr id="14" name="">
-            <a:extLst xmlns:a="http://schemas.openxmlformats.org/drawingml/2006/main">
-              <a:ext uri="{FF2B5EF4-FFF2-40B4-BE49-F238E27FC236}">
-                <a16:creationId xmlns:a16="http://schemas.microsoft.com/office/drawing/2014/main" id="{9599AF29-91DE-47C0-8189-B0778BB52724}"/>
-              </a:ext>
-            </a:extLst>
-          </p:cNvPr>
-          <p:cNvSpPr>
-            <a:spLocks xmlns:a="http://schemas.openxmlformats.org/drawingml/2006/main" noGrp="1"/>
-          </p:cNvSpPr>
-          <p:nvPr/>
-        </p:nvSpPr>
-        <p:spPr>
-          <a:xfrm xmlns:a="http://schemas.openxmlformats.org/drawingml/2006/main">
-            <a:off x="6819900" y="4610100"/>
-            <a:ext cx="1866900" cy="514350"/>
-          </a:xfrm>
-          <a:prstGeom xmlns:a="http://schemas.openxmlformats.org/drawingml/2006/main" prst="rect">
-            <a:avLst/>
-          </a:prstGeom>
-          <a:noFill xmlns:a="http://schemas.openxmlformats.org/drawingml/2006/main"/>
-          <a:ln xmlns:a="http://schemas.openxmlformats.org/drawingml/2006/main" w="0">
-            <a:noFill/>
-            <a:prstDash val="solid"/>
-          </a:ln>
-        </p:spPr>
-        <p:txBody>
-          <a:bodyPr xmlns:a="http://schemas.openxmlformats.org/drawingml/2006/main" wrap="square" lIns="0" tIns="0" rIns="0" bIns="0" anchor="ctr">
-            <a:normAutofit fontScale="100000"/>
-          </a:bodyPr>
-          <a:lstStyle xmlns:a="http://schemas.openxmlformats.org/drawingml/2006/main"/>
-          <a:p xmlns:a="http://schemas.openxmlformats.org/drawingml/2006/main">
-            <a:pPr algn="l">
-              <a:lnSpc>
-                <a:spcPct val="100000"/>
-              </a:lnSpc>
-              <a:buNone/>
-              <a:defRPr sz="1200" b="0">
-                <a:solidFill>
-                  <a:srgbClr val="00A2EB"/>
-                </a:solidFill>
-                <a:latin typeface="Calibri"/>
-                <a:ea typeface="Calibri"/>
-                <a:cs typeface="Calibri"/>
-              </a:defRPr>
-            </a:pPr>
-            <a:r>
-              <a:rPr sz="1200" b="0">
-                <a:solidFill>
-                  <a:srgbClr val="00A2EB"/>
-                </a:solidFill>
-                <a:latin typeface="Calibri"/>
-                <a:ea typeface="Calibri"/>
-                <a:cs typeface="Calibri"/>
-              </a:rPr>
-              <a:t>Workflow: Easier
-Agent: Harder</a:t>
-            </a:r>
-          </a:p>
-        </p:txBody>
-      </p:sp>
-      <p:sp>
-        <p:nvSpPr>
-          <p:cNvPr id="15" name="ingestion-4">
-            <a:extLst xmlns:a="http://schemas.openxmlformats.org/drawingml/2006/main">
-              <a:ext uri="{FF2B5EF4-FFF2-40B4-BE49-F238E27FC236}">
-                <a16:creationId xmlns:a16="http://schemas.microsoft.com/office/drawing/2014/main" id="{7952DE37-BD86-481C-A575-8709971DD74E}"/>
-              </a:ext>
-            </a:extLst>
-          </p:cNvPr>
-          <p:cNvSpPr>
-            <a:spLocks xmlns:a="http://schemas.openxmlformats.org/drawingml/2006/main" noGrp="1"/>
-          </p:cNvSpPr>
-          <p:nvPr/>
-        </p:nvSpPr>
-        <p:spPr>
-          <a:xfrm xmlns:a="http://schemas.openxmlformats.org/drawingml/2006/main">
-            <a:off x="9448800" y="3086100"/>
-            <a:ext cx="2247900" cy="2266950"/>
-          </a:xfrm>
-          <a:prstGeom xmlns:a="http://schemas.openxmlformats.org/drawingml/2006/main" prst="roundRect">
-            <a:avLst>
-              <a:gd name="adj" fmla="val 5085"/>
-            </a:avLst>
-          </a:prstGeom>
-          <a:solidFill xmlns:a="http://schemas.openxmlformats.org/drawingml/2006/main">
-            <a:srgbClr val="FFFFFF"/>
-          </a:solidFill>
-          <a:ln xmlns:a="http://schemas.openxmlformats.org/drawingml/2006/main" w="9525">
-            <a:solidFill>
-              <a:srgbClr val="E4E7E9"/>
-            </a:solidFill>
-            <a:prstDash val="solid"/>
-          </a:ln>
-        </p:spPr>
-      </p:sp>
-      <p:sp>
-        <p:nvSpPr>
-          <p:cNvPr id="16" name="">
-            <a:extLst xmlns:a="http://schemas.openxmlformats.org/drawingml/2006/main">
-              <a:ext uri="{FF2B5EF4-FFF2-40B4-BE49-F238E27FC236}">
-                <a16:creationId xmlns:a16="http://schemas.microsoft.com/office/drawing/2014/main" id="{62EC2EC9-18A1-4F72-A64D-AF536DDC8F61}"/>
-              </a:ext>
-            </a:extLst>
-          </p:cNvPr>
-          <p:cNvSpPr>
-            <a:spLocks xmlns:a="http://schemas.openxmlformats.org/drawingml/2006/main" noGrp="1"/>
-          </p:cNvSpPr>
-          <p:nvPr/>
-        </p:nvSpPr>
-        <p:spPr>
-          <a:xfrm xmlns:a="http://schemas.openxmlformats.org/drawingml/2006/main">
-            <a:off x="9639300" y="3295650"/>
-            <a:ext cx="514350" cy="285750"/>
-          </a:xfrm>
-          <a:prstGeom xmlns:a="http://schemas.openxmlformats.org/drawingml/2006/main" prst="rect">
-            <a:avLst/>
-          </a:prstGeom>
-          <a:noFill xmlns:a="http://schemas.openxmlformats.org/drawingml/2006/main"/>
-          <a:ln xmlns:a="http://schemas.openxmlformats.org/drawingml/2006/main" w="0">
-            <a:noFill/>
-            <a:prstDash val="solid"/>
-          </a:ln>
-        </p:spPr>
-        <p:txBody>
-          <a:bodyPr xmlns:a="http://schemas.openxmlformats.org/drawingml/2006/main" wrap="square" lIns="0" tIns="0" rIns="0" bIns="0" anchor="ctr">
-            <a:noAutofit/>
-          </a:bodyPr>
-          <a:lstStyle xmlns:a="http://schemas.openxmlformats.org/drawingml/2006/main"/>
-          <a:p xmlns:a="http://schemas.openxmlformats.org/drawingml/2006/main">
-            <a:pPr algn="l">
-              <a:lnSpc>
-                <a:spcPct val="100000"/>
-              </a:lnSpc>
-              <a:buNone/>
-              <a:defRPr sz="1350" b="1">
-                <a:solidFill>
-                  <a:srgbClr val="00A2EB"/>
-                </a:solidFill>
-                <a:latin typeface="Calibri"/>
-                <a:ea typeface="Calibri"/>
-                <a:cs typeface="Calibri"/>
-              </a:defRPr>
-            </a:pPr>
-            <a:r>
-              <a:rPr sz="1800" b="1">
-                <a:solidFill>
-                  <a:srgbClr val="00A2EB"/>
-                </a:solidFill>
-                <a:latin typeface="Calibri"/>
-                <a:ea typeface="Calibri"/>
-                <a:cs typeface="Calibri"/>
-              </a:rPr>
-              <a:t>04</a:t>
-            </a:r>
-          </a:p>
-        </p:txBody>
-      </p:sp>
-      <p:sp>
-        <p:nvSpPr>
-          <p:cNvPr id="17" name="">
-            <a:extLst xmlns:a="http://schemas.openxmlformats.org/drawingml/2006/main">
-              <a:ext uri="{FF2B5EF4-FFF2-40B4-BE49-F238E27FC236}">
-                <a16:creationId xmlns:a16="http://schemas.microsoft.com/office/drawing/2014/main" id="{8540FD5A-1C0F-4BE1-B862-685F20D0F43C}"/>
-              </a:ext>
-            </a:extLst>
-          </p:cNvPr>
-          <p:cNvSpPr>
-            <a:spLocks xmlns:a="http://schemas.openxmlformats.org/drawingml/2006/main" noGrp="1"/>
-          </p:cNvSpPr>
-          <p:nvPr/>
-        </p:nvSpPr>
-        <p:spPr>
-          <a:xfrm xmlns:a="http://schemas.openxmlformats.org/drawingml/2006/main">
-            <a:off x="9563100" y="3752850"/>
-            <a:ext cx="2019300" cy="685800"/>
-          </a:xfrm>
-          <a:prstGeom xmlns:a="http://schemas.openxmlformats.org/drawingml/2006/main" prst="rect">
-            <a:avLst/>
-          </a:prstGeom>
-          <a:noFill xmlns:a="http://schemas.openxmlformats.org/drawingml/2006/main"/>
-          <a:ln xmlns:a="http://schemas.openxmlformats.org/drawingml/2006/main" w="0">
-            <a:noFill/>
-            <a:prstDash val="solid"/>
-          </a:ln>
-        </p:spPr>
-        <p:txBody>
-          <a:bodyPr xmlns:a="http://schemas.openxmlformats.org/drawingml/2006/main" wrap="square" lIns="0" tIns="0" rIns="0" bIns="0" anchor="ctr">
-            <a:normAutofit fontScale="100000"/>
-          </a:bodyPr>
-          <a:lstStyle xmlns:a="http://schemas.openxmlformats.org/drawingml/2006/main"/>
-          <a:p xmlns:a="http://schemas.openxmlformats.org/drawingml/2006/main">
-            <a:pPr algn="l">
-              <a:lnSpc>
-                <a:spcPct val="100000"/>
-              </a:lnSpc>
-              <a:buNone/>
-              <a:defRPr sz="1950" b="1">
-                <a:solidFill>
-                  <a:srgbClr val="051C2A"/>
-                </a:solidFill>
-                <a:latin typeface="Calibri"/>
-                <a:ea typeface="Calibri"/>
-                <a:cs typeface="Calibri"/>
-              </a:defRPr>
-            </a:pPr>
-            <a:r>
-              <a:rPr sz="1950" b="1">
-                <a:solidFill>
-                  <a:srgbClr val="051C2A"/>
-                </a:solidFill>
-                <a:latin typeface="Calibri"/>
-                <a:ea typeface="Calibri"/>
-                <a:cs typeface="Calibri"/>
-              </a:rPr>
-              <a:t>TOOL CHAINING</a:t>
-            </a:r>
-          </a:p>
-        </p:txBody>
-      </p:sp>
-      <p:sp>
-        <p:nvSpPr>
-          <p:cNvPr id="18" name="">
-            <a:extLst xmlns:a="http://schemas.openxmlformats.org/drawingml/2006/main">
-              <a:ext uri="{FF2B5EF4-FFF2-40B4-BE49-F238E27FC236}">
-                <a16:creationId xmlns:a16="http://schemas.microsoft.com/office/drawing/2014/main" id="{67E52B70-645C-40F7-B0DE-1D1D177875CC}"/>
-              </a:ext>
-            </a:extLst>
-          </p:cNvPr>
-          <p:cNvSpPr>
-            <a:spLocks xmlns:a="http://schemas.openxmlformats.org/drawingml/2006/main" noGrp="1"/>
-          </p:cNvSpPr>
-          <p:nvPr/>
-        </p:nvSpPr>
-        <p:spPr>
-          <a:xfrm xmlns:a="http://schemas.openxmlformats.org/drawingml/2006/main">
-            <a:off x="9639300" y="4610100"/>
-            <a:ext cx="1866900" cy="514350"/>
-          </a:xfrm>
-          <a:prstGeom xmlns:a="http://schemas.openxmlformats.org/drawingml/2006/main" prst="rect">
-            <a:avLst/>
-          </a:prstGeom>
-          <a:noFill xmlns:a="http://schemas.openxmlformats.org/drawingml/2006/main"/>
-          <a:ln xmlns:a="http://schemas.openxmlformats.org/drawingml/2006/main" w="0">
-            <a:noFill/>
-            <a:prstDash val="solid"/>
-          </a:ln>
-        </p:spPr>
-        <p:txBody>
-          <a:bodyPr xmlns:a="http://schemas.openxmlformats.org/drawingml/2006/main" wrap="square" lIns="0" tIns="0" rIns="0" bIns="0" anchor="ctr">
-            <a:normAutofit fontScale="100000"/>
-          </a:bodyPr>
-          <a:lstStyle xmlns:a="http://schemas.openxmlformats.org/drawingml/2006/main"/>
-          <a:p xmlns:a="http://schemas.openxmlformats.org/drawingml/2006/main">
-            <a:pPr algn="l">
-              <a:lnSpc>
-                <a:spcPct val="100000"/>
-              </a:lnSpc>
-              <a:buNone/>
-              <a:defRPr sz="1200" b="0">
-                <a:solidFill>
-                  <a:srgbClr val="1F40CB"/>
-                </a:solidFill>
-                <a:latin typeface="Calibri"/>
-                <a:ea typeface="Calibri"/>
-                <a:cs typeface="Calibri"/>
-              </a:defRPr>
-            </a:pPr>
-            <a:r>
-              <a:rPr sz="1200" b="0">
-                <a:solidFill>
-                  <a:srgbClr val="1F40CB"/>
-                </a:solidFill>
-                <a:latin typeface="Calibri"/>
-                <a:ea typeface="Calibri"/>
-                <a:cs typeface="Calibri"/>
-              </a:rPr>
-              <a:t>Workflow: Coded by you
-Agent: Uses results</a:t>
-            </a:r>
-          </a:p>
-        </p:txBody>
-      </p:sp>
-      <p:sp>
-        <p:nvSpPr>
-          <p:cNvPr id="19" name="ingestion-5">
-            <a:extLst xmlns:a="http://schemas.openxmlformats.org/drawingml/2006/main">
-              <a:ext uri="{FF2B5EF4-FFF2-40B4-BE49-F238E27FC236}">
-                <a16:creationId xmlns:a16="http://schemas.microsoft.com/office/drawing/2014/main" id="{43F7E1B1-E237-4A79-B0C4-38965CF32D74}"/>
-              </a:ext>
-            </a:extLst>
-          </p:cNvPr>
-          <p:cNvSpPr>
-            <a:spLocks xmlns:a="http://schemas.openxmlformats.org/drawingml/2006/main" noGrp="1"/>
-          </p:cNvSpPr>
-          <p:nvPr/>
-        </p:nvSpPr>
-        <p:spPr>
-          <a:xfrm xmlns:a="http://schemas.openxmlformats.org/drawingml/2006/main">
-            <a:off x="12268200" y="3086100"/>
-            <a:ext cx="2247900" cy="2266950"/>
-          </a:xfrm>
-          <a:prstGeom xmlns:a="http://schemas.openxmlformats.org/drawingml/2006/main" prst="roundRect">
-            <a:avLst>
-              <a:gd name="adj" fmla="val 5085"/>
-            </a:avLst>
-          </a:prstGeom>
-          <a:solidFill xmlns:a="http://schemas.openxmlformats.org/drawingml/2006/main">
-            <a:srgbClr val="FFFFFF"/>
-          </a:solidFill>
-          <a:ln xmlns:a="http://schemas.openxmlformats.org/drawingml/2006/main" w="19050">
-            <a:solidFill>
-              <a:srgbClr val="F07D00"/>
-            </a:solidFill>
-            <a:prstDash val="solid"/>
-          </a:ln>
-        </p:spPr>
-      </p:sp>
-      <p:sp>
-        <p:nvSpPr>
-          <p:cNvPr id="20" name="">
-            <a:extLst xmlns:a="http://schemas.openxmlformats.org/drawingml/2006/main">
-              <a:ext uri="{FF2B5EF4-FFF2-40B4-BE49-F238E27FC236}">
-                <a16:creationId xmlns:a16="http://schemas.microsoft.com/office/drawing/2014/main" id="{51764D39-05B0-4F08-BC2B-2221BE2F38D6}"/>
-              </a:ext>
-            </a:extLst>
-          </p:cNvPr>
-          <p:cNvSpPr>
-            <a:spLocks xmlns:a="http://schemas.openxmlformats.org/drawingml/2006/main" noGrp="1"/>
-          </p:cNvSpPr>
-          <p:nvPr/>
-        </p:nvSpPr>
-        <p:spPr>
-          <a:xfrm xmlns:a="http://schemas.openxmlformats.org/drawingml/2006/main">
-            <a:off x="12458700" y="3295650"/>
-            <a:ext cx="514350" cy="285750"/>
-          </a:xfrm>
-          <a:prstGeom xmlns:a="http://schemas.openxmlformats.org/drawingml/2006/main" prst="rect">
-            <a:avLst/>
-          </a:prstGeom>
-          <a:noFill xmlns:a="http://schemas.openxmlformats.org/drawingml/2006/main"/>
-          <a:ln xmlns:a="http://schemas.openxmlformats.org/drawingml/2006/main" w="0">
-            <a:noFill/>
-            <a:prstDash val="solid"/>
-          </a:ln>
-        </p:spPr>
-        <p:txBody>
-          <a:bodyPr xmlns:a="http://schemas.openxmlformats.org/drawingml/2006/main" wrap="square" lIns="0" tIns="0" rIns="0" bIns="0" anchor="ctr">
-            <a:noAutofit/>
-          </a:bodyPr>
-          <a:lstStyle xmlns:a="http://schemas.openxmlformats.org/drawingml/2006/main"/>
-          <a:p xmlns:a="http://schemas.openxmlformats.org/drawingml/2006/main">
-            <a:pPr algn="l">
-              <a:lnSpc>
-                <a:spcPct val="100000"/>
-              </a:lnSpc>
-              <a:buNone/>
-              <a:defRPr sz="1350" b="1">
-                <a:solidFill>
-                  <a:srgbClr val="00A2EB"/>
-                </a:solidFill>
-                <a:latin typeface="Calibri"/>
-                <a:ea typeface="Calibri"/>
-                <a:cs typeface="Calibri"/>
-              </a:defRPr>
-            </a:pPr>
-            <a:r>
-              <a:rPr sz="1800" b="1">
-                <a:solidFill>
-                  <a:srgbClr val="00A2EB"/>
-                </a:solidFill>
-                <a:latin typeface="Calibri"/>
-                <a:ea typeface="Calibri"/>
-                <a:cs typeface="Calibri"/>
-              </a:rPr>
-              <a:t>05</a:t>
-            </a:r>
-          </a:p>
-        </p:txBody>
-      </p:sp>
-      <p:sp>
-        <p:nvSpPr>
-          <p:cNvPr id="21" name="">
-            <a:extLst xmlns:a="http://schemas.openxmlformats.org/drawingml/2006/main">
-              <a:ext uri="{FF2B5EF4-FFF2-40B4-BE49-F238E27FC236}">
-                <a16:creationId xmlns:a16="http://schemas.microsoft.com/office/drawing/2014/main" id="{C0F4CBB5-9FF7-4C7B-8D8C-5AA3541DD5E4}"/>
-              </a:ext>
-            </a:extLst>
-          </p:cNvPr>
-          <p:cNvSpPr>
-            <a:spLocks xmlns:a="http://schemas.openxmlformats.org/drawingml/2006/main" noGrp="1"/>
-          </p:cNvSpPr>
-          <p:nvPr/>
-        </p:nvSpPr>
-        <p:spPr>
-          <a:xfrm xmlns:a="http://schemas.openxmlformats.org/drawingml/2006/main">
-            <a:off x="12382500" y="3752850"/>
-            <a:ext cx="2019300" cy="685800"/>
-          </a:xfrm>
-          <a:prstGeom xmlns:a="http://schemas.openxmlformats.org/drawingml/2006/main" prst="rect">
-            <a:avLst/>
-          </a:prstGeom>
-          <a:noFill xmlns:a="http://schemas.openxmlformats.org/drawingml/2006/main"/>
-          <a:ln xmlns:a="http://schemas.openxmlformats.org/drawingml/2006/main" w="0">
-            <a:noFill/>
-            <a:prstDash val="solid"/>
-          </a:ln>
-        </p:spPr>
-        <p:txBody>
-          <a:bodyPr xmlns:a="http://schemas.openxmlformats.org/drawingml/2006/main" wrap="square" lIns="0" tIns="0" rIns="0" bIns="0" anchor="ctr">
-            <a:normAutofit fontScale="100000"/>
-          </a:bodyPr>
-          <a:lstStyle xmlns:a="http://schemas.openxmlformats.org/drawingml/2006/main"/>
-          <a:p xmlns:a="http://schemas.openxmlformats.org/drawingml/2006/main">
-            <a:pPr algn="l">
-              <a:lnSpc>
-                <a:spcPct val="100000"/>
-              </a:lnSpc>
-              <a:buNone/>
-              <a:defRPr sz="1950" b="1">
-                <a:solidFill>
-                  <a:srgbClr val="051C2A"/>
-                </a:solidFill>
-                <a:latin typeface="Calibri"/>
-                <a:ea typeface="Calibri"/>
-                <a:cs typeface="Calibri"/>
-              </a:defRPr>
-            </a:pPr>
-            <a:r>
-              <a:rPr sz="1950" b="1">
-                <a:solidFill>
-                  <a:srgbClr val="051C2A"/>
-                </a:solidFill>
-                <a:latin typeface="Calibri"/>
-                <a:ea typeface="Calibri"/>
-                <a:cs typeface="Calibri"/>
-              </a:rPr>
-              <a:t>BEST FOR</a:t>
-            </a:r>
-          </a:p>
-        </p:txBody>
-      </p:sp>
-      <p:sp>
-        <p:nvSpPr>
-          <p:cNvPr id="22" name="">
-            <a:extLst xmlns:a="http://schemas.openxmlformats.org/drawingml/2006/main">
-              <a:ext uri="{FF2B5EF4-FFF2-40B4-BE49-F238E27FC236}">
-                <a16:creationId xmlns:a16="http://schemas.microsoft.com/office/drawing/2014/main" id="{8856B515-B8BF-4B9C-8D6B-EC909D2B3B4E}"/>
-              </a:ext>
-            </a:extLst>
-          </p:cNvPr>
-          <p:cNvSpPr>
-            <a:spLocks xmlns:a="http://schemas.openxmlformats.org/drawingml/2006/main" noGrp="1"/>
-          </p:cNvSpPr>
-          <p:nvPr/>
-        </p:nvSpPr>
-        <p:spPr>
-          <a:xfrm xmlns:a="http://schemas.openxmlformats.org/drawingml/2006/main">
-            <a:off x="12458700" y="4610100"/>
-            <a:ext cx="1866900" cy="514350"/>
-          </a:xfrm>
-          <a:prstGeom xmlns:a="http://schemas.openxmlformats.org/drawingml/2006/main" prst="rect">
-            <a:avLst/>
-          </a:prstGeom>
-          <a:noFill xmlns:a="http://schemas.openxmlformats.org/drawingml/2006/main"/>
-          <a:ln xmlns:a="http://schemas.openxmlformats.org/drawingml/2006/main" w="0">
-            <a:noFill/>
-            <a:prstDash val="solid"/>
-          </a:ln>
-        </p:spPr>
-        <p:txBody>
-          <a:bodyPr xmlns:a="http://schemas.openxmlformats.org/drawingml/2006/main" wrap="square" lIns="0" tIns="0" rIns="0" bIns="0" anchor="ctr">
-            <a:normAutofit fontScale="100000"/>
-          </a:bodyPr>
-          <a:lstStyle xmlns:a="http://schemas.openxmlformats.org/drawingml/2006/main"/>
-          <a:p xmlns:a="http://schemas.openxmlformats.org/drawingml/2006/main">
-            <a:pPr algn="l">
-              <a:lnSpc>
-                <a:spcPct val="100000"/>
-              </a:lnSpc>
-              <a:buNone/>
-              <a:defRPr sz="1200" b="0">
-                <a:solidFill>
-                  <a:srgbClr val="1F40CB"/>
-                </a:solidFill>
-                <a:latin typeface="Calibri"/>
-                <a:ea typeface="Calibri"/>
-                <a:cs typeface="Calibri"/>
-              </a:defRPr>
-            </a:pPr>
-            <a:r>
-              <a:rPr sz="1200" b="0">
-                <a:solidFill>
-                  <a:srgbClr val="1F40CB"/>
-                </a:solidFill>
-                <a:latin typeface="Calibri"/>
-                <a:ea typeface="Calibri"/>
-                <a:cs typeface="Calibri"/>
-              </a:rPr>
-              <a:t>Workflow: Known steps
-Agent: Open path</a:t>
-            </a:r>
-          </a:p>
-        </p:txBody>
-      </p:sp>
-      <p:cxnSp>
-        <p:nvCxnSpPr>
-          <p:cNvPr id="525" name=""/>
-          <p:cNvCxnSpPr>
-            <a:stCxn xmlns:a="http://schemas.openxmlformats.org/drawingml/2006/main" id="3" idx="3"/>
-            <a:endCxn xmlns:a="http://schemas.openxmlformats.org/drawingml/2006/main" id="7" idx="1"/>
-          </p:cNvCxnSpPr>
-          <p:nvPr/>
-        </p:nvCxnSpPr>
-        <p:spPr>
-          <a:xfrm xmlns:a="http://schemas.openxmlformats.org/drawingml/2006/main">
-            <a:off x="3238500" y="4219575"/>
-            <a:ext cx="571500" cy="0"/>
-          </a:xfrm>
-          <a:prstGeom xmlns:a="http://schemas.openxmlformats.org/drawingml/2006/main" prst="straightConnector1">
-            <a:avLst/>
-          </a:prstGeom>
-          <a:ln xmlns:a="http://schemas.openxmlformats.org/drawingml/2006/main" w="28575">
-            <a:solidFill>
-              <a:srgbClr val="9A9A9F"/>
-            </a:solidFill>
-            <a:prstDash val="solid"/>
-            <a:tailEnd type="triangle" w="med" len="med"/>
-          </a:ln>
-        </p:spPr>
-      </p:cxnSp>
-      <p:cxnSp>
-        <p:nvCxnSpPr>
-          <p:cNvPr id="526" name=""/>
-          <p:cNvCxnSpPr>
-            <a:stCxn xmlns:a="http://schemas.openxmlformats.org/drawingml/2006/main" id="7" idx="3"/>
-            <a:endCxn xmlns:a="http://schemas.openxmlformats.org/drawingml/2006/main" id="11" idx="1"/>
-          </p:cNvCxnSpPr>
-          <p:nvPr/>
-        </p:nvCxnSpPr>
-        <p:spPr>
-          <a:xfrm xmlns:a="http://schemas.openxmlformats.org/drawingml/2006/main">
-            <a:off x="6057900" y="4219575"/>
-            <a:ext cx="571500" cy="0"/>
-          </a:xfrm>
-          <a:prstGeom xmlns:a="http://schemas.openxmlformats.org/drawingml/2006/main" prst="straightConnector1">
-            <a:avLst/>
-          </a:prstGeom>
-          <a:ln xmlns:a="http://schemas.openxmlformats.org/drawingml/2006/main" w="28575">
-            <a:solidFill>
-              <a:srgbClr val="9A9A9F"/>
-            </a:solidFill>
-            <a:prstDash val="solid"/>
-            <a:tailEnd type="triangle" w="med" len="med"/>
-          </a:ln>
-        </p:spPr>
-      </p:cxnSp>
-      <p:cxnSp>
-        <p:nvCxnSpPr>
-          <p:cNvPr id="527" name=""/>
-          <p:cNvCxnSpPr>
-            <a:stCxn xmlns:a="http://schemas.openxmlformats.org/drawingml/2006/main" id="11" idx="3"/>
-            <a:endCxn xmlns:a="http://schemas.openxmlformats.org/drawingml/2006/main" id="15" idx="1"/>
-          </p:cNvCxnSpPr>
-          <p:nvPr/>
-        </p:nvCxnSpPr>
-        <p:spPr>
-          <a:xfrm xmlns:a="http://schemas.openxmlformats.org/drawingml/2006/main">
-            <a:off x="8877300" y="4219575"/>
-            <a:ext cx="571500" cy="0"/>
-          </a:xfrm>
-          <a:prstGeom xmlns:a="http://schemas.openxmlformats.org/drawingml/2006/main" prst="straightConnector1">
-            <a:avLst/>
-          </a:prstGeom>
-          <a:ln xmlns:a="http://schemas.openxmlformats.org/drawingml/2006/main" w="28575">
-            <a:solidFill>
-              <a:srgbClr val="9A9A9F"/>
-            </a:solidFill>
-            <a:prstDash val="solid"/>
-            <a:tailEnd type="triangle" w="med" len="med"/>
-          </a:ln>
-        </p:spPr>
-      </p:cxnSp>
-      <p:cxnSp>
-        <p:nvCxnSpPr>
-          <p:cNvPr id="528" name=""/>
-          <p:cNvCxnSpPr>
-            <a:stCxn xmlns:a="http://schemas.openxmlformats.org/drawingml/2006/main" id="15" idx="3"/>
-            <a:endCxn xmlns:a="http://schemas.openxmlformats.org/drawingml/2006/main" id="19" idx="1"/>
-          </p:cNvCxnSpPr>
-          <p:nvPr/>
-        </p:nvCxnSpPr>
-        <p:spPr>
-          <a:xfrm xmlns:a="http://schemas.openxmlformats.org/drawingml/2006/main">
-            <a:off x="11696700" y="4219575"/>
-            <a:ext cx="571500" cy="0"/>
-          </a:xfrm>
-          <a:prstGeom xmlns:a="http://schemas.openxmlformats.org/drawingml/2006/main" prst="straightConnector1">
-            <a:avLst/>
-          </a:prstGeom>
-          <a:ln xmlns:a="http://schemas.openxmlformats.org/drawingml/2006/main" w="28575">
-            <a:solidFill>
-              <a:srgbClr val="9A9A9F"/>
-            </a:solidFill>
-            <a:prstDash val="solid"/>
-            <a:tailEnd type="triangle" w="med" len="med"/>
-          </a:ln>
-        </p:spPr>
-      </p:cxnSp>
-      <p:sp>
-        <p:nvSpPr>
-          <p:cNvPr id="27" name="">
-            <a:extLst xmlns:a="http://schemas.openxmlformats.org/drawingml/2006/main">
-              <a:ext uri="{FF2B5EF4-FFF2-40B4-BE49-F238E27FC236}">
-                <a16:creationId xmlns:a16="http://schemas.microsoft.com/office/drawing/2014/main" id="{79128475-820B-447C-A724-7D8A31328FFE}"/>
-              </a:ext>
-            </a:extLst>
-          </p:cNvPr>
-          <p:cNvSpPr>
-            <a:spLocks xmlns:a="http://schemas.openxmlformats.org/drawingml/2006/main" noGrp="1"/>
-          </p:cNvSpPr>
-          <p:nvPr/>
-        </p:nvSpPr>
-        <p:spPr>
-          <a:xfrm xmlns:a="http://schemas.openxmlformats.org/drawingml/2006/main">
-            <a:off x="2381250" y="6210300"/>
-            <a:ext cx="10477500" cy="457200"/>
-          </a:xfrm>
-          <a:prstGeom xmlns:a="http://schemas.openxmlformats.org/drawingml/2006/main" prst="rect">
-            <a:avLst/>
-          </a:prstGeom>
-          <a:noFill xmlns:a="http://schemas.openxmlformats.org/drawingml/2006/main"/>
-          <a:ln xmlns:a="http://schemas.openxmlformats.org/drawingml/2006/main" w="0">
-            <a:noFill/>
-            <a:prstDash val="solid"/>
-          </a:ln>
-        </p:spPr>
-        <p:txBody>
-          <a:bodyPr xmlns:a="http://schemas.openxmlformats.org/drawingml/2006/main" wrap="square" lIns="0" tIns="0" rIns="0" bIns="0" anchor="ctr">
-            <a:normAutofit fontScale="100000"/>
-          </a:bodyPr>
-          <a:lstStyle xmlns:a="http://schemas.openxmlformats.org/drawingml/2006/main"/>
-          <a:p xmlns:a="http://schemas.openxmlformats.org/drawingml/2006/main">
-            <a:pPr algn="ctr">
-              <a:lnSpc>
-                <a:spcPct val="100000"/>
-              </a:lnSpc>
-              <a:buNone/>
-              <a:defRPr sz="2100" b="1">
-                <a:solidFill>
-                  <a:srgbClr val="051C2A"/>
-                </a:solidFill>
-                <a:latin typeface="Calibri"/>
-                <a:ea typeface="Calibri"/>
-                <a:cs typeface="Calibri"/>
-              </a:defRPr>
-            </a:pPr>
-            <a:r>
-              <a:rPr sz="2100" b="1">
-                <a:solidFill>
-                  <a:srgbClr val="051C2A"/>
-                </a:solidFill>
-                <a:latin typeface="Calibri"/>
-                <a:ea typeface="Calibri"/>
-                <a:cs typeface="Calibri"/>
-              </a:rPr>
-              <a:t>If you can draw every step before the run, use a workflow.</a:t>
-            </a:r>
-          </a:p>
-        </p:txBody>
-      </p:sp>
-      <p:sp>
-        <p:nvSpPr>
-          <p:cNvPr id="28" name="">
-            <a:extLst xmlns:a="http://schemas.openxmlformats.org/drawingml/2006/main">
-              <a:ext uri="{FF2B5EF4-FFF2-40B4-BE49-F238E27FC236}">
-                <a16:creationId xmlns:a16="http://schemas.microsoft.com/office/drawing/2014/main" id="{685F2AAD-81FC-436A-88F7-89F49C9F1671}"/>
-              </a:ext>
-            </a:extLst>
-          </p:cNvPr>
-          <p:cNvSpPr>
-            <a:spLocks xmlns:a="http://schemas.openxmlformats.org/drawingml/2006/main" noGrp="1"/>
-          </p:cNvSpPr>
-          <p:nvPr/>
-        </p:nvSpPr>
-        <p:spPr>
-          <a:xfrm xmlns:a="http://schemas.openxmlformats.org/drawingml/2006/main">
-            <a:off x="1885950" y="6838950"/>
-            <a:ext cx="4476750" cy="323850"/>
-          </a:xfrm>
-          <a:prstGeom xmlns:a="http://schemas.openxmlformats.org/drawingml/2006/main" prst="rect">
-            <a:avLst/>
-          </a:prstGeom>
-          <a:noFill xmlns:a="http://schemas.openxmlformats.org/drawingml/2006/main"/>
-          <a:ln xmlns:a="http://schemas.openxmlformats.org/drawingml/2006/main" w="0">
-            <a:noFill/>
-            <a:prstDash val="solid"/>
-          </a:ln>
-        </p:spPr>
-        <p:txBody>
-          <a:bodyPr xmlns:a="http://schemas.openxmlformats.org/drawingml/2006/main" wrap="square" lIns="0" tIns="0" rIns="0" bIns="0" anchor="ctr">
-            <a:normAutofit fontScale="100000"/>
-          </a:bodyPr>
-          <a:lstStyle xmlns:a="http://schemas.openxmlformats.org/drawingml/2006/main"/>
-          <a:p xmlns:a="http://schemas.openxmlformats.org/drawingml/2006/main">
-            <a:pPr algn="ctr">
-              <a:lnSpc>
-                <a:spcPct val="100000"/>
-              </a:lnSpc>
-              <a:buNone/>
-              <a:defRPr sz="1500" b="0">
-                <a:solidFill>
-                  <a:srgbClr val="64748B"/>
-                </a:solidFill>
-                <a:latin typeface="Calibri"/>
-                <a:ea typeface="Calibri"/>
-                <a:cs typeface="Calibri"/>
-              </a:defRPr>
-            </a:pPr>
-            <a:r>
-              <a:rPr sz="1500" b="0">
-                <a:solidFill>
-                  <a:srgbClr val="64748B"/>
-                </a:solidFill>
-                <a:latin typeface="Calibri"/>
-                <a:ea typeface="Calibri"/>
-                <a:cs typeface="Calibri"/>
-              </a:rPr>
-              <a:t>Agent: Chosen after each result</a:t>
-            </a:r>
-          </a:p>
-        </p:txBody>
-      </p:sp>
-      <p:sp>
-        <p:nvSpPr>
-          <p:cNvPr id="29" name="">
-            <a:extLst xmlns:a="http://schemas.openxmlformats.org/drawingml/2006/main">
-              <a:ext uri="{FF2B5EF4-FFF2-40B4-BE49-F238E27FC236}">
-                <a16:creationId xmlns:a16="http://schemas.microsoft.com/office/drawing/2014/main" id="{CDE04AD7-6CBE-4792-B549-765578FB3E1E}"/>
-              </a:ext>
-            </a:extLst>
-          </p:cNvPr>
-          <p:cNvSpPr>
-            <a:spLocks xmlns:a="http://schemas.openxmlformats.org/drawingml/2006/main" noGrp="1"/>
-          </p:cNvSpPr>
-          <p:nvPr/>
-        </p:nvSpPr>
-        <p:spPr>
-          <a:xfrm xmlns:a="http://schemas.openxmlformats.org/drawingml/2006/main">
-            <a:off x="8801100" y="6838950"/>
-            <a:ext cx="4762500" cy="323850"/>
-          </a:xfrm>
-          <a:prstGeom xmlns:a="http://schemas.openxmlformats.org/drawingml/2006/main" prst="rect">
-            <a:avLst/>
-          </a:prstGeom>
-          <a:noFill xmlns:a="http://schemas.openxmlformats.org/drawingml/2006/main"/>
-          <a:ln xmlns:a="http://schemas.openxmlformats.org/drawingml/2006/main" w="0">
-            <a:noFill/>
-            <a:prstDash val="solid"/>
-          </a:ln>
-        </p:spPr>
-        <p:txBody>
-          <a:bodyPr xmlns:a="http://schemas.openxmlformats.org/drawingml/2006/main" wrap="square" lIns="0" tIns="0" rIns="0" bIns="0" anchor="ctr">
-            <a:normAutofit fontScale="100000"/>
-          </a:bodyPr>
-          <a:lstStyle xmlns:a="http://schemas.openxmlformats.org/drawingml/2006/main"/>
-          <a:p xmlns:a="http://schemas.openxmlformats.org/drawingml/2006/main">
-            <a:pPr algn="ctr">
-              <a:lnSpc>
-                <a:spcPct val="100000"/>
-              </a:lnSpc>
-              <a:buNone/>
-              <a:defRPr sz="1500" b="0">
-                <a:solidFill>
-                  <a:srgbClr val="64748B"/>
-                </a:solidFill>
-                <a:latin typeface="Calibri"/>
-                <a:ea typeface="Calibri"/>
-                <a:cs typeface="Calibri"/>
-              </a:defRPr>
-            </a:pPr>
-            <a:r>
-              <a:rPr sz="1500" b="0">
-                <a:solidFill>
-                  <a:srgbClr val="64748B"/>
-                </a:solidFill>
-                <a:latin typeface="Calibri"/>
-                <a:ea typeface="Calibri"/>
-                <a:cs typeface="Calibri"/>
-              </a:rPr>
-              <a:t>If the next step depends on a tool result, use an agent.</a:t>
-            </a:r>
-          </a:p>
-        </p:txBody>
-      </p:sp>
-      <p:sp>
-        <p:nvSpPr>
-          <p:cNvPr id="30" name="">
-            <a:extLst xmlns:a="http://schemas.openxmlformats.org/drawingml/2006/main">
-              <a:ext uri="{FF2B5EF4-FFF2-40B4-BE49-F238E27FC236}">
-                <a16:creationId xmlns:a16="http://schemas.microsoft.com/office/drawing/2014/main" id="{28CBA7AE-993C-4F84-A696-8D1323AC4E80}"/>
-              </a:ext>
-            </a:extLst>
-          </p:cNvPr>
-          <p:cNvSpPr>
-            <a:spLocks xmlns:a="http://schemas.openxmlformats.org/drawingml/2006/main" noGrp="1"/>
-          </p:cNvSpPr>
-          <p:nvPr/>
-        </p:nvSpPr>
-        <p:spPr>
-          <a:xfrm xmlns:a="http://schemas.openxmlformats.org/drawingml/2006/main">
-            <a:off x="857250" y="7896225"/>
-            <a:ext cx="13525500" cy="28575"/>
-          </a:xfrm>
-          <a:prstGeom xmlns:a="http://schemas.openxmlformats.org/drawingml/2006/main" prst="rect">
-            <a:avLst/>
-          </a:prstGeom>
-          <a:solidFill xmlns:a="http://schemas.openxmlformats.org/drawingml/2006/main">
-            <a:srgbClr val="E4E7E9"/>
-          </a:solidFill>
-          <a:ln xmlns:a="http://schemas.openxmlformats.org/drawingml/2006/main" w="0">
-            <a:solidFill>
-              <a:srgbClr val="E4E7E9"/>
-            </a:solidFill>
-            <a:prstDash val="solid"/>
-          </a:ln>
-        </p:spPr>
-      </p:sp>
-      <p:sp>
-        <p:nvSpPr>
-          <p:cNvPr id="31" name="">
-            <a:extLst xmlns:a="http://schemas.openxmlformats.org/drawingml/2006/main">
-              <a:ext uri="{FF2B5EF4-FFF2-40B4-BE49-F238E27FC236}">
-                <a16:creationId xmlns:a16="http://schemas.microsoft.com/office/drawing/2014/main" id="{DE97BF4D-EDBC-4480-A82B-512A72221950}"/>
-              </a:ext>
-            </a:extLst>
-          </p:cNvPr>
-          <p:cNvSpPr>
-            <a:spLocks xmlns:a="http://schemas.openxmlformats.org/drawingml/2006/main" noGrp="1"/>
-          </p:cNvSpPr>
-          <p:nvPr/>
-        </p:nvSpPr>
-        <p:spPr>
-          <a:xfrm xmlns:a="http://schemas.openxmlformats.org/drawingml/2006/main">
-            <a:off x="857250" y="7896225"/>
-            <a:ext cx="8001000" cy="38100"/>
-          </a:xfrm>
-          <a:prstGeom xmlns:a="http://schemas.openxmlformats.org/drawingml/2006/main" prst="rect">
-            <a:avLst/>
-          </a:prstGeom>
-          <a:solidFill xmlns:a="http://schemas.openxmlformats.org/drawingml/2006/main">
-            <a:srgbClr val="00A2EB"/>
-          </a:solidFill>
-          <a:ln xmlns:a="http://schemas.openxmlformats.org/drawingml/2006/main" w="0">
-            <a:solidFill>
-              <a:srgbClr val="00A2EB"/>
-            </a:solidFill>
-            <a:prstDash val="solid"/>
-          </a:ln>
-        </p:spPr>
-      </p:sp>
-      <p:sp>
-        <p:nvSpPr>
-          <p:cNvPr id="32" name="">
-            <a:extLst xmlns:a="http://schemas.openxmlformats.org/drawingml/2006/main">
-              <a:ext uri="{FF2B5EF4-FFF2-40B4-BE49-F238E27FC236}">
-                <a16:creationId xmlns:a16="http://schemas.microsoft.com/office/drawing/2014/main" id="{49281B64-2F0F-4357-A085-C65451F28236}"/>
-              </a:ext>
-            </a:extLst>
-          </p:cNvPr>
-          <p:cNvSpPr>
-            <a:spLocks xmlns:a="http://schemas.openxmlformats.org/drawingml/2006/main" noGrp="1"/>
-          </p:cNvSpPr>
-          <p:nvPr/>
-        </p:nvSpPr>
-        <p:spPr>
-          <a:xfrm xmlns:a="http://schemas.openxmlformats.org/drawingml/2006/main">
-            <a:off x="971550" y="8058150"/>
-            <a:ext cx="3714750" cy="323850"/>
-          </a:xfrm>
-          <a:prstGeom xmlns:a="http://schemas.openxmlformats.org/drawingml/2006/main" prst="rect">
-            <a:avLst/>
-          </a:prstGeom>
-          <a:noFill xmlns:a="http://schemas.openxmlformats.org/drawingml/2006/main"/>
-          <a:ln xmlns:a="http://schemas.openxmlformats.org/drawingml/2006/main" w="0">
-            <a:noFill/>
-            <a:prstDash val="solid"/>
-          </a:ln>
-        </p:spPr>
-        <p:txBody>
-          <a:bodyPr xmlns:a="http://schemas.openxmlformats.org/drawingml/2006/main" wrap="square" lIns="0" tIns="0" rIns="0" bIns="0" anchor="ctr">
-            <a:normAutofit fontScale="100000"/>
-          </a:bodyPr>
-          <a:lstStyle xmlns:a="http://schemas.openxmlformats.org/drawingml/2006/main"/>
-          <a:p xmlns:a="http://schemas.openxmlformats.org/drawingml/2006/main">
-            <a:pPr algn="l">
-              <a:lnSpc>
-                <a:spcPct val="100000"/>
-              </a:lnSpc>
-              <a:buNone/>
-              <a:defRPr sz="1200" b="0">
-                <a:solidFill>
-                  <a:srgbClr val="9A9A9F"/>
-                </a:solidFill>
-                <a:latin typeface="Calibri"/>
-                <a:ea typeface="Calibri"/>
-                <a:cs typeface="Calibri"/>
-              </a:defRPr>
-            </a:pPr>
-            <a:r>
-              <a:rPr sz="1200" b="0">
-                <a:solidFill>
-                  <a:srgbClr val="9A9A9F"/>
-                </a:solidFill>
-                <a:latin typeface="Calibri"/>
-                <a:ea typeface="Calibri"/>
-                <a:cs typeface="Calibri"/>
-              </a:rPr>
-              <a:t>First Finance - Arnaud Demes</a:t>
-            </a:r>
-          </a:p>
-        </p:txBody>
-      </p:sp>
-      <p:sp>
-        <p:nvSpPr>
-          <p:cNvPr id="33" name="">
-            <a:extLst xmlns:a="http://schemas.openxmlformats.org/drawingml/2006/main">
-              <a:ext uri="{FF2B5EF4-FFF2-40B4-BE49-F238E27FC236}">
-                <a16:creationId xmlns:a16="http://schemas.microsoft.com/office/drawing/2014/main" id="{EAA325A4-7EC6-42CE-A13A-4B38A32DE7F2}"/>
-              </a:ext>
-            </a:extLst>
-          </p:cNvPr>
-          <p:cNvSpPr>
-            <a:spLocks xmlns:a="http://schemas.openxmlformats.org/drawingml/2006/main" noGrp="1"/>
-          </p:cNvSpPr>
-          <p:nvPr/>
-        </p:nvSpPr>
-        <p:spPr>
-          <a:xfrm xmlns:a="http://schemas.openxmlformats.org/drawingml/2006/main">
-            <a:off x="12192000" y="8058150"/>
-            <a:ext cx="1809750" cy="323850"/>
-          </a:xfrm>
-          <a:prstGeom xmlns:a="http://schemas.openxmlformats.org/drawingml/2006/main" prst="rect">
-            <a:avLst/>
-          </a:prstGeom>
-          <a:noFill xmlns:a="http://schemas.openxmlformats.org/drawingml/2006/main"/>
-          <a:ln xmlns:a="http://schemas.openxmlformats.org/drawingml/2006/main" w="0">
-            <a:noFill/>
-            <a:prstDash val="solid"/>
-          </a:ln>
-        </p:spPr>
-        <p:txBody>
-          <a:bodyPr xmlns:a="http://schemas.openxmlformats.org/drawingml/2006/main" wrap="square" lIns="0" tIns="0" rIns="0" bIns="0" anchor="ctr">
-            <a:normAutofit fontScale="100000"/>
-          </a:bodyPr>
-          <a:lstStyle xmlns:a="http://schemas.openxmlformats.org/drawingml/2006/main"/>
-          <a:p xmlns:a="http://schemas.openxmlformats.org/drawingml/2006/main">
-            <a:pPr algn="r">
-              <a:lnSpc>
-                <a:spcPct val="100000"/>
-              </a:lnSpc>
-              <a:buNone/>
-              <a:defRPr sz="1200" b="1">
-                <a:solidFill>
-                  <a:srgbClr val="9A9A9F"/>
-                </a:solidFill>
-                <a:latin typeface="Calibri"/>
-                <a:ea typeface="Calibri"/>
-                <a:cs typeface="Calibri"/>
-              </a:defRPr>
-            </a:pPr>
-            <a:r>
-              <a:rPr sz="1200" b="1">
-                <a:solidFill>
-                  <a:srgbClr val="9A9A9F"/>
-                </a:solidFill>
-                <a:latin typeface="Calibri"/>
-                <a:ea typeface="Calibri"/>
-                <a:cs typeface="Calibri"/>
-              </a:rPr>
-              <a:t>COMPARE</a:t>
-            </a:r>
-          </a:p>
-        </p:txBody>
-      </p:sp>
-      <p:sp>
-        <p:nvSpPr>
-          <p:cNvPr id="34" name="">
-            <a:extLst xmlns:a="http://schemas.openxmlformats.org/drawingml/2006/main">
-              <a:ext uri="{FF2B5EF4-FFF2-40B4-BE49-F238E27FC236}">
-                <a16:creationId xmlns:a16="http://schemas.microsoft.com/office/drawing/2014/main" id="{5F7FB65A-4A0D-4595-92F4-FD9B71638842}"/>
-              </a:ext>
-            </a:extLst>
-          </p:cNvPr>
-          <p:cNvSpPr>
-            <a:spLocks xmlns:a="http://schemas.openxmlformats.org/drawingml/2006/main" noGrp="1"/>
-          </p:cNvSpPr>
-          <p:nvPr/>
-        </p:nvSpPr>
-        <p:spPr>
-          <a:xfrm xmlns:a="http://schemas.openxmlformats.org/drawingml/2006/main">
-            <a:off x="14135100" y="8058150"/>
-            <a:ext cx="266700" cy="323850"/>
-          </a:xfrm>
-          <a:prstGeom xmlns:a="http://schemas.openxmlformats.org/drawingml/2006/main" prst="rect">
-            <a:avLst/>
-          </a:prstGeom>
-          <a:noFill xmlns:a="http://schemas.openxmlformats.org/drawingml/2006/main"/>
-          <a:ln xmlns:a="http://schemas.openxmlformats.org/drawingml/2006/main" w="0">
-            <a:noFill/>
-            <a:prstDash val="solid"/>
-          </a:ln>
-        </p:spPr>
-        <p:txBody>
-          <a:bodyPr xmlns:a="http://schemas.openxmlformats.org/drawingml/2006/main" wrap="square" lIns="0" tIns="0" rIns="0" bIns="0" anchor="ctr">
-            <a:normAutofit fontScale="100000"/>
-          </a:bodyPr>
-          <a:lstStyle xmlns:a="http://schemas.openxmlformats.org/drawingml/2006/main"/>
-          <a:p xmlns:a="http://schemas.openxmlformats.org/drawingml/2006/main">
-            <a:pPr algn="r">
-              <a:lnSpc>
-                <a:spcPct val="100000"/>
-              </a:lnSpc>
-              <a:buNone/>
-              <a:defRPr sz="1200" b="1">
-                <a:solidFill>
-                  <a:srgbClr val="9A9A9F"/>
-                </a:solidFill>
-                <a:latin typeface="Calibri"/>
-                <a:ea typeface="Calibri"/>
-                <a:cs typeface="Calibri"/>
-              </a:defRPr>
-            </a:pPr>
-            <a:r>
-              <a:rPr sz="1200" b="1">
-                <a:solidFill>
-                  <a:srgbClr val="9A9A9F"/>
-                </a:solidFill>
-                <a:latin typeface="Calibri"/>
-                <a:ea typeface="Calibri"/>
-                <a:cs typeface="Calibri"/>
-              </a:rPr>
-              <a:t>03</a:t>
-            </a:r>
-          </a:p>
-        </p:txBody>
-      </p:sp>
+      <p:pic>
+        <p:nvPicPr>
+          <p:cNvPr id="47" name=""/>
+          <p:cNvPicPr>
+            <a:picLocks xmlns:a="http://schemas.openxmlformats.org/drawingml/2006/main" noChangeAspect="1"/>
+          </p:cNvPicPr>
+          <p:nvPr/>
+        </p:nvPicPr>
+        <p:blipFill>
+          <a:blip xmlns:r="http://schemas.openxmlformats.org/officeDocument/2006/relationships" xmlns:a="http://schemas.openxmlformats.org/drawingml/2006/main" r:embed="R0db9d7833aea4e47"/>
+          <a:srcRect xmlns:a="http://schemas.openxmlformats.org/drawingml/2006/main" l="0" t="16457" r="0" b="16457"/>
+          <a:stretch xmlns:a="http://schemas.openxmlformats.org/drawingml/2006/main">
+            <a:fillRect l="0" t="0" r="0" b="0"/>
+          </a:stretch>
+        </p:blipFill>
+        <p:spPr>
+          <a:xfrm xmlns:a="http://schemas.openxmlformats.org/drawingml/2006/main">
+            <a:off x="1143000" y="2266950"/>
+            <a:ext cx="12954000" cy="3619500"/>
+          </a:xfrm>
+          <a:prstGeom xmlns:a="http://schemas.openxmlformats.org/drawingml/2006/main" prst="rect">
+            <a:avLst/>
+          </a:prstGeom>
+        </p:spPr>
+      </p:pic>
     </p:spTree>
     <p:extLst>
       <p:ext uri="{BB962C8B-B14F-4D97-AF65-F5344CB8AC3E}">
@@ -7461,7 +6294,7 @@
                 <a:ea typeface="Calibri"/>
                 <a:cs typeface="Calibri"/>
               </a:rPr>
-              <a:t>The model chooses a tool. Python runs it.</a:t>
+              <a:t>The model proposes. Python validates and runs.</a:t>
             </a:r>
           </a:p>
         </p:txBody>
@@ -8836,7 +7669,7 @@
                 <a:ea typeface="Calibri"/>
                 <a:cs typeface="Calibri"/>
               </a:rPr>
-              <a:t>The model requests an action. Python validates and runs it.</a:t>
+              <a:t>Schemas, allowlists and provenance stay deterministic.</a:t>
             </a:r>
           </a:p>
         </p:txBody>
@@ -9179,7 +8012,7 @@
                 <a:ea typeface="Calibri"/>
                 <a:cs typeface="Calibri"/>
               </a:rPr>
-              <a:t>ONE-PASS WORKFLOW</a:t>
+              <a:t>DIRECT LOOKUP</a:t>
             </a:r>
           </a:p>
         </p:txBody>
@@ -9241,7 +8074,7 @@
                 <a:ea typeface="Calibri"/>
                 <a:cs typeface="Calibri"/>
               </a:rPr>
-              <a:t>A workflow works when every step is known</a:t>
+              <a:t>One known action: use a one-step workflow</a:t>
             </a:r>
           </a:p>
         </p:txBody>
@@ -10353,7 +9186,7 @@
       </p:sp>
       <p:cxnSp>
         <p:nvCxnSpPr>
-          <p:cNvPr id="525" name=""/>
+          <p:cNvPr id="577" name=""/>
           <p:cNvCxnSpPr>
             <a:stCxn xmlns:a="http://schemas.openxmlformats.org/drawingml/2006/main" id="3" idx="3"/>
             <a:endCxn xmlns:a="http://schemas.openxmlformats.org/drawingml/2006/main" id="7" idx="1"/>
@@ -10379,7 +9212,7 @@
       </p:cxnSp>
       <p:cxnSp>
         <p:nvCxnSpPr>
-          <p:cNvPr id="526" name=""/>
+          <p:cNvPr id="578" name=""/>
           <p:cNvCxnSpPr>
             <a:stCxn xmlns:a="http://schemas.openxmlformats.org/drawingml/2006/main" id="7" idx="3"/>
             <a:endCxn xmlns:a="http://schemas.openxmlformats.org/drawingml/2006/main" id="11" idx="1"/>
@@ -10405,7 +9238,7 @@
       </p:cxnSp>
       <p:cxnSp>
         <p:nvCxnSpPr>
-          <p:cNvPr id="527" name=""/>
+          <p:cNvPr id="579" name=""/>
           <p:cNvCxnSpPr>
             <a:stCxn xmlns:a="http://schemas.openxmlformats.org/drawingml/2006/main" id="11" idx="3"/>
             <a:endCxn xmlns:a="http://schemas.openxmlformats.org/drawingml/2006/main" id="15" idx="1"/>
@@ -10431,7 +9264,7 @@
       </p:cxnSp>
       <p:cxnSp>
         <p:nvCxnSpPr>
-          <p:cNvPr id="528" name=""/>
+          <p:cNvPr id="580" name=""/>
           <p:cNvCxnSpPr>
             <a:stCxn xmlns:a="http://schemas.openxmlformats.org/drawingml/2006/main" id="15" idx="3"/>
             <a:endCxn xmlns:a="http://schemas.openxmlformats.org/drawingml/2006/main" id="19" idx="1"/>
@@ -10512,7 +9345,7 @@
                 <a:ea typeface="Calibri"/>
                 <a:cs typeface="Calibri"/>
               </a:rPr>
-              <a:t>The workflow needs only one tool call.</a:t>
+              <a:t>No model-directed loop is needed.</a:t>
             </a:r>
           </a:p>
         </p:txBody>
@@ -10979,7 +9812,7 @@
                 <a:ea typeface="Calibri"/>
                 <a:cs typeface="Calibri"/>
               </a:rPr>
-              <a:t>DEPENDENCY FAILURE</a:t>
+              <a:t>TWO-STEP WORKFLOW</a:t>
             </a:r>
           </a:p>
         </p:txBody>
@@ -11041,7 +9874,7 @@
                 <a:ea typeface="Calibri"/>
                 <a:cs typeface="Calibri"/>
               </a:rPr>
-              <a:t>The workflow cannot know the EUR amount yet</a:t>
+              <a:t>Price to FX succeeds because code owns the route</a:t>
             </a:r>
           </a:p>
         </p:txBody>
@@ -11421,7 +10254,7 @@
                 <a:ea typeface="Calibri"/>
                 <a:cs typeface="Calibri"/>
               </a:rPr>
-              <a:t>Plan both</a:t>
+              <a:t>Code route</a:t>
             </a:r>
           </a:p>
         </p:txBody>
@@ -11642,7 +10475,7 @@
                 <a:ea typeface="Calibri"/>
                 <a:cs typeface="Calibri"/>
               </a:rPr>
-              <a:t>Price lookup</a:t>
+              <a:t>get_market_price</a:t>
             </a:r>
           </a:p>
         </p:txBody>
@@ -11704,7 +10537,7 @@
                 <a:ea typeface="Calibri"/>
                 <a:cs typeface="Calibri"/>
               </a:rPr>
-              <a:t>result needed first</a:t>
+              <a:t>214.57 USD</a:t>
             </a:r>
           </a:p>
         </p:txBody>
@@ -11863,7 +10696,7 @@
                 <a:ea typeface="Calibri"/>
                 <a:cs typeface="Calibri"/>
               </a:rPr>
-              <a:t>Conversion</a:t>
+              <a:t>Pass observed value</a:t>
             </a:r>
           </a:p>
         </p:txBody>
@@ -11925,7 +10758,7 @@
                 <a:ea typeface="Calibri"/>
                 <a:cs typeface="Calibri"/>
               </a:rPr>
-              <a:t>amount unavailable</a:t>
+              <a:t>214.57 USD</a:t>
             </a:r>
           </a:p>
         </p:txBody>
@@ -12084,7 +10917,7 @@
                 <a:ea typeface="Calibri"/>
                 <a:cs typeface="Calibri"/>
               </a:rPr>
-              <a:t>STOP</a:t>
+              <a:t>convert_currency</a:t>
             </a:r>
           </a:p>
         </p:txBody>
@@ -12146,14 +10979,14 @@
                 <a:ea typeface="Calibri"/>
                 <a:cs typeface="Calibri"/>
               </a:rPr>
-              <a:t>unsupported_dependency</a:t>
+              <a:t>183.76 EUR</a:t>
             </a:r>
           </a:p>
         </p:txBody>
       </p:sp>
       <p:cxnSp>
         <p:nvCxnSpPr>
-          <p:cNvPr id="525" name=""/>
+          <p:cNvPr id="577" name=""/>
           <p:cNvCxnSpPr>
             <a:stCxn xmlns:a="http://schemas.openxmlformats.org/drawingml/2006/main" id="3" idx="3"/>
             <a:endCxn xmlns:a="http://schemas.openxmlformats.org/drawingml/2006/main" id="7" idx="1"/>
@@ -12179,7 +11012,7 @@
       </p:cxnSp>
       <p:cxnSp>
         <p:nvCxnSpPr>
-          <p:cNvPr id="526" name=""/>
+          <p:cNvPr id="578" name=""/>
           <p:cNvCxnSpPr>
             <a:stCxn xmlns:a="http://schemas.openxmlformats.org/drawingml/2006/main" id="7" idx="3"/>
             <a:endCxn xmlns:a="http://schemas.openxmlformats.org/drawingml/2006/main" id="11" idx="1"/>
@@ -12205,7 +11038,7 @@
       </p:cxnSp>
       <p:cxnSp>
         <p:nvCxnSpPr>
-          <p:cNvPr id="527" name=""/>
+          <p:cNvPr id="579" name=""/>
           <p:cNvCxnSpPr>
             <a:stCxn xmlns:a="http://schemas.openxmlformats.org/drawingml/2006/main" id="11" idx="3"/>
             <a:endCxn xmlns:a="http://schemas.openxmlformats.org/drawingml/2006/main" id="15" idx="1"/>
@@ -12231,7 +11064,7 @@
       </p:cxnSp>
       <p:cxnSp>
         <p:nvCxnSpPr>
-          <p:cNvPr id="528" name=""/>
+          <p:cNvPr id="580" name=""/>
           <p:cNvCxnSpPr>
             <a:stCxn xmlns:a="http://schemas.openxmlformats.org/drawingml/2006/main" id="15" idx="3"/>
             <a:endCxn xmlns:a="http://schemas.openxmlformats.org/drawingml/2006/main" id="19" idx="1"/>
@@ -12312,7 +11145,7 @@
                 <a:ea typeface="Calibri"/>
                 <a:cs typeface="Calibri"/>
               </a:rPr>
-              <a:t>Stop. Do not invent a missing value.</a:t>
+              <a:t>A dependency is data flow, not agent control.</a:t>
             </a:r>
           </a:p>
         </p:txBody>
@@ -12374,7 +11207,7 @@
                 <a:ea typeface="Calibri"/>
                 <a:cs typeface="Calibri"/>
               </a:rPr>
-              <a:t>missing input shown</a:t>
+              <a:t>route known before run</a:t>
             </a:r>
           </a:p>
         </p:txBody>
@@ -12436,7 +11269,7 @@
                 <a:ea typeface="Calibri"/>
                 <a:cs typeface="Calibri"/>
               </a:rPr>
-              <a:t>safe stop</a:t>
+              <a:t>workflow status: completed</a:t>
             </a:r>
           </a:p>
         </p:txBody>
@@ -12626,7 +11459,7 @@
                 <a:ea typeface="Calibri"/>
                 <a:cs typeface="Calibri"/>
               </a:rPr>
-              <a:t>FAILURE</a:t>
+              <a:t>WORKFLOW</a:t>
             </a:r>
           </a:p>
         </p:txBody>
@@ -12779,7 +11612,7 @@
                 <a:ea typeface="Calibri"/>
                 <a:cs typeface="Calibri"/>
               </a:rPr>
-              <a:t>BOUNDED AGENT</a:t>
+              <a:t>AGENT LOOP</a:t>
             </a:r>
           </a:p>
         </p:txBody>
@@ -12841,39 +11674,223 @@
                 <a:ea typeface="Calibri"/>
                 <a:cs typeface="Calibri"/>
               </a:rPr>
-              <a:t>The agent uses each result to choose the next step</a:t>
-            </a:r>
-          </a:p>
-        </p:txBody>
-      </p:sp>
-      <p:sp>
-        <p:nvSpPr>
-          <p:cNvPr id="3" name="ingestion-1">
-            <a:extLst xmlns:a="http://schemas.openxmlformats.org/drawingml/2006/main">
-              <a:ext uri="{FF2B5EF4-FFF2-40B4-BE49-F238E27FC236}">
-                <a16:creationId xmlns:a16="http://schemas.microsoft.com/office/drawing/2014/main" id="{EF5CEA91-0836-4E99-95C1-43A271A11FFF}"/>
-              </a:ext>
-            </a:extLst>
-          </p:cNvPr>
-          <p:cNvSpPr>
-            <a:spLocks xmlns:a="http://schemas.openxmlformats.org/drawingml/2006/main" noGrp="1"/>
-          </p:cNvSpPr>
-          <p:nvPr/>
-        </p:nvSpPr>
-        <p:spPr>
-          <a:xfrm xmlns:a="http://schemas.openxmlformats.org/drawingml/2006/main">
-            <a:off x="990600" y="3086100"/>
-            <a:ext cx="2247900" cy="2266950"/>
-          </a:xfrm>
-          <a:prstGeom xmlns:a="http://schemas.openxmlformats.org/drawingml/2006/main" prst="roundRect">
-            <a:avLst>
-              <a:gd name="adj" fmla="val 5085"/>
-            </a:avLst>
+              <a:t>An agent lets the model choose after each result</a:t>
+            </a:r>
+          </a:p>
+        </p:txBody>
+      </p:sp>
+      <p:sp>
+        <p:nvSpPr>
+          <p:cNvPr id="27" name="">
+            <a:extLst xmlns:a="http://schemas.openxmlformats.org/drawingml/2006/main">
+              <a:ext uri="{FF2B5EF4-FFF2-40B4-BE49-F238E27FC236}">
+                <a16:creationId xmlns:a16="http://schemas.microsoft.com/office/drawing/2014/main" id="{79128475-820B-447C-A724-7D8A31328FFE}"/>
+              </a:ext>
+            </a:extLst>
+          </p:cNvPr>
+          <p:cNvSpPr>
+            <a:spLocks xmlns:a="http://schemas.openxmlformats.org/drawingml/2006/main" noGrp="1"/>
+          </p:cNvSpPr>
+          <p:nvPr/>
+        </p:nvSpPr>
+        <p:spPr>
+          <a:xfrm xmlns:a="http://schemas.openxmlformats.org/drawingml/2006/main">
+            <a:off x="2381250" y="6210300"/>
+            <a:ext cx="10477500" cy="457200"/>
+          </a:xfrm>
+          <a:prstGeom xmlns:a="http://schemas.openxmlformats.org/drawingml/2006/main" prst="rect">
+            <a:avLst/>
+          </a:prstGeom>
+          <a:noFill xmlns:a="http://schemas.openxmlformats.org/drawingml/2006/main"/>
+          <a:ln xmlns:a="http://schemas.openxmlformats.org/drawingml/2006/main" w="0">
+            <a:noFill/>
+            <a:prstDash val="solid"/>
+          </a:ln>
+        </p:spPr>
+        <p:txBody>
+          <a:bodyPr xmlns:a="http://schemas.openxmlformats.org/drawingml/2006/main" wrap="square" lIns="0" tIns="0" rIns="0" bIns="0" anchor="ctr">
+            <a:normAutofit fontScale="100000"/>
+          </a:bodyPr>
+          <a:lstStyle xmlns:a="http://schemas.openxmlformats.org/drawingml/2006/main"/>
+          <a:p xmlns:a="http://schemas.openxmlformats.org/drawingml/2006/main">
+            <a:pPr algn="ctr">
+              <a:lnSpc>
+                <a:spcPct val="100000"/>
+              </a:lnSpc>
+              <a:buNone/>
+              <a:defRPr sz="2100" b="1">
+                <a:solidFill>
+                  <a:srgbClr val="051C2A"/>
+                </a:solidFill>
+                <a:latin typeface="Calibri"/>
+                <a:ea typeface="Calibri"/>
+                <a:cs typeface="Calibri"/>
+              </a:defRPr>
+            </a:pPr>
+            <a:r>
+              <a:rPr sz="2100" b="1">
+                <a:solidFill>
+                  <a:srgbClr val="051C2A"/>
+                </a:solidFill>
+                <a:latin typeface="Calibri"/>
+                <a:ea typeface="Calibri"/>
+                <a:cs typeface="Calibri"/>
+              </a:rPr>
+              <a:t>Environment feedback changes the model's next action.</a:t>
+            </a:r>
+          </a:p>
+        </p:txBody>
+      </p:sp>
+      <p:sp>
+        <p:nvSpPr>
+          <p:cNvPr id="28" name="">
+            <a:extLst xmlns:a="http://schemas.openxmlformats.org/drawingml/2006/main">
+              <a:ext uri="{FF2B5EF4-FFF2-40B4-BE49-F238E27FC236}">
+                <a16:creationId xmlns:a16="http://schemas.microsoft.com/office/drawing/2014/main" id="{685F2AAD-81FC-436A-88F7-89F49C9F1671}"/>
+              </a:ext>
+            </a:extLst>
+          </p:cNvPr>
+          <p:cNvSpPr>
+            <a:spLocks xmlns:a="http://schemas.openxmlformats.org/drawingml/2006/main" noGrp="1"/>
+          </p:cNvSpPr>
+          <p:nvPr/>
+        </p:nvSpPr>
+        <p:spPr>
+          <a:xfrm xmlns:a="http://schemas.openxmlformats.org/drawingml/2006/main">
+            <a:off x="1885950" y="6838950"/>
+            <a:ext cx="4476750" cy="323850"/>
+          </a:xfrm>
+          <a:prstGeom xmlns:a="http://schemas.openxmlformats.org/drawingml/2006/main" prst="rect">
+            <a:avLst/>
+          </a:prstGeom>
+          <a:noFill xmlns:a="http://schemas.openxmlformats.org/drawingml/2006/main"/>
+          <a:ln xmlns:a="http://schemas.openxmlformats.org/drawingml/2006/main" w="0">
+            <a:noFill/>
+            <a:prstDash val="solid"/>
+          </a:ln>
+        </p:spPr>
+        <p:txBody>
+          <a:bodyPr xmlns:a="http://schemas.openxmlformats.org/drawingml/2006/main" wrap="square" lIns="0" tIns="0" rIns="0" bIns="0" anchor="ctr">
+            <a:normAutofit fontScale="100000"/>
+          </a:bodyPr>
+          <a:lstStyle xmlns:a="http://schemas.openxmlformats.org/drawingml/2006/main"/>
+          <a:p xmlns:a="http://schemas.openxmlformats.org/drawingml/2006/main">
+            <a:pPr algn="ctr">
+              <a:lnSpc>
+                <a:spcPct val="100000"/>
+              </a:lnSpc>
+              <a:buNone/>
+              <a:defRPr sz="1500" b="0">
+                <a:solidFill>
+                  <a:srgbClr val="64748B"/>
+                </a:solidFill>
+                <a:latin typeface="Calibri"/>
+                <a:ea typeface="Calibri"/>
+                <a:cs typeface="Calibri"/>
+              </a:defRPr>
+            </a:pPr>
+            <a:r>
+              <a:rPr sz="1500" b="0">
+                <a:solidFill>
+                  <a:srgbClr val="64748B"/>
+                </a:solidFill>
+                <a:latin typeface="Calibri"/>
+                <a:ea typeface="Calibri"/>
+                <a:cs typeface="Calibri"/>
+              </a:rPr>
+              <a:t>Anthropic · autonomous agent</a:t>
+            </a:r>
+          </a:p>
+        </p:txBody>
+      </p:sp>
+      <p:sp>
+        <p:nvSpPr>
+          <p:cNvPr id="29" name="">
+            <a:extLst xmlns:a="http://schemas.openxmlformats.org/drawingml/2006/main">
+              <a:ext uri="{FF2B5EF4-FFF2-40B4-BE49-F238E27FC236}">
+                <a16:creationId xmlns:a16="http://schemas.microsoft.com/office/drawing/2014/main" id="{CDE04AD7-6CBE-4792-B549-765578FB3E1E}"/>
+              </a:ext>
+            </a:extLst>
+          </p:cNvPr>
+          <p:cNvSpPr>
+            <a:spLocks xmlns:a="http://schemas.openxmlformats.org/drawingml/2006/main" noGrp="1"/>
+          </p:cNvSpPr>
+          <p:nvPr/>
+        </p:nvSpPr>
+        <p:spPr>
+          <a:xfrm xmlns:a="http://schemas.openxmlformats.org/drawingml/2006/main">
+            <a:off x="8801100" y="6838950"/>
+            <a:ext cx="4762500" cy="323850"/>
+          </a:xfrm>
+          <a:prstGeom xmlns:a="http://schemas.openxmlformats.org/drawingml/2006/main" prst="rect">
+            <a:avLst/>
+          </a:prstGeom>
+          <a:noFill xmlns:a="http://schemas.openxmlformats.org/drawingml/2006/main"/>
+          <a:ln xmlns:a="http://schemas.openxmlformats.org/drawingml/2006/main" w="0">
+            <a:noFill/>
+            <a:prstDash val="solid"/>
+          </a:ln>
+        </p:spPr>
+        <p:txBody>
+          <a:bodyPr xmlns:a="http://schemas.openxmlformats.org/drawingml/2006/main" wrap="square" lIns="0" tIns="0" rIns="0" bIns="0" anchor="ctr">
+            <a:normAutofit fontScale="100000"/>
+          </a:bodyPr>
+          <a:lstStyle xmlns:a="http://schemas.openxmlformats.org/drawingml/2006/main"/>
+          <a:p xmlns:a="http://schemas.openxmlformats.org/drawingml/2006/main">
+            <a:pPr algn="ctr">
+              <a:lnSpc>
+                <a:spcPct val="100000"/>
+              </a:lnSpc>
+              <a:buNone/>
+              <a:defRPr sz="1500" b="0">
+                <a:solidFill>
+                  <a:srgbClr val="64748B"/>
+                </a:solidFill>
+                <a:latin typeface="Calibri"/>
+                <a:ea typeface="Calibri"/>
+                <a:cs typeface="Calibri"/>
+              </a:defRPr>
+            </a:pPr>
+            <a:r>
+              <a:rPr sz="1500" b="0">
+                <a:solidFill>
+                  <a:srgbClr val="64748B"/>
+                </a:solidFill>
+                <a:latin typeface="Calibri"/>
+                <a:ea typeface="Calibri"/>
+                <a:cs typeface="Calibri"/>
+              </a:rPr>
+              <a:t>MAX_STEPS = 4</a:t>
+            </a:r>
+          </a:p>
+        </p:txBody>
+      </p:sp>
+      <p:sp>
+        <p:nvSpPr>
+          <p:cNvPr id="30" name="">
+            <a:extLst xmlns:a="http://schemas.openxmlformats.org/drawingml/2006/main">
+              <a:ext uri="{FF2B5EF4-FFF2-40B4-BE49-F238E27FC236}">
+                <a16:creationId xmlns:a16="http://schemas.microsoft.com/office/drawing/2014/main" id="{28CBA7AE-993C-4F84-A696-8D1323AC4E80}"/>
+              </a:ext>
+            </a:extLst>
+          </p:cNvPr>
+          <p:cNvSpPr>
+            <a:spLocks xmlns:a="http://schemas.openxmlformats.org/drawingml/2006/main" noGrp="1"/>
+          </p:cNvSpPr>
+          <p:nvPr/>
+        </p:nvSpPr>
+        <p:spPr>
+          <a:xfrm xmlns:a="http://schemas.openxmlformats.org/drawingml/2006/main">
+            <a:off x="857250" y="7896225"/>
+            <a:ext cx="13525500" cy="28575"/>
+          </a:xfrm>
+          <a:prstGeom xmlns:a="http://schemas.openxmlformats.org/drawingml/2006/main" prst="rect">
+            <a:avLst/>
           </a:prstGeom>
           <a:solidFill xmlns:a="http://schemas.openxmlformats.org/drawingml/2006/main">
-            <a:srgbClr val="FFFFFF"/>
+            <a:srgbClr val="E4E7E9"/>
           </a:solidFill>
-          <a:ln xmlns:a="http://schemas.openxmlformats.org/drawingml/2006/main" w="9525">
+          <a:ln xmlns:a="http://schemas.openxmlformats.org/drawingml/2006/main" w="0">
             <a:solidFill>
               <a:srgbClr val="E4E7E9"/>
             </a:solidFill>
@@ -12883,84 +11900,55 @@
       </p:sp>
       <p:sp>
         <p:nvSpPr>
-          <p:cNvPr id="4" name="">
-            <a:extLst xmlns:a="http://schemas.openxmlformats.org/drawingml/2006/main">
-              <a:ext uri="{FF2B5EF4-FFF2-40B4-BE49-F238E27FC236}">
-                <a16:creationId xmlns:a16="http://schemas.microsoft.com/office/drawing/2014/main" id="{4A163ADC-FDBA-49AB-AB53-62FA29104479}"/>
-              </a:ext>
-            </a:extLst>
-          </p:cNvPr>
-          <p:cNvSpPr>
-            <a:spLocks xmlns:a="http://schemas.openxmlformats.org/drawingml/2006/main" noGrp="1"/>
-          </p:cNvSpPr>
-          <p:nvPr/>
-        </p:nvSpPr>
-        <p:spPr>
-          <a:xfrm xmlns:a="http://schemas.openxmlformats.org/drawingml/2006/main">
-            <a:off x="1181100" y="3295650"/>
-            <a:ext cx="514350" cy="285750"/>
-          </a:xfrm>
-          <a:prstGeom xmlns:a="http://schemas.openxmlformats.org/drawingml/2006/main" prst="rect">
-            <a:avLst/>
-          </a:prstGeom>
-          <a:noFill xmlns:a="http://schemas.openxmlformats.org/drawingml/2006/main"/>
-          <a:ln xmlns:a="http://schemas.openxmlformats.org/drawingml/2006/main" w="0">
-            <a:noFill/>
-            <a:prstDash val="solid"/>
-          </a:ln>
-        </p:spPr>
-        <p:txBody>
-          <a:bodyPr xmlns:a="http://schemas.openxmlformats.org/drawingml/2006/main" wrap="square" lIns="0" tIns="0" rIns="0" bIns="0" anchor="ctr">
-            <a:noAutofit/>
-          </a:bodyPr>
-          <a:lstStyle xmlns:a="http://schemas.openxmlformats.org/drawingml/2006/main"/>
-          <a:p xmlns:a="http://schemas.openxmlformats.org/drawingml/2006/main">
-            <a:pPr algn="l">
-              <a:lnSpc>
-                <a:spcPct val="100000"/>
-              </a:lnSpc>
-              <a:buNone/>
-              <a:defRPr sz="1350" b="1">
-                <a:solidFill>
-                  <a:srgbClr val="00A2EB"/>
-                </a:solidFill>
-                <a:latin typeface="Calibri"/>
-                <a:ea typeface="Calibri"/>
-                <a:cs typeface="Calibri"/>
-              </a:defRPr>
-            </a:pPr>
-            <a:r>
-              <a:rPr sz="1800" b="1">
-                <a:solidFill>
-                  <a:srgbClr val="00A2EB"/>
-                </a:solidFill>
-                <a:latin typeface="Calibri"/>
-                <a:ea typeface="Calibri"/>
-                <a:cs typeface="Calibri"/>
-              </a:rPr>
-              <a:t>01</a:t>
-            </a:r>
-          </a:p>
-        </p:txBody>
-      </p:sp>
-      <p:sp>
-        <p:nvSpPr>
-          <p:cNvPr id="5" name="">
-            <a:extLst xmlns:a="http://schemas.openxmlformats.org/drawingml/2006/main">
-              <a:ext uri="{FF2B5EF4-FFF2-40B4-BE49-F238E27FC236}">
-                <a16:creationId xmlns:a16="http://schemas.microsoft.com/office/drawing/2014/main" id="{26D1AD73-F995-4369-A266-8FA41354CE3D}"/>
-              </a:ext>
-            </a:extLst>
-          </p:cNvPr>
-          <p:cNvSpPr>
-            <a:spLocks xmlns:a="http://schemas.openxmlformats.org/drawingml/2006/main" noGrp="1"/>
-          </p:cNvSpPr>
-          <p:nvPr/>
-        </p:nvSpPr>
-        <p:spPr>
-          <a:xfrm xmlns:a="http://schemas.openxmlformats.org/drawingml/2006/main">
-            <a:off x="1104900" y="3752850"/>
-            <a:ext cx="2019300" cy="685800"/>
+          <p:cNvPr id="31" name="">
+            <a:extLst xmlns:a="http://schemas.openxmlformats.org/drawingml/2006/main">
+              <a:ext uri="{FF2B5EF4-FFF2-40B4-BE49-F238E27FC236}">
+                <a16:creationId xmlns:a16="http://schemas.microsoft.com/office/drawing/2014/main" id="{DE97BF4D-EDBC-4480-A82B-512A72221950}"/>
+              </a:ext>
+            </a:extLst>
+          </p:cNvPr>
+          <p:cNvSpPr>
+            <a:spLocks xmlns:a="http://schemas.openxmlformats.org/drawingml/2006/main" noGrp="1"/>
+          </p:cNvSpPr>
+          <p:nvPr/>
+        </p:nvSpPr>
+        <p:spPr>
+          <a:xfrm xmlns:a="http://schemas.openxmlformats.org/drawingml/2006/main">
+            <a:off x="857250" y="7896225"/>
+            <a:ext cx="8001000" cy="38100"/>
+          </a:xfrm>
+          <a:prstGeom xmlns:a="http://schemas.openxmlformats.org/drawingml/2006/main" prst="rect">
+            <a:avLst/>
+          </a:prstGeom>
+          <a:solidFill xmlns:a="http://schemas.openxmlformats.org/drawingml/2006/main">
+            <a:srgbClr val="00A2EB"/>
+          </a:solidFill>
+          <a:ln xmlns:a="http://schemas.openxmlformats.org/drawingml/2006/main" w="0">
+            <a:solidFill>
+              <a:srgbClr val="00A2EB"/>
+            </a:solidFill>
+            <a:prstDash val="solid"/>
+          </a:ln>
+        </p:spPr>
+      </p:sp>
+      <p:sp>
+        <p:nvSpPr>
+          <p:cNvPr id="32" name="">
+            <a:extLst xmlns:a="http://schemas.openxmlformats.org/drawingml/2006/main">
+              <a:ext uri="{FF2B5EF4-FFF2-40B4-BE49-F238E27FC236}">
+                <a16:creationId xmlns:a16="http://schemas.microsoft.com/office/drawing/2014/main" id="{49281B64-2F0F-4357-A085-C65451F28236}"/>
+              </a:ext>
+            </a:extLst>
+          </p:cNvPr>
+          <p:cNvSpPr>
+            <a:spLocks xmlns:a="http://schemas.openxmlformats.org/drawingml/2006/main" noGrp="1"/>
+          </p:cNvSpPr>
+          <p:nvPr/>
+        </p:nvSpPr>
+        <p:spPr>
+          <a:xfrm xmlns:a="http://schemas.openxmlformats.org/drawingml/2006/main">
+            <a:off x="971550" y="8058150"/>
+            <a:ext cx="3714750" cy="323850"/>
           </a:xfrm>
           <a:prstGeom xmlns:a="http://schemas.openxmlformats.org/drawingml/2006/main" prst="rect">
             <a:avLst/>
@@ -12982,47 +11970,47 @@
                 <a:spcPct val="100000"/>
               </a:lnSpc>
               <a:buNone/>
-              <a:defRPr sz="1950" b="1">
-                <a:solidFill>
-                  <a:srgbClr val="051C2A"/>
-                </a:solidFill>
-                <a:latin typeface="Calibri"/>
-                <a:ea typeface="Calibri"/>
-                <a:cs typeface="Calibri"/>
-              </a:defRPr>
-            </a:pPr>
-            <a:r>
-              <a:rPr sz="1950" b="1">
-                <a:solidFill>
-                  <a:srgbClr val="051C2A"/>
-                </a:solidFill>
-                <a:latin typeface="Calibri"/>
-                <a:ea typeface="Calibri"/>
-                <a:cs typeface="Calibri"/>
-              </a:rPr>
-              <a:t>Decide</a:t>
-            </a:r>
-          </a:p>
-        </p:txBody>
-      </p:sp>
-      <p:sp>
-        <p:nvSpPr>
-          <p:cNvPr id="6" name="">
-            <a:extLst xmlns:a="http://schemas.openxmlformats.org/drawingml/2006/main">
-              <a:ext uri="{FF2B5EF4-FFF2-40B4-BE49-F238E27FC236}">
-                <a16:creationId xmlns:a16="http://schemas.microsoft.com/office/drawing/2014/main" id="{4CA7F72B-07B6-4BF4-A3F9-5860F8AC7245}"/>
-              </a:ext>
-            </a:extLst>
-          </p:cNvPr>
-          <p:cNvSpPr>
-            <a:spLocks xmlns:a="http://schemas.openxmlformats.org/drawingml/2006/main" noGrp="1"/>
-          </p:cNvSpPr>
-          <p:nvPr/>
-        </p:nvSpPr>
-        <p:spPr>
-          <a:xfrm xmlns:a="http://schemas.openxmlformats.org/drawingml/2006/main">
-            <a:off x="1181100" y="4610100"/>
-            <a:ext cx="1866900" cy="514350"/>
+              <a:defRPr sz="1200" b="0">
+                <a:solidFill>
+                  <a:srgbClr val="9A9A9F"/>
+                </a:solidFill>
+                <a:latin typeface="Calibri"/>
+                <a:ea typeface="Calibri"/>
+                <a:cs typeface="Calibri"/>
+              </a:defRPr>
+            </a:pPr>
+            <a:r>
+              <a:rPr sz="1200" b="0">
+                <a:solidFill>
+                  <a:srgbClr val="9A9A9F"/>
+                </a:solidFill>
+                <a:latin typeface="Calibri"/>
+                <a:ea typeface="Calibri"/>
+                <a:cs typeface="Calibri"/>
+              </a:rPr>
+              <a:t>First Finance - Arnaud Demes</a:t>
+            </a:r>
+          </a:p>
+        </p:txBody>
+      </p:sp>
+      <p:sp>
+        <p:nvSpPr>
+          <p:cNvPr id="33" name="">
+            <a:extLst xmlns:a="http://schemas.openxmlformats.org/drawingml/2006/main">
+              <a:ext uri="{FF2B5EF4-FFF2-40B4-BE49-F238E27FC236}">
+                <a16:creationId xmlns:a16="http://schemas.microsoft.com/office/drawing/2014/main" id="{EAA325A4-7EC6-42CE-A13A-4B38A32DE7F2}"/>
+              </a:ext>
+            </a:extLst>
+          </p:cNvPr>
+          <p:cNvSpPr>
+            <a:spLocks xmlns:a="http://schemas.openxmlformats.org/drawingml/2006/main" noGrp="1"/>
+          </p:cNvSpPr>
+          <p:nvPr/>
+        </p:nvSpPr>
+        <p:spPr>
+          <a:xfrm xmlns:a="http://schemas.openxmlformats.org/drawingml/2006/main">
+            <a:off x="12192000" y="8058150"/>
+            <a:ext cx="1809750" cy="323850"/>
           </a:xfrm>
           <a:prstGeom xmlns:a="http://schemas.openxmlformats.org/drawingml/2006/main" prst="rect">
             <a:avLst/>
@@ -13039,149 +12027,52 @@
           </a:bodyPr>
           <a:lstStyle xmlns:a="http://schemas.openxmlformats.org/drawingml/2006/main"/>
           <a:p xmlns:a="http://schemas.openxmlformats.org/drawingml/2006/main">
-            <a:pPr algn="l">
+            <a:pPr algn="r">
               <a:lnSpc>
                 <a:spcPct val="100000"/>
               </a:lnSpc>
               <a:buNone/>
-              <a:defRPr sz="1200" b="0">
-                <a:solidFill>
-                  <a:srgbClr val="1F40CB"/>
-                </a:solidFill>
-                <a:latin typeface="Calibri"/>
-                <a:ea typeface="Calibri"/>
-                <a:cs typeface="Calibri"/>
-              </a:defRPr>
-            </a:pPr>
-            <a:r>
-              <a:rPr sz="1200" b="0">
-                <a:solidFill>
-                  <a:srgbClr val="1F40CB"/>
-                </a:solidFill>
-                <a:latin typeface="Calibri"/>
-                <a:ea typeface="Calibri"/>
-                <a:cs typeface="Calibri"/>
-              </a:rPr>
-              <a:t>get_market_price</a:t>
-            </a:r>
-          </a:p>
-        </p:txBody>
-      </p:sp>
-      <p:sp>
-        <p:nvSpPr>
-          <p:cNvPr id="7" name="ingestion-2">
-            <a:extLst xmlns:a="http://schemas.openxmlformats.org/drawingml/2006/main">
-              <a:ext uri="{FF2B5EF4-FFF2-40B4-BE49-F238E27FC236}">
-                <a16:creationId xmlns:a16="http://schemas.microsoft.com/office/drawing/2014/main" id="{B39DEECB-E0D1-415A-8F2A-C8075A6D97BA}"/>
-              </a:ext>
-            </a:extLst>
-          </p:cNvPr>
-          <p:cNvSpPr>
-            <a:spLocks xmlns:a="http://schemas.openxmlformats.org/drawingml/2006/main" noGrp="1"/>
-          </p:cNvSpPr>
-          <p:nvPr/>
-        </p:nvSpPr>
-        <p:spPr>
-          <a:xfrm xmlns:a="http://schemas.openxmlformats.org/drawingml/2006/main">
-            <a:off x="3810000" y="3086100"/>
-            <a:ext cx="2247900" cy="2266950"/>
-          </a:xfrm>
-          <a:prstGeom xmlns:a="http://schemas.openxmlformats.org/drawingml/2006/main" prst="roundRect">
-            <a:avLst>
-              <a:gd name="adj" fmla="val 5085"/>
-            </a:avLst>
-          </a:prstGeom>
-          <a:solidFill xmlns:a="http://schemas.openxmlformats.org/drawingml/2006/main">
-            <a:srgbClr val="FFFFFF"/>
-          </a:solidFill>
-          <a:ln xmlns:a="http://schemas.openxmlformats.org/drawingml/2006/main" w="9525">
-            <a:solidFill>
-              <a:srgbClr val="E4E7E9"/>
-            </a:solidFill>
-            <a:prstDash val="solid"/>
-          </a:ln>
-        </p:spPr>
-      </p:sp>
-      <p:sp>
-        <p:nvSpPr>
-          <p:cNvPr id="8" name="">
-            <a:extLst xmlns:a="http://schemas.openxmlformats.org/drawingml/2006/main">
-              <a:ext uri="{FF2B5EF4-FFF2-40B4-BE49-F238E27FC236}">
-                <a16:creationId xmlns:a16="http://schemas.microsoft.com/office/drawing/2014/main" id="{18679081-8A68-4B7E-9199-340CF95714DE}"/>
-              </a:ext>
-            </a:extLst>
-          </p:cNvPr>
-          <p:cNvSpPr>
-            <a:spLocks xmlns:a="http://schemas.openxmlformats.org/drawingml/2006/main" noGrp="1"/>
-          </p:cNvSpPr>
-          <p:nvPr/>
-        </p:nvSpPr>
-        <p:spPr>
-          <a:xfrm xmlns:a="http://schemas.openxmlformats.org/drawingml/2006/main">
-            <a:off x="4000500" y="3295650"/>
-            <a:ext cx="514350" cy="285750"/>
-          </a:xfrm>
-          <a:prstGeom xmlns:a="http://schemas.openxmlformats.org/drawingml/2006/main" prst="rect">
-            <a:avLst/>
-          </a:prstGeom>
-          <a:noFill xmlns:a="http://schemas.openxmlformats.org/drawingml/2006/main"/>
-          <a:ln xmlns:a="http://schemas.openxmlformats.org/drawingml/2006/main" w="0">
-            <a:noFill/>
-            <a:prstDash val="solid"/>
-          </a:ln>
-        </p:spPr>
-        <p:txBody>
-          <a:bodyPr xmlns:a="http://schemas.openxmlformats.org/drawingml/2006/main" wrap="square" lIns="0" tIns="0" rIns="0" bIns="0" anchor="ctr">
-            <a:noAutofit/>
-          </a:bodyPr>
-          <a:lstStyle xmlns:a="http://schemas.openxmlformats.org/drawingml/2006/main"/>
-          <a:p xmlns:a="http://schemas.openxmlformats.org/drawingml/2006/main">
-            <a:pPr algn="l">
-              <a:lnSpc>
-                <a:spcPct val="100000"/>
-              </a:lnSpc>
-              <a:buNone/>
-              <a:defRPr sz="1350" b="1">
-                <a:solidFill>
-                  <a:srgbClr val="00A2EB"/>
-                </a:solidFill>
-                <a:latin typeface="Calibri"/>
-                <a:ea typeface="Calibri"/>
-                <a:cs typeface="Calibri"/>
-              </a:defRPr>
-            </a:pPr>
-            <a:r>
-              <a:rPr sz="1800" b="1">
-                <a:solidFill>
-                  <a:srgbClr val="00A2EB"/>
-                </a:solidFill>
-                <a:latin typeface="Calibri"/>
-                <a:ea typeface="Calibri"/>
-                <a:cs typeface="Calibri"/>
-              </a:rPr>
-              <a:t>02</a:t>
-            </a:r>
-          </a:p>
-        </p:txBody>
-      </p:sp>
-      <p:sp>
-        <p:nvSpPr>
-          <p:cNvPr id="9" name="">
-            <a:extLst xmlns:a="http://schemas.openxmlformats.org/drawingml/2006/main">
-              <a:ext uri="{FF2B5EF4-FFF2-40B4-BE49-F238E27FC236}">
-                <a16:creationId xmlns:a16="http://schemas.microsoft.com/office/drawing/2014/main" id="{ED095E54-44DC-4092-9EB7-0C81E4B47710}"/>
-              </a:ext>
-            </a:extLst>
-          </p:cNvPr>
-          <p:cNvSpPr>
-            <a:spLocks xmlns:a="http://schemas.openxmlformats.org/drawingml/2006/main" noGrp="1"/>
-          </p:cNvSpPr>
-          <p:nvPr/>
-        </p:nvSpPr>
-        <p:spPr>
-          <a:xfrm xmlns:a="http://schemas.openxmlformats.org/drawingml/2006/main">
-            <a:off x="3924300" y="3752850"/>
-            <a:ext cx="2019300" cy="685800"/>
+              <a:defRPr sz="1200" b="1">
+                <a:solidFill>
+                  <a:srgbClr val="9A9A9F"/>
+                </a:solidFill>
+                <a:latin typeface="Calibri"/>
+                <a:ea typeface="Calibri"/>
+                <a:cs typeface="Calibri"/>
+              </a:defRPr>
+            </a:pPr>
+            <a:r>
+              <a:rPr sz="1200" b="1">
+                <a:solidFill>
+                  <a:srgbClr val="9A9A9F"/>
+                </a:solidFill>
+                <a:latin typeface="Calibri"/>
+                <a:ea typeface="Calibri"/>
+                <a:cs typeface="Calibri"/>
+              </a:rPr>
+              <a:t>AGENT</a:t>
+            </a:r>
+          </a:p>
+        </p:txBody>
+      </p:sp>
+      <p:sp>
+        <p:nvSpPr>
+          <p:cNvPr id="34" name="">
+            <a:extLst xmlns:a="http://schemas.openxmlformats.org/drawingml/2006/main">
+              <a:ext uri="{FF2B5EF4-FFF2-40B4-BE49-F238E27FC236}">
+                <a16:creationId xmlns:a16="http://schemas.microsoft.com/office/drawing/2014/main" id="{5F7FB65A-4A0D-4595-92F4-FD9B71638842}"/>
+              </a:ext>
+            </a:extLst>
+          </p:cNvPr>
+          <p:cNvSpPr>
+            <a:spLocks xmlns:a="http://schemas.openxmlformats.org/drawingml/2006/main" noGrp="1"/>
+          </p:cNvSpPr>
+          <p:nvPr/>
+        </p:nvSpPr>
+        <p:spPr>
+          <a:xfrm xmlns:a="http://schemas.openxmlformats.org/drawingml/2006/main">
+            <a:off x="14135100" y="8058150"/>
+            <a:ext cx="266700" cy="323850"/>
           </a:xfrm>
           <a:prstGeom xmlns:a="http://schemas.openxmlformats.org/drawingml/2006/main" prst="rect">
             <a:avLst/>
@@ -13198,1155 +12089,12 @@
           </a:bodyPr>
           <a:lstStyle xmlns:a="http://schemas.openxmlformats.org/drawingml/2006/main"/>
           <a:p xmlns:a="http://schemas.openxmlformats.org/drawingml/2006/main">
-            <a:pPr algn="l">
+            <a:pPr algn="r">
               <a:lnSpc>
                 <a:spcPct val="100000"/>
               </a:lnSpc>
               <a:buNone/>
-              <a:defRPr sz="1950" b="1">
-                <a:solidFill>
-                  <a:srgbClr val="051C2A"/>
-                </a:solidFill>
-                <a:latin typeface="Calibri"/>
-                <a:ea typeface="Calibri"/>
-                <a:cs typeface="Calibri"/>
-              </a:defRPr>
-            </a:pPr>
-            <a:r>
-              <a:rPr sz="1950" b="1">
-                <a:solidFill>
-                  <a:srgbClr val="051C2A"/>
-                </a:solidFill>
-                <a:latin typeface="Calibri"/>
-                <a:ea typeface="Calibri"/>
-                <a:cs typeface="Calibri"/>
-              </a:rPr>
-              <a:t>Observe</a:t>
-            </a:r>
-          </a:p>
-        </p:txBody>
-      </p:sp>
-      <p:sp>
-        <p:nvSpPr>
-          <p:cNvPr id="10" name="">
-            <a:extLst xmlns:a="http://schemas.openxmlformats.org/drawingml/2006/main">
-              <a:ext uri="{FF2B5EF4-FFF2-40B4-BE49-F238E27FC236}">
-                <a16:creationId xmlns:a16="http://schemas.microsoft.com/office/drawing/2014/main" id="{4DB65E8E-6BA9-40DB-99F9-46D3397B13A3}"/>
-              </a:ext>
-            </a:extLst>
-          </p:cNvPr>
-          <p:cNvSpPr>
-            <a:spLocks xmlns:a="http://schemas.openxmlformats.org/drawingml/2006/main" noGrp="1"/>
-          </p:cNvSpPr>
-          <p:nvPr/>
-        </p:nvSpPr>
-        <p:spPr>
-          <a:xfrm xmlns:a="http://schemas.openxmlformats.org/drawingml/2006/main">
-            <a:off x="4000500" y="4610100"/>
-            <a:ext cx="1866900" cy="514350"/>
-          </a:xfrm>
-          <a:prstGeom xmlns:a="http://schemas.openxmlformats.org/drawingml/2006/main" prst="rect">
-            <a:avLst/>
-          </a:prstGeom>
-          <a:noFill xmlns:a="http://schemas.openxmlformats.org/drawingml/2006/main"/>
-          <a:ln xmlns:a="http://schemas.openxmlformats.org/drawingml/2006/main" w="0">
-            <a:noFill/>
-            <a:prstDash val="solid"/>
-          </a:ln>
-        </p:spPr>
-        <p:txBody>
-          <a:bodyPr xmlns:a="http://schemas.openxmlformats.org/drawingml/2006/main" wrap="square" lIns="0" tIns="0" rIns="0" bIns="0" anchor="ctr">
-            <a:normAutofit fontScale="100000"/>
-          </a:bodyPr>
-          <a:lstStyle xmlns:a="http://schemas.openxmlformats.org/drawingml/2006/main"/>
-          <a:p xmlns:a="http://schemas.openxmlformats.org/drawingml/2006/main">
-            <a:pPr algn="l">
-              <a:lnSpc>
-                <a:spcPct val="100000"/>
-              </a:lnSpc>
-              <a:buNone/>
-              <a:defRPr sz="1200" b="0">
-                <a:solidFill>
-                  <a:srgbClr val="1F40CB"/>
-                </a:solidFill>
-                <a:latin typeface="Calibri"/>
-                <a:ea typeface="Calibri"/>
-                <a:cs typeface="Calibri"/>
-              </a:defRPr>
-            </a:pPr>
-            <a:r>
-              <a:rPr sz="1200" b="0">
-                <a:solidFill>
-                  <a:srgbClr val="1F40CB"/>
-                </a:solidFill>
-                <a:latin typeface="Calibri"/>
-                <a:ea typeface="Calibri"/>
-                <a:cs typeface="Calibri"/>
-              </a:rPr>
-              <a:t>214.575 USD</a:t>
-            </a:r>
-          </a:p>
-        </p:txBody>
-      </p:sp>
-      <p:sp>
-        <p:nvSpPr>
-          <p:cNvPr id="11" name="ingestion-3">
-            <a:extLst xmlns:a="http://schemas.openxmlformats.org/drawingml/2006/main">
-              <a:ext uri="{FF2B5EF4-FFF2-40B4-BE49-F238E27FC236}">
-                <a16:creationId xmlns:a16="http://schemas.microsoft.com/office/drawing/2014/main" id="{D4342A97-3791-461F-A305-9671DA4948CE}"/>
-              </a:ext>
-            </a:extLst>
-          </p:cNvPr>
-          <p:cNvSpPr>
-            <a:spLocks xmlns:a="http://schemas.openxmlformats.org/drawingml/2006/main" noGrp="1"/>
-          </p:cNvSpPr>
-          <p:nvPr/>
-        </p:nvSpPr>
-        <p:spPr>
-          <a:xfrm xmlns:a="http://schemas.openxmlformats.org/drawingml/2006/main">
-            <a:off x="6629400" y="3086100"/>
-            <a:ext cx="2247900" cy="2266950"/>
-          </a:xfrm>
-          <a:prstGeom xmlns:a="http://schemas.openxmlformats.org/drawingml/2006/main" prst="roundRect">
-            <a:avLst>
-              <a:gd name="adj" fmla="val 5085"/>
-            </a:avLst>
-          </a:prstGeom>
-          <a:solidFill xmlns:a="http://schemas.openxmlformats.org/drawingml/2006/main">
-            <a:srgbClr val="062433"/>
-          </a:solidFill>
-          <a:ln xmlns:a="http://schemas.openxmlformats.org/drawingml/2006/main" w="9525">
-            <a:solidFill>
-              <a:srgbClr val="062433"/>
-            </a:solidFill>
-            <a:prstDash val="solid"/>
-          </a:ln>
-        </p:spPr>
-      </p:sp>
-      <p:sp>
-        <p:nvSpPr>
-          <p:cNvPr id="12" name="">
-            <a:extLst xmlns:a="http://schemas.openxmlformats.org/drawingml/2006/main">
-              <a:ext uri="{FF2B5EF4-FFF2-40B4-BE49-F238E27FC236}">
-                <a16:creationId xmlns:a16="http://schemas.microsoft.com/office/drawing/2014/main" id="{64E49A95-2D88-4387-8BD5-FA749ABD0960}"/>
-              </a:ext>
-            </a:extLst>
-          </p:cNvPr>
-          <p:cNvSpPr>
-            <a:spLocks xmlns:a="http://schemas.openxmlformats.org/drawingml/2006/main" noGrp="1"/>
-          </p:cNvSpPr>
-          <p:nvPr/>
-        </p:nvSpPr>
-        <p:spPr>
-          <a:xfrm xmlns:a="http://schemas.openxmlformats.org/drawingml/2006/main">
-            <a:off x="6819900" y="3295650"/>
-            <a:ext cx="514350" cy="285750"/>
-          </a:xfrm>
-          <a:prstGeom xmlns:a="http://schemas.openxmlformats.org/drawingml/2006/main" prst="rect">
-            <a:avLst/>
-          </a:prstGeom>
-          <a:noFill xmlns:a="http://schemas.openxmlformats.org/drawingml/2006/main"/>
-          <a:ln xmlns:a="http://schemas.openxmlformats.org/drawingml/2006/main" w="0">
-            <a:noFill/>
-            <a:prstDash val="solid"/>
-          </a:ln>
-        </p:spPr>
-        <p:txBody>
-          <a:bodyPr xmlns:a="http://schemas.openxmlformats.org/drawingml/2006/main" wrap="square" lIns="0" tIns="0" rIns="0" bIns="0" anchor="ctr">
-            <a:noAutofit/>
-          </a:bodyPr>
-          <a:lstStyle xmlns:a="http://schemas.openxmlformats.org/drawingml/2006/main"/>
-          <a:p xmlns:a="http://schemas.openxmlformats.org/drawingml/2006/main">
-            <a:pPr algn="l">
-              <a:lnSpc>
-                <a:spcPct val="100000"/>
-              </a:lnSpc>
-              <a:buNone/>
-              <a:defRPr sz="1350" b="1">
-                <a:solidFill>
-                  <a:srgbClr val="00A2EB"/>
-                </a:solidFill>
-                <a:latin typeface="Calibri"/>
-                <a:ea typeface="Calibri"/>
-                <a:cs typeface="Calibri"/>
-              </a:defRPr>
-            </a:pPr>
-            <a:r>
-              <a:rPr sz="1800" b="1">
-                <a:solidFill>
-                  <a:srgbClr val="00A2EB"/>
-                </a:solidFill>
-                <a:latin typeface="Calibri"/>
-                <a:ea typeface="Calibri"/>
-                <a:cs typeface="Calibri"/>
-              </a:rPr>
-              <a:t>03</a:t>
-            </a:r>
-          </a:p>
-        </p:txBody>
-      </p:sp>
-      <p:sp>
-        <p:nvSpPr>
-          <p:cNvPr id="13" name="">
-            <a:extLst xmlns:a="http://schemas.openxmlformats.org/drawingml/2006/main">
-              <a:ext uri="{FF2B5EF4-FFF2-40B4-BE49-F238E27FC236}">
-                <a16:creationId xmlns:a16="http://schemas.microsoft.com/office/drawing/2014/main" id="{572D3874-F985-4CD0-BBFF-D59F5B7B32BE}"/>
-              </a:ext>
-            </a:extLst>
-          </p:cNvPr>
-          <p:cNvSpPr>
-            <a:spLocks xmlns:a="http://schemas.openxmlformats.org/drawingml/2006/main" noGrp="1"/>
-          </p:cNvSpPr>
-          <p:nvPr/>
-        </p:nvSpPr>
-        <p:spPr>
-          <a:xfrm xmlns:a="http://schemas.openxmlformats.org/drawingml/2006/main">
-            <a:off x="6743700" y="3752850"/>
-            <a:ext cx="2019300" cy="685800"/>
-          </a:xfrm>
-          <a:prstGeom xmlns:a="http://schemas.openxmlformats.org/drawingml/2006/main" prst="rect">
-            <a:avLst/>
-          </a:prstGeom>
-          <a:noFill xmlns:a="http://schemas.openxmlformats.org/drawingml/2006/main"/>
-          <a:ln xmlns:a="http://schemas.openxmlformats.org/drawingml/2006/main" w="0">
-            <a:noFill/>
-            <a:prstDash val="solid"/>
-          </a:ln>
-        </p:spPr>
-        <p:txBody>
-          <a:bodyPr xmlns:a="http://schemas.openxmlformats.org/drawingml/2006/main" wrap="square" lIns="0" tIns="0" rIns="0" bIns="0" anchor="ctr">
-            <a:noAutofit/>
-          </a:bodyPr>
-          <a:lstStyle xmlns:a="http://schemas.openxmlformats.org/drawingml/2006/main"/>
-          <a:p xmlns:a="http://schemas.openxmlformats.org/drawingml/2006/main">
-            <a:pPr algn="l">
-              <a:lnSpc>
-                <a:spcPct val="100000"/>
-              </a:lnSpc>
-              <a:buNone/>
-              <a:defRPr sz="1650" b="1">
-                <a:solidFill>
-                  <a:srgbClr val="FFFFFF"/>
-                </a:solidFill>
-                <a:latin typeface="Calibri"/>
-                <a:ea typeface="Calibri"/>
-                <a:cs typeface="Calibri"/>
-              </a:defRPr>
-            </a:pPr>
-            <a:r>
-              <a:rPr sz="1800" b="1">
-                <a:solidFill>
-                  <a:srgbClr val="FFFFFF"/>
-                </a:solidFill>
-                <a:latin typeface="Calibri"/>
-                <a:ea typeface="Calibri"/>
-                <a:cs typeface="Calibri"/>
-              </a:rPr>
-              <a:t>Decide</a:t>
-            </a:r>
-          </a:p>
-        </p:txBody>
-      </p:sp>
-      <p:sp>
-        <p:nvSpPr>
-          <p:cNvPr id="14" name="">
-            <a:extLst xmlns:a="http://schemas.openxmlformats.org/drawingml/2006/main">
-              <a:ext uri="{FF2B5EF4-FFF2-40B4-BE49-F238E27FC236}">
-                <a16:creationId xmlns:a16="http://schemas.microsoft.com/office/drawing/2014/main" id="{9599AF29-91DE-47C0-8189-B0778BB52724}"/>
-              </a:ext>
-            </a:extLst>
-          </p:cNvPr>
-          <p:cNvSpPr>
-            <a:spLocks xmlns:a="http://schemas.openxmlformats.org/drawingml/2006/main" noGrp="1"/>
-          </p:cNvSpPr>
-          <p:nvPr/>
-        </p:nvSpPr>
-        <p:spPr>
-          <a:xfrm xmlns:a="http://schemas.openxmlformats.org/drawingml/2006/main">
-            <a:off x="6819900" y="4610100"/>
-            <a:ext cx="1866900" cy="514350"/>
-          </a:xfrm>
-          <a:prstGeom xmlns:a="http://schemas.openxmlformats.org/drawingml/2006/main" prst="rect">
-            <a:avLst/>
-          </a:prstGeom>
-          <a:noFill xmlns:a="http://schemas.openxmlformats.org/drawingml/2006/main"/>
-          <a:ln xmlns:a="http://schemas.openxmlformats.org/drawingml/2006/main" w="0">
-            <a:noFill/>
-            <a:prstDash val="solid"/>
-          </a:ln>
-        </p:spPr>
-        <p:txBody>
-          <a:bodyPr xmlns:a="http://schemas.openxmlformats.org/drawingml/2006/main" wrap="square" lIns="0" tIns="0" rIns="0" bIns="0" anchor="ctr">
-            <a:normAutofit fontScale="100000"/>
-          </a:bodyPr>
-          <a:lstStyle xmlns:a="http://schemas.openxmlformats.org/drawingml/2006/main"/>
-          <a:p xmlns:a="http://schemas.openxmlformats.org/drawingml/2006/main">
-            <a:pPr algn="l">
-              <a:lnSpc>
-                <a:spcPct val="100000"/>
-              </a:lnSpc>
-              <a:buNone/>
-              <a:defRPr sz="1200" b="0">
-                <a:solidFill>
-                  <a:srgbClr val="00A2EB"/>
-                </a:solidFill>
-                <a:latin typeface="Calibri"/>
-                <a:ea typeface="Calibri"/>
-                <a:cs typeface="Calibri"/>
-              </a:defRPr>
-            </a:pPr>
-            <a:r>
-              <a:rPr sz="1200" b="0">
-                <a:solidFill>
-                  <a:srgbClr val="00A2EB"/>
-                </a:solidFill>
-                <a:latin typeface="Calibri"/>
-                <a:ea typeface="Calibri"/>
-                <a:cs typeface="Calibri"/>
-              </a:rPr>
-              <a:t>convert_currency</a:t>
-            </a:r>
-          </a:p>
-        </p:txBody>
-      </p:sp>
-      <p:sp>
-        <p:nvSpPr>
-          <p:cNvPr id="15" name="ingestion-4">
-            <a:extLst xmlns:a="http://schemas.openxmlformats.org/drawingml/2006/main">
-              <a:ext uri="{FF2B5EF4-FFF2-40B4-BE49-F238E27FC236}">
-                <a16:creationId xmlns:a16="http://schemas.microsoft.com/office/drawing/2014/main" id="{7952DE37-BD86-481C-A575-8709971DD74E}"/>
-              </a:ext>
-            </a:extLst>
-          </p:cNvPr>
-          <p:cNvSpPr>
-            <a:spLocks xmlns:a="http://schemas.openxmlformats.org/drawingml/2006/main" noGrp="1"/>
-          </p:cNvSpPr>
-          <p:nvPr/>
-        </p:nvSpPr>
-        <p:spPr>
-          <a:xfrm xmlns:a="http://schemas.openxmlformats.org/drawingml/2006/main">
-            <a:off x="9448800" y="3086100"/>
-            <a:ext cx="2247900" cy="2266950"/>
-          </a:xfrm>
-          <a:prstGeom xmlns:a="http://schemas.openxmlformats.org/drawingml/2006/main" prst="roundRect">
-            <a:avLst>
-              <a:gd name="adj" fmla="val 5085"/>
-            </a:avLst>
-          </a:prstGeom>
-          <a:solidFill xmlns:a="http://schemas.openxmlformats.org/drawingml/2006/main">
-            <a:srgbClr val="FFFFFF"/>
-          </a:solidFill>
-          <a:ln xmlns:a="http://schemas.openxmlformats.org/drawingml/2006/main" w="9525">
-            <a:solidFill>
-              <a:srgbClr val="E4E7E9"/>
-            </a:solidFill>
-            <a:prstDash val="solid"/>
-          </a:ln>
-        </p:spPr>
-      </p:sp>
-      <p:sp>
-        <p:nvSpPr>
-          <p:cNvPr id="16" name="">
-            <a:extLst xmlns:a="http://schemas.openxmlformats.org/drawingml/2006/main">
-              <a:ext uri="{FF2B5EF4-FFF2-40B4-BE49-F238E27FC236}">
-                <a16:creationId xmlns:a16="http://schemas.microsoft.com/office/drawing/2014/main" id="{62EC2EC9-18A1-4F72-A64D-AF536DDC8F61}"/>
-              </a:ext>
-            </a:extLst>
-          </p:cNvPr>
-          <p:cNvSpPr>
-            <a:spLocks xmlns:a="http://schemas.openxmlformats.org/drawingml/2006/main" noGrp="1"/>
-          </p:cNvSpPr>
-          <p:nvPr/>
-        </p:nvSpPr>
-        <p:spPr>
-          <a:xfrm xmlns:a="http://schemas.openxmlformats.org/drawingml/2006/main">
-            <a:off x="9639300" y="3295650"/>
-            <a:ext cx="514350" cy="285750"/>
-          </a:xfrm>
-          <a:prstGeom xmlns:a="http://schemas.openxmlformats.org/drawingml/2006/main" prst="rect">
-            <a:avLst/>
-          </a:prstGeom>
-          <a:noFill xmlns:a="http://schemas.openxmlformats.org/drawingml/2006/main"/>
-          <a:ln xmlns:a="http://schemas.openxmlformats.org/drawingml/2006/main" w="0">
-            <a:noFill/>
-            <a:prstDash val="solid"/>
-          </a:ln>
-        </p:spPr>
-        <p:txBody>
-          <a:bodyPr xmlns:a="http://schemas.openxmlformats.org/drawingml/2006/main" wrap="square" lIns="0" tIns="0" rIns="0" bIns="0" anchor="ctr">
-            <a:noAutofit/>
-          </a:bodyPr>
-          <a:lstStyle xmlns:a="http://schemas.openxmlformats.org/drawingml/2006/main"/>
-          <a:p xmlns:a="http://schemas.openxmlformats.org/drawingml/2006/main">
-            <a:pPr algn="l">
-              <a:lnSpc>
-                <a:spcPct val="100000"/>
-              </a:lnSpc>
-              <a:buNone/>
-              <a:defRPr sz="1350" b="1">
-                <a:solidFill>
-                  <a:srgbClr val="00A2EB"/>
-                </a:solidFill>
-                <a:latin typeface="Calibri"/>
-                <a:ea typeface="Calibri"/>
-                <a:cs typeface="Calibri"/>
-              </a:defRPr>
-            </a:pPr>
-            <a:r>
-              <a:rPr sz="1800" b="1">
-                <a:solidFill>
-                  <a:srgbClr val="00A2EB"/>
-                </a:solidFill>
-                <a:latin typeface="Calibri"/>
-                <a:ea typeface="Calibri"/>
-                <a:cs typeface="Calibri"/>
-              </a:rPr>
-              <a:t>04</a:t>
-            </a:r>
-          </a:p>
-        </p:txBody>
-      </p:sp>
-      <p:sp>
-        <p:nvSpPr>
-          <p:cNvPr id="17" name="">
-            <a:extLst xmlns:a="http://schemas.openxmlformats.org/drawingml/2006/main">
-              <a:ext uri="{FF2B5EF4-FFF2-40B4-BE49-F238E27FC236}">
-                <a16:creationId xmlns:a16="http://schemas.microsoft.com/office/drawing/2014/main" id="{8540FD5A-1C0F-4BE1-B862-685F20D0F43C}"/>
-              </a:ext>
-            </a:extLst>
-          </p:cNvPr>
-          <p:cNvSpPr>
-            <a:spLocks xmlns:a="http://schemas.openxmlformats.org/drawingml/2006/main" noGrp="1"/>
-          </p:cNvSpPr>
-          <p:nvPr/>
-        </p:nvSpPr>
-        <p:spPr>
-          <a:xfrm xmlns:a="http://schemas.openxmlformats.org/drawingml/2006/main">
-            <a:off x="9563100" y="3752850"/>
-            <a:ext cx="2019300" cy="685800"/>
-          </a:xfrm>
-          <a:prstGeom xmlns:a="http://schemas.openxmlformats.org/drawingml/2006/main" prst="rect">
-            <a:avLst/>
-          </a:prstGeom>
-          <a:noFill xmlns:a="http://schemas.openxmlformats.org/drawingml/2006/main"/>
-          <a:ln xmlns:a="http://schemas.openxmlformats.org/drawingml/2006/main" w="0">
-            <a:noFill/>
-            <a:prstDash val="solid"/>
-          </a:ln>
-        </p:spPr>
-        <p:txBody>
-          <a:bodyPr xmlns:a="http://schemas.openxmlformats.org/drawingml/2006/main" wrap="square" lIns="0" tIns="0" rIns="0" bIns="0" anchor="ctr">
-            <a:normAutofit fontScale="100000"/>
-          </a:bodyPr>
-          <a:lstStyle xmlns:a="http://schemas.openxmlformats.org/drawingml/2006/main"/>
-          <a:p xmlns:a="http://schemas.openxmlformats.org/drawingml/2006/main">
-            <a:pPr algn="l">
-              <a:lnSpc>
-                <a:spcPct val="100000"/>
-              </a:lnSpc>
-              <a:buNone/>
-              <a:defRPr sz="1950" b="1">
-                <a:solidFill>
-                  <a:srgbClr val="051C2A"/>
-                </a:solidFill>
-                <a:latin typeface="Calibri"/>
-                <a:ea typeface="Calibri"/>
-                <a:cs typeface="Calibri"/>
-              </a:defRPr>
-            </a:pPr>
-            <a:r>
-              <a:rPr sz="1950" b="1">
-                <a:solidFill>
-                  <a:srgbClr val="051C2A"/>
-                </a:solidFill>
-                <a:latin typeface="Calibri"/>
-                <a:ea typeface="Calibri"/>
-                <a:cs typeface="Calibri"/>
-              </a:rPr>
-              <a:t>Observe</a:t>
-            </a:r>
-          </a:p>
-        </p:txBody>
-      </p:sp>
-      <p:sp>
-        <p:nvSpPr>
-          <p:cNvPr id="18" name="">
-            <a:extLst xmlns:a="http://schemas.openxmlformats.org/drawingml/2006/main">
-              <a:ext uri="{FF2B5EF4-FFF2-40B4-BE49-F238E27FC236}">
-                <a16:creationId xmlns:a16="http://schemas.microsoft.com/office/drawing/2014/main" id="{67E52B70-645C-40F7-B0DE-1D1D177875CC}"/>
-              </a:ext>
-            </a:extLst>
-          </p:cNvPr>
-          <p:cNvSpPr>
-            <a:spLocks xmlns:a="http://schemas.openxmlformats.org/drawingml/2006/main" noGrp="1"/>
-          </p:cNvSpPr>
-          <p:nvPr/>
-        </p:nvSpPr>
-        <p:spPr>
-          <a:xfrm xmlns:a="http://schemas.openxmlformats.org/drawingml/2006/main">
-            <a:off x="9639300" y="4610100"/>
-            <a:ext cx="1866900" cy="514350"/>
-          </a:xfrm>
-          <a:prstGeom xmlns:a="http://schemas.openxmlformats.org/drawingml/2006/main" prst="rect">
-            <a:avLst/>
-          </a:prstGeom>
-          <a:noFill xmlns:a="http://schemas.openxmlformats.org/drawingml/2006/main"/>
-          <a:ln xmlns:a="http://schemas.openxmlformats.org/drawingml/2006/main" w="0">
-            <a:noFill/>
-            <a:prstDash val="solid"/>
-          </a:ln>
-        </p:spPr>
-        <p:txBody>
-          <a:bodyPr xmlns:a="http://schemas.openxmlformats.org/drawingml/2006/main" wrap="square" lIns="0" tIns="0" rIns="0" bIns="0" anchor="ctr">
-            <a:normAutofit fontScale="100000"/>
-          </a:bodyPr>
-          <a:lstStyle xmlns:a="http://schemas.openxmlformats.org/drawingml/2006/main"/>
-          <a:p xmlns:a="http://schemas.openxmlformats.org/drawingml/2006/main">
-            <a:pPr algn="l">
-              <a:lnSpc>
-                <a:spcPct val="100000"/>
-              </a:lnSpc>
-              <a:buNone/>
-              <a:defRPr sz="1200" b="0">
-                <a:solidFill>
-                  <a:srgbClr val="1F40CB"/>
-                </a:solidFill>
-                <a:latin typeface="Calibri"/>
-                <a:ea typeface="Calibri"/>
-                <a:cs typeface="Calibri"/>
-              </a:defRPr>
-            </a:pPr>
-            <a:r>
-              <a:rPr sz="1200" b="0">
-                <a:solidFill>
-                  <a:srgbClr val="1F40CB"/>
-                </a:solidFill>
-                <a:latin typeface="Calibri"/>
-                <a:ea typeface="Calibri"/>
-                <a:cs typeface="Calibri"/>
-              </a:rPr>
-              <a:t>183.7620 EUR</a:t>
-            </a:r>
-          </a:p>
-        </p:txBody>
-      </p:sp>
-      <p:sp>
-        <p:nvSpPr>
-          <p:cNvPr id="19" name="ingestion-5">
-            <a:extLst xmlns:a="http://schemas.openxmlformats.org/drawingml/2006/main">
-              <a:ext uri="{FF2B5EF4-FFF2-40B4-BE49-F238E27FC236}">
-                <a16:creationId xmlns:a16="http://schemas.microsoft.com/office/drawing/2014/main" id="{43F7E1B1-E237-4A79-B0C4-38965CF32D74}"/>
-              </a:ext>
-            </a:extLst>
-          </p:cNvPr>
-          <p:cNvSpPr>
-            <a:spLocks xmlns:a="http://schemas.openxmlformats.org/drawingml/2006/main" noGrp="1"/>
-          </p:cNvSpPr>
-          <p:nvPr/>
-        </p:nvSpPr>
-        <p:spPr>
-          <a:xfrm xmlns:a="http://schemas.openxmlformats.org/drawingml/2006/main">
-            <a:off x="12268200" y="3086100"/>
-            <a:ext cx="2247900" cy="2266950"/>
-          </a:xfrm>
-          <a:prstGeom xmlns:a="http://schemas.openxmlformats.org/drawingml/2006/main" prst="roundRect">
-            <a:avLst>
-              <a:gd name="adj" fmla="val 5085"/>
-            </a:avLst>
-          </a:prstGeom>
-          <a:solidFill xmlns:a="http://schemas.openxmlformats.org/drawingml/2006/main">
-            <a:srgbClr val="FFFFFF"/>
-          </a:solidFill>
-          <a:ln xmlns:a="http://schemas.openxmlformats.org/drawingml/2006/main" w="19050">
-            <a:solidFill>
-              <a:srgbClr val="F07D00"/>
-            </a:solidFill>
-            <a:prstDash val="solid"/>
-          </a:ln>
-        </p:spPr>
-      </p:sp>
-      <p:sp>
-        <p:nvSpPr>
-          <p:cNvPr id="20" name="">
-            <a:extLst xmlns:a="http://schemas.openxmlformats.org/drawingml/2006/main">
-              <a:ext uri="{FF2B5EF4-FFF2-40B4-BE49-F238E27FC236}">
-                <a16:creationId xmlns:a16="http://schemas.microsoft.com/office/drawing/2014/main" id="{51764D39-05B0-4F08-BC2B-2221BE2F38D6}"/>
-              </a:ext>
-            </a:extLst>
-          </p:cNvPr>
-          <p:cNvSpPr>
-            <a:spLocks xmlns:a="http://schemas.openxmlformats.org/drawingml/2006/main" noGrp="1"/>
-          </p:cNvSpPr>
-          <p:nvPr/>
-        </p:nvSpPr>
-        <p:spPr>
-          <a:xfrm xmlns:a="http://schemas.openxmlformats.org/drawingml/2006/main">
-            <a:off x="12458700" y="3295650"/>
-            <a:ext cx="514350" cy="285750"/>
-          </a:xfrm>
-          <a:prstGeom xmlns:a="http://schemas.openxmlformats.org/drawingml/2006/main" prst="rect">
-            <a:avLst/>
-          </a:prstGeom>
-          <a:noFill xmlns:a="http://schemas.openxmlformats.org/drawingml/2006/main"/>
-          <a:ln xmlns:a="http://schemas.openxmlformats.org/drawingml/2006/main" w="0">
-            <a:noFill/>
-            <a:prstDash val="solid"/>
-          </a:ln>
-        </p:spPr>
-        <p:txBody>
-          <a:bodyPr xmlns:a="http://schemas.openxmlformats.org/drawingml/2006/main" wrap="square" lIns="0" tIns="0" rIns="0" bIns="0" anchor="ctr">
-            <a:noAutofit/>
-          </a:bodyPr>
-          <a:lstStyle xmlns:a="http://schemas.openxmlformats.org/drawingml/2006/main"/>
-          <a:p xmlns:a="http://schemas.openxmlformats.org/drawingml/2006/main">
-            <a:pPr algn="l">
-              <a:lnSpc>
-                <a:spcPct val="100000"/>
-              </a:lnSpc>
-              <a:buNone/>
-              <a:defRPr sz="1350" b="1">
-                <a:solidFill>
-                  <a:srgbClr val="00A2EB"/>
-                </a:solidFill>
-                <a:latin typeface="Calibri"/>
-                <a:ea typeface="Calibri"/>
-                <a:cs typeface="Calibri"/>
-              </a:defRPr>
-            </a:pPr>
-            <a:r>
-              <a:rPr sz="1800" b="1">
-                <a:solidFill>
-                  <a:srgbClr val="00A2EB"/>
-                </a:solidFill>
-                <a:latin typeface="Calibri"/>
-                <a:ea typeface="Calibri"/>
-                <a:cs typeface="Calibri"/>
-              </a:rPr>
-              <a:t>05</a:t>
-            </a:r>
-          </a:p>
-        </p:txBody>
-      </p:sp>
-      <p:sp>
-        <p:nvSpPr>
-          <p:cNvPr id="21" name="">
-            <a:extLst xmlns:a="http://schemas.openxmlformats.org/drawingml/2006/main">
-              <a:ext uri="{FF2B5EF4-FFF2-40B4-BE49-F238E27FC236}">
-                <a16:creationId xmlns:a16="http://schemas.microsoft.com/office/drawing/2014/main" id="{C0F4CBB5-9FF7-4C7B-8D8C-5AA3541DD5E4}"/>
-              </a:ext>
-            </a:extLst>
-          </p:cNvPr>
-          <p:cNvSpPr>
-            <a:spLocks xmlns:a="http://schemas.openxmlformats.org/drawingml/2006/main" noGrp="1"/>
-          </p:cNvSpPr>
-          <p:nvPr/>
-        </p:nvSpPr>
-        <p:spPr>
-          <a:xfrm xmlns:a="http://schemas.openxmlformats.org/drawingml/2006/main">
-            <a:off x="12382500" y="3752850"/>
-            <a:ext cx="2019300" cy="685800"/>
-          </a:xfrm>
-          <a:prstGeom xmlns:a="http://schemas.openxmlformats.org/drawingml/2006/main" prst="rect">
-            <a:avLst/>
-          </a:prstGeom>
-          <a:noFill xmlns:a="http://schemas.openxmlformats.org/drawingml/2006/main"/>
-          <a:ln xmlns:a="http://schemas.openxmlformats.org/drawingml/2006/main" w="0">
-            <a:noFill/>
-            <a:prstDash val="solid"/>
-          </a:ln>
-        </p:spPr>
-        <p:txBody>
-          <a:bodyPr xmlns:a="http://schemas.openxmlformats.org/drawingml/2006/main" wrap="square" lIns="0" tIns="0" rIns="0" bIns="0" anchor="ctr">
-            <a:normAutofit fontScale="100000"/>
-          </a:bodyPr>
-          <a:lstStyle xmlns:a="http://schemas.openxmlformats.org/drawingml/2006/main"/>
-          <a:p xmlns:a="http://schemas.openxmlformats.org/drawingml/2006/main">
-            <a:pPr algn="l">
-              <a:lnSpc>
-                <a:spcPct val="100000"/>
-              </a:lnSpc>
-              <a:buNone/>
-              <a:defRPr sz="1950" b="1">
-                <a:solidFill>
-                  <a:srgbClr val="051C2A"/>
-                </a:solidFill>
-                <a:latin typeface="Calibri"/>
-                <a:ea typeface="Calibri"/>
-                <a:cs typeface="Calibri"/>
-              </a:defRPr>
-            </a:pPr>
-            <a:r>
-              <a:rPr sz="1950" b="1">
-                <a:solidFill>
-                  <a:srgbClr val="051C2A"/>
-                </a:solidFill>
-                <a:latin typeface="Calibri"/>
-                <a:ea typeface="Calibri"/>
-                <a:cs typeface="Calibri"/>
-              </a:rPr>
-              <a:t>Final</a:t>
-            </a:r>
-          </a:p>
-        </p:txBody>
-      </p:sp>
-      <p:sp>
-        <p:nvSpPr>
-          <p:cNvPr id="22" name="">
-            <a:extLst xmlns:a="http://schemas.openxmlformats.org/drawingml/2006/main">
-              <a:ext uri="{FF2B5EF4-FFF2-40B4-BE49-F238E27FC236}">
-                <a16:creationId xmlns:a16="http://schemas.microsoft.com/office/drawing/2014/main" id="{8856B515-B8BF-4B9C-8D6B-EC909D2B3B4E}"/>
-              </a:ext>
-            </a:extLst>
-          </p:cNvPr>
-          <p:cNvSpPr>
-            <a:spLocks xmlns:a="http://schemas.openxmlformats.org/drawingml/2006/main" noGrp="1"/>
-          </p:cNvSpPr>
-          <p:nvPr/>
-        </p:nvSpPr>
-        <p:spPr>
-          <a:xfrm xmlns:a="http://schemas.openxmlformats.org/drawingml/2006/main">
-            <a:off x="12458700" y="4610100"/>
-            <a:ext cx="1866900" cy="514350"/>
-          </a:xfrm>
-          <a:prstGeom xmlns:a="http://schemas.openxmlformats.org/drawingml/2006/main" prst="rect">
-            <a:avLst/>
-          </a:prstGeom>
-          <a:noFill xmlns:a="http://schemas.openxmlformats.org/drawingml/2006/main"/>
-          <a:ln xmlns:a="http://schemas.openxmlformats.org/drawingml/2006/main" w="0">
-            <a:noFill/>
-            <a:prstDash val="solid"/>
-          </a:ln>
-        </p:spPr>
-        <p:txBody>
-          <a:bodyPr xmlns:a="http://schemas.openxmlformats.org/drawingml/2006/main" wrap="square" lIns="0" tIns="0" rIns="0" bIns="0" anchor="ctr">
-            <a:normAutofit fontScale="100000"/>
-          </a:bodyPr>
-          <a:lstStyle xmlns:a="http://schemas.openxmlformats.org/drawingml/2006/main"/>
-          <a:p xmlns:a="http://schemas.openxmlformats.org/drawingml/2006/main">
-            <a:pPr algn="l">
-              <a:lnSpc>
-                <a:spcPct val="100000"/>
-              </a:lnSpc>
-              <a:buNone/>
-              <a:defRPr sz="1200" b="0">
-                <a:solidFill>
-                  <a:srgbClr val="1F40CB"/>
-                </a:solidFill>
-                <a:latin typeface="Calibri"/>
-                <a:ea typeface="Calibri"/>
-                <a:cs typeface="Calibri"/>
-              </a:defRPr>
-            </a:pPr>
-            <a:r>
-              <a:rPr sz="1200" b="0">
-                <a:solidFill>
-                  <a:srgbClr val="1F40CB"/>
-                </a:solidFill>
-                <a:latin typeface="Calibri"/>
-                <a:ea typeface="Calibri"/>
-                <a:cs typeface="Calibri"/>
-              </a:rPr>
-              <a:t>from tool data</a:t>
-            </a:r>
-          </a:p>
-        </p:txBody>
-      </p:sp>
-      <p:cxnSp>
-        <p:nvCxnSpPr>
-          <p:cNvPr id="525" name=""/>
-          <p:cNvCxnSpPr>
-            <a:stCxn xmlns:a="http://schemas.openxmlformats.org/drawingml/2006/main" id="3" idx="3"/>
-            <a:endCxn xmlns:a="http://schemas.openxmlformats.org/drawingml/2006/main" id="7" idx="1"/>
-          </p:cNvCxnSpPr>
-          <p:nvPr/>
-        </p:nvCxnSpPr>
-        <p:spPr>
-          <a:xfrm xmlns:a="http://schemas.openxmlformats.org/drawingml/2006/main">
-            <a:off x="3238500" y="4219575"/>
-            <a:ext cx="571500" cy="0"/>
-          </a:xfrm>
-          <a:prstGeom xmlns:a="http://schemas.openxmlformats.org/drawingml/2006/main" prst="straightConnector1">
-            <a:avLst/>
-          </a:prstGeom>
-          <a:ln xmlns:a="http://schemas.openxmlformats.org/drawingml/2006/main" w="28575">
-            <a:solidFill>
-              <a:srgbClr val="9A9A9F"/>
-            </a:solidFill>
-            <a:prstDash val="solid"/>
-            <a:tailEnd type="triangle" w="med" len="med"/>
-          </a:ln>
-        </p:spPr>
-      </p:cxnSp>
-      <p:cxnSp>
-        <p:nvCxnSpPr>
-          <p:cNvPr id="526" name=""/>
-          <p:cNvCxnSpPr>
-            <a:stCxn xmlns:a="http://schemas.openxmlformats.org/drawingml/2006/main" id="7" idx="3"/>
-            <a:endCxn xmlns:a="http://schemas.openxmlformats.org/drawingml/2006/main" id="11" idx="1"/>
-          </p:cNvCxnSpPr>
-          <p:nvPr/>
-        </p:nvCxnSpPr>
-        <p:spPr>
-          <a:xfrm xmlns:a="http://schemas.openxmlformats.org/drawingml/2006/main">
-            <a:off x="6057900" y="4219575"/>
-            <a:ext cx="571500" cy="0"/>
-          </a:xfrm>
-          <a:prstGeom xmlns:a="http://schemas.openxmlformats.org/drawingml/2006/main" prst="straightConnector1">
-            <a:avLst/>
-          </a:prstGeom>
-          <a:ln xmlns:a="http://schemas.openxmlformats.org/drawingml/2006/main" w="28575">
-            <a:solidFill>
-              <a:srgbClr val="9A9A9F"/>
-            </a:solidFill>
-            <a:prstDash val="solid"/>
-            <a:tailEnd type="triangle" w="med" len="med"/>
-          </a:ln>
-        </p:spPr>
-      </p:cxnSp>
-      <p:cxnSp>
-        <p:nvCxnSpPr>
-          <p:cNvPr id="527" name=""/>
-          <p:cNvCxnSpPr>
-            <a:stCxn xmlns:a="http://schemas.openxmlformats.org/drawingml/2006/main" id="11" idx="3"/>
-            <a:endCxn xmlns:a="http://schemas.openxmlformats.org/drawingml/2006/main" id="15" idx="1"/>
-          </p:cNvCxnSpPr>
-          <p:nvPr/>
-        </p:nvCxnSpPr>
-        <p:spPr>
-          <a:xfrm xmlns:a="http://schemas.openxmlformats.org/drawingml/2006/main">
-            <a:off x="8877300" y="4219575"/>
-            <a:ext cx="571500" cy="0"/>
-          </a:xfrm>
-          <a:prstGeom xmlns:a="http://schemas.openxmlformats.org/drawingml/2006/main" prst="straightConnector1">
-            <a:avLst/>
-          </a:prstGeom>
-          <a:ln xmlns:a="http://schemas.openxmlformats.org/drawingml/2006/main" w="28575">
-            <a:solidFill>
-              <a:srgbClr val="9A9A9F"/>
-            </a:solidFill>
-            <a:prstDash val="solid"/>
-            <a:tailEnd type="triangle" w="med" len="med"/>
-          </a:ln>
-        </p:spPr>
-      </p:cxnSp>
-      <p:cxnSp>
-        <p:nvCxnSpPr>
-          <p:cNvPr id="528" name=""/>
-          <p:cNvCxnSpPr>
-            <a:stCxn xmlns:a="http://schemas.openxmlformats.org/drawingml/2006/main" id="15" idx="3"/>
-            <a:endCxn xmlns:a="http://schemas.openxmlformats.org/drawingml/2006/main" id="19" idx="1"/>
-          </p:cNvCxnSpPr>
-          <p:nvPr/>
-        </p:nvCxnSpPr>
-        <p:spPr>
-          <a:xfrm xmlns:a="http://schemas.openxmlformats.org/drawingml/2006/main">
-            <a:off x="11696700" y="4219575"/>
-            <a:ext cx="571500" cy="0"/>
-          </a:xfrm>
-          <a:prstGeom xmlns:a="http://schemas.openxmlformats.org/drawingml/2006/main" prst="straightConnector1">
-            <a:avLst/>
-          </a:prstGeom>
-          <a:ln xmlns:a="http://schemas.openxmlformats.org/drawingml/2006/main" w="28575">
-            <a:solidFill>
-              <a:srgbClr val="9A9A9F"/>
-            </a:solidFill>
-            <a:prstDash val="solid"/>
-            <a:tailEnd type="triangle" w="med" len="med"/>
-          </a:ln>
-        </p:spPr>
-      </p:cxnSp>
-      <p:sp>
-        <p:nvSpPr>
-          <p:cNvPr id="27" name="">
-            <a:extLst xmlns:a="http://schemas.openxmlformats.org/drawingml/2006/main">
-              <a:ext uri="{FF2B5EF4-FFF2-40B4-BE49-F238E27FC236}">
-                <a16:creationId xmlns:a16="http://schemas.microsoft.com/office/drawing/2014/main" id="{79128475-820B-447C-A724-7D8A31328FFE}"/>
-              </a:ext>
-            </a:extLst>
-          </p:cNvPr>
-          <p:cNvSpPr>
-            <a:spLocks xmlns:a="http://schemas.openxmlformats.org/drawingml/2006/main" noGrp="1"/>
-          </p:cNvSpPr>
-          <p:nvPr/>
-        </p:nvSpPr>
-        <p:spPr>
-          <a:xfrm xmlns:a="http://schemas.openxmlformats.org/drawingml/2006/main">
-            <a:off x="2381250" y="6210300"/>
-            <a:ext cx="10477500" cy="457200"/>
-          </a:xfrm>
-          <a:prstGeom xmlns:a="http://schemas.openxmlformats.org/drawingml/2006/main" prst="rect">
-            <a:avLst/>
-          </a:prstGeom>
-          <a:noFill xmlns:a="http://schemas.openxmlformats.org/drawingml/2006/main"/>
-          <a:ln xmlns:a="http://schemas.openxmlformats.org/drawingml/2006/main" w="0">
-            <a:noFill/>
-            <a:prstDash val="solid"/>
-          </a:ln>
-        </p:spPr>
-        <p:txBody>
-          <a:bodyPr xmlns:a="http://schemas.openxmlformats.org/drawingml/2006/main" wrap="square" lIns="0" tIns="0" rIns="0" bIns="0" anchor="ctr">
-            <a:normAutofit fontScale="100000"/>
-          </a:bodyPr>
-          <a:lstStyle xmlns:a="http://schemas.openxmlformats.org/drawingml/2006/main"/>
-          <a:p xmlns:a="http://schemas.openxmlformats.org/drawingml/2006/main">
-            <a:pPr algn="ctr">
-              <a:lnSpc>
-                <a:spcPct val="100000"/>
-              </a:lnSpc>
-              <a:buNone/>
-              <a:defRPr sz="2100" b="1">
-                <a:solidFill>
-                  <a:srgbClr val="051C2A"/>
-                </a:solidFill>
-                <a:latin typeface="Calibri"/>
-                <a:ea typeface="Calibri"/>
-                <a:cs typeface="Calibri"/>
-              </a:defRPr>
-            </a:pPr>
-            <a:r>
-              <a:rPr sz="2100" b="1">
-                <a:solidFill>
-                  <a:srgbClr val="051C2A"/>
-                </a:solidFill>
-                <a:latin typeface="Calibri"/>
-                <a:ea typeface="Calibri"/>
-                <a:cs typeface="Calibri"/>
-              </a:rPr>
-              <a:t>The FX call uses the price returned by the first tool.</a:t>
-            </a:r>
-          </a:p>
-        </p:txBody>
-      </p:sp>
-      <p:sp>
-        <p:nvSpPr>
-          <p:cNvPr id="28" name="">
-            <a:extLst xmlns:a="http://schemas.openxmlformats.org/drawingml/2006/main">
-              <a:ext uri="{FF2B5EF4-FFF2-40B4-BE49-F238E27FC236}">
-                <a16:creationId xmlns:a16="http://schemas.microsoft.com/office/drawing/2014/main" id="{685F2AAD-81FC-436A-88F7-89F49C9F1671}"/>
-              </a:ext>
-            </a:extLst>
-          </p:cNvPr>
-          <p:cNvSpPr>
-            <a:spLocks xmlns:a="http://schemas.openxmlformats.org/drawingml/2006/main" noGrp="1"/>
-          </p:cNvSpPr>
-          <p:nvPr/>
-        </p:nvSpPr>
-        <p:spPr>
-          <a:xfrm xmlns:a="http://schemas.openxmlformats.org/drawingml/2006/main">
-            <a:off x="1885950" y="6838950"/>
-            <a:ext cx="4476750" cy="323850"/>
-          </a:xfrm>
-          <a:prstGeom xmlns:a="http://schemas.openxmlformats.org/drawingml/2006/main" prst="rect">
-            <a:avLst/>
-          </a:prstGeom>
-          <a:noFill xmlns:a="http://schemas.openxmlformats.org/drawingml/2006/main"/>
-          <a:ln xmlns:a="http://schemas.openxmlformats.org/drawingml/2006/main" w="0">
-            <a:noFill/>
-            <a:prstDash val="solid"/>
-          </a:ln>
-        </p:spPr>
-        <p:txBody>
-          <a:bodyPr xmlns:a="http://schemas.openxmlformats.org/drawingml/2006/main" wrap="square" lIns="0" tIns="0" rIns="0" bIns="0" anchor="ctr">
-            <a:normAutofit fontScale="100000"/>
-          </a:bodyPr>
-          <a:lstStyle xmlns:a="http://schemas.openxmlformats.org/drawingml/2006/main"/>
-          <a:p xmlns:a="http://schemas.openxmlformats.org/drawingml/2006/main">
-            <a:pPr algn="ctr">
-              <a:lnSpc>
-                <a:spcPct val="100000"/>
-              </a:lnSpc>
-              <a:buNone/>
-              <a:defRPr sz="1500" b="0">
-                <a:solidFill>
-                  <a:srgbClr val="64748B"/>
-                </a:solidFill>
-                <a:latin typeface="Calibri"/>
-                <a:ea typeface="Calibri"/>
-                <a:cs typeface="Calibri"/>
-              </a:defRPr>
-            </a:pPr>
-            <a:r>
-              <a:rPr sz="1500" b="0">
-                <a:solidFill>
-                  <a:srgbClr val="64748B"/>
-                </a:solidFill>
-                <a:latin typeface="Calibri"/>
-                <a:ea typeface="Calibri"/>
-                <a:cs typeface="Calibri"/>
-              </a:rPr>
-              <a:t>MAX_STEPS = 4</a:t>
-            </a:r>
-          </a:p>
-        </p:txBody>
-      </p:sp>
-      <p:sp>
-        <p:nvSpPr>
-          <p:cNvPr id="29" name="">
-            <a:extLst xmlns:a="http://schemas.openxmlformats.org/drawingml/2006/main">
-              <a:ext uri="{FF2B5EF4-FFF2-40B4-BE49-F238E27FC236}">
-                <a16:creationId xmlns:a16="http://schemas.microsoft.com/office/drawing/2014/main" id="{CDE04AD7-6CBE-4792-B549-765578FB3E1E}"/>
-              </a:ext>
-            </a:extLst>
-          </p:cNvPr>
-          <p:cNvSpPr>
-            <a:spLocks xmlns:a="http://schemas.openxmlformats.org/drawingml/2006/main" noGrp="1"/>
-          </p:cNvSpPr>
-          <p:nvPr/>
-        </p:nvSpPr>
-        <p:spPr>
-          <a:xfrm xmlns:a="http://schemas.openxmlformats.org/drawingml/2006/main">
-            <a:off x="8801100" y="6838950"/>
-            <a:ext cx="4762500" cy="323850"/>
-          </a:xfrm>
-          <a:prstGeom xmlns:a="http://schemas.openxmlformats.org/drawingml/2006/main" prst="rect">
-            <a:avLst/>
-          </a:prstGeom>
-          <a:noFill xmlns:a="http://schemas.openxmlformats.org/drawingml/2006/main"/>
-          <a:ln xmlns:a="http://schemas.openxmlformats.org/drawingml/2006/main" w="0">
-            <a:noFill/>
-            <a:prstDash val="solid"/>
-          </a:ln>
-        </p:spPr>
-        <p:txBody>
-          <a:bodyPr xmlns:a="http://schemas.openxmlformats.org/drawingml/2006/main" wrap="square" lIns="0" tIns="0" rIns="0" bIns="0" anchor="ctr">
-            <a:normAutofit fontScale="100000"/>
-          </a:bodyPr>
-          <a:lstStyle xmlns:a="http://schemas.openxmlformats.org/drawingml/2006/main"/>
-          <a:p xmlns:a="http://schemas.openxmlformats.org/drawingml/2006/main">
-            <a:pPr algn="ctr">
-              <a:lnSpc>
-                <a:spcPct val="100000"/>
-              </a:lnSpc>
-              <a:buNone/>
-              <a:defRPr sz="1500" b="0">
-                <a:solidFill>
-                  <a:srgbClr val="64748B"/>
-                </a:solidFill>
-                <a:latin typeface="Calibri"/>
-                <a:ea typeface="Calibri"/>
-                <a:cs typeface="Calibri"/>
-              </a:defRPr>
-            </a:pPr>
-            <a:r>
-              <a:rPr sz="1500" b="0">
-                <a:solidFill>
-                  <a:srgbClr val="64748B"/>
-                </a:solidFill>
-                <a:latin typeface="Calibri"/>
-                <a:ea typeface="Calibri"/>
-                <a:cs typeface="Calibri"/>
-              </a:rPr>
-              <a:t>two calls · one answer</a:t>
-            </a:r>
-          </a:p>
-        </p:txBody>
-      </p:sp>
-      <p:sp>
-        <p:nvSpPr>
-          <p:cNvPr id="30" name="">
-            <a:extLst xmlns:a="http://schemas.openxmlformats.org/drawingml/2006/main">
-              <a:ext uri="{FF2B5EF4-FFF2-40B4-BE49-F238E27FC236}">
-                <a16:creationId xmlns:a16="http://schemas.microsoft.com/office/drawing/2014/main" id="{28CBA7AE-993C-4F84-A696-8D1323AC4E80}"/>
-              </a:ext>
-            </a:extLst>
-          </p:cNvPr>
-          <p:cNvSpPr>
-            <a:spLocks xmlns:a="http://schemas.openxmlformats.org/drawingml/2006/main" noGrp="1"/>
-          </p:cNvSpPr>
-          <p:nvPr/>
-        </p:nvSpPr>
-        <p:spPr>
-          <a:xfrm xmlns:a="http://schemas.openxmlformats.org/drawingml/2006/main">
-            <a:off x="857250" y="7896225"/>
-            <a:ext cx="13525500" cy="28575"/>
-          </a:xfrm>
-          <a:prstGeom xmlns:a="http://schemas.openxmlformats.org/drawingml/2006/main" prst="rect">
-            <a:avLst/>
-          </a:prstGeom>
-          <a:solidFill xmlns:a="http://schemas.openxmlformats.org/drawingml/2006/main">
-            <a:srgbClr val="E4E7E9"/>
-          </a:solidFill>
-          <a:ln xmlns:a="http://schemas.openxmlformats.org/drawingml/2006/main" w="0">
-            <a:solidFill>
-              <a:srgbClr val="E4E7E9"/>
-            </a:solidFill>
-            <a:prstDash val="solid"/>
-          </a:ln>
-        </p:spPr>
-      </p:sp>
-      <p:sp>
-        <p:nvSpPr>
-          <p:cNvPr id="31" name="">
-            <a:extLst xmlns:a="http://schemas.openxmlformats.org/drawingml/2006/main">
-              <a:ext uri="{FF2B5EF4-FFF2-40B4-BE49-F238E27FC236}">
-                <a16:creationId xmlns:a16="http://schemas.microsoft.com/office/drawing/2014/main" id="{DE97BF4D-EDBC-4480-A82B-512A72221950}"/>
-              </a:ext>
-            </a:extLst>
-          </p:cNvPr>
-          <p:cNvSpPr>
-            <a:spLocks xmlns:a="http://schemas.openxmlformats.org/drawingml/2006/main" noGrp="1"/>
-          </p:cNvSpPr>
-          <p:nvPr/>
-        </p:nvSpPr>
-        <p:spPr>
-          <a:xfrm xmlns:a="http://schemas.openxmlformats.org/drawingml/2006/main">
-            <a:off x="857250" y="7896225"/>
-            <a:ext cx="8001000" cy="38100"/>
-          </a:xfrm>
-          <a:prstGeom xmlns:a="http://schemas.openxmlformats.org/drawingml/2006/main" prst="rect">
-            <a:avLst/>
-          </a:prstGeom>
-          <a:solidFill xmlns:a="http://schemas.openxmlformats.org/drawingml/2006/main">
-            <a:srgbClr val="00A2EB"/>
-          </a:solidFill>
-          <a:ln xmlns:a="http://schemas.openxmlformats.org/drawingml/2006/main" w="0">
-            <a:solidFill>
-              <a:srgbClr val="00A2EB"/>
-            </a:solidFill>
-            <a:prstDash val="solid"/>
-          </a:ln>
-        </p:spPr>
-      </p:sp>
-      <p:sp>
-        <p:nvSpPr>
-          <p:cNvPr id="32" name="">
-            <a:extLst xmlns:a="http://schemas.openxmlformats.org/drawingml/2006/main">
-              <a:ext uri="{FF2B5EF4-FFF2-40B4-BE49-F238E27FC236}">
-                <a16:creationId xmlns:a16="http://schemas.microsoft.com/office/drawing/2014/main" id="{49281B64-2F0F-4357-A085-C65451F28236}"/>
-              </a:ext>
-            </a:extLst>
-          </p:cNvPr>
-          <p:cNvSpPr>
-            <a:spLocks xmlns:a="http://schemas.openxmlformats.org/drawingml/2006/main" noGrp="1"/>
-          </p:cNvSpPr>
-          <p:nvPr/>
-        </p:nvSpPr>
-        <p:spPr>
-          <a:xfrm xmlns:a="http://schemas.openxmlformats.org/drawingml/2006/main">
-            <a:off x="971550" y="8058150"/>
-            <a:ext cx="3714750" cy="323850"/>
-          </a:xfrm>
-          <a:prstGeom xmlns:a="http://schemas.openxmlformats.org/drawingml/2006/main" prst="rect">
-            <a:avLst/>
-          </a:prstGeom>
-          <a:noFill xmlns:a="http://schemas.openxmlformats.org/drawingml/2006/main"/>
-          <a:ln xmlns:a="http://schemas.openxmlformats.org/drawingml/2006/main" w="0">
-            <a:noFill/>
-            <a:prstDash val="solid"/>
-          </a:ln>
-        </p:spPr>
-        <p:txBody>
-          <a:bodyPr xmlns:a="http://schemas.openxmlformats.org/drawingml/2006/main" wrap="square" lIns="0" tIns="0" rIns="0" bIns="0" anchor="ctr">
-            <a:normAutofit fontScale="100000"/>
-          </a:bodyPr>
-          <a:lstStyle xmlns:a="http://schemas.openxmlformats.org/drawingml/2006/main"/>
-          <a:p xmlns:a="http://schemas.openxmlformats.org/drawingml/2006/main">
-            <a:pPr algn="l">
-              <a:lnSpc>
-                <a:spcPct val="100000"/>
-              </a:lnSpc>
-              <a:buNone/>
-              <a:defRPr sz="1200" b="0">
+              <a:defRPr sz="1200" b="1">
                 <a:solidFill>
                   <a:srgbClr val="9A9A9F"/>
                 </a:solidFill>
@@ -14356,7 +12104,7 @@
               </a:defRPr>
             </a:pPr>
             <a:r>
-              <a:rPr sz="1200" b="0">
+              <a:rPr sz="1200" b="1">
                 <a:solidFill>
                   <a:srgbClr val="9A9A9F"/>
                 </a:solidFill>
@@ -14364,135 +12112,36 @@
                 <a:ea typeface="Calibri"/>
                 <a:cs typeface="Calibri"/>
               </a:rPr>
-              <a:t>First Finance - Arnaud Demes</a:t>
-            </a:r>
-          </a:p>
-        </p:txBody>
-      </p:sp>
-      <p:sp>
-        <p:nvSpPr>
-          <p:cNvPr id="33" name="">
-            <a:extLst xmlns:a="http://schemas.openxmlformats.org/drawingml/2006/main">
-              <a:ext uri="{FF2B5EF4-FFF2-40B4-BE49-F238E27FC236}">
-                <a16:creationId xmlns:a16="http://schemas.microsoft.com/office/drawing/2014/main" id="{EAA325A4-7EC6-42CE-A13A-4B38A32DE7F2}"/>
-              </a:ext>
-            </a:extLst>
-          </p:cNvPr>
-          <p:cNvSpPr>
-            <a:spLocks xmlns:a="http://schemas.openxmlformats.org/drawingml/2006/main" noGrp="1"/>
-          </p:cNvSpPr>
-          <p:nvPr/>
-        </p:nvSpPr>
-        <p:spPr>
-          <a:xfrm xmlns:a="http://schemas.openxmlformats.org/drawingml/2006/main">
-            <a:off x="12192000" y="8058150"/>
-            <a:ext cx="1809750" cy="323850"/>
-          </a:xfrm>
-          <a:prstGeom xmlns:a="http://schemas.openxmlformats.org/drawingml/2006/main" prst="rect">
-            <a:avLst/>
-          </a:prstGeom>
-          <a:noFill xmlns:a="http://schemas.openxmlformats.org/drawingml/2006/main"/>
-          <a:ln xmlns:a="http://schemas.openxmlformats.org/drawingml/2006/main" w="0">
-            <a:noFill/>
-            <a:prstDash val="solid"/>
-          </a:ln>
-        </p:spPr>
-        <p:txBody>
-          <a:bodyPr xmlns:a="http://schemas.openxmlformats.org/drawingml/2006/main" wrap="square" lIns="0" tIns="0" rIns="0" bIns="0" anchor="ctr">
-            <a:normAutofit fontScale="100000"/>
-          </a:bodyPr>
-          <a:lstStyle xmlns:a="http://schemas.openxmlformats.org/drawingml/2006/main"/>
-          <a:p xmlns:a="http://schemas.openxmlformats.org/drawingml/2006/main">
-            <a:pPr algn="r">
-              <a:lnSpc>
-                <a:spcPct val="100000"/>
-              </a:lnSpc>
-              <a:buNone/>
-              <a:defRPr sz="1200" b="1">
-                <a:solidFill>
-                  <a:srgbClr val="9A9A9F"/>
-                </a:solidFill>
-                <a:latin typeface="Calibri"/>
-                <a:ea typeface="Calibri"/>
-                <a:cs typeface="Calibri"/>
-              </a:defRPr>
-            </a:pPr>
-            <a:r>
-              <a:rPr sz="1200" b="1">
-                <a:solidFill>
-                  <a:srgbClr val="9A9A9F"/>
-                </a:solidFill>
-                <a:latin typeface="Calibri"/>
-                <a:ea typeface="Calibri"/>
-                <a:cs typeface="Calibri"/>
-              </a:rPr>
-              <a:t>AGENT</a:t>
-            </a:r>
-          </a:p>
-        </p:txBody>
-      </p:sp>
-      <p:sp>
-        <p:nvSpPr>
-          <p:cNvPr id="34" name="">
-            <a:extLst xmlns:a="http://schemas.openxmlformats.org/drawingml/2006/main">
-              <a:ext uri="{FF2B5EF4-FFF2-40B4-BE49-F238E27FC236}">
-                <a16:creationId xmlns:a16="http://schemas.microsoft.com/office/drawing/2014/main" id="{5F7FB65A-4A0D-4595-92F4-FD9B71638842}"/>
-              </a:ext>
-            </a:extLst>
-          </p:cNvPr>
-          <p:cNvSpPr>
-            <a:spLocks xmlns:a="http://schemas.openxmlformats.org/drawingml/2006/main" noGrp="1"/>
-          </p:cNvSpPr>
-          <p:nvPr/>
-        </p:nvSpPr>
-        <p:spPr>
-          <a:xfrm xmlns:a="http://schemas.openxmlformats.org/drawingml/2006/main">
-            <a:off x="14135100" y="8058150"/>
-            <a:ext cx="266700" cy="323850"/>
-          </a:xfrm>
-          <a:prstGeom xmlns:a="http://schemas.openxmlformats.org/drawingml/2006/main" prst="rect">
-            <a:avLst/>
-          </a:prstGeom>
-          <a:noFill xmlns:a="http://schemas.openxmlformats.org/drawingml/2006/main"/>
-          <a:ln xmlns:a="http://schemas.openxmlformats.org/drawingml/2006/main" w="0">
-            <a:noFill/>
-            <a:prstDash val="solid"/>
-          </a:ln>
-        </p:spPr>
-        <p:txBody>
-          <a:bodyPr xmlns:a="http://schemas.openxmlformats.org/drawingml/2006/main" wrap="square" lIns="0" tIns="0" rIns="0" bIns="0" anchor="ctr">
-            <a:normAutofit fontScale="100000"/>
-          </a:bodyPr>
-          <a:lstStyle xmlns:a="http://schemas.openxmlformats.org/drawingml/2006/main"/>
-          <a:p xmlns:a="http://schemas.openxmlformats.org/drawingml/2006/main">
-            <a:pPr algn="r">
-              <a:lnSpc>
-                <a:spcPct val="100000"/>
-              </a:lnSpc>
-              <a:buNone/>
-              <a:defRPr sz="1200" b="1">
-                <a:solidFill>
-                  <a:srgbClr val="9A9A9F"/>
-                </a:solidFill>
-                <a:latin typeface="Calibri"/>
-                <a:ea typeface="Calibri"/>
-                <a:cs typeface="Calibri"/>
-              </a:defRPr>
-            </a:pPr>
-            <a:r>
-              <a:rPr sz="1200" b="1">
-                <a:solidFill>
-                  <a:srgbClr val="9A9A9F"/>
-                </a:solidFill>
-                <a:latin typeface="Calibri"/>
-                <a:ea typeface="Calibri"/>
-                <a:cs typeface="Calibri"/>
-              </a:rPr>
               <a:t>07</a:t>
             </a:r>
           </a:p>
         </p:txBody>
       </p:sp>
+      <p:pic>
+        <p:nvPicPr>
+          <p:cNvPr id="47" name=""/>
+          <p:cNvPicPr>
+            <a:picLocks xmlns:a="http://schemas.openxmlformats.org/drawingml/2006/main" noChangeAspect="1"/>
+          </p:cNvPicPr>
+          <p:nvPr/>
+        </p:nvPicPr>
+        <p:blipFill>
+          <a:blip xmlns:r="http://schemas.openxmlformats.org/officeDocument/2006/relationships" xmlns:a="http://schemas.openxmlformats.org/drawingml/2006/main" r:embed="R68224c4e7e764c35"/>
+          <a:srcRect xmlns:a="http://schemas.openxmlformats.org/drawingml/2006/main" l="0" t="11468" r="0" b="11468"/>
+          <a:stretch xmlns:a="http://schemas.openxmlformats.org/drawingml/2006/main">
+            <a:fillRect l="0" t="0" r="0" b="0"/>
+          </a:stretch>
+        </p:blipFill>
+        <p:spPr>
+          <a:xfrm xmlns:a="http://schemas.openxmlformats.org/drawingml/2006/main">
+            <a:off x="1714500" y="2238375"/>
+            <a:ext cx="11811000" cy="3790950"/>
+          </a:xfrm>
+          <a:prstGeom xmlns:a="http://schemas.openxmlformats.org/drawingml/2006/main" prst="rect">
+            <a:avLst/>
+          </a:prstGeom>
+        </p:spPr>
+      </p:pic>
     </p:spTree>
     <p:extLst>
       <p:ext uri="{BB962C8B-B14F-4D97-AF65-F5344CB8AC3E}">
@@ -14579,7 +12228,7 @@
                 <a:ea typeface="Calibri"/>
                 <a:cs typeface="Calibri"/>
               </a:rPr>
-              <a:t>EXECUTION TRACE</a:t>
+              <a:t>BOUNDED BY CODE</a:t>
             </a:r>
           </a:p>
         </p:txBody>
@@ -14641,39 +12290,223 @@
                 <a:ea typeface="Calibri"/>
                 <a:cs typeface="Calibri"/>
               </a:rPr>
-              <a:t>The trace shows why the agent works</a:t>
-            </a:r>
-          </a:p>
-        </p:txBody>
-      </p:sp>
-      <p:sp>
-        <p:nvSpPr>
-          <p:cNvPr id="3" name="ingestion-1">
-            <a:extLst xmlns:a="http://schemas.openxmlformats.org/drawingml/2006/main">
-              <a:ext uri="{FF2B5EF4-FFF2-40B4-BE49-F238E27FC236}">
-                <a16:creationId xmlns:a16="http://schemas.microsoft.com/office/drawing/2014/main" id="{EF5CEA91-0836-4E99-95C1-43A271A11FFF}"/>
-              </a:ext>
-            </a:extLst>
-          </p:cNvPr>
-          <p:cNvSpPr>
-            <a:spLocks xmlns:a="http://schemas.openxmlformats.org/drawingml/2006/main" noGrp="1"/>
-          </p:cNvSpPr>
-          <p:nvPr/>
-        </p:nvSpPr>
-        <p:spPr>
-          <a:xfrm xmlns:a="http://schemas.openxmlformats.org/drawingml/2006/main">
-            <a:off x="990600" y="3086100"/>
-            <a:ext cx="2247900" cy="2266950"/>
-          </a:xfrm>
-          <a:prstGeom xmlns:a="http://schemas.openxmlformats.org/drawingml/2006/main" prst="roundRect">
-            <a:avLst>
-              <a:gd name="adj" fmla="val 5085"/>
-            </a:avLst>
+              <a:t>An agent still needs tools, instructions and exit conditions</a:t>
+            </a:r>
+          </a:p>
+        </p:txBody>
+      </p:sp>
+      <p:sp>
+        <p:nvSpPr>
+          <p:cNvPr id="27" name="">
+            <a:extLst xmlns:a="http://schemas.openxmlformats.org/drawingml/2006/main">
+              <a:ext uri="{FF2B5EF4-FFF2-40B4-BE49-F238E27FC236}">
+                <a16:creationId xmlns:a16="http://schemas.microsoft.com/office/drawing/2014/main" id="{79128475-820B-447C-A724-7D8A31328FFE}"/>
+              </a:ext>
+            </a:extLst>
+          </p:cNvPr>
+          <p:cNvSpPr>
+            <a:spLocks xmlns:a="http://schemas.openxmlformats.org/drawingml/2006/main" noGrp="1"/>
+          </p:cNvSpPr>
+          <p:nvPr/>
+        </p:nvSpPr>
+        <p:spPr>
+          <a:xfrm xmlns:a="http://schemas.openxmlformats.org/drawingml/2006/main">
+            <a:off x="2381250" y="6210300"/>
+            <a:ext cx="10477500" cy="457200"/>
+          </a:xfrm>
+          <a:prstGeom xmlns:a="http://schemas.openxmlformats.org/drawingml/2006/main" prst="rect">
+            <a:avLst/>
+          </a:prstGeom>
+          <a:noFill xmlns:a="http://schemas.openxmlformats.org/drawingml/2006/main"/>
+          <a:ln xmlns:a="http://schemas.openxmlformats.org/drawingml/2006/main" w="0">
+            <a:noFill/>
+            <a:prstDash val="solid"/>
+          </a:ln>
+        </p:spPr>
+        <p:txBody>
+          <a:bodyPr xmlns:a="http://schemas.openxmlformats.org/drawingml/2006/main" wrap="square" lIns="0" tIns="0" rIns="0" bIns="0" anchor="ctr">
+            <a:normAutofit fontScale="100000"/>
+          </a:bodyPr>
+          <a:lstStyle xmlns:a="http://schemas.openxmlformats.org/drawingml/2006/main"/>
+          <a:p xmlns:a="http://schemas.openxmlformats.org/drawingml/2006/main">
+            <a:pPr algn="ctr">
+              <a:lnSpc>
+                <a:spcPct val="100000"/>
+              </a:lnSpc>
+              <a:buNone/>
+              <a:defRPr sz="2100" b="1">
+                <a:solidFill>
+                  <a:srgbClr val="051C2A"/>
+                </a:solidFill>
+                <a:latin typeface="Calibri"/>
+                <a:ea typeface="Calibri"/>
+                <a:cs typeface="Calibri"/>
+              </a:defRPr>
+            </a:pPr>
+            <a:r>
+              <a:rPr sz="2100" b="1">
+                <a:solidFill>
+                  <a:srgbClr val="051C2A"/>
+                </a:solidFill>
+                <a:latin typeface="Calibri"/>
+                <a:ea typeface="Calibri"/>
+                <a:cs typeface="Calibri"/>
+              </a:rPr>
+              <a:t>The model directs execution. The application owns the boundary.</a:t>
+            </a:r>
+          </a:p>
+        </p:txBody>
+      </p:sp>
+      <p:sp>
+        <p:nvSpPr>
+          <p:cNvPr id="28" name="">
+            <a:extLst xmlns:a="http://schemas.openxmlformats.org/drawingml/2006/main">
+              <a:ext uri="{FF2B5EF4-FFF2-40B4-BE49-F238E27FC236}">
+                <a16:creationId xmlns:a16="http://schemas.microsoft.com/office/drawing/2014/main" id="{685F2AAD-81FC-436A-88F7-89F49C9F1671}"/>
+              </a:ext>
+            </a:extLst>
+          </p:cNvPr>
+          <p:cNvSpPr>
+            <a:spLocks xmlns:a="http://schemas.openxmlformats.org/drawingml/2006/main" noGrp="1"/>
+          </p:cNvSpPr>
+          <p:nvPr/>
+        </p:nvSpPr>
+        <p:spPr>
+          <a:xfrm xmlns:a="http://schemas.openxmlformats.org/drawingml/2006/main">
+            <a:off x="1885950" y="6838950"/>
+            <a:ext cx="4476750" cy="323850"/>
+          </a:xfrm>
+          <a:prstGeom xmlns:a="http://schemas.openxmlformats.org/drawingml/2006/main" prst="rect">
+            <a:avLst/>
+          </a:prstGeom>
+          <a:noFill xmlns:a="http://schemas.openxmlformats.org/drawingml/2006/main"/>
+          <a:ln xmlns:a="http://schemas.openxmlformats.org/drawingml/2006/main" w="0">
+            <a:noFill/>
+            <a:prstDash val="solid"/>
+          </a:ln>
+        </p:spPr>
+        <p:txBody>
+          <a:bodyPr xmlns:a="http://schemas.openxmlformats.org/drawingml/2006/main" wrap="square" lIns="0" tIns="0" rIns="0" bIns="0" anchor="ctr">
+            <a:normAutofit fontScale="100000"/>
+          </a:bodyPr>
+          <a:lstStyle xmlns:a="http://schemas.openxmlformats.org/drawingml/2006/main"/>
+          <a:p xmlns:a="http://schemas.openxmlformats.org/drawingml/2006/main">
+            <a:pPr algn="ctr">
+              <a:lnSpc>
+                <a:spcPct val="100000"/>
+              </a:lnSpc>
+              <a:buNone/>
+              <a:defRPr sz="1500" b="0">
+                <a:solidFill>
+                  <a:srgbClr val="64748B"/>
+                </a:solidFill>
+                <a:latin typeface="Calibri"/>
+                <a:ea typeface="Calibri"/>
+                <a:cs typeface="Calibri"/>
+              </a:defRPr>
+            </a:pPr>
+            <a:r>
+              <a:rPr sz="1500" b="0">
+                <a:solidFill>
+                  <a:srgbClr val="64748B"/>
+                </a:solidFill>
+                <a:latin typeface="Calibri"/>
+                <a:ea typeface="Calibri"/>
+                <a:cs typeface="Calibri"/>
+              </a:rPr>
+              <a:t>OpenAI · single-agent system</a:t>
+            </a:r>
+          </a:p>
+        </p:txBody>
+      </p:sp>
+      <p:sp>
+        <p:nvSpPr>
+          <p:cNvPr id="29" name="">
+            <a:extLst xmlns:a="http://schemas.openxmlformats.org/drawingml/2006/main">
+              <a:ext uri="{FF2B5EF4-FFF2-40B4-BE49-F238E27FC236}">
+                <a16:creationId xmlns:a16="http://schemas.microsoft.com/office/drawing/2014/main" id="{CDE04AD7-6CBE-4792-B549-765578FB3E1E}"/>
+              </a:ext>
+            </a:extLst>
+          </p:cNvPr>
+          <p:cNvSpPr>
+            <a:spLocks xmlns:a="http://schemas.openxmlformats.org/drawingml/2006/main" noGrp="1"/>
+          </p:cNvSpPr>
+          <p:nvPr/>
+        </p:nvSpPr>
+        <p:spPr>
+          <a:xfrm xmlns:a="http://schemas.openxmlformats.org/drawingml/2006/main">
+            <a:off x="8801100" y="6838950"/>
+            <a:ext cx="4762500" cy="323850"/>
+          </a:xfrm>
+          <a:prstGeom xmlns:a="http://schemas.openxmlformats.org/drawingml/2006/main" prst="rect">
+            <a:avLst/>
+          </a:prstGeom>
+          <a:noFill xmlns:a="http://schemas.openxmlformats.org/drawingml/2006/main"/>
+          <a:ln xmlns:a="http://schemas.openxmlformats.org/drawingml/2006/main" w="0">
+            <a:noFill/>
+            <a:prstDash val="solid"/>
+          </a:ln>
+        </p:spPr>
+        <p:txBody>
+          <a:bodyPr xmlns:a="http://schemas.openxmlformats.org/drawingml/2006/main" wrap="square" lIns="0" tIns="0" rIns="0" bIns="0" anchor="ctr">
+            <a:normAutofit fontScale="100000"/>
+          </a:bodyPr>
+          <a:lstStyle xmlns:a="http://schemas.openxmlformats.org/drawingml/2006/main"/>
+          <a:p xmlns:a="http://schemas.openxmlformats.org/drawingml/2006/main">
+            <a:pPr algn="ctr">
+              <a:lnSpc>
+                <a:spcPct val="100000"/>
+              </a:lnSpc>
+              <a:buNone/>
+              <a:defRPr sz="1500" b="0">
+                <a:solidFill>
+                  <a:srgbClr val="64748B"/>
+                </a:solidFill>
+                <a:latin typeface="Calibri"/>
+                <a:ea typeface="Calibri"/>
+                <a:cs typeface="Calibri"/>
+              </a:defRPr>
+            </a:pPr>
+            <a:r>
+              <a:rPr sz="1500" b="0">
+                <a:solidFill>
+                  <a:srgbClr val="64748B"/>
+                </a:solidFill>
+                <a:latin typeface="Calibri"/>
+                <a:ea typeface="Calibri"/>
+                <a:cs typeface="Calibri"/>
+              </a:rPr>
+              <a:t>MAX_STEPS stops the loop</a:t>
+            </a:r>
+          </a:p>
+        </p:txBody>
+      </p:sp>
+      <p:sp>
+        <p:nvSpPr>
+          <p:cNvPr id="30" name="">
+            <a:extLst xmlns:a="http://schemas.openxmlformats.org/drawingml/2006/main">
+              <a:ext uri="{FF2B5EF4-FFF2-40B4-BE49-F238E27FC236}">
+                <a16:creationId xmlns:a16="http://schemas.microsoft.com/office/drawing/2014/main" id="{28CBA7AE-993C-4F84-A696-8D1323AC4E80}"/>
+              </a:ext>
+            </a:extLst>
+          </p:cNvPr>
+          <p:cNvSpPr>
+            <a:spLocks xmlns:a="http://schemas.openxmlformats.org/drawingml/2006/main" noGrp="1"/>
+          </p:cNvSpPr>
+          <p:nvPr/>
+        </p:nvSpPr>
+        <p:spPr>
+          <a:xfrm xmlns:a="http://schemas.openxmlformats.org/drawingml/2006/main">
+            <a:off x="857250" y="7896225"/>
+            <a:ext cx="13525500" cy="28575"/>
+          </a:xfrm>
+          <a:prstGeom xmlns:a="http://schemas.openxmlformats.org/drawingml/2006/main" prst="rect">
+            <a:avLst/>
           </a:prstGeom>
           <a:solidFill xmlns:a="http://schemas.openxmlformats.org/drawingml/2006/main">
-            <a:srgbClr val="FFFFFF"/>
+            <a:srgbClr val="E4E7E9"/>
           </a:solidFill>
-          <a:ln xmlns:a="http://schemas.openxmlformats.org/drawingml/2006/main" w="9525">
+          <a:ln xmlns:a="http://schemas.openxmlformats.org/drawingml/2006/main" w="0">
             <a:solidFill>
               <a:srgbClr val="E4E7E9"/>
             </a:solidFill>
@@ -14683,84 +12516,55 @@
       </p:sp>
       <p:sp>
         <p:nvSpPr>
-          <p:cNvPr id="4" name="">
-            <a:extLst xmlns:a="http://schemas.openxmlformats.org/drawingml/2006/main">
-              <a:ext uri="{FF2B5EF4-FFF2-40B4-BE49-F238E27FC236}">
-                <a16:creationId xmlns:a16="http://schemas.microsoft.com/office/drawing/2014/main" id="{4A163ADC-FDBA-49AB-AB53-62FA29104479}"/>
-              </a:ext>
-            </a:extLst>
-          </p:cNvPr>
-          <p:cNvSpPr>
-            <a:spLocks xmlns:a="http://schemas.openxmlformats.org/drawingml/2006/main" noGrp="1"/>
-          </p:cNvSpPr>
-          <p:nvPr/>
-        </p:nvSpPr>
-        <p:spPr>
-          <a:xfrm xmlns:a="http://schemas.openxmlformats.org/drawingml/2006/main">
-            <a:off x="1181100" y="3295650"/>
-            <a:ext cx="514350" cy="285750"/>
-          </a:xfrm>
-          <a:prstGeom xmlns:a="http://schemas.openxmlformats.org/drawingml/2006/main" prst="rect">
-            <a:avLst/>
-          </a:prstGeom>
-          <a:noFill xmlns:a="http://schemas.openxmlformats.org/drawingml/2006/main"/>
-          <a:ln xmlns:a="http://schemas.openxmlformats.org/drawingml/2006/main" w="0">
-            <a:noFill/>
-            <a:prstDash val="solid"/>
-          </a:ln>
-        </p:spPr>
-        <p:txBody>
-          <a:bodyPr xmlns:a="http://schemas.openxmlformats.org/drawingml/2006/main" wrap="square" lIns="0" tIns="0" rIns="0" bIns="0" anchor="ctr">
-            <a:noAutofit/>
-          </a:bodyPr>
-          <a:lstStyle xmlns:a="http://schemas.openxmlformats.org/drawingml/2006/main"/>
-          <a:p xmlns:a="http://schemas.openxmlformats.org/drawingml/2006/main">
-            <a:pPr algn="l">
-              <a:lnSpc>
-                <a:spcPct val="100000"/>
-              </a:lnSpc>
-              <a:buNone/>
-              <a:defRPr sz="1350" b="1">
-                <a:solidFill>
-                  <a:srgbClr val="00A2EB"/>
-                </a:solidFill>
-                <a:latin typeface="Calibri"/>
-                <a:ea typeface="Calibri"/>
-                <a:cs typeface="Calibri"/>
-              </a:defRPr>
-            </a:pPr>
-            <a:r>
-              <a:rPr sz="1800" b="1">
-                <a:solidFill>
-                  <a:srgbClr val="00A2EB"/>
-                </a:solidFill>
-                <a:latin typeface="Calibri"/>
-                <a:ea typeface="Calibri"/>
-                <a:cs typeface="Calibri"/>
-              </a:rPr>
-              <a:t>01</a:t>
-            </a:r>
-          </a:p>
-        </p:txBody>
-      </p:sp>
-      <p:sp>
-        <p:nvSpPr>
-          <p:cNvPr id="5" name="">
-            <a:extLst xmlns:a="http://schemas.openxmlformats.org/drawingml/2006/main">
-              <a:ext uri="{FF2B5EF4-FFF2-40B4-BE49-F238E27FC236}">
-                <a16:creationId xmlns:a16="http://schemas.microsoft.com/office/drawing/2014/main" id="{26D1AD73-F995-4369-A266-8FA41354CE3D}"/>
-              </a:ext>
-            </a:extLst>
-          </p:cNvPr>
-          <p:cNvSpPr>
-            <a:spLocks xmlns:a="http://schemas.openxmlformats.org/drawingml/2006/main" noGrp="1"/>
-          </p:cNvSpPr>
-          <p:nvPr/>
-        </p:nvSpPr>
-        <p:spPr>
-          <a:xfrm xmlns:a="http://schemas.openxmlformats.org/drawingml/2006/main">
-            <a:off x="1104900" y="3752850"/>
-            <a:ext cx="2019300" cy="685800"/>
+          <p:cNvPr id="31" name="">
+            <a:extLst xmlns:a="http://schemas.openxmlformats.org/drawingml/2006/main">
+              <a:ext uri="{FF2B5EF4-FFF2-40B4-BE49-F238E27FC236}">
+                <a16:creationId xmlns:a16="http://schemas.microsoft.com/office/drawing/2014/main" id="{DE97BF4D-EDBC-4480-A82B-512A72221950}"/>
+              </a:ext>
+            </a:extLst>
+          </p:cNvPr>
+          <p:cNvSpPr>
+            <a:spLocks xmlns:a="http://schemas.openxmlformats.org/drawingml/2006/main" noGrp="1"/>
+          </p:cNvSpPr>
+          <p:nvPr/>
+        </p:nvSpPr>
+        <p:spPr>
+          <a:xfrm xmlns:a="http://schemas.openxmlformats.org/drawingml/2006/main">
+            <a:off x="857250" y="7896225"/>
+            <a:ext cx="8001000" cy="38100"/>
+          </a:xfrm>
+          <a:prstGeom xmlns:a="http://schemas.openxmlformats.org/drawingml/2006/main" prst="rect">
+            <a:avLst/>
+          </a:prstGeom>
+          <a:solidFill xmlns:a="http://schemas.openxmlformats.org/drawingml/2006/main">
+            <a:srgbClr val="00A2EB"/>
+          </a:solidFill>
+          <a:ln xmlns:a="http://schemas.openxmlformats.org/drawingml/2006/main" w="0">
+            <a:solidFill>
+              <a:srgbClr val="00A2EB"/>
+            </a:solidFill>
+            <a:prstDash val="solid"/>
+          </a:ln>
+        </p:spPr>
+      </p:sp>
+      <p:sp>
+        <p:nvSpPr>
+          <p:cNvPr id="32" name="">
+            <a:extLst xmlns:a="http://schemas.openxmlformats.org/drawingml/2006/main">
+              <a:ext uri="{FF2B5EF4-FFF2-40B4-BE49-F238E27FC236}">
+                <a16:creationId xmlns:a16="http://schemas.microsoft.com/office/drawing/2014/main" id="{49281B64-2F0F-4357-A085-C65451F28236}"/>
+              </a:ext>
+            </a:extLst>
+          </p:cNvPr>
+          <p:cNvSpPr>
+            <a:spLocks xmlns:a="http://schemas.openxmlformats.org/drawingml/2006/main" noGrp="1"/>
+          </p:cNvSpPr>
+          <p:nvPr/>
+        </p:nvSpPr>
+        <p:spPr>
+          <a:xfrm xmlns:a="http://schemas.openxmlformats.org/drawingml/2006/main">
+            <a:off x="971550" y="8058150"/>
+            <a:ext cx="3714750" cy="323850"/>
           </a:xfrm>
           <a:prstGeom xmlns:a="http://schemas.openxmlformats.org/drawingml/2006/main" prst="rect">
             <a:avLst/>
@@ -14782,47 +12586,47 @@
                 <a:spcPct val="100000"/>
               </a:lnSpc>
               <a:buNone/>
-              <a:defRPr sz="1950" b="1">
-                <a:solidFill>
-                  <a:srgbClr val="051C2A"/>
-                </a:solidFill>
-                <a:latin typeface="Calibri"/>
-                <a:ea typeface="Calibri"/>
-                <a:cs typeface="Calibri"/>
-              </a:defRPr>
-            </a:pPr>
-            <a:r>
-              <a:rPr sz="1950" b="1">
-                <a:solidFill>
-                  <a:srgbClr val="051C2A"/>
-                </a:solidFill>
-                <a:latin typeface="Calibri"/>
-                <a:ea typeface="Calibri"/>
-                <a:cs typeface="Calibri"/>
-              </a:rPr>
-              <a:t>Fixed</a:t>
-            </a:r>
-          </a:p>
-        </p:txBody>
-      </p:sp>
-      <p:sp>
-        <p:nvSpPr>
-          <p:cNvPr id="6" name="">
-            <a:extLst xmlns:a="http://schemas.openxmlformats.org/drawingml/2006/main">
-              <a:ext uri="{FF2B5EF4-FFF2-40B4-BE49-F238E27FC236}">
-                <a16:creationId xmlns:a16="http://schemas.microsoft.com/office/drawing/2014/main" id="{4CA7F72B-07B6-4BF4-A3F9-5860F8AC7245}"/>
-              </a:ext>
-            </a:extLst>
-          </p:cNvPr>
-          <p:cNvSpPr>
-            <a:spLocks xmlns:a="http://schemas.openxmlformats.org/drawingml/2006/main" noGrp="1"/>
-          </p:cNvSpPr>
-          <p:nvPr/>
-        </p:nvSpPr>
-        <p:spPr>
-          <a:xfrm xmlns:a="http://schemas.openxmlformats.org/drawingml/2006/main">
-            <a:off x="1181100" y="4610100"/>
-            <a:ext cx="1866900" cy="514350"/>
+              <a:defRPr sz="1200" b="0">
+                <a:solidFill>
+                  <a:srgbClr val="9A9A9F"/>
+                </a:solidFill>
+                <a:latin typeface="Calibri"/>
+                <a:ea typeface="Calibri"/>
+                <a:cs typeface="Calibri"/>
+              </a:defRPr>
+            </a:pPr>
+            <a:r>
+              <a:rPr sz="1200" b="0">
+                <a:solidFill>
+                  <a:srgbClr val="9A9A9F"/>
+                </a:solidFill>
+                <a:latin typeface="Calibri"/>
+                <a:ea typeface="Calibri"/>
+                <a:cs typeface="Calibri"/>
+              </a:rPr>
+              <a:t>First Finance - Arnaud Demes</a:t>
+            </a:r>
+          </a:p>
+        </p:txBody>
+      </p:sp>
+      <p:sp>
+        <p:nvSpPr>
+          <p:cNvPr id="33" name="">
+            <a:extLst xmlns:a="http://schemas.openxmlformats.org/drawingml/2006/main">
+              <a:ext uri="{FF2B5EF4-FFF2-40B4-BE49-F238E27FC236}">
+                <a16:creationId xmlns:a16="http://schemas.microsoft.com/office/drawing/2014/main" id="{EAA325A4-7EC6-42CE-A13A-4B38A32DE7F2}"/>
+              </a:ext>
+            </a:extLst>
+          </p:cNvPr>
+          <p:cNvSpPr>
+            <a:spLocks xmlns:a="http://schemas.openxmlformats.org/drawingml/2006/main" noGrp="1"/>
+          </p:cNvSpPr>
+          <p:nvPr/>
+        </p:nvSpPr>
+        <p:spPr>
+          <a:xfrm xmlns:a="http://schemas.openxmlformats.org/drawingml/2006/main">
+            <a:off x="12192000" y="8058150"/>
+            <a:ext cx="1809750" cy="323850"/>
           </a:xfrm>
           <a:prstGeom xmlns:a="http://schemas.openxmlformats.org/drawingml/2006/main" prst="rect">
             <a:avLst/>
@@ -14839,149 +12643,52 @@
           </a:bodyPr>
           <a:lstStyle xmlns:a="http://schemas.openxmlformats.org/drawingml/2006/main"/>
           <a:p xmlns:a="http://schemas.openxmlformats.org/drawingml/2006/main">
-            <a:pPr algn="l">
+            <a:pPr algn="r">
               <a:lnSpc>
                 <a:spcPct val="100000"/>
               </a:lnSpc>
               <a:buNone/>
-              <a:defRPr sz="1200" b="0">
-                <a:solidFill>
-                  <a:srgbClr val="1F40CB"/>
-                </a:solidFill>
-                <a:latin typeface="Calibri"/>
-                <a:ea typeface="Calibri"/>
-                <a:cs typeface="Calibri"/>
-              </a:defRPr>
-            </a:pPr>
-            <a:r>
-              <a:rPr sz="1200" b="0">
-                <a:solidFill>
-                  <a:srgbClr val="1F40CB"/>
-                </a:solidFill>
-                <a:latin typeface="Calibri"/>
-                <a:ea typeface="Calibri"/>
-                <a:cs typeface="Calibri"/>
-              </a:rPr>
-              <a:t>same question · same data</a:t>
-            </a:r>
-          </a:p>
-        </p:txBody>
-      </p:sp>
-      <p:sp>
-        <p:nvSpPr>
-          <p:cNvPr id="7" name="ingestion-2">
-            <a:extLst xmlns:a="http://schemas.openxmlformats.org/drawingml/2006/main">
-              <a:ext uri="{FF2B5EF4-FFF2-40B4-BE49-F238E27FC236}">
-                <a16:creationId xmlns:a16="http://schemas.microsoft.com/office/drawing/2014/main" id="{B39DEECB-E0D1-415A-8F2A-C8075A6D97BA}"/>
-              </a:ext>
-            </a:extLst>
-          </p:cNvPr>
-          <p:cNvSpPr>
-            <a:spLocks xmlns:a="http://schemas.openxmlformats.org/drawingml/2006/main" noGrp="1"/>
-          </p:cNvSpPr>
-          <p:nvPr/>
-        </p:nvSpPr>
-        <p:spPr>
-          <a:xfrm xmlns:a="http://schemas.openxmlformats.org/drawingml/2006/main">
-            <a:off x="3810000" y="3086100"/>
-            <a:ext cx="2247900" cy="2266950"/>
-          </a:xfrm>
-          <a:prstGeom xmlns:a="http://schemas.openxmlformats.org/drawingml/2006/main" prst="roundRect">
-            <a:avLst>
-              <a:gd name="adj" fmla="val 5085"/>
-            </a:avLst>
-          </a:prstGeom>
-          <a:solidFill xmlns:a="http://schemas.openxmlformats.org/drawingml/2006/main">
-            <a:srgbClr val="FFFFFF"/>
-          </a:solidFill>
-          <a:ln xmlns:a="http://schemas.openxmlformats.org/drawingml/2006/main" w="9525">
-            <a:solidFill>
-              <a:srgbClr val="E4E7E9"/>
-            </a:solidFill>
-            <a:prstDash val="solid"/>
-          </a:ln>
-        </p:spPr>
-      </p:sp>
-      <p:sp>
-        <p:nvSpPr>
-          <p:cNvPr id="8" name="">
-            <a:extLst xmlns:a="http://schemas.openxmlformats.org/drawingml/2006/main">
-              <a:ext uri="{FF2B5EF4-FFF2-40B4-BE49-F238E27FC236}">
-                <a16:creationId xmlns:a16="http://schemas.microsoft.com/office/drawing/2014/main" id="{18679081-8A68-4B7E-9199-340CF95714DE}"/>
-              </a:ext>
-            </a:extLst>
-          </p:cNvPr>
-          <p:cNvSpPr>
-            <a:spLocks xmlns:a="http://schemas.openxmlformats.org/drawingml/2006/main" noGrp="1"/>
-          </p:cNvSpPr>
-          <p:nvPr/>
-        </p:nvSpPr>
-        <p:spPr>
-          <a:xfrm xmlns:a="http://schemas.openxmlformats.org/drawingml/2006/main">
-            <a:off x="4000500" y="3295650"/>
-            <a:ext cx="514350" cy="285750"/>
-          </a:xfrm>
-          <a:prstGeom xmlns:a="http://schemas.openxmlformats.org/drawingml/2006/main" prst="rect">
-            <a:avLst/>
-          </a:prstGeom>
-          <a:noFill xmlns:a="http://schemas.openxmlformats.org/drawingml/2006/main"/>
-          <a:ln xmlns:a="http://schemas.openxmlformats.org/drawingml/2006/main" w="0">
-            <a:noFill/>
-            <a:prstDash val="solid"/>
-          </a:ln>
-        </p:spPr>
-        <p:txBody>
-          <a:bodyPr xmlns:a="http://schemas.openxmlformats.org/drawingml/2006/main" wrap="square" lIns="0" tIns="0" rIns="0" bIns="0" anchor="ctr">
-            <a:noAutofit/>
-          </a:bodyPr>
-          <a:lstStyle xmlns:a="http://schemas.openxmlformats.org/drawingml/2006/main"/>
-          <a:p xmlns:a="http://schemas.openxmlformats.org/drawingml/2006/main">
-            <a:pPr algn="l">
-              <a:lnSpc>
-                <a:spcPct val="100000"/>
-              </a:lnSpc>
-              <a:buNone/>
-              <a:defRPr sz="1350" b="1">
-                <a:solidFill>
-                  <a:srgbClr val="00A2EB"/>
-                </a:solidFill>
-                <a:latin typeface="Calibri"/>
-                <a:ea typeface="Calibri"/>
-                <a:cs typeface="Calibri"/>
-              </a:defRPr>
-            </a:pPr>
-            <a:r>
-              <a:rPr sz="1800" b="1">
-                <a:solidFill>
-                  <a:srgbClr val="00A2EB"/>
-                </a:solidFill>
-                <a:latin typeface="Calibri"/>
-                <a:ea typeface="Calibri"/>
-                <a:cs typeface="Calibri"/>
-              </a:rPr>
-              <a:t>02</a:t>
-            </a:r>
-          </a:p>
-        </p:txBody>
-      </p:sp>
-      <p:sp>
-        <p:nvSpPr>
-          <p:cNvPr id="9" name="">
-            <a:extLst xmlns:a="http://schemas.openxmlformats.org/drawingml/2006/main">
-              <a:ext uri="{FF2B5EF4-FFF2-40B4-BE49-F238E27FC236}">
-                <a16:creationId xmlns:a16="http://schemas.microsoft.com/office/drawing/2014/main" id="{ED095E54-44DC-4092-9EB7-0C81E4B47710}"/>
-              </a:ext>
-            </a:extLst>
-          </p:cNvPr>
-          <p:cNvSpPr>
-            <a:spLocks xmlns:a="http://schemas.openxmlformats.org/drawingml/2006/main" noGrp="1"/>
-          </p:cNvSpPr>
-          <p:nvPr/>
-        </p:nvSpPr>
-        <p:spPr>
-          <a:xfrm xmlns:a="http://schemas.openxmlformats.org/drawingml/2006/main">
-            <a:off x="3924300" y="3752850"/>
-            <a:ext cx="2019300" cy="685800"/>
+              <a:defRPr sz="1200" b="1">
+                <a:solidFill>
+                  <a:srgbClr val="9A9A9F"/>
+                </a:solidFill>
+                <a:latin typeface="Calibri"/>
+                <a:ea typeface="Calibri"/>
+                <a:cs typeface="Calibri"/>
+              </a:defRPr>
+            </a:pPr>
+            <a:r>
+              <a:rPr sz="1200" b="1">
+                <a:solidFill>
+                  <a:srgbClr val="9A9A9F"/>
+                </a:solidFill>
+                <a:latin typeface="Calibri"/>
+                <a:ea typeface="Calibri"/>
+                <a:cs typeface="Calibri"/>
+              </a:rPr>
+              <a:t>TRACE</a:t>
+            </a:r>
+          </a:p>
+        </p:txBody>
+      </p:sp>
+      <p:sp>
+        <p:nvSpPr>
+          <p:cNvPr id="34" name="">
+            <a:extLst xmlns:a="http://schemas.openxmlformats.org/drawingml/2006/main">
+              <a:ext uri="{FF2B5EF4-FFF2-40B4-BE49-F238E27FC236}">
+                <a16:creationId xmlns:a16="http://schemas.microsoft.com/office/drawing/2014/main" id="{5F7FB65A-4A0D-4595-92F4-FD9B71638842}"/>
+              </a:ext>
+            </a:extLst>
+          </p:cNvPr>
+          <p:cNvSpPr>
+            <a:spLocks xmlns:a="http://schemas.openxmlformats.org/drawingml/2006/main" noGrp="1"/>
+          </p:cNvSpPr>
+          <p:nvPr/>
+        </p:nvSpPr>
+        <p:spPr>
+          <a:xfrm xmlns:a="http://schemas.openxmlformats.org/drawingml/2006/main">
+            <a:off x="14135100" y="8058150"/>
+            <a:ext cx="266700" cy="323850"/>
           </a:xfrm>
           <a:prstGeom xmlns:a="http://schemas.openxmlformats.org/drawingml/2006/main" prst="rect">
             <a:avLst/>
@@ -14998,1155 +12705,12 @@
           </a:bodyPr>
           <a:lstStyle xmlns:a="http://schemas.openxmlformats.org/drawingml/2006/main"/>
           <a:p xmlns:a="http://schemas.openxmlformats.org/drawingml/2006/main">
-            <a:pPr algn="l">
+            <a:pPr algn="r">
               <a:lnSpc>
                 <a:spcPct val="100000"/>
               </a:lnSpc>
               <a:buNone/>
-              <a:defRPr sz="1950" b="1">
-                <a:solidFill>
-                  <a:srgbClr val="051C2A"/>
-                </a:solidFill>
-                <a:latin typeface="Calibri"/>
-                <a:ea typeface="Calibri"/>
-                <a:cs typeface="Calibri"/>
-              </a:defRPr>
-            </a:pPr>
-            <a:r>
-              <a:rPr sz="1950" b="1">
-                <a:solidFill>
-                  <a:srgbClr val="051C2A"/>
-                </a:solidFill>
-                <a:latin typeface="Calibri"/>
-                <a:ea typeface="Calibri"/>
-                <a:cs typeface="Calibri"/>
-              </a:rPr>
-              <a:t>Workflow</a:t>
-            </a:r>
-          </a:p>
-        </p:txBody>
-      </p:sp>
-      <p:sp>
-        <p:nvSpPr>
-          <p:cNvPr id="10" name="">
-            <a:extLst xmlns:a="http://schemas.openxmlformats.org/drawingml/2006/main">
-              <a:ext uri="{FF2B5EF4-FFF2-40B4-BE49-F238E27FC236}">
-                <a16:creationId xmlns:a16="http://schemas.microsoft.com/office/drawing/2014/main" id="{4DB65E8E-6BA9-40DB-99F9-46D3397B13A3}"/>
-              </a:ext>
-            </a:extLst>
-          </p:cNvPr>
-          <p:cNvSpPr>
-            <a:spLocks xmlns:a="http://schemas.openxmlformats.org/drawingml/2006/main" noGrp="1"/>
-          </p:cNvSpPr>
-          <p:nvPr/>
-        </p:nvSpPr>
-        <p:spPr>
-          <a:xfrm xmlns:a="http://schemas.openxmlformats.org/drawingml/2006/main">
-            <a:off x="4000500" y="4610100"/>
-            <a:ext cx="1866900" cy="514350"/>
-          </a:xfrm>
-          <a:prstGeom xmlns:a="http://schemas.openxmlformats.org/drawingml/2006/main" prst="rect">
-            <a:avLst/>
-          </a:prstGeom>
-          <a:noFill xmlns:a="http://schemas.openxmlformats.org/drawingml/2006/main"/>
-          <a:ln xmlns:a="http://schemas.openxmlformats.org/drawingml/2006/main" w="0">
-            <a:noFill/>
-            <a:prstDash val="solid"/>
-          </a:ln>
-        </p:spPr>
-        <p:txBody>
-          <a:bodyPr xmlns:a="http://schemas.openxmlformats.org/drawingml/2006/main" wrap="square" lIns="0" tIns="0" rIns="0" bIns="0" anchor="ctr">
-            <a:normAutofit fontScale="100000"/>
-          </a:bodyPr>
-          <a:lstStyle xmlns:a="http://schemas.openxmlformats.org/drawingml/2006/main"/>
-          <a:p xmlns:a="http://schemas.openxmlformats.org/drawingml/2006/main">
-            <a:pPr algn="l">
-              <a:lnSpc>
-                <a:spcPct val="100000"/>
-              </a:lnSpc>
-              <a:buNone/>
-              <a:defRPr sz="1200" b="0">
-                <a:solidFill>
-                  <a:srgbClr val="1F40CB"/>
-                </a:solidFill>
-                <a:latin typeface="Calibri"/>
-                <a:ea typeface="Calibri"/>
-                <a:cs typeface="Calibri"/>
-              </a:defRPr>
-            </a:pPr>
-            <a:r>
-              <a:rPr sz="1200" b="0">
-                <a:solidFill>
-                  <a:srgbClr val="1F40CB"/>
-                </a:solidFill>
-                <a:latin typeface="Calibri"/>
-                <a:ea typeface="Calibri"/>
-                <a:cs typeface="Calibri"/>
-              </a:rPr>
-              <a:t>unsupported_dependency</a:t>
-            </a:r>
-          </a:p>
-        </p:txBody>
-      </p:sp>
-      <p:sp>
-        <p:nvSpPr>
-          <p:cNvPr id="11" name="ingestion-3">
-            <a:extLst xmlns:a="http://schemas.openxmlformats.org/drawingml/2006/main">
-              <a:ext uri="{FF2B5EF4-FFF2-40B4-BE49-F238E27FC236}">
-                <a16:creationId xmlns:a16="http://schemas.microsoft.com/office/drawing/2014/main" id="{D4342A97-3791-461F-A305-9671DA4948CE}"/>
-              </a:ext>
-            </a:extLst>
-          </p:cNvPr>
-          <p:cNvSpPr>
-            <a:spLocks xmlns:a="http://schemas.openxmlformats.org/drawingml/2006/main" noGrp="1"/>
-          </p:cNvSpPr>
-          <p:nvPr/>
-        </p:nvSpPr>
-        <p:spPr>
-          <a:xfrm xmlns:a="http://schemas.openxmlformats.org/drawingml/2006/main">
-            <a:off x="6629400" y="3086100"/>
-            <a:ext cx="2247900" cy="2266950"/>
-          </a:xfrm>
-          <a:prstGeom xmlns:a="http://schemas.openxmlformats.org/drawingml/2006/main" prst="roundRect">
-            <a:avLst>
-              <a:gd name="adj" fmla="val 5085"/>
-            </a:avLst>
-          </a:prstGeom>
-          <a:solidFill xmlns:a="http://schemas.openxmlformats.org/drawingml/2006/main">
-            <a:srgbClr val="062433"/>
-          </a:solidFill>
-          <a:ln xmlns:a="http://schemas.openxmlformats.org/drawingml/2006/main" w="9525">
-            <a:solidFill>
-              <a:srgbClr val="062433"/>
-            </a:solidFill>
-            <a:prstDash val="solid"/>
-          </a:ln>
-        </p:spPr>
-      </p:sp>
-      <p:sp>
-        <p:nvSpPr>
-          <p:cNvPr id="12" name="">
-            <a:extLst xmlns:a="http://schemas.openxmlformats.org/drawingml/2006/main">
-              <a:ext uri="{FF2B5EF4-FFF2-40B4-BE49-F238E27FC236}">
-                <a16:creationId xmlns:a16="http://schemas.microsoft.com/office/drawing/2014/main" id="{64E49A95-2D88-4387-8BD5-FA749ABD0960}"/>
-              </a:ext>
-            </a:extLst>
-          </p:cNvPr>
-          <p:cNvSpPr>
-            <a:spLocks xmlns:a="http://schemas.openxmlformats.org/drawingml/2006/main" noGrp="1"/>
-          </p:cNvSpPr>
-          <p:nvPr/>
-        </p:nvSpPr>
-        <p:spPr>
-          <a:xfrm xmlns:a="http://schemas.openxmlformats.org/drawingml/2006/main">
-            <a:off x="6819900" y="3295650"/>
-            <a:ext cx="514350" cy="285750"/>
-          </a:xfrm>
-          <a:prstGeom xmlns:a="http://schemas.openxmlformats.org/drawingml/2006/main" prst="rect">
-            <a:avLst/>
-          </a:prstGeom>
-          <a:noFill xmlns:a="http://schemas.openxmlformats.org/drawingml/2006/main"/>
-          <a:ln xmlns:a="http://schemas.openxmlformats.org/drawingml/2006/main" w="0">
-            <a:noFill/>
-            <a:prstDash val="solid"/>
-          </a:ln>
-        </p:spPr>
-        <p:txBody>
-          <a:bodyPr xmlns:a="http://schemas.openxmlformats.org/drawingml/2006/main" wrap="square" lIns="0" tIns="0" rIns="0" bIns="0" anchor="ctr">
-            <a:noAutofit/>
-          </a:bodyPr>
-          <a:lstStyle xmlns:a="http://schemas.openxmlformats.org/drawingml/2006/main"/>
-          <a:p xmlns:a="http://schemas.openxmlformats.org/drawingml/2006/main">
-            <a:pPr algn="l">
-              <a:lnSpc>
-                <a:spcPct val="100000"/>
-              </a:lnSpc>
-              <a:buNone/>
-              <a:defRPr sz="1350" b="1">
-                <a:solidFill>
-                  <a:srgbClr val="00A2EB"/>
-                </a:solidFill>
-                <a:latin typeface="Calibri"/>
-                <a:ea typeface="Calibri"/>
-                <a:cs typeface="Calibri"/>
-              </a:defRPr>
-            </a:pPr>
-            <a:r>
-              <a:rPr sz="1800" b="1">
-                <a:solidFill>
-                  <a:srgbClr val="00A2EB"/>
-                </a:solidFill>
-                <a:latin typeface="Calibri"/>
-                <a:ea typeface="Calibri"/>
-                <a:cs typeface="Calibri"/>
-              </a:rPr>
-              <a:t>03</a:t>
-            </a:r>
-          </a:p>
-        </p:txBody>
-      </p:sp>
-      <p:sp>
-        <p:nvSpPr>
-          <p:cNvPr id="13" name="">
-            <a:extLst xmlns:a="http://schemas.openxmlformats.org/drawingml/2006/main">
-              <a:ext uri="{FF2B5EF4-FFF2-40B4-BE49-F238E27FC236}">
-                <a16:creationId xmlns:a16="http://schemas.microsoft.com/office/drawing/2014/main" id="{572D3874-F985-4CD0-BBFF-D59F5B7B32BE}"/>
-              </a:ext>
-            </a:extLst>
-          </p:cNvPr>
-          <p:cNvSpPr>
-            <a:spLocks xmlns:a="http://schemas.openxmlformats.org/drawingml/2006/main" noGrp="1"/>
-          </p:cNvSpPr>
-          <p:nvPr/>
-        </p:nvSpPr>
-        <p:spPr>
-          <a:xfrm xmlns:a="http://schemas.openxmlformats.org/drawingml/2006/main">
-            <a:off x="6743700" y="3752850"/>
-            <a:ext cx="2019300" cy="685800"/>
-          </a:xfrm>
-          <a:prstGeom xmlns:a="http://schemas.openxmlformats.org/drawingml/2006/main" prst="rect">
-            <a:avLst/>
-          </a:prstGeom>
-          <a:noFill xmlns:a="http://schemas.openxmlformats.org/drawingml/2006/main"/>
-          <a:ln xmlns:a="http://schemas.openxmlformats.org/drawingml/2006/main" w="0">
-            <a:noFill/>
-            <a:prstDash val="solid"/>
-          </a:ln>
-        </p:spPr>
-        <p:txBody>
-          <a:bodyPr xmlns:a="http://schemas.openxmlformats.org/drawingml/2006/main" wrap="square" lIns="0" tIns="0" rIns="0" bIns="0" anchor="ctr">
-            <a:noAutofit/>
-          </a:bodyPr>
-          <a:lstStyle xmlns:a="http://schemas.openxmlformats.org/drawingml/2006/main"/>
-          <a:p xmlns:a="http://schemas.openxmlformats.org/drawingml/2006/main">
-            <a:pPr algn="l">
-              <a:lnSpc>
-                <a:spcPct val="100000"/>
-              </a:lnSpc>
-              <a:buNone/>
-              <a:defRPr sz="1650" b="1">
-                <a:solidFill>
-                  <a:srgbClr val="FFFFFF"/>
-                </a:solidFill>
-                <a:latin typeface="Calibri"/>
-                <a:ea typeface="Calibri"/>
-                <a:cs typeface="Calibri"/>
-              </a:defRPr>
-            </a:pPr>
-            <a:r>
-              <a:rPr sz="1800" b="1">
-                <a:solidFill>
-                  <a:srgbClr val="FFFFFF"/>
-                </a:solidFill>
-                <a:latin typeface="Calibri"/>
-                <a:ea typeface="Calibri"/>
-                <a:cs typeface="Calibri"/>
-              </a:rPr>
-              <a:t>Agent step 1</a:t>
-            </a:r>
-          </a:p>
-        </p:txBody>
-      </p:sp>
-      <p:sp>
-        <p:nvSpPr>
-          <p:cNvPr id="14" name="">
-            <a:extLst xmlns:a="http://schemas.openxmlformats.org/drawingml/2006/main">
-              <a:ext uri="{FF2B5EF4-FFF2-40B4-BE49-F238E27FC236}">
-                <a16:creationId xmlns:a16="http://schemas.microsoft.com/office/drawing/2014/main" id="{9599AF29-91DE-47C0-8189-B0778BB52724}"/>
-              </a:ext>
-            </a:extLst>
-          </p:cNvPr>
-          <p:cNvSpPr>
-            <a:spLocks xmlns:a="http://schemas.openxmlformats.org/drawingml/2006/main" noGrp="1"/>
-          </p:cNvSpPr>
-          <p:nvPr/>
-        </p:nvSpPr>
-        <p:spPr>
-          <a:xfrm xmlns:a="http://schemas.openxmlformats.org/drawingml/2006/main">
-            <a:off x="6819900" y="4610100"/>
-            <a:ext cx="1866900" cy="514350"/>
-          </a:xfrm>
-          <a:prstGeom xmlns:a="http://schemas.openxmlformats.org/drawingml/2006/main" prst="rect">
-            <a:avLst/>
-          </a:prstGeom>
-          <a:noFill xmlns:a="http://schemas.openxmlformats.org/drawingml/2006/main"/>
-          <a:ln xmlns:a="http://schemas.openxmlformats.org/drawingml/2006/main" w="0">
-            <a:noFill/>
-            <a:prstDash val="solid"/>
-          </a:ln>
-        </p:spPr>
-        <p:txBody>
-          <a:bodyPr xmlns:a="http://schemas.openxmlformats.org/drawingml/2006/main" wrap="square" lIns="0" tIns="0" rIns="0" bIns="0" anchor="ctr">
-            <a:normAutofit fontScale="100000"/>
-          </a:bodyPr>
-          <a:lstStyle xmlns:a="http://schemas.openxmlformats.org/drawingml/2006/main"/>
-          <a:p xmlns:a="http://schemas.openxmlformats.org/drawingml/2006/main">
-            <a:pPr algn="l">
-              <a:lnSpc>
-                <a:spcPct val="100000"/>
-              </a:lnSpc>
-              <a:buNone/>
-              <a:defRPr sz="1200" b="0">
-                <a:solidFill>
-                  <a:srgbClr val="00A2EB"/>
-                </a:solidFill>
-                <a:latin typeface="Calibri"/>
-                <a:ea typeface="Calibri"/>
-                <a:cs typeface="Calibri"/>
-              </a:defRPr>
-            </a:pPr>
-            <a:r>
-              <a:rPr sz="1200" b="0">
-                <a:solidFill>
-                  <a:srgbClr val="00A2EB"/>
-                </a:solidFill>
-                <a:latin typeface="Calibri"/>
-                <a:ea typeface="Calibri"/>
-                <a:cs typeface="Calibri"/>
-              </a:rPr>
-              <a:t>get_market_price</a:t>
-            </a:r>
-          </a:p>
-        </p:txBody>
-      </p:sp>
-      <p:sp>
-        <p:nvSpPr>
-          <p:cNvPr id="15" name="ingestion-4">
-            <a:extLst xmlns:a="http://schemas.openxmlformats.org/drawingml/2006/main">
-              <a:ext uri="{FF2B5EF4-FFF2-40B4-BE49-F238E27FC236}">
-                <a16:creationId xmlns:a16="http://schemas.microsoft.com/office/drawing/2014/main" id="{7952DE37-BD86-481C-A575-8709971DD74E}"/>
-              </a:ext>
-            </a:extLst>
-          </p:cNvPr>
-          <p:cNvSpPr>
-            <a:spLocks xmlns:a="http://schemas.openxmlformats.org/drawingml/2006/main" noGrp="1"/>
-          </p:cNvSpPr>
-          <p:nvPr/>
-        </p:nvSpPr>
-        <p:spPr>
-          <a:xfrm xmlns:a="http://schemas.openxmlformats.org/drawingml/2006/main">
-            <a:off x="9448800" y="3086100"/>
-            <a:ext cx="2247900" cy="2266950"/>
-          </a:xfrm>
-          <a:prstGeom xmlns:a="http://schemas.openxmlformats.org/drawingml/2006/main" prst="roundRect">
-            <a:avLst>
-              <a:gd name="adj" fmla="val 5085"/>
-            </a:avLst>
-          </a:prstGeom>
-          <a:solidFill xmlns:a="http://schemas.openxmlformats.org/drawingml/2006/main">
-            <a:srgbClr val="FFFFFF"/>
-          </a:solidFill>
-          <a:ln xmlns:a="http://schemas.openxmlformats.org/drawingml/2006/main" w="9525">
-            <a:solidFill>
-              <a:srgbClr val="E4E7E9"/>
-            </a:solidFill>
-            <a:prstDash val="solid"/>
-          </a:ln>
-        </p:spPr>
-      </p:sp>
-      <p:sp>
-        <p:nvSpPr>
-          <p:cNvPr id="16" name="">
-            <a:extLst xmlns:a="http://schemas.openxmlformats.org/drawingml/2006/main">
-              <a:ext uri="{FF2B5EF4-FFF2-40B4-BE49-F238E27FC236}">
-                <a16:creationId xmlns:a16="http://schemas.microsoft.com/office/drawing/2014/main" id="{62EC2EC9-18A1-4F72-A64D-AF536DDC8F61}"/>
-              </a:ext>
-            </a:extLst>
-          </p:cNvPr>
-          <p:cNvSpPr>
-            <a:spLocks xmlns:a="http://schemas.openxmlformats.org/drawingml/2006/main" noGrp="1"/>
-          </p:cNvSpPr>
-          <p:nvPr/>
-        </p:nvSpPr>
-        <p:spPr>
-          <a:xfrm xmlns:a="http://schemas.openxmlformats.org/drawingml/2006/main">
-            <a:off x="9639300" y="3295650"/>
-            <a:ext cx="514350" cy="285750"/>
-          </a:xfrm>
-          <a:prstGeom xmlns:a="http://schemas.openxmlformats.org/drawingml/2006/main" prst="rect">
-            <a:avLst/>
-          </a:prstGeom>
-          <a:noFill xmlns:a="http://schemas.openxmlformats.org/drawingml/2006/main"/>
-          <a:ln xmlns:a="http://schemas.openxmlformats.org/drawingml/2006/main" w="0">
-            <a:noFill/>
-            <a:prstDash val="solid"/>
-          </a:ln>
-        </p:spPr>
-        <p:txBody>
-          <a:bodyPr xmlns:a="http://schemas.openxmlformats.org/drawingml/2006/main" wrap="square" lIns="0" tIns="0" rIns="0" bIns="0" anchor="ctr">
-            <a:noAutofit/>
-          </a:bodyPr>
-          <a:lstStyle xmlns:a="http://schemas.openxmlformats.org/drawingml/2006/main"/>
-          <a:p xmlns:a="http://schemas.openxmlformats.org/drawingml/2006/main">
-            <a:pPr algn="l">
-              <a:lnSpc>
-                <a:spcPct val="100000"/>
-              </a:lnSpc>
-              <a:buNone/>
-              <a:defRPr sz="1350" b="1">
-                <a:solidFill>
-                  <a:srgbClr val="00A2EB"/>
-                </a:solidFill>
-                <a:latin typeface="Calibri"/>
-                <a:ea typeface="Calibri"/>
-                <a:cs typeface="Calibri"/>
-              </a:defRPr>
-            </a:pPr>
-            <a:r>
-              <a:rPr sz="1800" b="1">
-                <a:solidFill>
-                  <a:srgbClr val="00A2EB"/>
-                </a:solidFill>
-                <a:latin typeface="Calibri"/>
-                <a:ea typeface="Calibri"/>
-                <a:cs typeface="Calibri"/>
-              </a:rPr>
-              <a:t>04</a:t>
-            </a:r>
-          </a:p>
-        </p:txBody>
-      </p:sp>
-      <p:sp>
-        <p:nvSpPr>
-          <p:cNvPr id="17" name="">
-            <a:extLst xmlns:a="http://schemas.openxmlformats.org/drawingml/2006/main">
-              <a:ext uri="{FF2B5EF4-FFF2-40B4-BE49-F238E27FC236}">
-                <a16:creationId xmlns:a16="http://schemas.microsoft.com/office/drawing/2014/main" id="{8540FD5A-1C0F-4BE1-B862-685F20D0F43C}"/>
-              </a:ext>
-            </a:extLst>
-          </p:cNvPr>
-          <p:cNvSpPr>
-            <a:spLocks xmlns:a="http://schemas.openxmlformats.org/drawingml/2006/main" noGrp="1"/>
-          </p:cNvSpPr>
-          <p:nvPr/>
-        </p:nvSpPr>
-        <p:spPr>
-          <a:xfrm xmlns:a="http://schemas.openxmlformats.org/drawingml/2006/main">
-            <a:off x="9563100" y="3752850"/>
-            <a:ext cx="2019300" cy="685800"/>
-          </a:xfrm>
-          <a:prstGeom xmlns:a="http://schemas.openxmlformats.org/drawingml/2006/main" prst="rect">
-            <a:avLst/>
-          </a:prstGeom>
-          <a:noFill xmlns:a="http://schemas.openxmlformats.org/drawingml/2006/main"/>
-          <a:ln xmlns:a="http://schemas.openxmlformats.org/drawingml/2006/main" w="0">
-            <a:noFill/>
-            <a:prstDash val="solid"/>
-          </a:ln>
-        </p:spPr>
-        <p:txBody>
-          <a:bodyPr xmlns:a="http://schemas.openxmlformats.org/drawingml/2006/main" wrap="square" lIns="0" tIns="0" rIns="0" bIns="0" anchor="ctr">
-            <a:normAutofit fontScale="100000"/>
-          </a:bodyPr>
-          <a:lstStyle xmlns:a="http://schemas.openxmlformats.org/drawingml/2006/main"/>
-          <a:p xmlns:a="http://schemas.openxmlformats.org/drawingml/2006/main">
-            <a:pPr algn="l">
-              <a:lnSpc>
-                <a:spcPct val="100000"/>
-              </a:lnSpc>
-              <a:buNone/>
-              <a:defRPr sz="1950" b="1">
-                <a:solidFill>
-                  <a:srgbClr val="051C2A"/>
-                </a:solidFill>
-                <a:latin typeface="Calibri"/>
-                <a:ea typeface="Calibri"/>
-                <a:cs typeface="Calibri"/>
-              </a:defRPr>
-            </a:pPr>
-            <a:r>
-              <a:rPr sz="1950" b="1">
-                <a:solidFill>
-                  <a:srgbClr val="051C2A"/>
-                </a:solidFill>
-                <a:latin typeface="Calibri"/>
-                <a:ea typeface="Calibri"/>
-                <a:cs typeface="Calibri"/>
-              </a:rPr>
-              <a:t>Agent step 2</a:t>
-            </a:r>
-          </a:p>
-        </p:txBody>
-      </p:sp>
-      <p:sp>
-        <p:nvSpPr>
-          <p:cNvPr id="18" name="">
-            <a:extLst xmlns:a="http://schemas.openxmlformats.org/drawingml/2006/main">
-              <a:ext uri="{FF2B5EF4-FFF2-40B4-BE49-F238E27FC236}">
-                <a16:creationId xmlns:a16="http://schemas.microsoft.com/office/drawing/2014/main" id="{67E52B70-645C-40F7-B0DE-1D1D177875CC}"/>
-              </a:ext>
-            </a:extLst>
-          </p:cNvPr>
-          <p:cNvSpPr>
-            <a:spLocks xmlns:a="http://schemas.openxmlformats.org/drawingml/2006/main" noGrp="1"/>
-          </p:cNvSpPr>
-          <p:nvPr/>
-        </p:nvSpPr>
-        <p:spPr>
-          <a:xfrm xmlns:a="http://schemas.openxmlformats.org/drawingml/2006/main">
-            <a:off x="9639300" y="4610100"/>
-            <a:ext cx="1866900" cy="514350"/>
-          </a:xfrm>
-          <a:prstGeom xmlns:a="http://schemas.openxmlformats.org/drawingml/2006/main" prst="rect">
-            <a:avLst/>
-          </a:prstGeom>
-          <a:noFill xmlns:a="http://schemas.openxmlformats.org/drawingml/2006/main"/>
-          <a:ln xmlns:a="http://schemas.openxmlformats.org/drawingml/2006/main" w="0">
-            <a:noFill/>
-            <a:prstDash val="solid"/>
-          </a:ln>
-        </p:spPr>
-        <p:txBody>
-          <a:bodyPr xmlns:a="http://schemas.openxmlformats.org/drawingml/2006/main" wrap="square" lIns="0" tIns="0" rIns="0" bIns="0" anchor="ctr">
-            <a:normAutofit fontScale="100000"/>
-          </a:bodyPr>
-          <a:lstStyle xmlns:a="http://schemas.openxmlformats.org/drawingml/2006/main"/>
-          <a:p xmlns:a="http://schemas.openxmlformats.org/drawingml/2006/main">
-            <a:pPr algn="l">
-              <a:lnSpc>
-                <a:spcPct val="100000"/>
-              </a:lnSpc>
-              <a:buNone/>
-              <a:defRPr sz="1200" b="0">
-                <a:solidFill>
-                  <a:srgbClr val="1F40CB"/>
-                </a:solidFill>
-                <a:latin typeface="Calibri"/>
-                <a:ea typeface="Calibri"/>
-                <a:cs typeface="Calibri"/>
-              </a:defRPr>
-            </a:pPr>
-            <a:r>
-              <a:rPr sz="1200" b="0">
-                <a:solidFill>
-                  <a:srgbClr val="1F40CB"/>
-                </a:solidFill>
-                <a:latin typeface="Calibri"/>
-                <a:ea typeface="Calibri"/>
-                <a:cs typeface="Calibri"/>
-              </a:rPr>
-              <a:t>convert_currency</a:t>
-            </a:r>
-          </a:p>
-        </p:txBody>
-      </p:sp>
-      <p:sp>
-        <p:nvSpPr>
-          <p:cNvPr id="19" name="ingestion-5">
-            <a:extLst xmlns:a="http://schemas.openxmlformats.org/drawingml/2006/main">
-              <a:ext uri="{FF2B5EF4-FFF2-40B4-BE49-F238E27FC236}">
-                <a16:creationId xmlns:a16="http://schemas.microsoft.com/office/drawing/2014/main" id="{43F7E1B1-E237-4A79-B0C4-38965CF32D74}"/>
-              </a:ext>
-            </a:extLst>
-          </p:cNvPr>
-          <p:cNvSpPr>
-            <a:spLocks xmlns:a="http://schemas.openxmlformats.org/drawingml/2006/main" noGrp="1"/>
-          </p:cNvSpPr>
-          <p:nvPr/>
-        </p:nvSpPr>
-        <p:spPr>
-          <a:xfrm xmlns:a="http://schemas.openxmlformats.org/drawingml/2006/main">
-            <a:off x="12268200" y="3086100"/>
-            <a:ext cx="2247900" cy="2266950"/>
-          </a:xfrm>
-          <a:prstGeom xmlns:a="http://schemas.openxmlformats.org/drawingml/2006/main" prst="roundRect">
-            <a:avLst>
-              <a:gd name="adj" fmla="val 5085"/>
-            </a:avLst>
-          </a:prstGeom>
-          <a:solidFill xmlns:a="http://schemas.openxmlformats.org/drawingml/2006/main">
-            <a:srgbClr val="FFFFFF"/>
-          </a:solidFill>
-          <a:ln xmlns:a="http://schemas.openxmlformats.org/drawingml/2006/main" w="19050">
-            <a:solidFill>
-              <a:srgbClr val="F07D00"/>
-            </a:solidFill>
-            <a:prstDash val="solid"/>
-          </a:ln>
-        </p:spPr>
-      </p:sp>
-      <p:sp>
-        <p:nvSpPr>
-          <p:cNvPr id="20" name="">
-            <a:extLst xmlns:a="http://schemas.openxmlformats.org/drawingml/2006/main">
-              <a:ext uri="{FF2B5EF4-FFF2-40B4-BE49-F238E27FC236}">
-                <a16:creationId xmlns:a16="http://schemas.microsoft.com/office/drawing/2014/main" id="{51764D39-05B0-4F08-BC2B-2221BE2F38D6}"/>
-              </a:ext>
-            </a:extLst>
-          </p:cNvPr>
-          <p:cNvSpPr>
-            <a:spLocks xmlns:a="http://schemas.openxmlformats.org/drawingml/2006/main" noGrp="1"/>
-          </p:cNvSpPr>
-          <p:nvPr/>
-        </p:nvSpPr>
-        <p:spPr>
-          <a:xfrm xmlns:a="http://schemas.openxmlformats.org/drawingml/2006/main">
-            <a:off x="12458700" y="3295650"/>
-            <a:ext cx="514350" cy="285750"/>
-          </a:xfrm>
-          <a:prstGeom xmlns:a="http://schemas.openxmlformats.org/drawingml/2006/main" prst="rect">
-            <a:avLst/>
-          </a:prstGeom>
-          <a:noFill xmlns:a="http://schemas.openxmlformats.org/drawingml/2006/main"/>
-          <a:ln xmlns:a="http://schemas.openxmlformats.org/drawingml/2006/main" w="0">
-            <a:noFill/>
-            <a:prstDash val="solid"/>
-          </a:ln>
-        </p:spPr>
-        <p:txBody>
-          <a:bodyPr xmlns:a="http://schemas.openxmlformats.org/drawingml/2006/main" wrap="square" lIns="0" tIns="0" rIns="0" bIns="0" anchor="ctr">
-            <a:noAutofit/>
-          </a:bodyPr>
-          <a:lstStyle xmlns:a="http://schemas.openxmlformats.org/drawingml/2006/main"/>
-          <a:p xmlns:a="http://schemas.openxmlformats.org/drawingml/2006/main">
-            <a:pPr algn="l">
-              <a:lnSpc>
-                <a:spcPct val="100000"/>
-              </a:lnSpc>
-              <a:buNone/>
-              <a:defRPr sz="1350" b="1">
-                <a:solidFill>
-                  <a:srgbClr val="00A2EB"/>
-                </a:solidFill>
-                <a:latin typeface="Calibri"/>
-                <a:ea typeface="Calibri"/>
-                <a:cs typeface="Calibri"/>
-              </a:defRPr>
-            </a:pPr>
-            <a:r>
-              <a:rPr sz="1800" b="1">
-                <a:solidFill>
-                  <a:srgbClr val="00A2EB"/>
-                </a:solidFill>
-                <a:latin typeface="Calibri"/>
-                <a:ea typeface="Calibri"/>
-                <a:cs typeface="Calibri"/>
-              </a:rPr>
-              <a:t>05</a:t>
-            </a:r>
-          </a:p>
-        </p:txBody>
-      </p:sp>
-      <p:sp>
-        <p:nvSpPr>
-          <p:cNvPr id="21" name="">
-            <a:extLst xmlns:a="http://schemas.openxmlformats.org/drawingml/2006/main">
-              <a:ext uri="{FF2B5EF4-FFF2-40B4-BE49-F238E27FC236}">
-                <a16:creationId xmlns:a16="http://schemas.microsoft.com/office/drawing/2014/main" id="{C0F4CBB5-9FF7-4C7B-8D8C-5AA3541DD5E4}"/>
-              </a:ext>
-            </a:extLst>
-          </p:cNvPr>
-          <p:cNvSpPr>
-            <a:spLocks xmlns:a="http://schemas.openxmlformats.org/drawingml/2006/main" noGrp="1"/>
-          </p:cNvSpPr>
-          <p:nvPr/>
-        </p:nvSpPr>
-        <p:spPr>
-          <a:xfrm xmlns:a="http://schemas.openxmlformats.org/drawingml/2006/main">
-            <a:off x="12382500" y="3752850"/>
-            <a:ext cx="2019300" cy="685800"/>
-          </a:xfrm>
-          <a:prstGeom xmlns:a="http://schemas.openxmlformats.org/drawingml/2006/main" prst="rect">
-            <a:avLst/>
-          </a:prstGeom>
-          <a:noFill xmlns:a="http://schemas.openxmlformats.org/drawingml/2006/main"/>
-          <a:ln xmlns:a="http://schemas.openxmlformats.org/drawingml/2006/main" w="0">
-            <a:noFill/>
-            <a:prstDash val="solid"/>
-          </a:ln>
-        </p:spPr>
-        <p:txBody>
-          <a:bodyPr xmlns:a="http://schemas.openxmlformats.org/drawingml/2006/main" wrap="square" lIns="0" tIns="0" rIns="0" bIns="0" anchor="ctr">
-            <a:normAutofit fontScale="100000"/>
-          </a:bodyPr>
-          <a:lstStyle xmlns:a="http://schemas.openxmlformats.org/drawingml/2006/main"/>
-          <a:p xmlns:a="http://schemas.openxmlformats.org/drawingml/2006/main">
-            <a:pPr algn="l">
-              <a:lnSpc>
-                <a:spcPct val="100000"/>
-              </a:lnSpc>
-              <a:buNone/>
-              <a:defRPr sz="1950" b="1">
-                <a:solidFill>
-                  <a:srgbClr val="051C2A"/>
-                </a:solidFill>
-                <a:latin typeface="Calibri"/>
-                <a:ea typeface="Calibri"/>
-                <a:cs typeface="Calibri"/>
-              </a:defRPr>
-            </a:pPr>
-            <a:r>
-              <a:rPr sz="1950" b="1">
-                <a:solidFill>
-                  <a:srgbClr val="051C2A"/>
-                </a:solidFill>
-                <a:latin typeface="Calibri"/>
-                <a:ea typeface="Calibri"/>
-                <a:cs typeface="Calibri"/>
-              </a:rPr>
-              <a:t>Compare</a:t>
-            </a:r>
-          </a:p>
-        </p:txBody>
-      </p:sp>
-      <p:sp>
-        <p:nvSpPr>
-          <p:cNvPr id="22" name="">
-            <a:extLst xmlns:a="http://schemas.openxmlformats.org/drawingml/2006/main">
-              <a:ext uri="{FF2B5EF4-FFF2-40B4-BE49-F238E27FC236}">
-                <a16:creationId xmlns:a16="http://schemas.microsoft.com/office/drawing/2014/main" id="{8856B515-B8BF-4B9C-8D6B-EC909D2B3B4E}"/>
-              </a:ext>
-            </a:extLst>
-          </p:cNvPr>
-          <p:cNvSpPr>
-            <a:spLocks xmlns:a="http://schemas.openxmlformats.org/drawingml/2006/main" noGrp="1"/>
-          </p:cNvSpPr>
-          <p:nvPr/>
-        </p:nvSpPr>
-        <p:spPr>
-          <a:xfrm xmlns:a="http://schemas.openxmlformats.org/drawingml/2006/main">
-            <a:off x="12458700" y="4610100"/>
-            <a:ext cx="1866900" cy="514350"/>
-          </a:xfrm>
-          <a:prstGeom xmlns:a="http://schemas.openxmlformats.org/drawingml/2006/main" prst="rect">
-            <a:avLst/>
-          </a:prstGeom>
-          <a:noFill xmlns:a="http://schemas.openxmlformats.org/drawingml/2006/main"/>
-          <a:ln xmlns:a="http://schemas.openxmlformats.org/drawingml/2006/main" w="0">
-            <a:noFill/>
-            <a:prstDash val="solid"/>
-          </a:ln>
-        </p:spPr>
-        <p:txBody>
-          <a:bodyPr xmlns:a="http://schemas.openxmlformats.org/drawingml/2006/main" wrap="square" lIns="0" tIns="0" rIns="0" bIns="0" anchor="ctr">
-            <a:normAutofit fontScale="100000"/>
-          </a:bodyPr>
-          <a:lstStyle xmlns:a="http://schemas.openxmlformats.org/drawingml/2006/main"/>
-          <a:p xmlns:a="http://schemas.openxmlformats.org/drawingml/2006/main">
-            <a:pPr algn="l">
-              <a:lnSpc>
-                <a:spcPct val="100000"/>
-              </a:lnSpc>
-              <a:buNone/>
-              <a:defRPr sz="1200" b="0">
-                <a:solidFill>
-                  <a:srgbClr val="1F40CB"/>
-                </a:solidFill>
-                <a:latin typeface="Calibri"/>
-                <a:ea typeface="Calibri"/>
-                <a:cs typeface="Calibri"/>
-              </a:defRPr>
-            </a:pPr>
-            <a:r>
-              <a:rPr sz="1200" b="0">
-                <a:solidFill>
-                  <a:srgbClr val="1F40CB"/>
-                </a:solidFill>
-                <a:latin typeface="Calibri"/>
-                <a:ea typeface="Calibri"/>
-                <a:cs typeface="Calibri"/>
-              </a:rPr>
-              <a:t>status · calls · steps</a:t>
-            </a:r>
-          </a:p>
-        </p:txBody>
-      </p:sp>
-      <p:cxnSp>
-        <p:nvCxnSpPr>
-          <p:cNvPr id="525" name=""/>
-          <p:cNvCxnSpPr>
-            <a:stCxn xmlns:a="http://schemas.openxmlformats.org/drawingml/2006/main" id="3" idx="3"/>
-            <a:endCxn xmlns:a="http://schemas.openxmlformats.org/drawingml/2006/main" id="7" idx="1"/>
-          </p:cNvCxnSpPr>
-          <p:nvPr/>
-        </p:nvCxnSpPr>
-        <p:spPr>
-          <a:xfrm xmlns:a="http://schemas.openxmlformats.org/drawingml/2006/main">
-            <a:off x="3238500" y="4219575"/>
-            <a:ext cx="571500" cy="0"/>
-          </a:xfrm>
-          <a:prstGeom xmlns:a="http://schemas.openxmlformats.org/drawingml/2006/main" prst="straightConnector1">
-            <a:avLst/>
-          </a:prstGeom>
-          <a:ln xmlns:a="http://schemas.openxmlformats.org/drawingml/2006/main" w="28575">
-            <a:solidFill>
-              <a:srgbClr val="9A9A9F"/>
-            </a:solidFill>
-            <a:prstDash val="solid"/>
-            <a:tailEnd type="triangle" w="med" len="med"/>
-          </a:ln>
-        </p:spPr>
-      </p:cxnSp>
-      <p:cxnSp>
-        <p:nvCxnSpPr>
-          <p:cNvPr id="526" name=""/>
-          <p:cNvCxnSpPr>
-            <a:stCxn xmlns:a="http://schemas.openxmlformats.org/drawingml/2006/main" id="7" idx="3"/>
-            <a:endCxn xmlns:a="http://schemas.openxmlformats.org/drawingml/2006/main" id="11" idx="1"/>
-          </p:cNvCxnSpPr>
-          <p:nvPr/>
-        </p:nvCxnSpPr>
-        <p:spPr>
-          <a:xfrm xmlns:a="http://schemas.openxmlformats.org/drawingml/2006/main">
-            <a:off x="6057900" y="4219575"/>
-            <a:ext cx="571500" cy="0"/>
-          </a:xfrm>
-          <a:prstGeom xmlns:a="http://schemas.openxmlformats.org/drawingml/2006/main" prst="straightConnector1">
-            <a:avLst/>
-          </a:prstGeom>
-          <a:ln xmlns:a="http://schemas.openxmlformats.org/drawingml/2006/main" w="28575">
-            <a:solidFill>
-              <a:srgbClr val="9A9A9F"/>
-            </a:solidFill>
-            <a:prstDash val="solid"/>
-            <a:tailEnd type="triangle" w="med" len="med"/>
-          </a:ln>
-        </p:spPr>
-      </p:cxnSp>
-      <p:cxnSp>
-        <p:nvCxnSpPr>
-          <p:cNvPr id="527" name=""/>
-          <p:cNvCxnSpPr>
-            <a:stCxn xmlns:a="http://schemas.openxmlformats.org/drawingml/2006/main" id="11" idx="3"/>
-            <a:endCxn xmlns:a="http://schemas.openxmlformats.org/drawingml/2006/main" id="15" idx="1"/>
-          </p:cNvCxnSpPr>
-          <p:nvPr/>
-        </p:nvCxnSpPr>
-        <p:spPr>
-          <a:xfrm xmlns:a="http://schemas.openxmlformats.org/drawingml/2006/main">
-            <a:off x="8877300" y="4219575"/>
-            <a:ext cx="571500" cy="0"/>
-          </a:xfrm>
-          <a:prstGeom xmlns:a="http://schemas.openxmlformats.org/drawingml/2006/main" prst="straightConnector1">
-            <a:avLst/>
-          </a:prstGeom>
-          <a:ln xmlns:a="http://schemas.openxmlformats.org/drawingml/2006/main" w="28575">
-            <a:solidFill>
-              <a:srgbClr val="9A9A9F"/>
-            </a:solidFill>
-            <a:prstDash val="solid"/>
-            <a:tailEnd type="triangle" w="med" len="med"/>
-          </a:ln>
-        </p:spPr>
-      </p:cxnSp>
-      <p:cxnSp>
-        <p:nvCxnSpPr>
-          <p:cNvPr id="528" name=""/>
-          <p:cNvCxnSpPr>
-            <a:stCxn xmlns:a="http://schemas.openxmlformats.org/drawingml/2006/main" id="15" idx="3"/>
-            <a:endCxn xmlns:a="http://schemas.openxmlformats.org/drawingml/2006/main" id="19" idx="1"/>
-          </p:cNvCxnSpPr>
-          <p:nvPr/>
-        </p:nvCxnSpPr>
-        <p:spPr>
-          <a:xfrm xmlns:a="http://schemas.openxmlformats.org/drawingml/2006/main">
-            <a:off x="11696700" y="4219575"/>
-            <a:ext cx="571500" cy="0"/>
-          </a:xfrm>
-          <a:prstGeom xmlns:a="http://schemas.openxmlformats.org/drawingml/2006/main" prst="straightConnector1">
-            <a:avLst/>
-          </a:prstGeom>
-          <a:ln xmlns:a="http://schemas.openxmlformats.org/drawingml/2006/main" w="28575">
-            <a:solidFill>
-              <a:srgbClr val="9A9A9F"/>
-            </a:solidFill>
-            <a:prstDash val="solid"/>
-            <a:tailEnd type="triangle" w="med" len="med"/>
-          </a:ln>
-        </p:spPr>
-      </p:cxnSp>
-      <p:sp>
-        <p:nvSpPr>
-          <p:cNvPr id="27" name="">
-            <a:extLst xmlns:a="http://schemas.openxmlformats.org/drawingml/2006/main">
-              <a:ext uri="{FF2B5EF4-FFF2-40B4-BE49-F238E27FC236}">
-                <a16:creationId xmlns:a16="http://schemas.microsoft.com/office/drawing/2014/main" id="{79128475-820B-447C-A724-7D8A31328FFE}"/>
-              </a:ext>
-            </a:extLst>
-          </p:cNvPr>
-          <p:cNvSpPr>
-            <a:spLocks xmlns:a="http://schemas.openxmlformats.org/drawingml/2006/main" noGrp="1"/>
-          </p:cNvSpPr>
-          <p:nvPr/>
-        </p:nvSpPr>
-        <p:spPr>
-          <a:xfrm xmlns:a="http://schemas.openxmlformats.org/drawingml/2006/main">
-            <a:off x="2381250" y="6210300"/>
-            <a:ext cx="10477500" cy="457200"/>
-          </a:xfrm>
-          <a:prstGeom xmlns:a="http://schemas.openxmlformats.org/drawingml/2006/main" prst="rect">
-            <a:avLst/>
-          </a:prstGeom>
-          <a:noFill xmlns:a="http://schemas.openxmlformats.org/drawingml/2006/main"/>
-          <a:ln xmlns:a="http://schemas.openxmlformats.org/drawingml/2006/main" w="0">
-            <a:noFill/>
-            <a:prstDash val="solid"/>
-          </a:ln>
-        </p:spPr>
-        <p:txBody>
-          <a:bodyPr xmlns:a="http://schemas.openxmlformats.org/drawingml/2006/main" wrap="square" lIns="0" tIns="0" rIns="0" bIns="0" anchor="ctr">
-            <a:normAutofit fontScale="100000"/>
-          </a:bodyPr>
-          <a:lstStyle xmlns:a="http://schemas.openxmlformats.org/drawingml/2006/main"/>
-          <a:p xmlns:a="http://schemas.openxmlformats.org/drawingml/2006/main">
-            <a:pPr algn="ctr">
-              <a:lnSpc>
-                <a:spcPct val="100000"/>
-              </a:lnSpc>
-              <a:buNone/>
-              <a:defRPr sz="2100" b="1">
-                <a:solidFill>
-                  <a:srgbClr val="051C2A"/>
-                </a:solidFill>
-                <a:latin typeface="Calibri"/>
-                <a:ea typeface="Calibri"/>
-                <a:cs typeface="Calibri"/>
-              </a:defRPr>
-            </a:pPr>
-            <a:r>
-              <a:rPr sz="2100" b="1">
-                <a:solidFill>
-                  <a:srgbClr val="051C2A"/>
-                </a:solidFill>
-                <a:latin typeface="Calibri"/>
-                <a:ea typeface="Calibri"/>
-                <a:cs typeface="Calibri"/>
-              </a:rPr>
-              <a:t>Same tools and data. Only the control logic changes.</a:t>
-            </a:r>
-          </a:p>
-        </p:txBody>
-      </p:sp>
-      <p:sp>
-        <p:nvSpPr>
-          <p:cNvPr id="28" name="">
-            <a:extLst xmlns:a="http://schemas.openxmlformats.org/drawingml/2006/main">
-              <a:ext uri="{FF2B5EF4-FFF2-40B4-BE49-F238E27FC236}">
-                <a16:creationId xmlns:a16="http://schemas.microsoft.com/office/drawing/2014/main" id="{685F2AAD-81FC-436A-88F7-89F49C9F1671}"/>
-              </a:ext>
-            </a:extLst>
-          </p:cNvPr>
-          <p:cNvSpPr>
-            <a:spLocks xmlns:a="http://schemas.openxmlformats.org/drawingml/2006/main" noGrp="1"/>
-          </p:cNvSpPr>
-          <p:nvPr/>
-        </p:nvSpPr>
-        <p:spPr>
-          <a:xfrm xmlns:a="http://schemas.openxmlformats.org/drawingml/2006/main">
-            <a:off x="1885950" y="6838950"/>
-            <a:ext cx="4476750" cy="323850"/>
-          </a:xfrm>
-          <a:prstGeom xmlns:a="http://schemas.openxmlformats.org/drawingml/2006/main" prst="rect">
-            <a:avLst/>
-          </a:prstGeom>
-          <a:noFill xmlns:a="http://schemas.openxmlformats.org/drawingml/2006/main"/>
-          <a:ln xmlns:a="http://schemas.openxmlformats.org/drawingml/2006/main" w="0">
-            <a:noFill/>
-            <a:prstDash val="solid"/>
-          </a:ln>
-        </p:spPr>
-        <p:txBody>
-          <a:bodyPr xmlns:a="http://schemas.openxmlformats.org/drawingml/2006/main" wrap="square" lIns="0" tIns="0" rIns="0" bIns="0" anchor="ctr">
-            <a:normAutofit fontScale="100000"/>
-          </a:bodyPr>
-          <a:lstStyle xmlns:a="http://schemas.openxmlformats.org/drawingml/2006/main"/>
-          <a:p xmlns:a="http://schemas.openxmlformats.org/drawingml/2006/main">
-            <a:pPr algn="ctr">
-              <a:lnSpc>
-                <a:spcPct val="100000"/>
-              </a:lnSpc>
-              <a:buNone/>
-              <a:defRPr sz="1500" b="0">
-                <a:solidFill>
-                  <a:srgbClr val="64748B"/>
-                </a:solidFill>
-                <a:latin typeface="Calibri"/>
-                <a:ea typeface="Calibri"/>
-                <a:cs typeface="Calibri"/>
-              </a:defRPr>
-            </a:pPr>
-            <a:r>
-              <a:rPr sz="1500" b="0">
-                <a:solidFill>
-                  <a:srgbClr val="64748B"/>
-                </a:solidFill>
-                <a:latin typeface="Calibri"/>
-                <a:ea typeface="Calibri"/>
-                <a:cs typeface="Calibri"/>
-              </a:rPr>
-              <a:t>workflow · safe stop</a:t>
-            </a:r>
-          </a:p>
-        </p:txBody>
-      </p:sp>
-      <p:sp>
-        <p:nvSpPr>
-          <p:cNvPr id="29" name="">
-            <a:extLst xmlns:a="http://schemas.openxmlformats.org/drawingml/2006/main">
-              <a:ext uri="{FF2B5EF4-FFF2-40B4-BE49-F238E27FC236}">
-                <a16:creationId xmlns:a16="http://schemas.microsoft.com/office/drawing/2014/main" id="{CDE04AD7-6CBE-4792-B549-765578FB3E1E}"/>
-              </a:ext>
-            </a:extLst>
-          </p:cNvPr>
-          <p:cNvSpPr>
-            <a:spLocks xmlns:a="http://schemas.openxmlformats.org/drawingml/2006/main" noGrp="1"/>
-          </p:cNvSpPr>
-          <p:nvPr/>
-        </p:nvSpPr>
-        <p:spPr>
-          <a:xfrm xmlns:a="http://schemas.openxmlformats.org/drawingml/2006/main">
-            <a:off x="8801100" y="6838950"/>
-            <a:ext cx="4762500" cy="323850"/>
-          </a:xfrm>
-          <a:prstGeom xmlns:a="http://schemas.openxmlformats.org/drawingml/2006/main" prst="rect">
-            <a:avLst/>
-          </a:prstGeom>
-          <a:noFill xmlns:a="http://schemas.openxmlformats.org/drawingml/2006/main"/>
-          <a:ln xmlns:a="http://schemas.openxmlformats.org/drawingml/2006/main" w="0">
-            <a:noFill/>
-            <a:prstDash val="solid"/>
-          </a:ln>
-        </p:spPr>
-        <p:txBody>
-          <a:bodyPr xmlns:a="http://schemas.openxmlformats.org/drawingml/2006/main" wrap="square" lIns="0" tIns="0" rIns="0" bIns="0" anchor="ctr">
-            <a:normAutofit fontScale="100000"/>
-          </a:bodyPr>
-          <a:lstStyle xmlns:a="http://schemas.openxmlformats.org/drawingml/2006/main"/>
-          <a:p xmlns:a="http://schemas.openxmlformats.org/drawingml/2006/main">
-            <a:pPr algn="ctr">
-              <a:lnSpc>
-                <a:spcPct val="100000"/>
-              </a:lnSpc>
-              <a:buNone/>
-              <a:defRPr sz="1500" b="0">
-                <a:solidFill>
-                  <a:srgbClr val="64748B"/>
-                </a:solidFill>
-                <a:latin typeface="Calibri"/>
-                <a:ea typeface="Calibri"/>
-                <a:cs typeface="Calibri"/>
-              </a:defRPr>
-            </a:pPr>
-            <a:r>
-              <a:rPr sz="1500" b="0">
-                <a:solidFill>
-                  <a:srgbClr val="64748B"/>
-                </a:solidFill>
-                <a:latin typeface="Calibri"/>
-                <a:ea typeface="Calibri"/>
-                <a:cs typeface="Calibri"/>
-              </a:rPr>
-              <a:t>agent · two verified calls</a:t>
-            </a:r>
-          </a:p>
-        </p:txBody>
-      </p:sp>
-      <p:sp>
-        <p:nvSpPr>
-          <p:cNvPr id="30" name="">
-            <a:extLst xmlns:a="http://schemas.openxmlformats.org/drawingml/2006/main">
-              <a:ext uri="{FF2B5EF4-FFF2-40B4-BE49-F238E27FC236}">
-                <a16:creationId xmlns:a16="http://schemas.microsoft.com/office/drawing/2014/main" id="{28CBA7AE-993C-4F84-A696-8D1323AC4E80}"/>
-              </a:ext>
-            </a:extLst>
-          </p:cNvPr>
-          <p:cNvSpPr>
-            <a:spLocks xmlns:a="http://schemas.openxmlformats.org/drawingml/2006/main" noGrp="1"/>
-          </p:cNvSpPr>
-          <p:nvPr/>
-        </p:nvSpPr>
-        <p:spPr>
-          <a:xfrm xmlns:a="http://schemas.openxmlformats.org/drawingml/2006/main">
-            <a:off x="857250" y="7896225"/>
-            <a:ext cx="13525500" cy="28575"/>
-          </a:xfrm>
-          <a:prstGeom xmlns:a="http://schemas.openxmlformats.org/drawingml/2006/main" prst="rect">
-            <a:avLst/>
-          </a:prstGeom>
-          <a:solidFill xmlns:a="http://schemas.openxmlformats.org/drawingml/2006/main">
-            <a:srgbClr val="E4E7E9"/>
-          </a:solidFill>
-          <a:ln xmlns:a="http://schemas.openxmlformats.org/drawingml/2006/main" w="0">
-            <a:solidFill>
-              <a:srgbClr val="E4E7E9"/>
-            </a:solidFill>
-            <a:prstDash val="solid"/>
-          </a:ln>
-        </p:spPr>
-      </p:sp>
-      <p:sp>
-        <p:nvSpPr>
-          <p:cNvPr id="31" name="">
-            <a:extLst xmlns:a="http://schemas.openxmlformats.org/drawingml/2006/main">
-              <a:ext uri="{FF2B5EF4-FFF2-40B4-BE49-F238E27FC236}">
-                <a16:creationId xmlns:a16="http://schemas.microsoft.com/office/drawing/2014/main" id="{DE97BF4D-EDBC-4480-A82B-512A72221950}"/>
-              </a:ext>
-            </a:extLst>
-          </p:cNvPr>
-          <p:cNvSpPr>
-            <a:spLocks xmlns:a="http://schemas.openxmlformats.org/drawingml/2006/main" noGrp="1"/>
-          </p:cNvSpPr>
-          <p:nvPr/>
-        </p:nvSpPr>
-        <p:spPr>
-          <a:xfrm xmlns:a="http://schemas.openxmlformats.org/drawingml/2006/main">
-            <a:off x="857250" y="7896225"/>
-            <a:ext cx="8001000" cy="38100"/>
-          </a:xfrm>
-          <a:prstGeom xmlns:a="http://schemas.openxmlformats.org/drawingml/2006/main" prst="rect">
-            <a:avLst/>
-          </a:prstGeom>
-          <a:solidFill xmlns:a="http://schemas.openxmlformats.org/drawingml/2006/main">
-            <a:srgbClr val="00A2EB"/>
-          </a:solidFill>
-          <a:ln xmlns:a="http://schemas.openxmlformats.org/drawingml/2006/main" w="0">
-            <a:solidFill>
-              <a:srgbClr val="00A2EB"/>
-            </a:solidFill>
-            <a:prstDash val="solid"/>
-          </a:ln>
-        </p:spPr>
-      </p:sp>
-      <p:sp>
-        <p:nvSpPr>
-          <p:cNvPr id="32" name="">
-            <a:extLst xmlns:a="http://schemas.openxmlformats.org/drawingml/2006/main">
-              <a:ext uri="{FF2B5EF4-FFF2-40B4-BE49-F238E27FC236}">
-                <a16:creationId xmlns:a16="http://schemas.microsoft.com/office/drawing/2014/main" id="{49281B64-2F0F-4357-A085-C65451F28236}"/>
-              </a:ext>
-            </a:extLst>
-          </p:cNvPr>
-          <p:cNvSpPr>
-            <a:spLocks xmlns:a="http://schemas.openxmlformats.org/drawingml/2006/main" noGrp="1"/>
-          </p:cNvSpPr>
-          <p:nvPr/>
-        </p:nvSpPr>
-        <p:spPr>
-          <a:xfrm xmlns:a="http://schemas.openxmlformats.org/drawingml/2006/main">
-            <a:off x="971550" y="8058150"/>
-            <a:ext cx="3714750" cy="323850"/>
-          </a:xfrm>
-          <a:prstGeom xmlns:a="http://schemas.openxmlformats.org/drawingml/2006/main" prst="rect">
-            <a:avLst/>
-          </a:prstGeom>
-          <a:noFill xmlns:a="http://schemas.openxmlformats.org/drawingml/2006/main"/>
-          <a:ln xmlns:a="http://schemas.openxmlformats.org/drawingml/2006/main" w="0">
-            <a:noFill/>
-            <a:prstDash val="solid"/>
-          </a:ln>
-        </p:spPr>
-        <p:txBody>
-          <a:bodyPr xmlns:a="http://schemas.openxmlformats.org/drawingml/2006/main" wrap="square" lIns="0" tIns="0" rIns="0" bIns="0" anchor="ctr">
-            <a:normAutofit fontScale="100000"/>
-          </a:bodyPr>
-          <a:lstStyle xmlns:a="http://schemas.openxmlformats.org/drawingml/2006/main"/>
-          <a:p xmlns:a="http://schemas.openxmlformats.org/drawingml/2006/main">
-            <a:pPr algn="l">
-              <a:lnSpc>
-                <a:spcPct val="100000"/>
-              </a:lnSpc>
-              <a:buNone/>
-              <a:defRPr sz="1200" b="0">
+              <a:defRPr sz="1200" b="1">
                 <a:solidFill>
                   <a:srgbClr val="9A9A9F"/>
                 </a:solidFill>
@@ -16156,7 +12720,7 @@
               </a:defRPr>
             </a:pPr>
             <a:r>
-              <a:rPr sz="1200" b="0">
+              <a:rPr sz="1200" b="1">
                 <a:solidFill>
                   <a:srgbClr val="9A9A9F"/>
                 </a:solidFill>
@@ -16164,135 +12728,36 @@
                 <a:ea typeface="Calibri"/>
                 <a:cs typeface="Calibri"/>
               </a:rPr>
-              <a:t>First Finance - Arnaud Demes</a:t>
-            </a:r>
-          </a:p>
-        </p:txBody>
-      </p:sp>
-      <p:sp>
-        <p:nvSpPr>
-          <p:cNvPr id="33" name="">
-            <a:extLst xmlns:a="http://schemas.openxmlformats.org/drawingml/2006/main">
-              <a:ext uri="{FF2B5EF4-FFF2-40B4-BE49-F238E27FC236}">
-                <a16:creationId xmlns:a16="http://schemas.microsoft.com/office/drawing/2014/main" id="{EAA325A4-7EC6-42CE-A13A-4B38A32DE7F2}"/>
-              </a:ext>
-            </a:extLst>
-          </p:cNvPr>
-          <p:cNvSpPr>
-            <a:spLocks xmlns:a="http://schemas.openxmlformats.org/drawingml/2006/main" noGrp="1"/>
-          </p:cNvSpPr>
-          <p:nvPr/>
-        </p:nvSpPr>
-        <p:spPr>
-          <a:xfrm xmlns:a="http://schemas.openxmlformats.org/drawingml/2006/main">
-            <a:off x="12192000" y="8058150"/>
-            <a:ext cx="1809750" cy="323850"/>
-          </a:xfrm>
-          <a:prstGeom xmlns:a="http://schemas.openxmlformats.org/drawingml/2006/main" prst="rect">
-            <a:avLst/>
-          </a:prstGeom>
-          <a:noFill xmlns:a="http://schemas.openxmlformats.org/drawingml/2006/main"/>
-          <a:ln xmlns:a="http://schemas.openxmlformats.org/drawingml/2006/main" w="0">
-            <a:noFill/>
-            <a:prstDash val="solid"/>
-          </a:ln>
-        </p:spPr>
-        <p:txBody>
-          <a:bodyPr xmlns:a="http://schemas.openxmlformats.org/drawingml/2006/main" wrap="square" lIns="0" tIns="0" rIns="0" bIns="0" anchor="ctr">
-            <a:normAutofit fontScale="100000"/>
-          </a:bodyPr>
-          <a:lstStyle xmlns:a="http://schemas.openxmlformats.org/drawingml/2006/main"/>
-          <a:p xmlns:a="http://schemas.openxmlformats.org/drawingml/2006/main">
-            <a:pPr algn="r">
-              <a:lnSpc>
-                <a:spcPct val="100000"/>
-              </a:lnSpc>
-              <a:buNone/>
-              <a:defRPr sz="1200" b="1">
-                <a:solidFill>
-                  <a:srgbClr val="9A9A9F"/>
-                </a:solidFill>
-                <a:latin typeface="Calibri"/>
-                <a:ea typeface="Calibri"/>
-                <a:cs typeface="Calibri"/>
-              </a:defRPr>
-            </a:pPr>
-            <a:r>
-              <a:rPr sz="1200" b="1">
-                <a:solidFill>
-                  <a:srgbClr val="9A9A9F"/>
-                </a:solidFill>
-                <a:latin typeface="Calibri"/>
-                <a:ea typeface="Calibri"/>
-                <a:cs typeface="Calibri"/>
-              </a:rPr>
-              <a:t>TRACE</a:t>
-            </a:r>
-          </a:p>
-        </p:txBody>
-      </p:sp>
-      <p:sp>
-        <p:nvSpPr>
-          <p:cNvPr id="34" name="">
-            <a:extLst xmlns:a="http://schemas.openxmlformats.org/drawingml/2006/main">
-              <a:ext uri="{FF2B5EF4-FFF2-40B4-BE49-F238E27FC236}">
-                <a16:creationId xmlns:a16="http://schemas.microsoft.com/office/drawing/2014/main" id="{5F7FB65A-4A0D-4595-92F4-FD9B71638842}"/>
-              </a:ext>
-            </a:extLst>
-          </p:cNvPr>
-          <p:cNvSpPr>
-            <a:spLocks xmlns:a="http://schemas.openxmlformats.org/drawingml/2006/main" noGrp="1"/>
-          </p:cNvSpPr>
-          <p:nvPr/>
-        </p:nvSpPr>
-        <p:spPr>
-          <a:xfrm xmlns:a="http://schemas.openxmlformats.org/drawingml/2006/main">
-            <a:off x="14135100" y="8058150"/>
-            <a:ext cx="266700" cy="323850"/>
-          </a:xfrm>
-          <a:prstGeom xmlns:a="http://schemas.openxmlformats.org/drawingml/2006/main" prst="rect">
-            <a:avLst/>
-          </a:prstGeom>
-          <a:noFill xmlns:a="http://schemas.openxmlformats.org/drawingml/2006/main"/>
-          <a:ln xmlns:a="http://schemas.openxmlformats.org/drawingml/2006/main" w="0">
-            <a:noFill/>
-            <a:prstDash val="solid"/>
-          </a:ln>
-        </p:spPr>
-        <p:txBody>
-          <a:bodyPr xmlns:a="http://schemas.openxmlformats.org/drawingml/2006/main" wrap="square" lIns="0" tIns="0" rIns="0" bIns="0" anchor="ctr">
-            <a:normAutofit fontScale="100000"/>
-          </a:bodyPr>
-          <a:lstStyle xmlns:a="http://schemas.openxmlformats.org/drawingml/2006/main"/>
-          <a:p xmlns:a="http://schemas.openxmlformats.org/drawingml/2006/main">
-            <a:pPr algn="r">
-              <a:lnSpc>
-                <a:spcPct val="100000"/>
-              </a:lnSpc>
-              <a:buNone/>
-              <a:defRPr sz="1200" b="1">
-                <a:solidFill>
-                  <a:srgbClr val="9A9A9F"/>
-                </a:solidFill>
-                <a:latin typeface="Calibri"/>
-                <a:ea typeface="Calibri"/>
-                <a:cs typeface="Calibri"/>
-              </a:defRPr>
-            </a:pPr>
-            <a:r>
-              <a:rPr sz="1200" b="1">
-                <a:solidFill>
-                  <a:srgbClr val="9A9A9F"/>
-                </a:solidFill>
-                <a:latin typeface="Calibri"/>
-                <a:ea typeface="Calibri"/>
-                <a:cs typeface="Calibri"/>
-              </a:rPr>
               <a:t>08</a:t>
             </a:r>
           </a:p>
         </p:txBody>
       </p:sp>
+      <p:pic>
+        <p:nvPicPr>
+          <p:cNvPr id="47" name=""/>
+          <p:cNvPicPr>
+            <a:picLocks xmlns:a="http://schemas.openxmlformats.org/drawingml/2006/main" noChangeAspect="1"/>
+          </p:cNvPicPr>
+          <p:nvPr/>
+        </p:nvPicPr>
+        <p:blipFill>
+          <a:blip xmlns:r="http://schemas.openxmlformats.org/officeDocument/2006/relationships" xmlns:a="http://schemas.openxmlformats.org/drawingml/2006/main" r:embed="Rc3a991b7c1c94f29"/>
+          <a:srcRect xmlns:a="http://schemas.openxmlformats.org/drawingml/2006/main" l="0" t="34975" r="0" b="34975"/>
+          <a:stretch xmlns:a="http://schemas.openxmlformats.org/drawingml/2006/main">
+            <a:fillRect l="0" t="0" r="0" b="0"/>
+          </a:stretch>
+        </p:blipFill>
+        <p:spPr>
+          <a:xfrm xmlns:a="http://schemas.openxmlformats.org/drawingml/2006/main">
+            <a:off x="2476500" y="2143125"/>
+            <a:ext cx="10287000" cy="4000500"/>
+          </a:xfrm>
+          <a:prstGeom xmlns:a="http://schemas.openxmlformats.org/drawingml/2006/main" prst="rect">
+            <a:avLst/>
+          </a:prstGeom>
+        </p:spPr>
+      </p:pic>
     </p:spTree>
     <p:extLst>
       <p:ext uri="{BB962C8B-B14F-4D97-AF65-F5344CB8AC3E}">
@@ -16379,7 +12844,7 @@
                 <a:ea typeface="Calibri"/>
                 <a:cs typeface="Calibri"/>
               </a:rPr>
-              <a:t>FINAL DECISION</a:t>
+              <a:t>WORKFLOW OR AGENT?</a:t>
             </a:r>
           </a:p>
         </p:txBody>
@@ -16441,7 +12906,7 @@
                 <a:ea typeface="Calibri"/>
                 <a:cs typeface="Calibri"/>
               </a:rPr>
-              <a:t>Use the simplest system that works</a:t>
+              <a:t>Choose an agent only when the model adds measured value</a:t>
             </a:r>
           </a:p>
         </p:txBody>
@@ -16600,7 +13065,7 @@
                 <a:ea typeface="Calibri"/>
                 <a:cs typeface="Calibri"/>
               </a:rPr>
-              <a:t>known steps</a:t>
+              <a:t>Known path</a:t>
             </a:r>
           </a:p>
           <a:p xmlns:a="http://schemas.openxmlformats.org/drawingml/2006/main">
@@ -16627,7 +13092,7 @@
                 <a:ea typeface="Calibri"/>
                 <a:cs typeface="Calibri"/>
               </a:rPr>
-              <a:t>fixed logic</a:t>
+              <a:t>Coded by you</a:t>
             </a:r>
           </a:p>
         </p:txBody>
@@ -16724,8 +13189,7 @@
                 <a:ea typeface="Calibri"/>
                 <a:cs typeface="Calibri"/>
               </a:rPr>
-              <a:t>BOUNDED
-AGENT</a:t>
+              <a:t>AGENT</a:t>
             </a:r>
           </a:p>
         </p:txBody>
@@ -16787,7 +13251,7 @@
                 <a:ea typeface="Calibri"/>
                 <a:cs typeface="Calibri"/>
               </a:rPr>
-              <a:t>tool result changes</a:t>
+              <a:t>Open-ended path</a:t>
             </a:r>
           </a:p>
           <a:p xmlns:a="http://schemas.openxmlformats.org/drawingml/2006/main">
@@ -16814,34 +13278,7 @@
                 <a:ea typeface="Calibri"/>
                 <a:cs typeface="Calibri"/>
               </a:rPr>
-              <a:t>next step</a:t>
-            </a:r>
-          </a:p>
-          <a:p xmlns:a="http://schemas.openxmlformats.org/drawingml/2006/main">
-            <a:pPr algn="ctr">
-              <a:lnSpc>
-                <a:spcPct val="80000"/>
-              </a:lnSpc>
-              <a:buNone/>
-              <a:defRPr sz="2175" b="1">
-                <a:solidFill>
-                  <a:srgbClr val="051C2A"/>
-                </a:solidFill>
-                <a:latin typeface="Calibri"/>
-                <a:ea typeface="Calibri"/>
-                <a:cs typeface="Calibri"/>
-              </a:defRPr>
-            </a:pPr>
-            <a:r>
-              <a:rPr sz="1800" b="1">
-                <a:solidFill>
-                  <a:srgbClr val="051C2A"/>
-                </a:solidFill>
-                <a:latin typeface="Calibri"/>
-                <a:ea typeface="Calibri"/>
-                <a:cs typeface="Calibri"/>
-              </a:rPr>
-              <a:t>MAX_STEPS</a:t>
+              <a:t>Chosen by the model</a:t>
             </a:r>
           </a:p>
         </p:txBody>
@@ -16903,7 +13340,7 @@
                 <a:ea typeface="Calibri"/>
                 <a:cs typeface="Calibri"/>
               </a:rPr>
-              <a:t>typed tools · clear trace</a:t>
+              <a:t>typed tools · trace</a:t>
             </a:r>
           </a:p>
           <a:p xmlns:a="http://schemas.openxmlformats.org/drawingml/2006/main">
@@ -16930,7 +13367,7 @@
                 <a:ea typeface="Calibri"/>
                 <a:cs typeface="Calibri"/>
               </a:rPr>
-              <a:t>step limit</a:t>
+              <a:t>MAX_STEPS</a:t>
             </a:r>
           </a:p>
         </p:txBody>
@@ -17123,7 +13560,7 @@
       </p:sp>
       <p:cxnSp>
         <p:nvCxnSpPr>
-          <p:cNvPr id="292" name=""/>
+          <p:cNvPr id="320" name=""/>
           <p:cNvCxnSpPr>
             <a:stCxn xmlns:a="http://schemas.openxmlformats.org/drawingml/2006/main" id="3" idx="3"/>
             <a:endCxn xmlns:a="http://schemas.openxmlformats.org/drawingml/2006/main" id="6" idx="1"/>
@@ -17149,7 +13586,7 @@
       </p:cxnSp>
       <p:cxnSp>
         <p:nvCxnSpPr>
-          <p:cNvPr id="293" name=""/>
+          <p:cNvPr id="321" name=""/>
           <p:cNvCxnSpPr>
             <a:stCxn xmlns:a="http://schemas.openxmlformats.org/drawingml/2006/main" id="6" idx="3"/>
             <a:endCxn xmlns:a="http://schemas.openxmlformats.org/drawingml/2006/main" id="10" idx="1"/>
@@ -17265,7 +13702,7 @@
                 <a:ea typeface="Calibri"/>
                 <a:cs typeface="Calibri"/>
               </a:rPr>
-              <a:t>SIMPLE FIRST</a:t>
+              <a:t>DECISION RULE</a:t>
             </a:r>
           </a:p>
         </p:txBody>
@@ -17327,7 +13764,7 @@
                 <a:ea typeface="Calibri"/>
                 <a:cs typeface="Calibri"/>
               </a:rPr>
-              <a:t>Start with a workflow. Use an agent only when a tool result changes the next step.</a:t>
+              <a:t>Use an agent only when model-directed control flow creates measurable value.</a:t>
             </a:r>
           </a:p>
         </p:txBody>
@@ -17422,7 +13859,7 @@
                 <a:ea typeface="Calibri"/>
                 <a:cs typeface="Calibri"/>
               </a:rPr>
-              <a:t>SAME CONTRACT</a:t>
+              <a:t>EVALUATE</a:t>
             </a:r>
           </a:p>
         </p:txBody>
@@ -17484,7 +13921,7 @@
                 <a:ea typeface="Calibri"/>
                 <a:cs typeface="Calibri"/>
               </a:rPr>
-              <a:t>same schemas · tools · trace · stop rule</a:t>
+              <a:t>quality · latency · cost · failure rate</a:t>
             </a:r>
           </a:p>
         </p:txBody>
@@ -17546,7 +13983,7 @@
                 <a:ea typeface="Calibri"/>
                 <a:cs typeface="Calibri"/>
               </a:rPr>
-              <a:t>DAY 2</a:t>
+              <a:t>NEXT</a:t>
             </a:r>
           </a:p>
         </p:txBody>
@@ -17608,7 +14045,7 @@
                 <a:ea typeface="Calibri"/>
                 <a:cs typeface="Calibri"/>
               </a:rPr>
-              <a:t>Next: handle tool failures with LangGraph state and safe retries.</a:t>
+              <a:t>Lesson 09: explicit state, recovery and safe retries.</a:t>
             </a:r>
           </a:p>
         </p:txBody>
